--- a/上位校採用分析レポート_2026_v2.pptx
+++ b/上位校採用分析レポート_2026_v2.pptx
@@ -3339,7 +3339,7 @@
         </p:nvSpPr>
         <p:spPr>
           <a:xfrm>
-            <a:off x="468000" y="4212000"/>
+            <a:off x="468000" y="4248000"/>
             <a:ext cx="2580300" cy="1800000"/>
           </a:xfrm>
           <a:prstGeom prst="rect">
@@ -3443,7 +3443,7 @@
         </p:nvSpPr>
         <p:spPr>
           <a:xfrm>
-            <a:off x="3336300" y="4212000"/>
+            <a:off x="3336300" y="4248000"/>
             <a:ext cx="2580300" cy="1800000"/>
           </a:xfrm>
           <a:prstGeom prst="rect">
@@ -3547,7 +3547,7 @@
         </p:nvSpPr>
         <p:spPr>
           <a:xfrm>
-            <a:off x="6204600" y="4212000"/>
+            <a:off x="6204600" y="4248000"/>
             <a:ext cx="2580300" cy="1800000"/>
           </a:xfrm>
           <a:prstGeom prst="rect">
@@ -3569,7 +3569,7 @@
                 </a:solidFill>
                 <a:latin typeface="IPAGothic"/>
               </a:rPr>
-              <a:t>選考中</a:t>
+              <a:t>現在選考中</a:t>
             </a:r>
           </a:p>
           <a:p>
@@ -3651,7 +3651,7 @@
         </p:nvSpPr>
         <p:spPr>
           <a:xfrm>
-            <a:off x="9072900" y="4212000"/>
+            <a:off x="9072900" y="4248000"/>
             <a:ext cx="2580300" cy="1800000"/>
           </a:xfrm>
           <a:prstGeom prst="rect">
@@ -3795,7 +3795,7 @@
                 </a:solidFill>
                 <a:latin typeface="IPAGothic"/>
               </a:rPr>
-              <a:t>サマリー：上位校　選考進捗（2026年1月〜7月）</a:t>
+              <a:t>サマリー：上位校　選考進捗（2026年1〜7月）</a:t>
             </a:r>
           </a:p>
         </p:txBody>
@@ -4003,7 +4003,7 @@
                 </a:solidFill>
                 <a:latin typeface="IPAGothic"/>
               </a:rPr>
-              <a:t>上位校含む全応募</a:t>
+              <a:t>全応募</a:t>
             </a:r>
           </a:p>
         </p:txBody>
@@ -4226,7 +4226,7 @@
         </p:nvGraphicFramePr>
         <p:xfrm>
           <a:off x="180000" y="2664000"/>
-          <a:ext cx="9900000" cy="4014000"/>
+          <a:ext cx="9684000" cy="4014000"/>
         </p:xfrm>
         <a:graphic>
           <a:graphicData uri="http://schemas.openxmlformats.org/drawingml/2006/table">
@@ -4238,8 +4238,8 @@
                 <a:gridCol w="1980000"/>
                 <a:gridCol w="900000"/>
                 <a:gridCol w="900000"/>
-                <a:gridCol w="1260000"/>
-                <a:gridCol w="1260000"/>
+                <a:gridCol w="1152000"/>
+                <a:gridCol w="1152000"/>
                 <a:gridCol w="900000"/>
                 <a:gridCol w="900000"/>
                 <a:gridCol w="1800000"/>
@@ -4252,7 +4252,7 @@
                     <a:p>
                       <a:pPr algn="ctr"/>
                       <a:r>
-                        <a:rPr sz="1400" b="1">
+                        <a:rPr sz="1300" b="1">
                           <a:solidFill>
                             <a:srgbClr val="FFFFFF"/>
                           </a:solidFill>
@@ -4266,36 +4266,16 @@
                     <a:solidFill>
                       <a:srgbClr val="1F3564"/>
                     </a:solidFill>
-                    <a:lnL w="12700" cap="flat" cmpd="sng">
-                      <a:solidFill>
-                        <a:srgbClr val="CCCCCC"/>
-                      </a:solidFill>
-                    </a:lnL>
-                    <a:lnR w="12700" cap="flat" cmpd="sng">
-                      <a:solidFill>
-                        <a:srgbClr val="CCCCCC"/>
-                      </a:solidFill>
-                    </a:lnR>
-                    <a:lnT w="12700" cap="flat" cmpd="sng">
-                      <a:solidFill>
-                        <a:srgbClr val="CCCCCC"/>
-                      </a:solidFill>
-                    </a:lnT>
-                    <a:lnB w="12700" cap="flat" cmpd="sng">
-                      <a:solidFill>
-                        <a:srgbClr val="CCCCCC"/>
-                      </a:solidFill>
-                    </a:lnB>
-                  </a:tcPr>
-                </a:tc>
-                <a:tc>
-                  <a:txBody>
-                    <a:bodyPr wrap="square"/>
-                    <a:lstStyle/>
-                    <a:p>
-                      <a:pPr algn="ctr"/>
-                      <a:r>
-                        <a:rPr sz="1400" b="1">
+                  </a:tcPr>
+                </a:tc>
+                <a:tc>
+                  <a:txBody>
+                    <a:bodyPr wrap="square"/>
+                    <a:lstStyle/>
+                    <a:p>
+                      <a:pPr algn="ctr"/>
+                      <a:r>
+                        <a:rPr sz="1300" b="1">
                           <a:solidFill>
                             <a:srgbClr val="FFFFFF"/>
                           </a:solidFill>
@@ -4309,36 +4289,16 @@
                     <a:solidFill>
                       <a:srgbClr val="1F3564"/>
                     </a:solidFill>
-                    <a:lnL w="12700" cap="flat" cmpd="sng">
-                      <a:solidFill>
-                        <a:srgbClr val="CCCCCC"/>
-                      </a:solidFill>
-                    </a:lnL>
-                    <a:lnR w="12700" cap="flat" cmpd="sng">
-                      <a:solidFill>
-                        <a:srgbClr val="CCCCCC"/>
-                      </a:solidFill>
-                    </a:lnR>
-                    <a:lnT w="12700" cap="flat" cmpd="sng">
-                      <a:solidFill>
-                        <a:srgbClr val="CCCCCC"/>
-                      </a:solidFill>
-                    </a:lnT>
-                    <a:lnB w="12700" cap="flat" cmpd="sng">
-                      <a:solidFill>
-                        <a:srgbClr val="CCCCCC"/>
-                      </a:solidFill>
-                    </a:lnB>
-                  </a:tcPr>
-                </a:tc>
-                <a:tc>
-                  <a:txBody>
-                    <a:bodyPr wrap="square"/>
-                    <a:lstStyle/>
-                    <a:p>
-                      <a:pPr algn="ctr"/>
-                      <a:r>
-                        <a:rPr sz="1400" b="1">
+                  </a:tcPr>
+                </a:tc>
+                <a:tc>
+                  <a:txBody>
+                    <a:bodyPr wrap="square"/>
+                    <a:lstStyle/>
+                    <a:p>
+                      <a:pPr algn="ctr"/>
+                      <a:r>
+                        <a:rPr sz="1300" b="1">
                           <a:solidFill>
                             <a:srgbClr val="FFFFFF"/>
                           </a:solidFill>
@@ -4352,42 +4312,22 @@
                     <a:solidFill>
                       <a:srgbClr val="1F3564"/>
                     </a:solidFill>
-                    <a:lnL w="12700" cap="flat" cmpd="sng">
-                      <a:solidFill>
-                        <a:srgbClr val="CCCCCC"/>
-                      </a:solidFill>
-                    </a:lnL>
-                    <a:lnR w="12700" cap="flat" cmpd="sng">
-                      <a:solidFill>
-                        <a:srgbClr val="CCCCCC"/>
-                      </a:solidFill>
-                    </a:lnR>
-                    <a:lnT w="12700" cap="flat" cmpd="sng">
-                      <a:solidFill>
-                        <a:srgbClr val="CCCCCC"/>
-                      </a:solidFill>
-                    </a:lnT>
-                    <a:lnB w="12700" cap="flat" cmpd="sng">
-                      <a:solidFill>
-                        <a:srgbClr val="CCCCCC"/>
-                      </a:solidFill>
-                    </a:lnB>
-                  </a:tcPr>
-                </a:tc>
-                <a:tc>
-                  <a:txBody>
-                    <a:bodyPr wrap="square"/>
-                    <a:lstStyle/>
-                    <a:p>
-                      <a:pPr algn="ctr"/>
-                      <a:r>
-                        <a:rPr sz="1400" b="1">
+                  </a:tcPr>
+                </a:tc>
+                <a:tc>
+                  <a:txBody>
+                    <a:bodyPr wrap="square"/>
+                    <a:lstStyle/>
+                    <a:p>
+                      <a:pPr algn="ctr"/>
+                      <a:r>
+                        <a:rPr sz="1300" b="1">
                           <a:solidFill>
                             <a:srgbClr val="FFFFFF"/>
                           </a:solidFill>
                           <a:latin typeface="IPAGothic"/>
                         </a:rPr>
-                        <a:t>辞退（実施前）</a:t>
+                        <a:t>辞退(実施前)</a:t>
                       </a:r>
                     </a:p>
                   </a:txBody>
@@ -4395,42 +4335,22 @@
                     <a:solidFill>
                       <a:srgbClr val="1F3564"/>
                     </a:solidFill>
-                    <a:lnL w="12700" cap="flat" cmpd="sng">
-                      <a:solidFill>
-                        <a:srgbClr val="CCCCCC"/>
-                      </a:solidFill>
-                    </a:lnL>
-                    <a:lnR w="12700" cap="flat" cmpd="sng">
-                      <a:solidFill>
-                        <a:srgbClr val="CCCCCC"/>
-                      </a:solidFill>
-                    </a:lnR>
-                    <a:lnT w="12700" cap="flat" cmpd="sng">
-                      <a:solidFill>
-                        <a:srgbClr val="CCCCCC"/>
-                      </a:solidFill>
-                    </a:lnT>
-                    <a:lnB w="12700" cap="flat" cmpd="sng">
-                      <a:solidFill>
-                        <a:srgbClr val="CCCCCC"/>
-                      </a:solidFill>
-                    </a:lnB>
-                  </a:tcPr>
-                </a:tc>
-                <a:tc>
-                  <a:txBody>
-                    <a:bodyPr wrap="square"/>
-                    <a:lstStyle/>
-                    <a:p>
-                      <a:pPr algn="ctr"/>
-                      <a:r>
-                        <a:rPr sz="1400" b="1">
+                  </a:tcPr>
+                </a:tc>
+                <a:tc>
+                  <a:txBody>
+                    <a:bodyPr wrap="square"/>
+                    <a:lstStyle/>
+                    <a:p>
+                      <a:pPr algn="ctr"/>
+                      <a:r>
+                        <a:rPr sz="1300" b="1">
                           <a:solidFill>
                             <a:srgbClr val="FFFFFF"/>
                           </a:solidFill>
                           <a:latin typeface="IPAGothic"/>
                         </a:rPr>
-                        <a:t>辞退（実施後）</a:t>
+                        <a:t>辞退(実施後)</a:t>
                       </a:r>
                     </a:p>
                   </a:txBody>
@@ -4438,36 +4358,16 @@
                     <a:solidFill>
                       <a:srgbClr val="1F3564"/>
                     </a:solidFill>
-                    <a:lnL w="12700" cap="flat" cmpd="sng">
-                      <a:solidFill>
-                        <a:srgbClr val="CCCCCC"/>
-                      </a:solidFill>
-                    </a:lnL>
-                    <a:lnR w="12700" cap="flat" cmpd="sng">
-                      <a:solidFill>
-                        <a:srgbClr val="CCCCCC"/>
-                      </a:solidFill>
-                    </a:lnR>
-                    <a:lnT w="12700" cap="flat" cmpd="sng">
-                      <a:solidFill>
-                        <a:srgbClr val="CCCCCC"/>
-                      </a:solidFill>
-                    </a:lnT>
-                    <a:lnB w="12700" cap="flat" cmpd="sng">
-                      <a:solidFill>
-                        <a:srgbClr val="CCCCCC"/>
-                      </a:solidFill>
-                    </a:lnB>
-                  </a:tcPr>
-                </a:tc>
-                <a:tc>
-                  <a:txBody>
-                    <a:bodyPr wrap="square"/>
-                    <a:lstStyle/>
-                    <a:p>
-                      <a:pPr algn="ctr"/>
-                      <a:r>
-                        <a:rPr sz="1400" b="1">
+                  </a:tcPr>
+                </a:tc>
+                <a:tc>
+                  <a:txBody>
+                    <a:bodyPr wrap="square"/>
+                    <a:lstStyle/>
+                    <a:p>
+                      <a:pPr algn="ctr"/>
+                      <a:r>
+                        <a:rPr sz="1300" b="1">
                           <a:solidFill>
                             <a:srgbClr val="FFFFFF"/>
                           </a:solidFill>
@@ -4481,36 +4381,16 @@
                     <a:solidFill>
                       <a:srgbClr val="1F3564"/>
                     </a:solidFill>
-                    <a:lnL w="12700" cap="flat" cmpd="sng">
-                      <a:solidFill>
-                        <a:srgbClr val="CCCCCC"/>
-                      </a:solidFill>
-                    </a:lnL>
-                    <a:lnR w="12700" cap="flat" cmpd="sng">
-                      <a:solidFill>
-                        <a:srgbClr val="CCCCCC"/>
-                      </a:solidFill>
-                    </a:lnR>
-                    <a:lnT w="12700" cap="flat" cmpd="sng">
-                      <a:solidFill>
-                        <a:srgbClr val="CCCCCC"/>
-                      </a:solidFill>
-                    </a:lnT>
-                    <a:lnB w="12700" cap="flat" cmpd="sng">
-                      <a:solidFill>
-                        <a:srgbClr val="CCCCCC"/>
-                      </a:solidFill>
-                    </a:lnB>
-                  </a:tcPr>
-                </a:tc>
-                <a:tc>
-                  <a:txBody>
-                    <a:bodyPr wrap="square"/>
-                    <a:lstStyle/>
-                    <a:p>
-                      <a:pPr algn="ctr"/>
-                      <a:r>
-                        <a:rPr sz="1400" b="1">
+                  </a:tcPr>
+                </a:tc>
+                <a:tc>
+                  <a:txBody>
+                    <a:bodyPr wrap="square"/>
+                    <a:lstStyle/>
+                    <a:p>
+                      <a:pPr algn="ctr"/>
+                      <a:r>
+                        <a:rPr sz="1300" b="1">
                           <a:solidFill>
                             <a:srgbClr val="FFFFFF"/>
                           </a:solidFill>
@@ -4524,36 +4404,16 @@
                     <a:solidFill>
                       <a:srgbClr val="1F3564"/>
                     </a:solidFill>
-                    <a:lnL w="12700" cap="flat" cmpd="sng">
-                      <a:solidFill>
-                        <a:srgbClr val="CCCCCC"/>
-                      </a:solidFill>
-                    </a:lnL>
-                    <a:lnR w="12700" cap="flat" cmpd="sng">
-                      <a:solidFill>
-                        <a:srgbClr val="CCCCCC"/>
-                      </a:solidFill>
-                    </a:lnR>
-                    <a:lnT w="12700" cap="flat" cmpd="sng">
-                      <a:solidFill>
-                        <a:srgbClr val="CCCCCC"/>
-                      </a:solidFill>
-                    </a:lnT>
-                    <a:lnB w="12700" cap="flat" cmpd="sng">
-                      <a:solidFill>
-                        <a:srgbClr val="CCCCCC"/>
-                      </a:solidFill>
-                    </a:lnB>
-                  </a:tcPr>
-                </a:tc>
-                <a:tc>
-                  <a:txBody>
-                    <a:bodyPr wrap="square"/>
-                    <a:lstStyle/>
-                    <a:p>
-                      <a:pPr algn="ctr"/>
-                      <a:r>
-                        <a:rPr sz="1400" b="1">
+                  </a:tcPr>
+                </a:tc>
+                <a:tc>
+                  <a:txBody>
+                    <a:bodyPr wrap="square"/>
+                    <a:lstStyle/>
+                    <a:p>
+                      <a:pPr algn="ctr"/>
+                      <a:r>
+                        <a:rPr sz="1300" b="1">
                           <a:solidFill>
                             <a:srgbClr val="FFFFFF"/>
                           </a:solidFill>
@@ -4567,26 +4427,6 @@
                     <a:solidFill>
                       <a:srgbClr val="1F3564"/>
                     </a:solidFill>
-                    <a:lnL w="12700" cap="flat" cmpd="sng">
-                      <a:solidFill>
-                        <a:srgbClr val="CCCCCC"/>
-                      </a:solidFill>
-                    </a:lnL>
-                    <a:lnR w="12700" cap="flat" cmpd="sng">
-                      <a:solidFill>
-                        <a:srgbClr val="CCCCCC"/>
-                      </a:solidFill>
-                    </a:lnR>
-                    <a:lnT w="12700" cap="flat" cmpd="sng">
-                      <a:solidFill>
-                        <a:srgbClr val="CCCCCC"/>
-                      </a:solidFill>
-                    </a:lnT>
-                    <a:lnB w="12700" cap="flat" cmpd="sng">
-                      <a:solidFill>
-                        <a:srgbClr val="CCCCCC"/>
-                      </a:solidFill>
-                    </a:lnB>
                   </a:tcPr>
                 </a:tc>
               </a:tr>
@@ -4598,7 +4438,7 @@
                     <a:p>
                       <a:pPr algn="ctr"/>
                       <a:r>
-                        <a:rPr sz="1500" b="1">
+                        <a:rPr sz="1400" b="1">
                           <a:solidFill>
                             <a:srgbClr val="1F3564"/>
                           </a:solidFill>
@@ -4612,36 +4452,16 @@
                     <a:solidFill>
                       <a:srgbClr val="ECF0F8"/>
                     </a:solidFill>
-                    <a:lnL w="12700" cap="flat" cmpd="sng">
-                      <a:solidFill>
-                        <a:srgbClr val="CCCCCC"/>
-                      </a:solidFill>
-                    </a:lnL>
-                    <a:lnR w="12700" cap="flat" cmpd="sng">
-                      <a:solidFill>
-                        <a:srgbClr val="CCCCCC"/>
-                      </a:solidFill>
-                    </a:lnR>
-                    <a:lnT w="12700" cap="flat" cmpd="sng">
-                      <a:solidFill>
-                        <a:srgbClr val="CCCCCC"/>
-                      </a:solidFill>
-                    </a:lnT>
-                    <a:lnB w="12700" cap="flat" cmpd="sng">
-                      <a:solidFill>
-                        <a:srgbClr val="CCCCCC"/>
-                      </a:solidFill>
-                    </a:lnB>
-                  </a:tcPr>
-                </a:tc>
-                <a:tc>
-                  <a:txBody>
-                    <a:bodyPr wrap="square"/>
-                    <a:lstStyle/>
-                    <a:p>
-                      <a:pPr algn="ctr"/>
-                      <a:r>
-                        <a:rPr sz="1500" b="0">
+                  </a:tcPr>
+                </a:tc>
+                <a:tc>
+                  <a:txBody>
+                    <a:bodyPr wrap="square"/>
+                    <a:lstStyle/>
+                    <a:p>
+                      <a:pPr algn="ctr"/>
+                      <a:r>
+                        <a:rPr sz="1400" b="0">
                           <a:solidFill>
                             <a:srgbClr val="1F3564"/>
                           </a:solidFill>
@@ -4655,36 +4475,16 @@
                     <a:solidFill>
                       <a:srgbClr val="FFFFFF"/>
                     </a:solidFill>
-                    <a:lnL w="12700" cap="flat" cmpd="sng">
-                      <a:solidFill>
-                        <a:srgbClr val="CCCCCC"/>
-                      </a:solidFill>
-                    </a:lnL>
-                    <a:lnR w="12700" cap="flat" cmpd="sng">
-                      <a:solidFill>
-                        <a:srgbClr val="CCCCCC"/>
-                      </a:solidFill>
-                    </a:lnR>
-                    <a:lnT w="12700" cap="flat" cmpd="sng">
-                      <a:solidFill>
-                        <a:srgbClr val="CCCCCC"/>
-                      </a:solidFill>
-                    </a:lnT>
-                    <a:lnB w="12700" cap="flat" cmpd="sng">
-                      <a:solidFill>
-                        <a:srgbClr val="CCCCCC"/>
-                      </a:solidFill>
-                    </a:lnB>
-                  </a:tcPr>
-                </a:tc>
-                <a:tc>
-                  <a:txBody>
-                    <a:bodyPr wrap="square"/>
-                    <a:lstStyle/>
-                    <a:p>
-                      <a:pPr algn="ctr"/>
-                      <a:r>
-                        <a:rPr sz="1700" b="1">
+                  </a:tcPr>
+                </a:tc>
+                <a:tc>
+                  <a:txBody>
+                    <a:bodyPr wrap="square"/>
+                    <a:lstStyle/>
+                    <a:p>
+                      <a:pPr algn="ctr"/>
+                      <a:r>
+                        <a:rPr sz="1600" b="1">
                           <a:solidFill>
                             <a:srgbClr val="27AE60"/>
                           </a:solidFill>
@@ -4694,37 +4494,16 @@
                       </a:r>
                     </a:p>
                   </a:txBody>
-                  <a:tcPr>
-                    <a:lnL w="12700" cap="flat" cmpd="sng">
-                      <a:solidFill>
-                        <a:srgbClr val="CCCCCC"/>
-                      </a:solidFill>
-                    </a:lnL>
-                    <a:lnR w="12700" cap="flat" cmpd="sng">
-                      <a:solidFill>
-                        <a:srgbClr val="CCCCCC"/>
-                      </a:solidFill>
-                    </a:lnR>
-                    <a:lnT w="12700" cap="flat" cmpd="sng">
-                      <a:solidFill>
-                        <a:srgbClr val="CCCCCC"/>
-                      </a:solidFill>
-                    </a:lnT>
-                    <a:lnB w="12700" cap="flat" cmpd="sng">
-                      <a:solidFill>
-                        <a:srgbClr val="CCCCCC"/>
-                      </a:solidFill>
-                    </a:lnB>
-                  </a:tcPr>
-                </a:tc>
-                <a:tc>
-                  <a:txBody>
-                    <a:bodyPr wrap="square"/>
-                    <a:lstStyle/>
-                    <a:p>
-                      <a:pPr algn="ctr"/>
-                      <a:r>
-                        <a:rPr sz="1700" b="1">
+                  <a:tcPr/>
+                </a:tc>
+                <a:tc>
+                  <a:txBody>
+                    <a:bodyPr wrap="square"/>
+                    <a:lstStyle/>
+                    <a:p>
+                      <a:pPr algn="ctr"/>
+                      <a:r>
+                        <a:rPr sz="1600" b="1">
                           <a:solidFill>
                             <a:srgbClr val="E85D5D"/>
                           </a:solidFill>
@@ -4735,36 +4514,19 @@
                     </a:p>
                   </a:txBody>
                   <a:tcPr>
-                    <a:lnL w="12700" cap="flat" cmpd="sng">
-                      <a:solidFill>
-                        <a:srgbClr val="CCCCCC"/>
-                      </a:solidFill>
-                    </a:lnL>
-                    <a:lnR w="12700" cap="flat" cmpd="sng">
-                      <a:solidFill>
-                        <a:srgbClr val="CCCCCC"/>
-                      </a:solidFill>
-                    </a:lnR>
-                    <a:lnT w="12700" cap="flat" cmpd="sng">
-                      <a:solidFill>
-                        <a:srgbClr val="CCCCCC"/>
-                      </a:solidFill>
-                    </a:lnT>
-                    <a:lnB w="12700" cap="flat" cmpd="sng">
-                      <a:solidFill>
-                        <a:srgbClr val="CCCCCC"/>
-                      </a:solidFill>
-                    </a:lnB>
-                  </a:tcPr>
-                </a:tc>
-                <a:tc>
-                  <a:txBody>
-                    <a:bodyPr wrap="square"/>
-                    <a:lstStyle/>
-                    <a:p>
-                      <a:pPr algn="ctr"/>
-                      <a:r>
-                        <a:rPr sz="1500" b="0">
+                    <a:solidFill>
+                      <a:srgbClr val="FFF0F0"/>
+                    </a:solidFill>
+                  </a:tcPr>
+                </a:tc>
+                <a:tc>
+                  <a:txBody>
+                    <a:bodyPr wrap="square"/>
+                    <a:lstStyle/>
+                    <a:p>
+                      <a:pPr algn="ctr"/>
+                      <a:r>
+                        <a:rPr sz="1400" b="0">
                           <a:solidFill>
                             <a:srgbClr val="1F3564"/>
                           </a:solidFill>
@@ -4778,26 +4540,52 @@
                     <a:solidFill>
                       <a:srgbClr val="FFFFFF"/>
                     </a:solidFill>
-                    <a:lnL w="12700" cap="flat" cmpd="sng">
-                      <a:solidFill>
-                        <a:srgbClr val="CCCCCC"/>
-                      </a:solidFill>
-                    </a:lnL>
-                    <a:lnR w="12700" cap="flat" cmpd="sng">
-                      <a:solidFill>
-                        <a:srgbClr val="CCCCCC"/>
-                      </a:solidFill>
-                    </a:lnR>
-                    <a:lnT w="12700" cap="flat" cmpd="sng">
-                      <a:solidFill>
-                        <a:srgbClr val="CCCCCC"/>
-                      </a:solidFill>
-                    </a:lnT>
-                    <a:lnB w="12700" cap="flat" cmpd="sng">
-                      <a:solidFill>
-                        <a:srgbClr val="CCCCCC"/>
-                      </a:solidFill>
-                    </a:lnB>
+                  </a:tcPr>
+                </a:tc>
+                <a:tc>
+                  <a:txBody>
+                    <a:bodyPr wrap="square"/>
+                    <a:lstStyle/>
+                    <a:p>
+                      <a:pPr algn="ctr"/>
+                      <a:r>
+                        <a:rPr sz="1300" b="0">
+                          <a:solidFill>
+                            <a:srgbClr val="AAAAAA"/>
+                          </a:solidFill>
+                          <a:latin typeface="IPAGothic"/>
+                        </a:rPr>
+                        <a:t>—</a:t>
+                      </a:r>
+                    </a:p>
+                  </a:txBody>
+                  <a:tcPr>
+                    <a:solidFill>
+                      <a:srgbClr val="F0F0F0"/>
+                    </a:solidFill>
+                  </a:tcPr>
+                </a:tc>
+                <a:tc>
+                  <a:txBody>
+                    <a:bodyPr wrap="square"/>
+                    <a:lstStyle/>
+                    <a:p>
+                      <a:pPr algn="ctr"/>
+                      <a:r>
+                        <a:rPr sz="1300" b="0">
+                          <a:solidFill>
+                            <a:srgbClr val="AAAAAA"/>
+                          </a:solidFill>
+                          <a:latin typeface="IPAGothic"/>
+                        </a:rPr>
+                        <a:t>—</a:t>
+                      </a:r>
+                    </a:p>
+                  </a:txBody>
+                  <a:tcPr>
+                    <a:solidFill>
+                      <a:srgbClr val="F0F0F0"/>
+                    </a:solidFill>
                   </a:tcPr>
                 </a:tc>
                 <a:tc>
@@ -4809,92 +4597,6 @@
                       <a:r>
                         <a:rPr sz="1400" b="0">
                           <a:solidFill>
-                            <a:srgbClr val="AAAAAA"/>
-                          </a:solidFill>
-                          <a:latin typeface="IPAGothic"/>
-                        </a:rPr>
-                        <a:t>—</a:t>
-                      </a:r>
-                    </a:p>
-                  </a:txBody>
-                  <a:tcPr>
-                    <a:solidFill>
-                      <a:srgbClr val="F0F0F0"/>
-                    </a:solidFill>
-                    <a:lnL w="12700" cap="flat" cmpd="sng">
-                      <a:solidFill>
-                        <a:srgbClr val="CCCCCC"/>
-                      </a:solidFill>
-                    </a:lnL>
-                    <a:lnR w="12700" cap="flat" cmpd="sng">
-                      <a:solidFill>
-                        <a:srgbClr val="CCCCCC"/>
-                      </a:solidFill>
-                    </a:lnR>
-                    <a:lnT w="12700" cap="flat" cmpd="sng">
-                      <a:solidFill>
-                        <a:srgbClr val="CCCCCC"/>
-                      </a:solidFill>
-                    </a:lnT>
-                    <a:lnB w="12700" cap="flat" cmpd="sng">
-                      <a:solidFill>
-                        <a:srgbClr val="CCCCCC"/>
-                      </a:solidFill>
-                    </a:lnB>
-                  </a:tcPr>
-                </a:tc>
-                <a:tc>
-                  <a:txBody>
-                    <a:bodyPr wrap="square"/>
-                    <a:lstStyle/>
-                    <a:p>
-                      <a:pPr algn="ctr"/>
-                      <a:r>
-                        <a:rPr sz="1400" b="0">
-                          <a:solidFill>
-                            <a:srgbClr val="AAAAAA"/>
-                          </a:solidFill>
-                          <a:latin typeface="IPAGothic"/>
-                        </a:rPr>
-                        <a:t>—</a:t>
-                      </a:r>
-                    </a:p>
-                  </a:txBody>
-                  <a:tcPr>
-                    <a:solidFill>
-                      <a:srgbClr val="F0F0F0"/>
-                    </a:solidFill>
-                    <a:lnL w="12700" cap="flat" cmpd="sng">
-                      <a:solidFill>
-                        <a:srgbClr val="CCCCCC"/>
-                      </a:solidFill>
-                    </a:lnL>
-                    <a:lnR w="12700" cap="flat" cmpd="sng">
-                      <a:solidFill>
-                        <a:srgbClr val="CCCCCC"/>
-                      </a:solidFill>
-                    </a:lnR>
-                    <a:lnT w="12700" cap="flat" cmpd="sng">
-                      <a:solidFill>
-                        <a:srgbClr val="CCCCCC"/>
-                      </a:solidFill>
-                    </a:lnT>
-                    <a:lnB w="12700" cap="flat" cmpd="sng">
-                      <a:solidFill>
-                        <a:srgbClr val="CCCCCC"/>
-                      </a:solidFill>
-                    </a:lnB>
-                  </a:tcPr>
-                </a:tc>
-                <a:tc>
-                  <a:txBody>
-                    <a:bodyPr wrap="square"/>
-                    <a:lstStyle/>
-                    <a:p>
-                      <a:pPr algn="ctr"/>
-                      <a:r>
-                        <a:rPr sz="1500" b="0">
-                          <a:solidFill>
                             <a:srgbClr val="1F3564"/>
                           </a:solidFill>
                           <a:latin typeface="IPAGothic"/>
@@ -4907,26 +4609,6 @@
                     <a:solidFill>
                       <a:srgbClr val="FFFFFF"/>
                     </a:solidFill>
-                    <a:lnL w="12700" cap="flat" cmpd="sng">
-                      <a:solidFill>
-                        <a:srgbClr val="CCCCCC"/>
-                      </a:solidFill>
-                    </a:lnL>
-                    <a:lnR w="12700" cap="flat" cmpd="sng">
-                      <a:solidFill>
-                        <a:srgbClr val="CCCCCC"/>
-                      </a:solidFill>
-                    </a:lnR>
-                    <a:lnT w="12700" cap="flat" cmpd="sng">
-                      <a:solidFill>
-                        <a:srgbClr val="CCCCCC"/>
-                      </a:solidFill>
-                    </a:lnT>
-                    <a:lnB w="12700" cap="flat" cmpd="sng">
-                      <a:solidFill>
-                        <a:srgbClr val="CCCCCC"/>
-                      </a:solidFill>
-                    </a:lnB>
                   </a:tcPr>
                 </a:tc>
               </a:tr>
@@ -4938,7 +4620,7 @@
                     <a:p>
                       <a:pPr algn="ctr"/>
                       <a:r>
-                        <a:rPr sz="1500" b="1">
+                        <a:rPr sz="1400" b="1">
                           <a:solidFill>
                             <a:srgbClr val="1F3564"/>
                           </a:solidFill>
@@ -4952,26 +4634,144 @@
                     <a:solidFill>
                       <a:srgbClr val="ECF0F8"/>
                     </a:solidFill>
-                    <a:lnL w="12700" cap="flat" cmpd="sng">
-                      <a:solidFill>
-                        <a:srgbClr val="CCCCCC"/>
-                      </a:solidFill>
-                    </a:lnL>
-                    <a:lnR w="12700" cap="flat" cmpd="sng">
-                      <a:solidFill>
-                        <a:srgbClr val="CCCCCC"/>
-                      </a:solidFill>
-                    </a:lnR>
-                    <a:lnT w="12700" cap="flat" cmpd="sng">
-                      <a:solidFill>
-                        <a:srgbClr val="CCCCCC"/>
-                      </a:solidFill>
-                    </a:lnT>
-                    <a:lnB w="12700" cap="flat" cmpd="sng">
-                      <a:solidFill>
-                        <a:srgbClr val="CCCCCC"/>
-                      </a:solidFill>
-                    </a:lnB>
+                  </a:tcPr>
+                </a:tc>
+                <a:tc>
+                  <a:txBody>
+                    <a:bodyPr wrap="square"/>
+                    <a:lstStyle/>
+                    <a:p>
+                      <a:pPr algn="ctr"/>
+                      <a:r>
+                        <a:rPr sz="1300" b="0">
+                          <a:solidFill>
+                            <a:srgbClr val="AAAAAA"/>
+                          </a:solidFill>
+                          <a:latin typeface="IPAGothic"/>
+                        </a:rPr>
+                        <a:t>—</a:t>
+                      </a:r>
+                    </a:p>
+                  </a:txBody>
+                  <a:tcPr>
+                    <a:solidFill>
+                      <a:srgbClr val="F0F0F0"/>
+                    </a:solidFill>
+                  </a:tcPr>
+                </a:tc>
+                <a:tc>
+                  <a:txBody>
+                    <a:bodyPr wrap="square"/>
+                    <a:lstStyle/>
+                    <a:p>
+                      <a:pPr algn="ctr"/>
+                      <a:r>
+                        <a:rPr sz="1300" b="0">
+                          <a:solidFill>
+                            <a:srgbClr val="AAAAAA"/>
+                          </a:solidFill>
+                          <a:latin typeface="IPAGothic"/>
+                        </a:rPr>
+                        <a:t>—</a:t>
+                      </a:r>
+                    </a:p>
+                  </a:txBody>
+                  <a:tcPr>
+                    <a:solidFill>
+                      <a:srgbClr val="F0F0F0"/>
+                    </a:solidFill>
+                  </a:tcPr>
+                </a:tc>
+                <a:tc>
+                  <a:txBody>
+                    <a:bodyPr wrap="square"/>
+                    <a:lstStyle/>
+                    <a:p>
+                      <a:pPr algn="ctr"/>
+                      <a:r>
+                        <a:rPr sz="1300" b="0">
+                          <a:solidFill>
+                            <a:srgbClr val="AAAAAA"/>
+                          </a:solidFill>
+                          <a:latin typeface="IPAGothic"/>
+                        </a:rPr>
+                        <a:t>—</a:t>
+                      </a:r>
+                    </a:p>
+                  </a:txBody>
+                  <a:tcPr>
+                    <a:solidFill>
+                      <a:srgbClr val="F0F0F0"/>
+                    </a:solidFill>
+                  </a:tcPr>
+                </a:tc>
+                <a:tc>
+                  <a:txBody>
+                    <a:bodyPr wrap="square"/>
+                    <a:lstStyle/>
+                    <a:p>
+                      <a:pPr algn="ctr"/>
+                      <a:r>
+                        <a:rPr sz="1300" b="0">
+                          <a:solidFill>
+                            <a:srgbClr val="AAAAAA"/>
+                          </a:solidFill>
+                          <a:latin typeface="IPAGothic"/>
+                        </a:rPr>
+                        <a:t>—</a:t>
+                      </a:r>
+                    </a:p>
+                  </a:txBody>
+                  <a:tcPr>
+                    <a:solidFill>
+                      <a:srgbClr val="F0F0F0"/>
+                    </a:solidFill>
+                  </a:tcPr>
+                </a:tc>
+                <a:tc>
+                  <a:txBody>
+                    <a:bodyPr wrap="square"/>
+                    <a:lstStyle/>
+                    <a:p>
+                      <a:pPr algn="ctr"/>
+                      <a:r>
+                        <a:rPr sz="1300" b="0">
+                          <a:solidFill>
+                            <a:srgbClr val="AAAAAA"/>
+                          </a:solidFill>
+                          <a:latin typeface="IPAGothic"/>
+                        </a:rPr>
+                        <a:t>—</a:t>
+                      </a:r>
+                    </a:p>
+                  </a:txBody>
+                  <a:tcPr>
+                    <a:solidFill>
+                      <a:srgbClr val="F0F0F0"/>
+                    </a:solidFill>
+                  </a:tcPr>
+                </a:tc>
+                <a:tc>
+                  <a:txBody>
+                    <a:bodyPr wrap="square"/>
+                    <a:lstStyle/>
+                    <a:p>
+                      <a:pPr algn="ctr"/>
+                      <a:r>
+                        <a:rPr sz="1300" b="0">
+                          <a:solidFill>
+                            <a:srgbClr val="AAAAAA"/>
+                          </a:solidFill>
+                          <a:latin typeface="IPAGothic"/>
+                        </a:rPr>
+                        <a:t>—</a:t>
+                      </a:r>
+                    </a:p>
+                  </a:txBody>
+                  <a:tcPr>
+                    <a:solidFill>
+                      <a:srgbClr val="F0F0F0"/>
+                    </a:solidFill>
                   </a:tcPr>
                 </a:tc>
                 <a:tc>
@@ -4983,264 +4783,6 @@
                       <a:r>
                         <a:rPr sz="1400" b="0">
                           <a:solidFill>
-                            <a:srgbClr val="AAAAAA"/>
-                          </a:solidFill>
-                          <a:latin typeface="IPAGothic"/>
-                        </a:rPr>
-                        <a:t>—</a:t>
-                      </a:r>
-                    </a:p>
-                  </a:txBody>
-                  <a:tcPr>
-                    <a:solidFill>
-                      <a:srgbClr val="F0F0F0"/>
-                    </a:solidFill>
-                    <a:lnL w="12700" cap="flat" cmpd="sng">
-                      <a:solidFill>
-                        <a:srgbClr val="CCCCCC"/>
-                      </a:solidFill>
-                    </a:lnL>
-                    <a:lnR w="12700" cap="flat" cmpd="sng">
-                      <a:solidFill>
-                        <a:srgbClr val="CCCCCC"/>
-                      </a:solidFill>
-                    </a:lnR>
-                    <a:lnT w="12700" cap="flat" cmpd="sng">
-                      <a:solidFill>
-                        <a:srgbClr val="CCCCCC"/>
-                      </a:solidFill>
-                    </a:lnT>
-                    <a:lnB w="12700" cap="flat" cmpd="sng">
-                      <a:solidFill>
-                        <a:srgbClr val="CCCCCC"/>
-                      </a:solidFill>
-                    </a:lnB>
-                  </a:tcPr>
-                </a:tc>
-                <a:tc>
-                  <a:txBody>
-                    <a:bodyPr wrap="square"/>
-                    <a:lstStyle/>
-                    <a:p>
-                      <a:pPr algn="ctr"/>
-                      <a:r>
-                        <a:rPr sz="1400" b="0">
-                          <a:solidFill>
-                            <a:srgbClr val="AAAAAA"/>
-                          </a:solidFill>
-                          <a:latin typeface="IPAGothic"/>
-                        </a:rPr>
-                        <a:t>—</a:t>
-                      </a:r>
-                    </a:p>
-                  </a:txBody>
-                  <a:tcPr>
-                    <a:solidFill>
-                      <a:srgbClr val="F0F0F0"/>
-                    </a:solidFill>
-                    <a:lnL w="12700" cap="flat" cmpd="sng">
-                      <a:solidFill>
-                        <a:srgbClr val="CCCCCC"/>
-                      </a:solidFill>
-                    </a:lnL>
-                    <a:lnR w="12700" cap="flat" cmpd="sng">
-                      <a:solidFill>
-                        <a:srgbClr val="CCCCCC"/>
-                      </a:solidFill>
-                    </a:lnR>
-                    <a:lnT w="12700" cap="flat" cmpd="sng">
-                      <a:solidFill>
-                        <a:srgbClr val="CCCCCC"/>
-                      </a:solidFill>
-                    </a:lnT>
-                    <a:lnB w="12700" cap="flat" cmpd="sng">
-                      <a:solidFill>
-                        <a:srgbClr val="CCCCCC"/>
-                      </a:solidFill>
-                    </a:lnB>
-                  </a:tcPr>
-                </a:tc>
-                <a:tc>
-                  <a:txBody>
-                    <a:bodyPr wrap="square"/>
-                    <a:lstStyle/>
-                    <a:p>
-                      <a:pPr algn="ctr"/>
-                      <a:r>
-                        <a:rPr sz="1400" b="0">
-                          <a:solidFill>
-                            <a:srgbClr val="AAAAAA"/>
-                          </a:solidFill>
-                          <a:latin typeface="IPAGothic"/>
-                        </a:rPr>
-                        <a:t>—</a:t>
-                      </a:r>
-                    </a:p>
-                  </a:txBody>
-                  <a:tcPr>
-                    <a:solidFill>
-                      <a:srgbClr val="F0F0F0"/>
-                    </a:solidFill>
-                    <a:lnL w="12700" cap="flat" cmpd="sng">
-                      <a:solidFill>
-                        <a:srgbClr val="CCCCCC"/>
-                      </a:solidFill>
-                    </a:lnL>
-                    <a:lnR w="12700" cap="flat" cmpd="sng">
-                      <a:solidFill>
-                        <a:srgbClr val="CCCCCC"/>
-                      </a:solidFill>
-                    </a:lnR>
-                    <a:lnT w="12700" cap="flat" cmpd="sng">
-                      <a:solidFill>
-                        <a:srgbClr val="CCCCCC"/>
-                      </a:solidFill>
-                    </a:lnT>
-                    <a:lnB w="12700" cap="flat" cmpd="sng">
-                      <a:solidFill>
-                        <a:srgbClr val="CCCCCC"/>
-                      </a:solidFill>
-                    </a:lnB>
-                  </a:tcPr>
-                </a:tc>
-                <a:tc>
-                  <a:txBody>
-                    <a:bodyPr wrap="square"/>
-                    <a:lstStyle/>
-                    <a:p>
-                      <a:pPr algn="ctr"/>
-                      <a:r>
-                        <a:rPr sz="1400" b="0">
-                          <a:solidFill>
-                            <a:srgbClr val="AAAAAA"/>
-                          </a:solidFill>
-                          <a:latin typeface="IPAGothic"/>
-                        </a:rPr>
-                        <a:t>—</a:t>
-                      </a:r>
-                    </a:p>
-                  </a:txBody>
-                  <a:tcPr>
-                    <a:solidFill>
-                      <a:srgbClr val="F0F0F0"/>
-                    </a:solidFill>
-                    <a:lnL w="12700" cap="flat" cmpd="sng">
-                      <a:solidFill>
-                        <a:srgbClr val="CCCCCC"/>
-                      </a:solidFill>
-                    </a:lnL>
-                    <a:lnR w="12700" cap="flat" cmpd="sng">
-                      <a:solidFill>
-                        <a:srgbClr val="CCCCCC"/>
-                      </a:solidFill>
-                    </a:lnR>
-                    <a:lnT w="12700" cap="flat" cmpd="sng">
-                      <a:solidFill>
-                        <a:srgbClr val="CCCCCC"/>
-                      </a:solidFill>
-                    </a:lnT>
-                    <a:lnB w="12700" cap="flat" cmpd="sng">
-                      <a:solidFill>
-                        <a:srgbClr val="CCCCCC"/>
-                      </a:solidFill>
-                    </a:lnB>
-                  </a:tcPr>
-                </a:tc>
-                <a:tc>
-                  <a:txBody>
-                    <a:bodyPr wrap="square"/>
-                    <a:lstStyle/>
-                    <a:p>
-                      <a:pPr algn="ctr"/>
-                      <a:r>
-                        <a:rPr sz="1400" b="0">
-                          <a:solidFill>
-                            <a:srgbClr val="AAAAAA"/>
-                          </a:solidFill>
-                          <a:latin typeface="IPAGothic"/>
-                        </a:rPr>
-                        <a:t>—</a:t>
-                      </a:r>
-                    </a:p>
-                  </a:txBody>
-                  <a:tcPr>
-                    <a:solidFill>
-                      <a:srgbClr val="F0F0F0"/>
-                    </a:solidFill>
-                    <a:lnL w="12700" cap="flat" cmpd="sng">
-                      <a:solidFill>
-                        <a:srgbClr val="CCCCCC"/>
-                      </a:solidFill>
-                    </a:lnL>
-                    <a:lnR w="12700" cap="flat" cmpd="sng">
-                      <a:solidFill>
-                        <a:srgbClr val="CCCCCC"/>
-                      </a:solidFill>
-                    </a:lnR>
-                    <a:lnT w="12700" cap="flat" cmpd="sng">
-                      <a:solidFill>
-                        <a:srgbClr val="CCCCCC"/>
-                      </a:solidFill>
-                    </a:lnT>
-                    <a:lnB w="12700" cap="flat" cmpd="sng">
-                      <a:solidFill>
-                        <a:srgbClr val="CCCCCC"/>
-                      </a:solidFill>
-                    </a:lnB>
-                  </a:tcPr>
-                </a:tc>
-                <a:tc>
-                  <a:txBody>
-                    <a:bodyPr wrap="square"/>
-                    <a:lstStyle/>
-                    <a:p>
-                      <a:pPr algn="ctr"/>
-                      <a:r>
-                        <a:rPr sz="1400" b="0">
-                          <a:solidFill>
-                            <a:srgbClr val="AAAAAA"/>
-                          </a:solidFill>
-                          <a:latin typeface="IPAGothic"/>
-                        </a:rPr>
-                        <a:t>—</a:t>
-                      </a:r>
-                    </a:p>
-                  </a:txBody>
-                  <a:tcPr>
-                    <a:solidFill>
-                      <a:srgbClr val="F0F0F0"/>
-                    </a:solidFill>
-                    <a:lnL w="12700" cap="flat" cmpd="sng">
-                      <a:solidFill>
-                        <a:srgbClr val="CCCCCC"/>
-                      </a:solidFill>
-                    </a:lnL>
-                    <a:lnR w="12700" cap="flat" cmpd="sng">
-                      <a:solidFill>
-                        <a:srgbClr val="CCCCCC"/>
-                      </a:solidFill>
-                    </a:lnR>
-                    <a:lnT w="12700" cap="flat" cmpd="sng">
-                      <a:solidFill>
-                        <a:srgbClr val="CCCCCC"/>
-                      </a:solidFill>
-                    </a:lnT>
-                    <a:lnB w="12700" cap="flat" cmpd="sng">
-                      <a:solidFill>
-                        <a:srgbClr val="CCCCCC"/>
-                      </a:solidFill>
-                    </a:lnB>
-                  </a:tcPr>
-                </a:tc>
-                <a:tc>
-                  <a:txBody>
-                    <a:bodyPr wrap="square"/>
-                    <a:lstStyle/>
-                    <a:p>
-                      <a:pPr algn="ctr"/>
-                      <a:r>
-                        <a:rPr sz="1500" b="0">
-                          <a:solidFill>
                             <a:srgbClr val="1F3564"/>
                           </a:solidFill>
                           <a:latin typeface="IPAGothic"/>
@@ -5253,26 +4795,6 @@
                     <a:solidFill>
                       <a:srgbClr val="ECF0F8"/>
                     </a:solidFill>
-                    <a:lnL w="12700" cap="flat" cmpd="sng">
-                      <a:solidFill>
-                        <a:srgbClr val="CCCCCC"/>
-                      </a:solidFill>
-                    </a:lnL>
-                    <a:lnR w="12700" cap="flat" cmpd="sng">
-                      <a:solidFill>
-                        <a:srgbClr val="CCCCCC"/>
-                      </a:solidFill>
-                    </a:lnR>
-                    <a:lnT w="12700" cap="flat" cmpd="sng">
-                      <a:solidFill>
-                        <a:srgbClr val="CCCCCC"/>
-                      </a:solidFill>
-                    </a:lnT>
-                    <a:lnB w="12700" cap="flat" cmpd="sng">
-                      <a:solidFill>
-                        <a:srgbClr val="CCCCCC"/>
-                      </a:solidFill>
-                    </a:lnB>
                   </a:tcPr>
                 </a:tc>
               </a:tr>
@@ -5284,7 +4806,7 @@
                     <a:p>
                       <a:pPr algn="ctr"/>
                       <a:r>
-                        <a:rPr sz="1500" b="1">
+                        <a:rPr sz="1400" b="1">
                           <a:solidFill>
                             <a:srgbClr val="1F3564"/>
                           </a:solidFill>
@@ -5298,26 +4820,144 @@
                     <a:solidFill>
                       <a:srgbClr val="ECF0F8"/>
                     </a:solidFill>
-                    <a:lnL w="12700" cap="flat" cmpd="sng">
-                      <a:solidFill>
-                        <a:srgbClr val="CCCCCC"/>
-                      </a:solidFill>
-                    </a:lnL>
-                    <a:lnR w="12700" cap="flat" cmpd="sng">
-                      <a:solidFill>
-                        <a:srgbClr val="CCCCCC"/>
-                      </a:solidFill>
-                    </a:lnR>
-                    <a:lnT w="12700" cap="flat" cmpd="sng">
-                      <a:solidFill>
-                        <a:srgbClr val="CCCCCC"/>
-                      </a:solidFill>
-                    </a:lnT>
-                    <a:lnB w="12700" cap="flat" cmpd="sng">
-                      <a:solidFill>
-                        <a:srgbClr val="CCCCCC"/>
-                      </a:solidFill>
-                    </a:lnB>
+                  </a:tcPr>
+                </a:tc>
+                <a:tc>
+                  <a:txBody>
+                    <a:bodyPr wrap="square"/>
+                    <a:lstStyle/>
+                    <a:p>
+                      <a:pPr algn="ctr"/>
+                      <a:r>
+                        <a:rPr sz="1300" b="0">
+                          <a:solidFill>
+                            <a:srgbClr val="AAAAAA"/>
+                          </a:solidFill>
+                          <a:latin typeface="IPAGothic"/>
+                        </a:rPr>
+                        <a:t>—</a:t>
+                      </a:r>
+                    </a:p>
+                  </a:txBody>
+                  <a:tcPr>
+                    <a:solidFill>
+                      <a:srgbClr val="F0F0F0"/>
+                    </a:solidFill>
+                  </a:tcPr>
+                </a:tc>
+                <a:tc>
+                  <a:txBody>
+                    <a:bodyPr wrap="square"/>
+                    <a:lstStyle/>
+                    <a:p>
+                      <a:pPr algn="ctr"/>
+                      <a:r>
+                        <a:rPr sz="1300" b="0">
+                          <a:solidFill>
+                            <a:srgbClr val="AAAAAA"/>
+                          </a:solidFill>
+                          <a:latin typeface="IPAGothic"/>
+                        </a:rPr>
+                        <a:t>—</a:t>
+                      </a:r>
+                    </a:p>
+                  </a:txBody>
+                  <a:tcPr>
+                    <a:solidFill>
+                      <a:srgbClr val="F0F0F0"/>
+                    </a:solidFill>
+                  </a:tcPr>
+                </a:tc>
+                <a:tc>
+                  <a:txBody>
+                    <a:bodyPr wrap="square"/>
+                    <a:lstStyle/>
+                    <a:p>
+                      <a:pPr algn="ctr"/>
+                      <a:r>
+                        <a:rPr sz="1300" b="0">
+                          <a:solidFill>
+                            <a:srgbClr val="AAAAAA"/>
+                          </a:solidFill>
+                          <a:latin typeface="IPAGothic"/>
+                        </a:rPr>
+                        <a:t>—</a:t>
+                      </a:r>
+                    </a:p>
+                  </a:txBody>
+                  <a:tcPr>
+                    <a:solidFill>
+                      <a:srgbClr val="F0F0F0"/>
+                    </a:solidFill>
+                  </a:tcPr>
+                </a:tc>
+                <a:tc>
+                  <a:txBody>
+                    <a:bodyPr wrap="square"/>
+                    <a:lstStyle/>
+                    <a:p>
+                      <a:pPr algn="ctr"/>
+                      <a:r>
+                        <a:rPr sz="1300" b="0">
+                          <a:solidFill>
+                            <a:srgbClr val="AAAAAA"/>
+                          </a:solidFill>
+                          <a:latin typeface="IPAGothic"/>
+                        </a:rPr>
+                        <a:t>—</a:t>
+                      </a:r>
+                    </a:p>
+                  </a:txBody>
+                  <a:tcPr>
+                    <a:solidFill>
+                      <a:srgbClr val="F0F0F0"/>
+                    </a:solidFill>
+                  </a:tcPr>
+                </a:tc>
+                <a:tc>
+                  <a:txBody>
+                    <a:bodyPr wrap="square"/>
+                    <a:lstStyle/>
+                    <a:p>
+                      <a:pPr algn="ctr"/>
+                      <a:r>
+                        <a:rPr sz="1300" b="0">
+                          <a:solidFill>
+                            <a:srgbClr val="AAAAAA"/>
+                          </a:solidFill>
+                          <a:latin typeface="IPAGothic"/>
+                        </a:rPr>
+                        <a:t>—</a:t>
+                      </a:r>
+                    </a:p>
+                  </a:txBody>
+                  <a:tcPr>
+                    <a:solidFill>
+                      <a:srgbClr val="F0F0F0"/>
+                    </a:solidFill>
+                  </a:tcPr>
+                </a:tc>
+                <a:tc>
+                  <a:txBody>
+                    <a:bodyPr wrap="square"/>
+                    <a:lstStyle/>
+                    <a:p>
+                      <a:pPr algn="ctr"/>
+                      <a:r>
+                        <a:rPr sz="1300" b="0">
+                          <a:solidFill>
+                            <a:srgbClr val="AAAAAA"/>
+                          </a:solidFill>
+                          <a:latin typeface="IPAGothic"/>
+                        </a:rPr>
+                        <a:t>—</a:t>
+                      </a:r>
+                    </a:p>
+                  </a:txBody>
+                  <a:tcPr>
+                    <a:solidFill>
+                      <a:srgbClr val="F0F0F0"/>
+                    </a:solidFill>
                   </a:tcPr>
                 </a:tc>
                 <a:tc>
@@ -5329,264 +4969,6 @@
                       <a:r>
                         <a:rPr sz="1400" b="0">
                           <a:solidFill>
-                            <a:srgbClr val="AAAAAA"/>
-                          </a:solidFill>
-                          <a:latin typeface="IPAGothic"/>
-                        </a:rPr>
-                        <a:t>—</a:t>
-                      </a:r>
-                    </a:p>
-                  </a:txBody>
-                  <a:tcPr>
-                    <a:solidFill>
-                      <a:srgbClr val="F0F0F0"/>
-                    </a:solidFill>
-                    <a:lnL w="12700" cap="flat" cmpd="sng">
-                      <a:solidFill>
-                        <a:srgbClr val="CCCCCC"/>
-                      </a:solidFill>
-                    </a:lnL>
-                    <a:lnR w="12700" cap="flat" cmpd="sng">
-                      <a:solidFill>
-                        <a:srgbClr val="CCCCCC"/>
-                      </a:solidFill>
-                    </a:lnR>
-                    <a:lnT w="12700" cap="flat" cmpd="sng">
-                      <a:solidFill>
-                        <a:srgbClr val="CCCCCC"/>
-                      </a:solidFill>
-                    </a:lnT>
-                    <a:lnB w="12700" cap="flat" cmpd="sng">
-                      <a:solidFill>
-                        <a:srgbClr val="CCCCCC"/>
-                      </a:solidFill>
-                    </a:lnB>
-                  </a:tcPr>
-                </a:tc>
-                <a:tc>
-                  <a:txBody>
-                    <a:bodyPr wrap="square"/>
-                    <a:lstStyle/>
-                    <a:p>
-                      <a:pPr algn="ctr"/>
-                      <a:r>
-                        <a:rPr sz="1400" b="0">
-                          <a:solidFill>
-                            <a:srgbClr val="AAAAAA"/>
-                          </a:solidFill>
-                          <a:latin typeface="IPAGothic"/>
-                        </a:rPr>
-                        <a:t>—</a:t>
-                      </a:r>
-                    </a:p>
-                  </a:txBody>
-                  <a:tcPr>
-                    <a:solidFill>
-                      <a:srgbClr val="F0F0F0"/>
-                    </a:solidFill>
-                    <a:lnL w="12700" cap="flat" cmpd="sng">
-                      <a:solidFill>
-                        <a:srgbClr val="CCCCCC"/>
-                      </a:solidFill>
-                    </a:lnL>
-                    <a:lnR w="12700" cap="flat" cmpd="sng">
-                      <a:solidFill>
-                        <a:srgbClr val="CCCCCC"/>
-                      </a:solidFill>
-                    </a:lnR>
-                    <a:lnT w="12700" cap="flat" cmpd="sng">
-                      <a:solidFill>
-                        <a:srgbClr val="CCCCCC"/>
-                      </a:solidFill>
-                    </a:lnT>
-                    <a:lnB w="12700" cap="flat" cmpd="sng">
-                      <a:solidFill>
-                        <a:srgbClr val="CCCCCC"/>
-                      </a:solidFill>
-                    </a:lnB>
-                  </a:tcPr>
-                </a:tc>
-                <a:tc>
-                  <a:txBody>
-                    <a:bodyPr wrap="square"/>
-                    <a:lstStyle/>
-                    <a:p>
-                      <a:pPr algn="ctr"/>
-                      <a:r>
-                        <a:rPr sz="1400" b="0">
-                          <a:solidFill>
-                            <a:srgbClr val="AAAAAA"/>
-                          </a:solidFill>
-                          <a:latin typeface="IPAGothic"/>
-                        </a:rPr>
-                        <a:t>—</a:t>
-                      </a:r>
-                    </a:p>
-                  </a:txBody>
-                  <a:tcPr>
-                    <a:solidFill>
-                      <a:srgbClr val="F0F0F0"/>
-                    </a:solidFill>
-                    <a:lnL w="12700" cap="flat" cmpd="sng">
-                      <a:solidFill>
-                        <a:srgbClr val="CCCCCC"/>
-                      </a:solidFill>
-                    </a:lnL>
-                    <a:lnR w="12700" cap="flat" cmpd="sng">
-                      <a:solidFill>
-                        <a:srgbClr val="CCCCCC"/>
-                      </a:solidFill>
-                    </a:lnR>
-                    <a:lnT w="12700" cap="flat" cmpd="sng">
-                      <a:solidFill>
-                        <a:srgbClr val="CCCCCC"/>
-                      </a:solidFill>
-                    </a:lnT>
-                    <a:lnB w="12700" cap="flat" cmpd="sng">
-                      <a:solidFill>
-                        <a:srgbClr val="CCCCCC"/>
-                      </a:solidFill>
-                    </a:lnB>
-                  </a:tcPr>
-                </a:tc>
-                <a:tc>
-                  <a:txBody>
-                    <a:bodyPr wrap="square"/>
-                    <a:lstStyle/>
-                    <a:p>
-                      <a:pPr algn="ctr"/>
-                      <a:r>
-                        <a:rPr sz="1400" b="0">
-                          <a:solidFill>
-                            <a:srgbClr val="AAAAAA"/>
-                          </a:solidFill>
-                          <a:latin typeface="IPAGothic"/>
-                        </a:rPr>
-                        <a:t>—</a:t>
-                      </a:r>
-                    </a:p>
-                  </a:txBody>
-                  <a:tcPr>
-                    <a:solidFill>
-                      <a:srgbClr val="F0F0F0"/>
-                    </a:solidFill>
-                    <a:lnL w="12700" cap="flat" cmpd="sng">
-                      <a:solidFill>
-                        <a:srgbClr val="CCCCCC"/>
-                      </a:solidFill>
-                    </a:lnL>
-                    <a:lnR w="12700" cap="flat" cmpd="sng">
-                      <a:solidFill>
-                        <a:srgbClr val="CCCCCC"/>
-                      </a:solidFill>
-                    </a:lnR>
-                    <a:lnT w="12700" cap="flat" cmpd="sng">
-                      <a:solidFill>
-                        <a:srgbClr val="CCCCCC"/>
-                      </a:solidFill>
-                    </a:lnT>
-                    <a:lnB w="12700" cap="flat" cmpd="sng">
-                      <a:solidFill>
-                        <a:srgbClr val="CCCCCC"/>
-                      </a:solidFill>
-                    </a:lnB>
-                  </a:tcPr>
-                </a:tc>
-                <a:tc>
-                  <a:txBody>
-                    <a:bodyPr wrap="square"/>
-                    <a:lstStyle/>
-                    <a:p>
-                      <a:pPr algn="ctr"/>
-                      <a:r>
-                        <a:rPr sz="1400" b="0">
-                          <a:solidFill>
-                            <a:srgbClr val="AAAAAA"/>
-                          </a:solidFill>
-                          <a:latin typeface="IPAGothic"/>
-                        </a:rPr>
-                        <a:t>—</a:t>
-                      </a:r>
-                    </a:p>
-                  </a:txBody>
-                  <a:tcPr>
-                    <a:solidFill>
-                      <a:srgbClr val="F0F0F0"/>
-                    </a:solidFill>
-                    <a:lnL w="12700" cap="flat" cmpd="sng">
-                      <a:solidFill>
-                        <a:srgbClr val="CCCCCC"/>
-                      </a:solidFill>
-                    </a:lnL>
-                    <a:lnR w="12700" cap="flat" cmpd="sng">
-                      <a:solidFill>
-                        <a:srgbClr val="CCCCCC"/>
-                      </a:solidFill>
-                    </a:lnR>
-                    <a:lnT w="12700" cap="flat" cmpd="sng">
-                      <a:solidFill>
-                        <a:srgbClr val="CCCCCC"/>
-                      </a:solidFill>
-                    </a:lnT>
-                    <a:lnB w="12700" cap="flat" cmpd="sng">
-                      <a:solidFill>
-                        <a:srgbClr val="CCCCCC"/>
-                      </a:solidFill>
-                    </a:lnB>
-                  </a:tcPr>
-                </a:tc>
-                <a:tc>
-                  <a:txBody>
-                    <a:bodyPr wrap="square"/>
-                    <a:lstStyle/>
-                    <a:p>
-                      <a:pPr algn="ctr"/>
-                      <a:r>
-                        <a:rPr sz="1400" b="0">
-                          <a:solidFill>
-                            <a:srgbClr val="AAAAAA"/>
-                          </a:solidFill>
-                          <a:latin typeface="IPAGothic"/>
-                        </a:rPr>
-                        <a:t>—</a:t>
-                      </a:r>
-                    </a:p>
-                  </a:txBody>
-                  <a:tcPr>
-                    <a:solidFill>
-                      <a:srgbClr val="F0F0F0"/>
-                    </a:solidFill>
-                    <a:lnL w="12700" cap="flat" cmpd="sng">
-                      <a:solidFill>
-                        <a:srgbClr val="CCCCCC"/>
-                      </a:solidFill>
-                    </a:lnL>
-                    <a:lnR w="12700" cap="flat" cmpd="sng">
-                      <a:solidFill>
-                        <a:srgbClr val="CCCCCC"/>
-                      </a:solidFill>
-                    </a:lnR>
-                    <a:lnT w="12700" cap="flat" cmpd="sng">
-                      <a:solidFill>
-                        <a:srgbClr val="CCCCCC"/>
-                      </a:solidFill>
-                    </a:lnT>
-                    <a:lnB w="12700" cap="flat" cmpd="sng">
-                      <a:solidFill>
-                        <a:srgbClr val="CCCCCC"/>
-                      </a:solidFill>
-                    </a:lnB>
-                  </a:tcPr>
-                </a:tc>
-                <a:tc>
-                  <a:txBody>
-                    <a:bodyPr wrap="square"/>
-                    <a:lstStyle/>
-                    <a:p>
-                      <a:pPr algn="ctr"/>
-                      <a:r>
-                        <a:rPr sz="1500" b="0">
-                          <a:solidFill>
                             <a:srgbClr val="1F3564"/>
                           </a:solidFill>
                           <a:latin typeface="IPAGothic"/>
@@ -5599,26 +4981,6 @@
                     <a:solidFill>
                       <a:srgbClr val="FFFFFF"/>
                     </a:solidFill>
-                    <a:lnL w="12700" cap="flat" cmpd="sng">
-                      <a:solidFill>
-                        <a:srgbClr val="CCCCCC"/>
-                      </a:solidFill>
-                    </a:lnL>
-                    <a:lnR w="12700" cap="flat" cmpd="sng">
-                      <a:solidFill>
-                        <a:srgbClr val="CCCCCC"/>
-                      </a:solidFill>
-                    </a:lnR>
-                    <a:lnT w="12700" cap="flat" cmpd="sng">
-                      <a:solidFill>
-                        <a:srgbClr val="CCCCCC"/>
-                      </a:solidFill>
-                    </a:lnT>
-                    <a:lnB w="12700" cap="flat" cmpd="sng">
-                      <a:solidFill>
-                        <a:srgbClr val="CCCCCC"/>
-                      </a:solidFill>
-                    </a:lnB>
                   </a:tcPr>
                 </a:tc>
               </a:tr>
@@ -5630,7 +4992,7 @@
                     <a:p>
                       <a:pPr algn="ctr"/>
                       <a:r>
-                        <a:rPr sz="1500" b="1">
+                        <a:rPr sz="1400" b="1">
                           <a:solidFill>
                             <a:srgbClr val="1F3564"/>
                           </a:solidFill>
@@ -5644,26 +5006,144 @@
                     <a:solidFill>
                       <a:srgbClr val="ECF0F8"/>
                     </a:solidFill>
-                    <a:lnL w="12700" cap="flat" cmpd="sng">
-                      <a:solidFill>
-                        <a:srgbClr val="CCCCCC"/>
-                      </a:solidFill>
-                    </a:lnL>
-                    <a:lnR w="12700" cap="flat" cmpd="sng">
-                      <a:solidFill>
-                        <a:srgbClr val="CCCCCC"/>
-                      </a:solidFill>
-                    </a:lnR>
-                    <a:lnT w="12700" cap="flat" cmpd="sng">
-                      <a:solidFill>
-                        <a:srgbClr val="CCCCCC"/>
-                      </a:solidFill>
-                    </a:lnT>
-                    <a:lnB w="12700" cap="flat" cmpd="sng">
-                      <a:solidFill>
-                        <a:srgbClr val="CCCCCC"/>
-                      </a:solidFill>
-                    </a:lnB>
+                  </a:tcPr>
+                </a:tc>
+                <a:tc>
+                  <a:txBody>
+                    <a:bodyPr wrap="square"/>
+                    <a:lstStyle/>
+                    <a:p>
+                      <a:pPr algn="ctr"/>
+                      <a:r>
+                        <a:rPr sz="1300" b="0">
+                          <a:solidFill>
+                            <a:srgbClr val="AAAAAA"/>
+                          </a:solidFill>
+                          <a:latin typeface="IPAGothic"/>
+                        </a:rPr>
+                        <a:t>—</a:t>
+                      </a:r>
+                    </a:p>
+                  </a:txBody>
+                  <a:tcPr>
+                    <a:solidFill>
+                      <a:srgbClr val="F0F0F0"/>
+                    </a:solidFill>
+                  </a:tcPr>
+                </a:tc>
+                <a:tc>
+                  <a:txBody>
+                    <a:bodyPr wrap="square"/>
+                    <a:lstStyle/>
+                    <a:p>
+                      <a:pPr algn="ctr"/>
+                      <a:r>
+                        <a:rPr sz="1300" b="0">
+                          <a:solidFill>
+                            <a:srgbClr val="AAAAAA"/>
+                          </a:solidFill>
+                          <a:latin typeface="IPAGothic"/>
+                        </a:rPr>
+                        <a:t>—</a:t>
+                      </a:r>
+                    </a:p>
+                  </a:txBody>
+                  <a:tcPr>
+                    <a:solidFill>
+                      <a:srgbClr val="F0F0F0"/>
+                    </a:solidFill>
+                  </a:tcPr>
+                </a:tc>
+                <a:tc>
+                  <a:txBody>
+                    <a:bodyPr wrap="square"/>
+                    <a:lstStyle/>
+                    <a:p>
+                      <a:pPr algn="ctr"/>
+                      <a:r>
+                        <a:rPr sz="1300" b="0">
+                          <a:solidFill>
+                            <a:srgbClr val="AAAAAA"/>
+                          </a:solidFill>
+                          <a:latin typeface="IPAGothic"/>
+                        </a:rPr>
+                        <a:t>—</a:t>
+                      </a:r>
+                    </a:p>
+                  </a:txBody>
+                  <a:tcPr>
+                    <a:solidFill>
+                      <a:srgbClr val="F0F0F0"/>
+                    </a:solidFill>
+                  </a:tcPr>
+                </a:tc>
+                <a:tc>
+                  <a:txBody>
+                    <a:bodyPr wrap="square"/>
+                    <a:lstStyle/>
+                    <a:p>
+                      <a:pPr algn="ctr"/>
+                      <a:r>
+                        <a:rPr sz="1300" b="0">
+                          <a:solidFill>
+                            <a:srgbClr val="AAAAAA"/>
+                          </a:solidFill>
+                          <a:latin typeface="IPAGothic"/>
+                        </a:rPr>
+                        <a:t>—</a:t>
+                      </a:r>
+                    </a:p>
+                  </a:txBody>
+                  <a:tcPr>
+                    <a:solidFill>
+                      <a:srgbClr val="F0F0F0"/>
+                    </a:solidFill>
+                  </a:tcPr>
+                </a:tc>
+                <a:tc>
+                  <a:txBody>
+                    <a:bodyPr wrap="square"/>
+                    <a:lstStyle/>
+                    <a:p>
+                      <a:pPr algn="ctr"/>
+                      <a:r>
+                        <a:rPr sz="1300" b="0">
+                          <a:solidFill>
+                            <a:srgbClr val="AAAAAA"/>
+                          </a:solidFill>
+                          <a:latin typeface="IPAGothic"/>
+                        </a:rPr>
+                        <a:t>—</a:t>
+                      </a:r>
+                    </a:p>
+                  </a:txBody>
+                  <a:tcPr>
+                    <a:solidFill>
+                      <a:srgbClr val="F0F0F0"/>
+                    </a:solidFill>
+                  </a:tcPr>
+                </a:tc>
+                <a:tc>
+                  <a:txBody>
+                    <a:bodyPr wrap="square"/>
+                    <a:lstStyle/>
+                    <a:p>
+                      <a:pPr algn="ctr"/>
+                      <a:r>
+                        <a:rPr sz="1300" b="0">
+                          <a:solidFill>
+                            <a:srgbClr val="AAAAAA"/>
+                          </a:solidFill>
+                          <a:latin typeface="IPAGothic"/>
+                        </a:rPr>
+                        <a:t>—</a:t>
+                      </a:r>
+                    </a:p>
+                  </a:txBody>
+                  <a:tcPr>
+                    <a:solidFill>
+                      <a:srgbClr val="F0F0F0"/>
+                    </a:solidFill>
                   </a:tcPr>
                 </a:tc>
                 <a:tc>
@@ -5675,264 +5155,6 @@
                       <a:r>
                         <a:rPr sz="1400" b="0">
                           <a:solidFill>
-                            <a:srgbClr val="AAAAAA"/>
-                          </a:solidFill>
-                          <a:latin typeface="IPAGothic"/>
-                        </a:rPr>
-                        <a:t>—</a:t>
-                      </a:r>
-                    </a:p>
-                  </a:txBody>
-                  <a:tcPr>
-                    <a:solidFill>
-                      <a:srgbClr val="F0F0F0"/>
-                    </a:solidFill>
-                    <a:lnL w="12700" cap="flat" cmpd="sng">
-                      <a:solidFill>
-                        <a:srgbClr val="CCCCCC"/>
-                      </a:solidFill>
-                    </a:lnL>
-                    <a:lnR w="12700" cap="flat" cmpd="sng">
-                      <a:solidFill>
-                        <a:srgbClr val="CCCCCC"/>
-                      </a:solidFill>
-                    </a:lnR>
-                    <a:lnT w="12700" cap="flat" cmpd="sng">
-                      <a:solidFill>
-                        <a:srgbClr val="CCCCCC"/>
-                      </a:solidFill>
-                    </a:lnT>
-                    <a:lnB w="12700" cap="flat" cmpd="sng">
-                      <a:solidFill>
-                        <a:srgbClr val="CCCCCC"/>
-                      </a:solidFill>
-                    </a:lnB>
-                  </a:tcPr>
-                </a:tc>
-                <a:tc>
-                  <a:txBody>
-                    <a:bodyPr wrap="square"/>
-                    <a:lstStyle/>
-                    <a:p>
-                      <a:pPr algn="ctr"/>
-                      <a:r>
-                        <a:rPr sz="1400" b="0">
-                          <a:solidFill>
-                            <a:srgbClr val="AAAAAA"/>
-                          </a:solidFill>
-                          <a:latin typeface="IPAGothic"/>
-                        </a:rPr>
-                        <a:t>—</a:t>
-                      </a:r>
-                    </a:p>
-                  </a:txBody>
-                  <a:tcPr>
-                    <a:solidFill>
-                      <a:srgbClr val="F0F0F0"/>
-                    </a:solidFill>
-                    <a:lnL w="12700" cap="flat" cmpd="sng">
-                      <a:solidFill>
-                        <a:srgbClr val="CCCCCC"/>
-                      </a:solidFill>
-                    </a:lnL>
-                    <a:lnR w="12700" cap="flat" cmpd="sng">
-                      <a:solidFill>
-                        <a:srgbClr val="CCCCCC"/>
-                      </a:solidFill>
-                    </a:lnR>
-                    <a:lnT w="12700" cap="flat" cmpd="sng">
-                      <a:solidFill>
-                        <a:srgbClr val="CCCCCC"/>
-                      </a:solidFill>
-                    </a:lnT>
-                    <a:lnB w="12700" cap="flat" cmpd="sng">
-                      <a:solidFill>
-                        <a:srgbClr val="CCCCCC"/>
-                      </a:solidFill>
-                    </a:lnB>
-                  </a:tcPr>
-                </a:tc>
-                <a:tc>
-                  <a:txBody>
-                    <a:bodyPr wrap="square"/>
-                    <a:lstStyle/>
-                    <a:p>
-                      <a:pPr algn="ctr"/>
-                      <a:r>
-                        <a:rPr sz="1400" b="0">
-                          <a:solidFill>
-                            <a:srgbClr val="AAAAAA"/>
-                          </a:solidFill>
-                          <a:latin typeface="IPAGothic"/>
-                        </a:rPr>
-                        <a:t>—</a:t>
-                      </a:r>
-                    </a:p>
-                  </a:txBody>
-                  <a:tcPr>
-                    <a:solidFill>
-                      <a:srgbClr val="F0F0F0"/>
-                    </a:solidFill>
-                    <a:lnL w="12700" cap="flat" cmpd="sng">
-                      <a:solidFill>
-                        <a:srgbClr val="CCCCCC"/>
-                      </a:solidFill>
-                    </a:lnL>
-                    <a:lnR w="12700" cap="flat" cmpd="sng">
-                      <a:solidFill>
-                        <a:srgbClr val="CCCCCC"/>
-                      </a:solidFill>
-                    </a:lnR>
-                    <a:lnT w="12700" cap="flat" cmpd="sng">
-                      <a:solidFill>
-                        <a:srgbClr val="CCCCCC"/>
-                      </a:solidFill>
-                    </a:lnT>
-                    <a:lnB w="12700" cap="flat" cmpd="sng">
-                      <a:solidFill>
-                        <a:srgbClr val="CCCCCC"/>
-                      </a:solidFill>
-                    </a:lnB>
-                  </a:tcPr>
-                </a:tc>
-                <a:tc>
-                  <a:txBody>
-                    <a:bodyPr wrap="square"/>
-                    <a:lstStyle/>
-                    <a:p>
-                      <a:pPr algn="ctr"/>
-                      <a:r>
-                        <a:rPr sz="1400" b="0">
-                          <a:solidFill>
-                            <a:srgbClr val="AAAAAA"/>
-                          </a:solidFill>
-                          <a:latin typeface="IPAGothic"/>
-                        </a:rPr>
-                        <a:t>—</a:t>
-                      </a:r>
-                    </a:p>
-                  </a:txBody>
-                  <a:tcPr>
-                    <a:solidFill>
-                      <a:srgbClr val="F0F0F0"/>
-                    </a:solidFill>
-                    <a:lnL w="12700" cap="flat" cmpd="sng">
-                      <a:solidFill>
-                        <a:srgbClr val="CCCCCC"/>
-                      </a:solidFill>
-                    </a:lnL>
-                    <a:lnR w="12700" cap="flat" cmpd="sng">
-                      <a:solidFill>
-                        <a:srgbClr val="CCCCCC"/>
-                      </a:solidFill>
-                    </a:lnR>
-                    <a:lnT w="12700" cap="flat" cmpd="sng">
-                      <a:solidFill>
-                        <a:srgbClr val="CCCCCC"/>
-                      </a:solidFill>
-                    </a:lnT>
-                    <a:lnB w="12700" cap="flat" cmpd="sng">
-                      <a:solidFill>
-                        <a:srgbClr val="CCCCCC"/>
-                      </a:solidFill>
-                    </a:lnB>
-                  </a:tcPr>
-                </a:tc>
-                <a:tc>
-                  <a:txBody>
-                    <a:bodyPr wrap="square"/>
-                    <a:lstStyle/>
-                    <a:p>
-                      <a:pPr algn="ctr"/>
-                      <a:r>
-                        <a:rPr sz="1400" b="0">
-                          <a:solidFill>
-                            <a:srgbClr val="AAAAAA"/>
-                          </a:solidFill>
-                          <a:latin typeface="IPAGothic"/>
-                        </a:rPr>
-                        <a:t>—</a:t>
-                      </a:r>
-                    </a:p>
-                  </a:txBody>
-                  <a:tcPr>
-                    <a:solidFill>
-                      <a:srgbClr val="F0F0F0"/>
-                    </a:solidFill>
-                    <a:lnL w="12700" cap="flat" cmpd="sng">
-                      <a:solidFill>
-                        <a:srgbClr val="CCCCCC"/>
-                      </a:solidFill>
-                    </a:lnL>
-                    <a:lnR w="12700" cap="flat" cmpd="sng">
-                      <a:solidFill>
-                        <a:srgbClr val="CCCCCC"/>
-                      </a:solidFill>
-                    </a:lnR>
-                    <a:lnT w="12700" cap="flat" cmpd="sng">
-                      <a:solidFill>
-                        <a:srgbClr val="CCCCCC"/>
-                      </a:solidFill>
-                    </a:lnT>
-                    <a:lnB w="12700" cap="flat" cmpd="sng">
-                      <a:solidFill>
-                        <a:srgbClr val="CCCCCC"/>
-                      </a:solidFill>
-                    </a:lnB>
-                  </a:tcPr>
-                </a:tc>
-                <a:tc>
-                  <a:txBody>
-                    <a:bodyPr wrap="square"/>
-                    <a:lstStyle/>
-                    <a:p>
-                      <a:pPr algn="ctr"/>
-                      <a:r>
-                        <a:rPr sz="1400" b="0">
-                          <a:solidFill>
-                            <a:srgbClr val="AAAAAA"/>
-                          </a:solidFill>
-                          <a:latin typeface="IPAGothic"/>
-                        </a:rPr>
-                        <a:t>—</a:t>
-                      </a:r>
-                    </a:p>
-                  </a:txBody>
-                  <a:tcPr>
-                    <a:solidFill>
-                      <a:srgbClr val="F0F0F0"/>
-                    </a:solidFill>
-                    <a:lnL w="12700" cap="flat" cmpd="sng">
-                      <a:solidFill>
-                        <a:srgbClr val="CCCCCC"/>
-                      </a:solidFill>
-                    </a:lnL>
-                    <a:lnR w="12700" cap="flat" cmpd="sng">
-                      <a:solidFill>
-                        <a:srgbClr val="CCCCCC"/>
-                      </a:solidFill>
-                    </a:lnR>
-                    <a:lnT w="12700" cap="flat" cmpd="sng">
-                      <a:solidFill>
-                        <a:srgbClr val="CCCCCC"/>
-                      </a:solidFill>
-                    </a:lnT>
-                    <a:lnB w="12700" cap="flat" cmpd="sng">
-                      <a:solidFill>
-                        <a:srgbClr val="CCCCCC"/>
-                      </a:solidFill>
-                    </a:lnB>
-                  </a:tcPr>
-                </a:tc>
-                <a:tc>
-                  <a:txBody>
-                    <a:bodyPr wrap="square"/>
-                    <a:lstStyle/>
-                    <a:p>
-                      <a:pPr algn="ctr"/>
-                      <a:r>
-                        <a:rPr sz="1500" b="0">
-                          <a:solidFill>
                             <a:srgbClr val="1F3564"/>
                           </a:solidFill>
                           <a:latin typeface="IPAGothic"/>
@@ -5945,26 +5167,6 @@
                     <a:solidFill>
                       <a:srgbClr val="ECF0F8"/>
                     </a:solidFill>
-                    <a:lnL w="12700" cap="flat" cmpd="sng">
-                      <a:solidFill>
-                        <a:srgbClr val="CCCCCC"/>
-                      </a:solidFill>
-                    </a:lnL>
-                    <a:lnR w="12700" cap="flat" cmpd="sng">
-                      <a:solidFill>
-                        <a:srgbClr val="CCCCCC"/>
-                      </a:solidFill>
-                    </a:lnR>
-                    <a:lnT w="12700" cap="flat" cmpd="sng">
-                      <a:solidFill>
-                        <a:srgbClr val="CCCCCC"/>
-                      </a:solidFill>
-                    </a:lnT>
-                    <a:lnB w="12700" cap="flat" cmpd="sng">
-                      <a:solidFill>
-                        <a:srgbClr val="CCCCCC"/>
-                      </a:solidFill>
-                    </a:lnB>
                   </a:tcPr>
                 </a:tc>
               </a:tr>
@@ -6099,7 +5301,7 @@
                 </a:solidFill>
                 <a:latin typeface="IPAGothic"/>
               </a:rPr>
-              <a:t>※ 2026年1月〜7月集計。現在ほぼ全員が説明会兼WEB選考の選考中フェーズ。</a:t>
+              <a:t>※ 現在ほぼ全員が説明会兼WEB選考の選考中フェーズ（2026年1〜7月集計）</a:t>
             </a:r>
           </a:p>
         </p:txBody>
@@ -6258,8 +5460,8 @@
         </p:nvSpPr>
         <p:spPr>
           <a:xfrm>
-            <a:off x="7315920" y="1080000"/>
-            <a:ext cx="4633416" cy="5346000"/>
+            <a:off x="7315920" y="1152000"/>
+            <a:ext cx="4511484" cy="5346000"/>
           </a:xfrm>
           <a:prstGeom prst="rect">
             <a:avLst/>
@@ -6282,8 +5484,6 @@
               <a:t>【上位校内訳】</a:t>
             </a:r>
           </a:p>
-          <a:p/>
-          <a:p/>
           <a:p>
             <a:r>
               <a:rPr sz="1800" b="1">
@@ -6295,7 +5495,6 @@
               <a:t>関西学院大学　2名</a:t>
             </a:r>
           </a:p>
-          <a:p/>
           <a:p>
             <a:r>
               <a:rPr sz="1800" b="1">
@@ -6307,7 +5506,6 @@
               <a:t>明治大学　　　1名</a:t>
             </a:r>
           </a:p>
-          <a:p/>
           <a:p>
             <a:r>
               <a:rPr sz="1800" b="1">
@@ -6319,10 +5517,9 @@
               <a:t>同志社大学　　1名</a:t>
             </a:r>
           </a:p>
-          <a:p/>
-          <a:p>
-            <a:r>
-              <a:rPr sz="1000" b="0">
+          <a:p>
+            <a:r>
+              <a:rPr sz="800" b="0">
                 <a:solidFill>
                   <a:srgbClr val="1F3564"/>
                 </a:solidFill>
@@ -6331,7 +5528,6 @@
               <a:t/>
             </a:r>
           </a:p>
-          <a:p/>
           <a:p>
             <a:r>
               <a:rPr sz="1500" b="1">
@@ -6343,7 +5539,6 @@
               <a:t>【ポイント】</a:t>
             </a:r>
           </a:p>
-          <a:p/>
           <a:p>
             <a:r>
               <a:rPr sz="1400" b="0">
@@ -6352,24 +5547,9 @@
                 </a:solidFill>
                 <a:latin typeface="IPAGothic"/>
               </a:rPr>
-              <a:t>・上位校比率：21%
- (4名/19名)</a:t>
-            </a:r>
-          </a:p>
-          <a:p/>
-          <a:p>
-            <a:r>
-              <a:rPr sz="1400" b="0">
-                <a:solidFill>
-                  <a:srgbClr val="1F3564"/>
-                </a:solidFill>
-                <a:latin typeface="IPAGothic"/>
-              </a:rPr>
-              <a:t>・MARCH・関関同立から
-  計4名が応募</a:t>
-            </a:r>
-          </a:p>
-          <a:p/>
+              <a:t>・上位校比率：21%（4名/19名）</a:t>
+            </a:r>
+          </a:p>
           <a:p>
             <a:r>
               <a:rPr sz="1400" b="0">
@@ -6378,8 +5558,7 @@
                 </a:solidFill>
                 <a:latin typeface="IPAGothic"/>
               </a:rPr>
-              <a:t>・旧帝大・早慶は
-  応募なし</a:t>
+              <a:t>・旧帝大・早慶は応募なし</a:t>
             </a:r>
           </a:p>
         </p:txBody>
@@ -6498,8 +5677,8 @@
         </p:blipFill>
         <p:spPr>
           <a:xfrm>
-            <a:off x="1080000" y="1080000"/>
-            <a:ext cx="10033200" cy="5346000"/>
+            <a:off x="720000" y="1080000"/>
+            <a:ext cx="6706260" cy="5346000"/>
           </a:xfrm>
           <a:prstGeom prst="rect">
             <a:avLst/>
@@ -6514,8 +5693,8 @@
         </p:nvSpPr>
         <p:spPr>
           <a:xfrm>
-            <a:off x="7925580" y="1332000"/>
-            <a:ext cx="3901824" cy="2160000"/>
+            <a:off x="7315920" y="1332000"/>
+            <a:ext cx="4511484" cy="2880000"/>
           </a:xfrm>
           <a:prstGeom prst="rect">
             <a:avLst/>
@@ -6540,90 +5719,46 @@
           </a:p>
           <a:p>
             <a:r>
-              <a:rPr sz="1400" b="1">
+              <a:rPr sz="1500" b="1">
                 <a:solidFill>
                   <a:srgbClr val="1F3564"/>
                 </a:solidFill>
                 <a:latin typeface="IPAGothic"/>
               </a:rPr>
-              <a:t>・関西学院大学</a:t>
-            </a:r>
-          </a:p>
-          <a:p>
-            <a:r>
-              <a:rPr sz="1200" b="0">
-                <a:solidFill>
-                  <a:srgbClr val="AAAAAA"/>
-                </a:solidFill>
-                <a:latin typeface="IPAGothic"/>
-              </a:rPr>
-              <a:t>  経済学部</a:t>
-            </a:r>
-          </a:p>
-          <a:p>
-            <a:r>
-              <a:rPr sz="1400" b="1">
+              <a:t>関西学院大学（経済学部）</a:t>
+            </a:r>
+          </a:p>
+          <a:p>
+            <a:r>
+              <a:rPr sz="1500" b="1">
                 <a:solidFill>
                   <a:srgbClr val="1F3564"/>
                 </a:solidFill>
                 <a:latin typeface="IPAGothic"/>
               </a:rPr>
-              <a:t>・関西学院大学</a:t>
-            </a:r>
-          </a:p>
-          <a:p>
-            <a:r>
-              <a:rPr sz="1200" b="0">
-                <a:solidFill>
-                  <a:srgbClr val="AAAAAA"/>
-                </a:solidFill>
-                <a:latin typeface="IPAGothic"/>
-              </a:rPr>
-              <a:t>  文学部</a:t>
-            </a:r>
-          </a:p>
-          <a:p>
-            <a:r>
-              <a:rPr sz="1400" b="1">
+              <a:t>関西学院大学（文学部）</a:t>
+            </a:r>
+          </a:p>
+          <a:p>
+            <a:r>
+              <a:rPr sz="1500" b="1">
                 <a:solidFill>
                   <a:srgbClr val="1F3564"/>
                 </a:solidFill>
                 <a:latin typeface="IPAGothic"/>
               </a:rPr>
-              <a:t>・明治大学</a:t>
-            </a:r>
-          </a:p>
-          <a:p>
-            <a:r>
-              <a:rPr sz="1200" b="0">
-                <a:solidFill>
-                  <a:srgbClr val="AAAAAA"/>
-                </a:solidFill>
-                <a:latin typeface="IPAGothic"/>
-              </a:rPr>
-              <a:t>  商学部</a:t>
-            </a:r>
-          </a:p>
-          <a:p>
-            <a:r>
-              <a:rPr sz="1400" b="1">
+              <a:t>明治大学（商学部）</a:t>
+            </a:r>
+          </a:p>
+          <a:p>
+            <a:r>
+              <a:rPr sz="1500" b="1">
                 <a:solidFill>
                   <a:srgbClr val="1F3564"/>
                 </a:solidFill>
                 <a:latin typeface="IPAGothic"/>
               </a:rPr>
-              <a:t>・同志社大学</a:t>
-            </a:r>
-          </a:p>
-          <a:p>
-            <a:r>
-              <a:rPr sz="1200" b="0">
-                <a:solidFill>
-                  <a:srgbClr val="AAAAAA"/>
-                </a:solidFill>
-                <a:latin typeface="IPAGothic"/>
-              </a:rPr>
-              <a:t>  文化情報学部</a:t>
+              <a:t>同志社大学（文化情報学部）</a:t>
             </a:r>
           </a:p>
         </p:txBody>
@@ -6742,8 +5877,8 @@
         </p:blipFill>
         <p:spPr>
           <a:xfrm>
-            <a:off x="720000" y="972000"/>
-            <a:ext cx="5486940" cy="5526000"/>
+            <a:off x="360000" y="900000"/>
+            <a:ext cx="5365008" cy="5634000"/>
           </a:xfrm>
           <a:prstGeom prst="rect">
             <a:avLst/>
@@ -6759,8 +5894,8 @@
           <p:nvPr/>
         </p:nvGraphicFramePr>
         <p:xfrm>
-          <a:off x="6340464.0" y="972000"/>
-          <a:ext cx="5486940" cy="5526000"/>
+          <a:off x="5730804.0" y="972000"/>
+          <a:ext cx="6096600" cy="5634000"/>
         </p:xfrm>
         <a:graphic>
           <a:graphicData uri="http://schemas.openxmlformats.org/drawingml/2006/table">
@@ -6769,19 +5904,19 @@
                 <a:tableStyleId>{5C22544A-7EE6-4342-B048-85BDC9FD1C3A}</a:tableStyleId>
               </a:tblPr>
               <a:tblGrid>
-                <a:gridCol w="3017817"/>
-                <a:gridCol w="823041"/>
-                <a:gridCol w="1646082"/>
+                <a:gridCol w="3353130"/>
+                <a:gridCol w="914490"/>
+                <a:gridCol w="1828980"/>
               </a:tblGrid>
-              <a:tr h="614000">
-                <a:tc>
-                  <a:txBody>
-                    <a:bodyPr wrap="square"/>
-                    <a:lstStyle/>
-                    <a:p>
-                      <a:pPr algn="ctr"/>
-                      <a:r>
-                        <a:rPr sz="1400" b="1">
+              <a:tr h="626000">
+                <a:tc>
+                  <a:txBody>
+                    <a:bodyPr wrap="square"/>
+                    <a:lstStyle/>
+                    <a:p>
+                      <a:pPr algn="ctr"/>
+                      <a:r>
+                        <a:rPr sz="1300" b="1">
                           <a:solidFill>
                             <a:srgbClr val="FFFFFF"/>
                           </a:solidFill>
@@ -6795,36 +5930,16 @@
                     <a:solidFill>
                       <a:srgbClr val="1F3564"/>
                     </a:solidFill>
-                    <a:lnL w="12700" cap="flat" cmpd="sng">
-                      <a:solidFill>
-                        <a:srgbClr val="CCCCCC"/>
-                      </a:solidFill>
-                    </a:lnL>
-                    <a:lnR w="12700" cap="flat" cmpd="sng">
-                      <a:solidFill>
-                        <a:srgbClr val="CCCCCC"/>
-                      </a:solidFill>
-                    </a:lnR>
-                    <a:lnT w="12700" cap="flat" cmpd="sng">
-                      <a:solidFill>
-                        <a:srgbClr val="CCCCCC"/>
-                      </a:solidFill>
-                    </a:lnT>
-                    <a:lnB w="12700" cap="flat" cmpd="sng">
-                      <a:solidFill>
-                        <a:srgbClr val="CCCCCC"/>
-                      </a:solidFill>
-                    </a:lnB>
-                  </a:tcPr>
-                </a:tc>
-                <a:tc>
-                  <a:txBody>
-                    <a:bodyPr wrap="square"/>
-                    <a:lstStyle/>
-                    <a:p>
-                      <a:pPr algn="ctr"/>
-                      <a:r>
-                        <a:rPr sz="1400" b="1">
+                  </a:tcPr>
+                </a:tc>
+                <a:tc>
+                  <a:txBody>
+                    <a:bodyPr wrap="square"/>
+                    <a:lstStyle/>
+                    <a:p>
+                      <a:pPr algn="ctr"/>
+                      <a:r>
+                        <a:rPr sz="1300" b="1">
                           <a:solidFill>
                             <a:srgbClr val="FFFFFF"/>
                           </a:solidFill>
@@ -6838,36 +5953,16 @@
                     <a:solidFill>
                       <a:srgbClr val="1F3564"/>
                     </a:solidFill>
-                    <a:lnL w="12700" cap="flat" cmpd="sng">
-                      <a:solidFill>
-                        <a:srgbClr val="CCCCCC"/>
-                      </a:solidFill>
-                    </a:lnL>
-                    <a:lnR w="12700" cap="flat" cmpd="sng">
-                      <a:solidFill>
-                        <a:srgbClr val="CCCCCC"/>
-                      </a:solidFill>
-                    </a:lnR>
-                    <a:lnT w="12700" cap="flat" cmpd="sng">
-                      <a:solidFill>
-                        <a:srgbClr val="CCCCCC"/>
-                      </a:solidFill>
-                    </a:lnT>
-                    <a:lnB w="12700" cap="flat" cmpd="sng">
-                      <a:solidFill>
-                        <a:srgbClr val="CCCCCC"/>
-                      </a:solidFill>
-                    </a:lnB>
-                  </a:tcPr>
-                </a:tc>
-                <a:tc>
-                  <a:txBody>
-                    <a:bodyPr wrap="square"/>
-                    <a:lstStyle/>
-                    <a:p>
-                      <a:pPr algn="ctr"/>
-                      <a:r>
-                        <a:rPr sz="1400" b="1">
+                  </a:tcPr>
+                </a:tc>
+                <a:tc>
+                  <a:txBody>
+                    <a:bodyPr wrap="square"/>
+                    <a:lstStyle/>
+                    <a:p>
+                      <a:pPr algn="ctr"/>
+                      <a:r>
+                        <a:rPr sz="1300" b="1">
                           <a:solidFill>
                             <a:srgbClr val="FFFFFF"/>
                           </a:solidFill>
@@ -6881,30 +5976,10 @@
                     <a:solidFill>
                       <a:srgbClr val="1F3564"/>
                     </a:solidFill>
-                    <a:lnL w="12700" cap="flat" cmpd="sng">
-                      <a:solidFill>
-                        <a:srgbClr val="CCCCCC"/>
-                      </a:solidFill>
-                    </a:lnL>
-                    <a:lnR w="12700" cap="flat" cmpd="sng">
-                      <a:solidFill>
-                        <a:srgbClr val="CCCCCC"/>
-                      </a:solidFill>
-                    </a:lnR>
-                    <a:lnT w="12700" cap="flat" cmpd="sng">
-                      <a:solidFill>
-                        <a:srgbClr val="CCCCCC"/>
-                      </a:solidFill>
-                    </a:lnT>
-                    <a:lnB w="12700" cap="flat" cmpd="sng">
-                      <a:solidFill>
-                        <a:srgbClr val="CCCCCC"/>
-                      </a:solidFill>
-                    </a:lnB>
                   </a:tcPr>
                 </a:tc>
               </a:tr>
-              <a:tr h="614000">
+              <a:tr h="626000">
                 <a:tc>
                   <a:txBody>
                     <a:bodyPr wrap="square"/>
@@ -6926,26 +6001,6 @@
                     <a:solidFill>
                       <a:srgbClr val="FFFFFF"/>
                     </a:solidFill>
-                    <a:lnL w="12700" cap="flat" cmpd="sng">
-                      <a:solidFill>
-                        <a:srgbClr val="CCCCCC"/>
-                      </a:solidFill>
-                    </a:lnL>
-                    <a:lnR w="12700" cap="flat" cmpd="sng">
-                      <a:solidFill>
-                        <a:srgbClr val="CCCCCC"/>
-                      </a:solidFill>
-                    </a:lnR>
-                    <a:lnT w="12700" cap="flat" cmpd="sng">
-                      <a:solidFill>
-                        <a:srgbClr val="CCCCCC"/>
-                      </a:solidFill>
-                    </a:lnT>
-                    <a:lnB w="12700" cap="flat" cmpd="sng">
-                      <a:solidFill>
-                        <a:srgbClr val="CCCCCC"/>
-                      </a:solidFill>
-                    </a:lnB>
                   </a:tcPr>
                 </a:tc>
                 <a:tc>
@@ -6969,26 +6024,6 @@
                     <a:solidFill>
                       <a:srgbClr val="FFFBEE"/>
                     </a:solidFill>
-                    <a:lnL w="12700" cap="flat" cmpd="sng">
-                      <a:solidFill>
-                        <a:srgbClr val="CCCCCC"/>
-                      </a:solidFill>
-                    </a:lnL>
-                    <a:lnR w="12700" cap="flat" cmpd="sng">
-                      <a:solidFill>
-                        <a:srgbClr val="CCCCCC"/>
-                      </a:solidFill>
-                    </a:lnR>
-                    <a:lnT w="12700" cap="flat" cmpd="sng">
-                      <a:solidFill>
-                        <a:srgbClr val="CCCCCC"/>
-                      </a:solidFill>
-                    </a:lnT>
-                    <a:lnB w="12700" cap="flat" cmpd="sng">
-                      <a:solidFill>
-                        <a:srgbClr val="CCCCCC"/>
-                      </a:solidFill>
-                    </a:lnB>
                   </a:tcPr>
                 </a:tc>
                 <a:tc>
@@ -7012,30 +6047,10 @@
                     <a:solidFill>
                       <a:srgbClr val="FFFFFF"/>
                     </a:solidFill>
-                    <a:lnL w="12700" cap="flat" cmpd="sng">
-                      <a:solidFill>
-                        <a:srgbClr val="CCCCCC"/>
-                      </a:solidFill>
-                    </a:lnL>
-                    <a:lnR w="12700" cap="flat" cmpd="sng">
-                      <a:solidFill>
-                        <a:srgbClr val="CCCCCC"/>
-                      </a:solidFill>
-                    </a:lnR>
-                    <a:lnT w="12700" cap="flat" cmpd="sng">
-                      <a:solidFill>
-                        <a:srgbClr val="CCCCCC"/>
-                      </a:solidFill>
-                    </a:lnT>
-                    <a:lnB w="12700" cap="flat" cmpd="sng">
-                      <a:solidFill>
-                        <a:srgbClr val="CCCCCC"/>
-                      </a:solidFill>
-                    </a:lnB>
                   </a:tcPr>
                 </a:tc>
               </a:tr>
-              <a:tr h="614000">
+              <a:tr h="626000">
                 <a:tc>
                   <a:txBody>
                     <a:bodyPr wrap="square"/>
@@ -7057,26 +6072,6 @@
                     <a:solidFill>
                       <a:srgbClr val="ECF0F8"/>
                     </a:solidFill>
-                    <a:lnL w="12700" cap="flat" cmpd="sng">
-                      <a:solidFill>
-                        <a:srgbClr val="CCCCCC"/>
-                      </a:solidFill>
-                    </a:lnL>
-                    <a:lnR w="12700" cap="flat" cmpd="sng">
-                      <a:solidFill>
-                        <a:srgbClr val="CCCCCC"/>
-                      </a:solidFill>
-                    </a:lnR>
-                    <a:lnT w="12700" cap="flat" cmpd="sng">
-                      <a:solidFill>
-                        <a:srgbClr val="CCCCCC"/>
-                      </a:solidFill>
-                    </a:lnT>
-                    <a:lnB w="12700" cap="flat" cmpd="sng">
-                      <a:solidFill>
-                        <a:srgbClr val="CCCCCC"/>
-                      </a:solidFill>
-                    </a:lnB>
                   </a:tcPr>
                 </a:tc>
                 <a:tc>
@@ -7100,26 +6095,6 @@
                     <a:solidFill>
                       <a:srgbClr val="FFFBEE"/>
                     </a:solidFill>
-                    <a:lnL w="12700" cap="flat" cmpd="sng">
-                      <a:solidFill>
-                        <a:srgbClr val="CCCCCC"/>
-                      </a:solidFill>
-                    </a:lnL>
-                    <a:lnR w="12700" cap="flat" cmpd="sng">
-                      <a:solidFill>
-                        <a:srgbClr val="CCCCCC"/>
-                      </a:solidFill>
-                    </a:lnR>
-                    <a:lnT w="12700" cap="flat" cmpd="sng">
-                      <a:solidFill>
-                        <a:srgbClr val="CCCCCC"/>
-                      </a:solidFill>
-                    </a:lnT>
-                    <a:lnB w="12700" cap="flat" cmpd="sng">
-                      <a:solidFill>
-                        <a:srgbClr val="CCCCCC"/>
-                      </a:solidFill>
-                    </a:lnB>
                   </a:tcPr>
                 </a:tc>
                 <a:tc>
@@ -7143,30 +6118,10 @@
                     <a:solidFill>
                       <a:srgbClr val="ECF0F8"/>
                     </a:solidFill>
-                    <a:lnL w="12700" cap="flat" cmpd="sng">
-                      <a:solidFill>
-                        <a:srgbClr val="CCCCCC"/>
-                      </a:solidFill>
-                    </a:lnL>
-                    <a:lnR w="12700" cap="flat" cmpd="sng">
-                      <a:solidFill>
-                        <a:srgbClr val="CCCCCC"/>
-                      </a:solidFill>
-                    </a:lnR>
-                    <a:lnT w="12700" cap="flat" cmpd="sng">
-                      <a:solidFill>
-                        <a:srgbClr val="CCCCCC"/>
-                      </a:solidFill>
-                    </a:lnT>
-                    <a:lnB w="12700" cap="flat" cmpd="sng">
-                      <a:solidFill>
-                        <a:srgbClr val="CCCCCC"/>
-                      </a:solidFill>
-                    </a:lnB>
                   </a:tcPr>
                 </a:tc>
               </a:tr>
-              <a:tr h="614000">
+              <a:tr h="626000">
                 <a:tc>
                   <a:txBody>
                     <a:bodyPr wrap="square"/>
@@ -7188,26 +6143,6 @@
                     <a:solidFill>
                       <a:srgbClr val="FFFFFF"/>
                     </a:solidFill>
-                    <a:lnL w="12700" cap="flat" cmpd="sng">
-                      <a:solidFill>
-                        <a:srgbClr val="CCCCCC"/>
-                      </a:solidFill>
-                    </a:lnL>
-                    <a:lnR w="12700" cap="flat" cmpd="sng">
-                      <a:solidFill>
-                        <a:srgbClr val="CCCCCC"/>
-                      </a:solidFill>
-                    </a:lnR>
-                    <a:lnT w="12700" cap="flat" cmpd="sng">
-                      <a:solidFill>
-                        <a:srgbClr val="CCCCCC"/>
-                      </a:solidFill>
-                    </a:lnT>
-                    <a:lnB w="12700" cap="flat" cmpd="sng">
-                      <a:solidFill>
-                        <a:srgbClr val="CCCCCC"/>
-                      </a:solidFill>
-                    </a:lnB>
                   </a:tcPr>
                 </a:tc>
                 <a:tc>
@@ -7231,26 +6166,6 @@
                     <a:solidFill>
                       <a:srgbClr val="FFFBEE"/>
                     </a:solidFill>
-                    <a:lnL w="12700" cap="flat" cmpd="sng">
-                      <a:solidFill>
-                        <a:srgbClr val="CCCCCC"/>
-                      </a:solidFill>
-                    </a:lnL>
-                    <a:lnR w="12700" cap="flat" cmpd="sng">
-                      <a:solidFill>
-                        <a:srgbClr val="CCCCCC"/>
-                      </a:solidFill>
-                    </a:lnR>
-                    <a:lnT w="12700" cap="flat" cmpd="sng">
-                      <a:solidFill>
-                        <a:srgbClr val="CCCCCC"/>
-                      </a:solidFill>
-                    </a:lnT>
-                    <a:lnB w="12700" cap="flat" cmpd="sng">
-                      <a:solidFill>
-                        <a:srgbClr val="CCCCCC"/>
-                      </a:solidFill>
-                    </a:lnB>
                   </a:tcPr>
                 </a:tc>
                 <a:tc>
@@ -7274,30 +6189,10 @@
                     <a:solidFill>
                       <a:srgbClr val="FFFFFF"/>
                     </a:solidFill>
-                    <a:lnL w="12700" cap="flat" cmpd="sng">
-                      <a:solidFill>
-                        <a:srgbClr val="CCCCCC"/>
-                      </a:solidFill>
-                    </a:lnL>
-                    <a:lnR w="12700" cap="flat" cmpd="sng">
-                      <a:solidFill>
-                        <a:srgbClr val="CCCCCC"/>
-                      </a:solidFill>
-                    </a:lnR>
-                    <a:lnT w="12700" cap="flat" cmpd="sng">
-                      <a:solidFill>
-                        <a:srgbClr val="CCCCCC"/>
-                      </a:solidFill>
-                    </a:lnT>
-                    <a:lnB w="12700" cap="flat" cmpd="sng">
-                      <a:solidFill>
-                        <a:srgbClr val="CCCCCC"/>
-                      </a:solidFill>
-                    </a:lnB>
                   </a:tcPr>
                 </a:tc>
               </a:tr>
-              <a:tr h="614000">
+              <a:tr h="626000">
                 <a:tc>
                   <a:txBody>
                     <a:bodyPr wrap="square"/>
@@ -7319,26 +6214,6 @@
                     <a:solidFill>
                       <a:srgbClr val="ECF0F8"/>
                     </a:solidFill>
-                    <a:lnL w="12700" cap="flat" cmpd="sng">
-                      <a:solidFill>
-                        <a:srgbClr val="CCCCCC"/>
-                      </a:solidFill>
-                    </a:lnL>
-                    <a:lnR w="12700" cap="flat" cmpd="sng">
-                      <a:solidFill>
-                        <a:srgbClr val="CCCCCC"/>
-                      </a:solidFill>
-                    </a:lnR>
-                    <a:lnT w="12700" cap="flat" cmpd="sng">
-                      <a:solidFill>
-                        <a:srgbClr val="CCCCCC"/>
-                      </a:solidFill>
-                    </a:lnT>
-                    <a:lnB w="12700" cap="flat" cmpd="sng">
-                      <a:solidFill>
-                        <a:srgbClr val="CCCCCC"/>
-                      </a:solidFill>
-                    </a:lnB>
                   </a:tcPr>
                 </a:tc>
                 <a:tc>
@@ -7362,26 +6237,6 @@
                     <a:solidFill>
                       <a:srgbClr val="ECF0F8"/>
                     </a:solidFill>
-                    <a:lnL w="12700" cap="flat" cmpd="sng">
-                      <a:solidFill>
-                        <a:srgbClr val="CCCCCC"/>
-                      </a:solidFill>
-                    </a:lnL>
-                    <a:lnR w="12700" cap="flat" cmpd="sng">
-                      <a:solidFill>
-                        <a:srgbClr val="CCCCCC"/>
-                      </a:solidFill>
-                    </a:lnR>
-                    <a:lnT w="12700" cap="flat" cmpd="sng">
-                      <a:solidFill>
-                        <a:srgbClr val="CCCCCC"/>
-                      </a:solidFill>
-                    </a:lnT>
-                    <a:lnB w="12700" cap="flat" cmpd="sng">
-                      <a:solidFill>
-                        <a:srgbClr val="CCCCCC"/>
-                      </a:solidFill>
-                    </a:lnB>
                   </a:tcPr>
                 </a:tc>
                 <a:tc>
@@ -7405,30 +6260,10 @@
                     <a:solidFill>
                       <a:srgbClr val="FFF0F0"/>
                     </a:solidFill>
-                    <a:lnL w="12700" cap="flat" cmpd="sng">
-                      <a:solidFill>
-                        <a:srgbClr val="CCCCCC"/>
-                      </a:solidFill>
-                    </a:lnL>
-                    <a:lnR w="12700" cap="flat" cmpd="sng">
-                      <a:solidFill>
-                        <a:srgbClr val="CCCCCC"/>
-                      </a:solidFill>
-                    </a:lnR>
-                    <a:lnT w="12700" cap="flat" cmpd="sng">
-                      <a:solidFill>
-                        <a:srgbClr val="CCCCCC"/>
-                      </a:solidFill>
-                    </a:lnT>
-                    <a:lnB w="12700" cap="flat" cmpd="sng">
-                      <a:solidFill>
-                        <a:srgbClr val="CCCCCC"/>
-                      </a:solidFill>
-                    </a:lnB>
                   </a:tcPr>
                 </a:tc>
               </a:tr>
-              <a:tr h="614000">
+              <a:tr h="626000">
                 <a:tc>
                   <a:txBody>
                     <a:bodyPr wrap="square"/>
@@ -7450,26 +6285,6 @@
                     <a:solidFill>
                       <a:srgbClr val="FFFFFF"/>
                     </a:solidFill>
-                    <a:lnL w="12700" cap="flat" cmpd="sng">
-                      <a:solidFill>
-                        <a:srgbClr val="CCCCCC"/>
-                      </a:solidFill>
-                    </a:lnL>
-                    <a:lnR w="12700" cap="flat" cmpd="sng">
-                      <a:solidFill>
-                        <a:srgbClr val="CCCCCC"/>
-                      </a:solidFill>
-                    </a:lnR>
-                    <a:lnT w="12700" cap="flat" cmpd="sng">
-                      <a:solidFill>
-                        <a:srgbClr val="CCCCCC"/>
-                      </a:solidFill>
-                    </a:lnT>
-                    <a:lnB w="12700" cap="flat" cmpd="sng">
-                      <a:solidFill>
-                        <a:srgbClr val="CCCCCC"/>
-                      </a:solidFill>
-                    </a:lnB>
                   </a:tcPr>
                 </a:tc>
                 <a:tc>
@@ -7493,26 +6308,6 @@
                     <a:solidFill>
                       <a:srgbClr val="FFFFFF"/>
                     </a:solidFill>
-                    <a:lnL w="12700" cap="flat" cmpd="sng">
-                      <a:solidFill>
-                        <a:srgbClr val="CCCCCC"/>
-                      </a:solidFill>
-                    </a:lnL>
-                    <a:lnR w="12700" cap="flat" cmpd="sng">
-                      <a:solidFill>
-                        <a:srgbClr val="CCCCCC"/>
-                      </a:solidFill>
-                    </a:lnR>
-                    <a:lnT w="12700" cap="flat" cmpd="sng">
-                      <a:solidFill>
-                        <a:srgbClr val="CCCCCC"/>
-                      </a:solidFill>
-                    </a:lnT>
-                    <a:lnB w="12700" cap="flat" cmpd="sng">
-                      <a:solidFill>
-                        <a:srgbClr val="CCCCCC"/>
-                      </a:solidFill>
-                    </a:lnB>
                   </a:tcPr>
                 </a:tc>
                 <a:tc>
@@ -7536,30 +6331,10 @@
                     <a:solidFill>
                       <a:srgbClr val="FFFFFF"/>
                     </a:solidFill>
-                    <a:lnL w="12700" cap="flat" cmpd="sng">
-                      <a:solidFill>
-                        <a:srgbClr val="CCCCCC"/>
-                      </a:solidFill>
-                    </a:lnL>
-                    <a:lnR w="12700" cap="flat" cmpd="sng">
-                      <a:solidFill>
-                        <a:srgbClr val="CCCCCC"/>
-                      </a:solidFill>
-                    </a:lnR>
-                    <a:lnT w="12700" cap="flat" cmpd="sng">
-                      <a:solidFill>
-                        <a:srgbClr val="CCCCCC"/>
-                      </a:solidFill>
-                    </a:lnT>
-                    <a:lnB w="12700" cap="flat" cmpd="sng">
-                      <a:solidFill>
-                        <a:srgbClr val="CCCCCC"/>
-                      </a:solidFill>
-                    </a:lnB>
                   </a:tcPr>
                 </a:tc>
               </a:tr>
-              <a:tr h="614000">
+              <a:tr h="626000">
                 <a:tc>
                   <a:txBody>
                     <a:bodyPr wrap="square"/>
@@ -7581,26 +6356,6 @@
                     <a:solidFill>
                       <a:srgbClr val="ECF0F8"/>
                     </a:solidFill>
-                    <a:lnL w="12700" cap="flat" cmpd="sng">
-                      <a:solidFill>
-                        <a:srgbClr val="CCCCCC"/>
-                      </a:solidFill>
-                    </a:lnL>
-                    <a:lnR w="12700" cap="flat" cmpd="sng">
-                      <a:solidFill>
-                        <a:srgbClr val="CCCCCC"/>
-                      </a:solidFill>
-                    </a:lnR>
-                    <a:lnT w="12700" cap="flat" cmpd="sng">
-                      <a:solidFill>
-                        <a:srgbClr val="CCCCCC"/>
-                      </a:solidFill>
-                    </a:lnT>
-                    <a:lnB w="12700" cap="flat" cmpd="sng">
-                      <a:solidFill>
-                        <a:srgbClr val="CCCCCC"/>
-                      </a:solidFill>
-                    </a:lnB>
                   </a:tcPr>
                 </a:tc>
                 <a:tc>
@@ -7624,26 +6379,6 @@
                     <a:solidFill>
                       <a:srgbClr val="ECF0F8"/>
                     </a:solidFill>
-                    <a:lnL w="12700" cap="flat" cmpd="sng">
-                      <a:solidFill>
-                        <a:srgbClr val="CCCCCC"/>
-                      </a:solidFill>
-                    </a:lnL>
-                    <a:lnR w="12700" cap="flat" cmpd="sng">
-                      <a:solidFill>
-                        <a:srgbClr val="CCCCCC"/>
-                      </a:solidFill>
-                    </a:lnR>
-                    <a:lnT w="12700" cap="flat" cmpd="sng">
-                      <a:solidFill>
-                        <a:srgbClr val="CCCCCC"/>
-                      </a:solidFill>
-                    </a:lnT>
-                    <a:lnB w="12700" cap="flat" cmpd="sng">
-                      <a:solidFill>
-                        <a:srgbClr val="CCCCCC"/>
-                      </a:solidFill>
-                    </a:lnB>
                   </a:tcPr>
                 </a:tc>
                 <a:tc>
@@ -7667,30 +6402,10 @@
                     <a:solidFill>
                       <a:srgbClr val="ECF0F8"/>
                     </a:solidFill>
-                    <a:lnL w="12700" cap="flat" cmpd="sng">
-                      <a:solidFill>
-                        <a:srgbClr val="CCCCCC"/>
-                      </a:solidFill>
-                    </a:lnL>
-                    <a:lnR w="12700" cap="flat" cmpd="sng">
-                      <a:solidFill>
-                        <a:srgbClr val="CCCCCC"/>
-                      </a:solidFill>
-                    </a:lnR>
-                    <a:lnT w="12700" cap="flat" cmpd="sng">
-                      <a:solidFill>
-                        <a:srgbClr val="CCCCCC"/>
-                      </a:solidFill>
-                    </a:lnT>
-                    <a:lnB w="12700" cap="flat" cmpd="sng">
-                      <a:solidFill>
-                        <a:srgbClr val="CCCCCC"/>
-                      </a:solidFill>
-                    </a:lnB>
                   </a:tcPr>
                 </a:tc>
               </a:tr>
-              <a:tr h="614000">
+              <a:tr h="626000">
                 <a:tc>
                   <a:txBody>
                     <a:bodyPr wrap="square"/>
@@ -7712,26 +6427,6 @@
                     <a:solidFill>
                       <a:srgbClr val="FFFFFF"/>
                     </a:solidFill>
-                    <a:lnL w="12700" cap="flat" cmpd="sng">
-                      <a:solidFill>
-                        <a:srgbClr val="CCCCCC"/>
-                      </a:solidFill>
-                    </a:lnL>
-                    <a:lnR w="12700" cap="flat" cmpd="sng">
-                      <a:solidFill>
-                        <a:srgbClr val="CCCCCC"/>
-                      </a:solidFill>
-                    </a:lnR>
-                    <a:lnT w="12700" cap="flat" cmpd="sng">
-                      <a:solidFill>
-                        <a:srgbClr val="CCCCCC"/>
-                      </a:solidFill>
-                    </a:lnT>
-                    <a:lnB w="12700" cap="flat" cmpd="sng">
-                      <a:solidFill>
-                        <a:srgbClr val="CCCCCC"/>
-                      </a:solidFill>
-                    </a:lnB>
                   </a:tcPr>
                 </a:tc>
                 <a:tc>
@@ -7755,26 +6450,6 @@
                     <a:solidFill>
                       <a:srgbClr val="FFFFFF"/>
                     </a:solidFill>
-                    <a:lnL w="12700" cap="flat" cmpd="sng">
-                      <a:solidFill>
-                        <a:srgbClr val="CCCCCC"/>
-                      </a:solidFill>
-                    </a:lnL>
-                    <a:lnR w="12700" cap="flat" cmpd="sng">
-                      <a:solidFill>
-                        <a:srgbClr val="CCCCCC"/>
-                      </a:solidFill>
-                    </a:lnR>
-                    <a:lnT w="12700" cap="flat" cmpd="sng">
-                      <a:solidFill>
-                        <a:srgbClr val="CCCCCC"/>
-                      </a:solidFill>
-                    </a:lnT>
-                    <a:lnB w="12700" cap="flat" cmpd="sng">
-                      <a:solidFill>
-                        <a:srgbClr val="CCCCCC"/>
-                      </a:solidFill>
-                    </a:lnB>
                   </a:tcPr>
                 </a:tc>
                 <a:tc>
@@ -7798,30 +6473,10 @@
                     <a:solidFill>
                       <a:srgbClr val="FFFFFF"/>
                     </a:solidFill>
-                    <a:lnL w="12700" cap="flat" cmpd="sng">
-                      <a:solidFill>
-                        <a:srgbClr val="CCCCCC"/>
-                      </a:solidFill>
-                    </a:lnL>
-                    <a:lnR w="12700" cap="flat" cmpd="sng">
-                      <a:solidFill>
-                        <a:srgbClr val="CCCCCC"/>
-                      </a:solidFill>
-                    </a:lnR>
-                    <a:lnT w="12700" cap="flat" cmpd="sng">
-                      <a:solidFill>
-                        <a:srgbClr val="CCCCCC"/>
-                      </a:solidFill>
-                    </a:lnT>
-                    <a:lnB w="12700" cap="flat" cmpd="sng">
-                      <a:solidFill>
-                        <a:srgbClr val="CCCCCC"/>
-                      </a:solidFill>
-                    </a:lnB>
                   </a:tcPr>
                 </a:tc>
               </a:tr>
-              <a:tr h="614000">
+              <a:tr h="626000">
                 <a:tc>
                   <a:txBody>
                     <a:bodyPr wrap="square"/>
@@ -7835,7 +6490,7 @@
                           </a:solidFill>
                           <a:latin typeface="IPAGothic"/>
                         </a:rPr>
-                        <a:t>その他</a:t>
+                        <a:t>その他（計10名）</a:t>
                       </a:r>
                     </a:p>
                   </a:txBody>
@@ -7843,26 +6498,6 @@
                     <a:solidFill>
                       <a:srgbClr val="ECF0F8"/>
                     </a:solidFill>
-                    <a:lnL w="12700" cap="flat" cmpd="sng">
-                      <a:solidFill>
-                        <a:srgbClr val="CCCCCC"/>
-                      </a:solidFill>
-                    </a:lnL>
-                    <a:lnR w="12700" cap="flat" cmpd="sng">
-                      <a:solidFill>
-                        <a:srgbClr val="CCCCCC"/>
-                      </a:solidFill>
-                    </a:lnR>
-                    <a:lnT w="12700" cap="flat" cmpd="sng">
-                      <a:solidFill>
-                        <a:srgbClr val="CCCCCC"/>
-                      </a:solidFill>
-                    </a:lnT>
-                    <a:lnB w="12700" cap="flat" cmpd="sng">
-                      <a:solidFill>
-                        <a:srgbClr val="CCCCCC"/>
-                      </a:solidFill>
-                    </a:lnB>
                   </a:tcPr>
                 </a:tc>
                 <a:tc>
@@ -7886,26 +6521,6 @@
                     <a:solidFill>
                       <a:srgbClr val="ECF0F8"/>
                     </a:solidFill>
-                    <a:lnL w="12700" cap="flat" cmpd="sng">
-                      <a:solidFill>
-                        <a:srgbClr val="CCCCCC"/>
-                      </a:solidFill>
-                    </a:lnL>
-                    <a:lnR w="12700" cap="flat" cmpd="sng">
-                      <a:solidFill>
-                        <a:srgbClr val="CCCCCC"/>
-                      </a:solidFill>
-                    </a:lnR>
-                    <a:lnT w="12700" cap="flat" cmpd="sng">
-                      <a:solidFill>
-                        <a:srgbClr val="CCCCCC"/>
-                      </a:solidFill>
-                    </a:lnT>
-                    <a:lnB w="12700" cap="flat" cmpd="sng">
-                      <a:solidFill>
-                        <a:srgbClr val="CCCCCC"/>
-                      </a:solidFill>
-                    </a:lnB>
                   </a:tcPr>
                 </a:tc>
                 <a:tc>
@@ -7921,7 +6536,7 @@
                           </a:solidFill>
                           <a:latin typeface="IPAGothic"/>
                         </a:rPr>
-                        <a:t>選考中（計10名）</a:t>
+                        <a:t>選考中</a:t>
                       </a:r>
                     </a:p>
                   </a:txBody>
@@ -7929,26 +6544,6 @@
                     <a:solidFill>
                       <a:srgbClr val="ECF0F8"/>
                     </a:solidFill>
-                    <a:lnL w="12700" cap="flat" cmpd="sng">
-                      <a:solidFill>
-                        <a:srgbClr val="CCCCCC"/>
-                      </a:solidFill>
-                    </a:lnL>
-                    <a:lnR w="12700" cap="flat" cmpd="sng">
-                      <a:solidFill>
-                        <a:srgbClr val="CCCCCC"/>
-                      </a:solidFill>
-                    </a:lnR>
-                    <a:lnT w="12700" cap="flat" cmpd="sng">
-                      <a:solidFill>
-                        <a:srgbClr val="CCCCCC"/>
-                      </a:solidFill>
-                    </a:lnT>
-                    <a:lnB w="12700" cap="flat" cmpd="sng">
-                      <a:solidFill>
-                        <a:srgbClr val="CCCCCC"/>
-                      </a:solidFill>
-                    </a:lnB>
                   </a:tcPr>
                 </a:tc>
               </a:tr>
@@ -8062,8 +6657,8 @@
         </p:nvSpPr>
         <p:spPr>
           <a:xfrm>
-            <a:off x="360000" y="1008000"/>
-            <a:ext cx="11473200" cy="360000"/>
+            <a:off x="360000" y="972000"/>
+            <a:ext cx="11473200" cy="324000"/>
           </a:xfrm>
           <a:prstGeom prst="rect">
             <a:avLst/>
@@ -8077,13 +6672,13 @@
           <a:lstStyle/>
           <a:p>
             <a:r>
-              <a:rPr sz="1600" b="1">
+              <a:rPr sz="1700" b="1">
                 <a:solidFill>
                   <a:srgbClr val="E85D5D"/>
                 </a:solidFill>
                 <a:latin typeface="IPAGothic"/>
               </a:rPr>
-              <a:t>※ 集計期間中の辞退者：1名（説明会実施前辞退）</a:t>
+              <a:t>辞退者：1名（説明会実施前辞退）</a:t>
             </a:r>
           </a:p>
         </p:txBody>
@@ -8097,8 +6692,8 @@
           <p:nvPr/>
         </p:nvGraphicFramePr>
         <p:xfrm>
-          <a:off x="180000" y="1440000"/>
-          <a:ext cx="12060000" cy="1260000"/>
+          <a:off x="180000" y="1404000"/>
+          <a:ext cx="12013200" cy="1152000"/>
         </p:xfrm>
         <a:graphic>
           <a:graphicData uri="http://schemas.openxmlformats.org/drawingml/2006/table">
@@ -8107,20 +6702,20 @@
                 <a:tableStyleId>{5C22544A-7EE6-4342-B048-85BDC9FD1C3A}</a:tableStyleId>
               </a:tblPr>
               <a:tblGrid>
-                <a:gridCol w="1980000"/>
-                <a:gridCol w="1620000"/>
+                <a:gridCol w="1800000"/>
+                <a:gridCol w="1440000"/>
                 <a:gridCol w="2340000"/>
-                <a:gridCol w="6120000"/>
+                <a:gridCol w="6433200"/>
               </a:tblGrid>
-              <a:tr h="630000">
-                <a:tc>
-                  <a:txBody>
-                    <a:bodyPr wrap="square"/>
-                    <a:lstStyle/>
-                    <a:p>
-                      <a:pPr algn="ctr"/>
-                      <a:r>
-                        <a:rPr sz="1500" b="1">
+              <a:tr h="576000">
+                <a:tc>
+                  <a:txBody>
+                    <a:bodyPr wrap="square"/>
+                    <a:lstStyle/>
+                    <a:p>
+                      <a:pPr algn="ctr"/>
+                      <a:r>
+                        <a:rPr sz="1400" b="1">
                           <a:solidFill>
                             <a:srgbClr val="FFFFFF"/>
                           </a:solidFill>
@@ -8134,36 +6729,16 @@
                     <a:solidFill>
                       <a:srgbClr val="1F3564"/>
                     </a:solidFill>
-                    <a:lnL w="12700" cap="flat" cmpd="sng">
-                      <a:solidFill>
-                        <a:srgbClr val="CCCCCC"/>
-                      </a:solidFill>
-                    </a:lnL>
-                    <a:lnR w="12700" cap="flat" cmpd="sng">
-                      <a:solidFill>
-                        <a:srgbClr val="CCCCCC"/>
-                      </a:solidFill>
-                    </a:lnR>
-                    <a:lnT w="12700" cap="flat" cmpd="sng">
-                      <a:solidFill>
-                        <a:srgbClr val="CCCCCC"/>
-                      </a:solidFill>
-                    </a:lnT>
-                    <a:lnB w="12700" cap="flat" cmpd="sng">
-                      <a:solidFill>
-                        <a:srgbClr val="CCCCCC"/>
-                      </a:solidFill>
-                    </a:lnB>
-                  </a:tcPr>
-                </a:tc>
-                <a:tc>
-                  <a:txBody>
-                    <a:bodyPr wrap="square"/>
-                    <a:lstStyle/>
-                    <a:p>
-                      <a:pPr algn="ctr"/>
-                      <a:r>
-                        <a:rPr sz="1500" b="1">
+                  </a:tcPr>
+                </a:tc>
+                <a:tc>
+                  <a:txBody>
+                    <a:bodyPr wrap="square"/>
+                    <a:lstStyle/>
+                    <a:p>
+                      <a:pPr algn="ctr"/>
+                      <a:r>
+                        <a:rPr sz="1400" b="1">
                           <a:solidFill>
                             <a:srgbClr val="FFFFFF"/>
                           </a:solidFill>
@@ -8177,36 +6752,16 @@
                     <a:solidFill>
                       <a:srgbClr val="1F3564"/>
                     </a:solidFill>
-                    <a:lnL w="12700" cap="flat" cmpd="sng">
-                      <a:solidFill>
-                        <a:srgbClr val="CCCCCC"/>
-                      </a:solidFill>
-                    </a:lnL>
-                    <a:lnR w="12700" cap="flat" cmpd="sng">
-                      <a:solidFill>
-                        <a:srgbClr val="CCCCCC"/>
-                      </a:solidFill>
-                    </a:lnR>
-                    <a:lnT w="12700" cap="flat" cmpd="sng">
-                      <a:solidFill>
-                        <a:srgbClr val="CCCCCC"/>
-                      </a:solidFill>
-                    </a:lnT>
-                    <a:lnB w="12700" cap="flat" cmpd="sng">
-                      <a:solidFill>
-                        <a:srgbClr val="CCCCCC"/>
-                      </a:solidFill>
-                    </a:lnB>
-                  </a:tcPr>
-                </a:tc>
-                <a:tc>
-                  <a:txBody>
-                    <a:bodyPr wrap="square"/>
-                    <a:lstStyle/>
-                    <a:p>
-                      <a:pPr algn="ctr"/>
-                      <a:r>
-                        <a:rPr sz="1500" b="1">
+                  </a:tcPr>
+                </a:tc>
+                <a:tc>
+                  <a:txBody>
+                    <a:bodyPr wrap="square"/>
+                    <a:lstStyle/>
+                    <a:p>
+                      <a:pPr algn="ctr"/>
+                      <a:r>
+                        <a:rPr sz="1400" b="1">
                           <a:solidFill>
                             <a:srgbClr val="FFFFFF"/>
                           </a:solidFill>
@@ -8220,36 +6775,16 @@
                     <a:solidFill>
                       <a:srgbClr val="1F3564"/>
                     </a:solidFill>
-                    <a:lnL w="12700" cap="flat" cmpd="sng">
-                      <a:solidFill>
-                        <a:srgbClr val="CCCCCC"/>
-                      </a:solidFill>
-                    </a:lnL>
-                    <a:lnR w="12700" cap="flat" cmpd="sng">
-                      <a:solidFill>
-                        <a:srgbClr val="CCCCCC"/>
-                      </a:solidFill>
-                    </a:lnR>
-                    <a:lnT w="12700" cap="flat" cmpd="sng">
-                      <a:solidFill>
-                        <a:srgbClr val="CCCCCC"/>
-                      </a:solidFill>
-                    </a:lnT>
-                    <a:lnB w="12700" cap="flat" cmpd="sng">
-                      <a:solidFill>
-                        <a:srgbClr val="CCCCCC"/>
-                      </a:solidFill>
-                    </a:lnB>
-                  </a:tcPr>
-                </a:tc>
-                <a:tc>
-                  <a:txBody>
-                    <a:bodyPr wrap="square"/>
-                    <a:lstStyle/>
-                    <a:p>
-                      <a:pPr algn="ctr"/>
-                      <a:r>
-                        <a:rPr sz="1500" b="1">
+                  </a:tcPr>
+                </a:tc>
+                <a:tc>
+                  <a:txBody>
+                    <a:bodyPr wrap="square"/>
+                    <a:lstStyle/>
+                    <a:p>
+                      <a:pPr algn="ctr"/>
+                      <a:r>
+                        <a:rPr sz="1400" b="1">
                           <a:solidFill>
                             <a:srgbClr val="FFFFFF"/>
                           </a:solidFill>
@@ -8263,30 +6798,33 @@
                     <a:solidFill>
                       <a:srgbClr val="1F3564"/>
                     </a:solidFill>
-                    <a:lnL w="12700" cap="flat" cmpd="sng">
-                      <a:solidFill>
-                        <a:srgbClr val="CCCCCC"/>
-                      </a:solidFill>
-                    </a:lnL>
-                    <a:lnR w="12700" cap="flat" cmpd="sng">
-                      <a:solidFill>
-                        <a:srgbClr val="CCCCCC"/>
-                      </a:solidFill>
-                    </a:lnR>
-                    <a:lnT w="12700" cap="flat" cmpd="sng">
-                      <a:solidFill>
-                        <a:srgbClr val="CCCCCC"/>
-                      </a:solidFill>
-                    </a:lnT>
-                    <a:lnB w="12700" cap="flat" cmpd="sng">
-                      <a:solidFill>
-                        <a:srgbClr val="CCCCCC"/>
-                      </a:solidFill>
-                    </a:lnB>
                   </a:tcPr>
                 </a:tc>
               </a:tr>
-              <a:tr h="630000">
+              <a:tr h="576000">
+                <a:tc>
+                  <a:txBody>
+                    <a:bodyPr wrap="square"/>
+                    <a:lstStyle/>
+                    <a:p>
+                      <a:pPr algn="ctr"/>
+                      <a:r>
+                        <a:rPr sz="1300" b="0">
+                          <a:solidFill>
+                            <a:srgbClr val="1F3564"/>
+                          </a:solidFill>
+                          <a:latin typeface="IPAGothic"/>
+                        </a:rPr>
+                        <a:t>説明会兼WEB選考</a:t>
+                      </a:r>
+                    </a:p>
+                  </a:txBody>
+                  <a:tcPr>
+                    <a:solidFill>
+                      <a:srgbClr val="FFFFFF"/>
+                    </a:solidFill>
+                  </a:tcPr>
+                </a:tc>
                 <a:tc>
                   <a:txBody>
                     <a:bodyPr wrap="square"/>
@@ -8296,11 +6834,34 @@
                       <a:r>
                         <a:rPr sz="1400" b="0">
                           <a:solidFill>
+                            <a:srgbClr val="E85D5D"/>
+                          </a:solidFill>
+                          <a:latin typeface="IPAGothic"/>
+                        </a:rPr>
+                        <a:t>実施前辞退</a:t>
+                      </a:r>
+                    </a:p>
+                  </a:txBody>
+                  <a:tcPr>
+                    <a:solidFill>
+                      <a:srgbClr val="FFF0F0"/>
+                    </a:solidFill>
+                  </a:tcPr>
+                </a:tc>
+                <a:tc>
+                  <a:txBody>
+                    <a:bodyPr wrap="square"/>
+                    <a:lstStyle/>
+                    <a:p>
+                      <a:pPr algn="ctr"/>
+                      <a:r>
+                        <a:rPr sz="1300" b="0">
+                          <a:solidFill>
                             <a:srgbClr val="1F3564"/>
                           </a:solidFill>
                           <a:latin typeface="IPAGothic"/>
                         </a:rPr>
-                        <a:t>説明会兼WEB選考</a:t>
+                        <a:t>働き方・制度・カルチャー</a:t>
                       </a:r>
                     </a:p>
                   </a:txBody>
@@ -8308,85 +6869,22 @@
                     <a:solidFill>
                       <a:srgbClr val="FFFFFF"/>
                     </a:solidFill>
-                    <a:lnL w="12700" cap="flat" cmpd="sng">
-                      <a:solidFill>
-                        <a:srgbClr val="CCCCCC"/>
-                      </a:solidFill>
-                    </a:lnL>
-                    <a:lnR w="12700" cap="flat" cmpd="sng">
-                      <a:solidFill>
-                        <a:srgbClr val="CCCCCC"/>
-                      </a:solidFill>
-                    </a:lnR>
-                    <a:lnT w="12700" cap="flat" cmpd="sng">
-                      <a:solidFill>
-                        <a:srgbClr val="CCCCCC"/>
-                      </a:solidFill>
-                    </a:lnT>
-                    <a:lnB w="12700" cap="flat" cmpd="sng">
-                      <a:solidFill>
-                        <a:srgbClr val="CCCCCC"/>
-                      </a:solidFill>
-                    </a:lnB>
-                  </a:tcPr>
-                </a:tc>
-                <a:tc>
-                  <a:txBody>
-                    <a:bodyPr wrap="square"/>
-                    <a:lstStyle/>
-                    <a:p>
-                      <a:pPr algn="ctr"/>
-                      <a:r>
-                        <a:rPr sz="1400" b="0">
+                  </a:tcPr>
+                </a:tc>
+                <a:tc>
+                  <a:txBody>
+                    <a:bodyPr wrap="square"/>
+                    <a:lstStyle/>
+                    <a:p>
+                      <a:pPr algn="ctr"/>
+                      <a:r>
+                        <a:rPr sz="1300" b="0">
                           <a:solidFill>
                             <a:srgbClr val="1F3564"/>
                           </a:solidFill>
                           <a:latin typeface="IPAGothic"/>
                         </a:rPr>
-                        <a:t>実施前辞退</a:t>
-                      </a:r>
-                    </a:p>
-                  </a:txBody>
-                  <a:tcPr>
-                    <a:solidFill>
-                      <a:srgbClr val="FFF0F0"/>
-                    </a:solidFill>
-                    <a:lnL w="12700" cap="flat" cmpd="sng">
-                      <a:solidFill>
-                        <a:srgbClr val="CCCCCC"/>
-                      </a:solidFill>
-                    </a:lnL>
-                    <a:lnR w="12700" cap="flat" cmpd="sng">
-                      <a:solidFill>
-                        <a:srgbClr val="CCCCCC"/>
-                      </a:solidFill>
-                    </a:lnR>
-                    <a:lnT w="12700" cap="flat" cmpd="sng">
-                      <a:solidFill>
-                        <a:srgbClr val="CCCCCC"/>
-                      </a:solidFill>
-                    </a:lnT>
-                    <a:lnB w="12700" cap="flat" cmpd="sng">
-                      <a:solidFill>
-                        <a:srgbClr val="CCCCCC"/>
-                      </a:solidFill>
-                    </a:lnB>
-                  </a:tcPr>
-                </a:tc>
-                <a:tc>
-                  <a:txBody>
-                    <a:bodyPr wrap="square"/>
-                    <a:lstStyle/>
-                    <a:p>
-                      <a:pPr algn="ctr"/>
-                      <a:r>
-                        <a:rPr sz="1400" b="0">
-                          <a:solidFill>
-                            <a:srgbClr val="1F3564"/>
-                          </a:solidFill>
-                          <a:latin typeface="IPAGothic"/>
-                        </a:rPr>
-                        <a:t>働き方・制度・カルチャー</a:t>
+                        <a:t>会社説明会前：自身の軸と合わないと感じたため</a:t>
                       </a:r>
                     </a:p>
                   </a:txBody>
@@ -8394,69 +6892,6 @@
                     <a:solidFill>
                       <a:srgbClr val="FFFFFF"/>
                     </a:solidFill>
-                    <a:lnL w="12700" cap="flat" cmpd="sng">
-                      <a:solidFill>
-                        <a:srgbClr val="CCCCCC"/>
-                      </a:solidFill>
-                    </a:lnL>
-                    <a:lnR w="12700" cap="flat" cmpd="sng">
-                      <a:solidFill>
-                        <a:srgbClr val="CCCCCC"/>
-                      </a:solidFill>
-                    </a:lnR>
-                    <a:lnT w="12700" cap="flat" cmpd="sng">
-                      <a:solidFill>
-                        <a:srgbClr val="CCCCCC"/>
-                      </a:solidFill>
-                    </a:lnT>
-                    <a:lnB w="12700" cap="flat" cmpd="sng">
-                      <a:solidFill>
-                        <a:srgbClr val="CCCCCC"/>
-                      </a:solidFill>
-                    </a:lnB>
-                  </a:tcPr>
-                </a:tc>
-                <a:tc>
-                  <a:txBody>
-                    <a:bodyPr wrap="square"/>
-                    <a:lstStyle/>
-                    <a:p>
-                      <a:pPr algn="ctr"/>
-                      <a:r>
-                        <a:rPr sz="1400" b="0">
-                          <a:solidFill>
-                            <a:srgbClr val="1F3564"/>
-                          </a:solidFill>
-                          <a:latin typeface="IPAGothic"/>
-                        </a:rPr>
-                        <a:t>会社説明会前：自身の軸と合わないと感じたため</a:t>
-                      </a:r>
-                    </a:p>
-                  </a:txBody>
-                  <a:tcPr>
-                    <a:solidFill>
-                      <a:srgbClr val="FFFFFF"/>
-                    </a:solidFill>
-                    <a:lnL w="12700" cap="flat" cmpd="sng">
-                      <a:solidFill>
-                        <a:srgbClr val="CCCCCC"/>
-                      </a:solidFill>
-                    </a:lnL>
-                    <a:lnR w="12700" cap="flat" cmpd="sng">
-                      <a:solidFill>
-                        <a:srgbClr val="CCCCCC"/>
-                      </a:solidFill>
-                    </a:lnR>
-                    <a:lnT w="12700" cap="flat" cmpd="sng">
-                      <a:solidFill>
-                        <a:srgbClr val="CCCCCC"/>
-                      </a:solidFill>
-                    </a:lnT>
-                    <a:lnB w="12700" cap="flat" cmpd="sng">
-                      <a:solidFill>
-                        <a:srgbClr val="CCCCCC"/>
-                      </a:solidFill>
-                    </a:lnB>
                   </a:tcPr>
                 </a:tc>
               </a:tr>
@@ -8472,8 +6907,8 @@
         </p:nvSpPr>
         <p:spPr>
           <a:xfrm>
-            <a:off x="180000" y="2952000"/>
-            <a:ext cx="3776400" cy="3762000"/>
+            <a:off x="180000" y="2772000"/>
+            <a:ext cx="3776400" cy="3942000"/>
           </a:xfrm>
           <a:prstGeom prst="rect">
             <a:avLst/>
@@ -8517,8 +6952,8 @@
         </p:nvSpPr>
         <p:spPr>
           <a:xfrm>
-            <a:off x="252000" y="3024000"/>
-            <a:ext cx="3632401" cy="3618000"/>
+            <a:off x="288000" y="2880000"/>
+            <a:ext cx="3596400" cy="3762000"/>
           </a:xfrm>
           <a:prstGeom prst="rect">
             <a:avLst/>
@@ -8545,7 +6980,7 @@
           <a:p>
             <a:pPr algn="ctr"/>
             <a:r>
-              <a:rPr sz="1700" b="1">
+              <a:rPr sz="1800" b="1">
                 <a:solidFill>
                   <a:srgbClr val="E85D5D"/>
                 </a:solidFill>
@@ -8557,7 +6992,7 @@
           <a:p>
             <a:pPr algn="ctr"/>
             <a:r>
-              <a:rPr sz="1700" b="1">
+              <a:rPr sz="1800" b="1">
                 <a:solidFill>
                   <a:srgbClr val="AAAAAA"/>
                 </a:solidFill>
@@ -8567,7 +7002,6 @@
             </a:r>
           </a:p>
           <a:p>
-            <a:pPr algn="l"/>
             <a:r>
               <a:rPr sz="1200" b="0">
                 <a:solidFill>
@@ -8575,8 +7009,8 @@
                 </a:solidFill>
                 <a:latin typeface="IPAGothic"/>
               </a:rPr>
-              <a:t>選考前離脱。
-説明会後は辞退なし。</a:t>
+              <a:t>説明会前の離脱。
+参加後の辞退はなし。</a:t>
             </a:r>
           </a:p>
         </p:txBody>
@@ -8589,8 +7023,8 @@
         </p:nvSpPr>
         <p:spPr>
           <a:xfrm>
-            <a:off x="4064400" y="2952000"/>
-            <a:ext cx="3776400" cy="3762000"/>
+            <a:off x="4064400" y="2772000"/>
+            <a:ext cx="3776400" cy="3942000"/>
           </a:xfrm>
           <a:prstGeom prst="rect">
             <a:avLst/>
@@ -8634,8 +7068,8 @@
         </p:nvSpPr>
         <p:spPr>
           <a:xfrm>
-            <a:off x="4136400" y="3024000"/>
-            <a:ext cx="3632401" cy="3618000"/>
+            <a:off x="4172400" y="2880000"/>
+            <a:ext cx="3596400" cy="3762000"/>
           </a:xfrm>
           <a:prstGeom prst="rect">
             <a:avLst/>
@@ -8662,7 +7096,7 @@
           <a:p>
             <a:pPr algn="ctr"/>
             <a:r>
-              <a:rPr sz="1700" b="1">
+              <a:rPr sz="1800" b="1">
                 <a:solidFill>
                   <a:srgbClr val="AAAAAA"/>
                 </a:solidFill>
@@ -8674,7 +7108,7 @@
           <a:p>
             <a:pPr algn="ctr"/>
             <a:r>
-              <a:rPr sz="1700" b="1">
+              <a:rPr sz="1800" b="1">
                 <a:solidFill>
                   <a:srgbClr val="AAAAAA"/>
                 </a:solidFill>
@@ -8684,7 +7118,6 @@
             </a:r>
           </a:p>
           <a:p>
-            <a:pPr algn="l"/>
             <a:r>
               <a:rPr sz="1200" b="0">
                 <a:solidFill>
@@ -8705,8 +7138,8 @@
         </p:nvSpPr>
         <p:spPr>
           <a:xfrm>
-            <a:off x="7948800" y="2952000"/>
-            <a:ext cx="3776400" cy="3762000"/>
+            <a:off x="7948800" y="2772000"/>
+            <a:ext cx="3776400" cy="3942000"/>
           </a:xfrm>
           <a:prstGeom prst="rect">
             <a:avLst/>
@@ -8750,8 +7183,8 @@
         </p:nvSpPr>
         <p:spPr>
           <a:xfrm>
-            <a:off x="8020800" y="3024000"/>
-            <a:ext cx="3632401" cy="3618000"/>
+            <a:off x="8056800" y="2880000"/>
+            <a:ext cx="3596400" cy="3762000"/>
           </a:xfrm>
           <a:prstGeom prst="rect">
             <a:avLst/>
@@ -8778,7 +7211,7 @@
           <a:p>
             <a:pPr algn="ctr"/>
             <a:r>
-              <a:rPr sz="1700" b="1">
+              <a:rPr sz="1800" b="1">
                 <a:solidFill>
                   <a:srgbClr val="AAAAAA"/>
                 </a:solidFill>
@@ -8790,7 +7223,7 @@
           <a:p>
             <a:pPr algn="ctr"/>
             <a:r>
-              <a:rPr sz="1700" b="1">
+              <a:rPr sz="1800" b="1">
                 <a:solidFill>
                   <a:srgbClr val="AAAAAA"/>
                 </a:solidFill>
@@ -8800,7 +7233,6 @@
             </a:r>
           </a:p>
           <a:p>
-            <a:pPr algn="l"/>
             <a:r>
               <a:rPr sz="1200" b="0">
                 <a:solidFill>
@@ -8927,8 +7359,8 @@
         </p:blipFill>
         <p:spPr>
           <a:xfrm>
-            <a:off x="360000" y="972000"/>
-            <a:ext cx="6706260" cy="5526000"/>
+            <a:off x="180000" y="972000"/>
+            <a:ext cx="6584328" cy="5526000"/>
           </a:xfrm>
           <a:prstGeom prst="rect">
             <a:avLst/>
@@ -8944,8 +7376,8 @@
           <p:nvPr/>
         </p:nvGraphicFramePr>
         <p:xfrm>
-          <a:off x="6828192.000000001" y="1008000"/>
-          <a:ext cx="5121141" cy="5526000"/>
+          <a:off x="6706260.000000001" y="1008000"/>
+          <a:ext cx="5243073" cy="5526000"/>
         </p:xfrm>
         <a:graphic>
           <a:graphicData uri="http://schemas.openxmlformats.org/drawingml/2006/table">
@@ -8954,11 +7386,11 @@
                 <a:tableStyleId>{5C22544A-7EE6-4342-B048-85BDC9FD1C3A}</a:tableStyleId>
               </a:tblPr>
               <a:tblGrid>
-                <a:gridCol w="2048457"/>
-                <a:gridCol w="768171"/>
-                <a:gridCol w="768171"/>
-                <a:gridCol w="768171"/>
-                <a:gridCol w="768171"/>
+                <a:gridCol w="2202091"/>
+                <a:gridCol w="786461"/>
+                <a:gridCol w="786461"/>
+                <a:gridCol w="681599"/>
+                <a:gridCol w="786461"/>
               </a:tblGrid>
               <a:tr h="1105200">
                 <a:tc>
@@ -8982,26 +7414,6 @@
                     <a:solidFill>
                       <a:srgbClr val="1F3564"/>
                     </a:solidFill>
-                    <a:lnL w="12700" cap="flat" cmpd="sng">
-                      <a:solidFill>
-                        <a:srgbClr val="CCCCCC"/>
-                      </a:solidFill>
-                    </a:lnL>
-                    <a:lnR w="12700" cap="flat" cmpd="sng">
-                      <a:solidFill>
-                        <a:srgbClr val="CCCCCC"/>
-                      </a:solidFill>
-                    </a:lnR>
-                    <a:lnT w="12700" cap="flat" cmpd="sng">
-                      <a:solidFill>
-                        <a:srgbClr val="CCCCCC"/>
-                      </a:solidFill>
-                    </a:lnT>
-                    <a:lnB w="12700" cap="flat" cmpd="sng">
-                      <a:solidFill>
-                        <a:srgbClr val="CCCCCC"/>
-                      </a:solidFill>
-                    </a:lnB>
                   </a:tcPr>
                 </a:tc>
                 <a:tc>
@@ -9025,26 +7437,6 @@
                     <a:solidFill>
                       <a:srgbClr val="1F3564"/>
                     </a:solidFill>
-                    <a:lnL w="12700" cap="flat" cmpd="sng">
-                      <a:solidFill>
-                        <a:srgbClr val="CCCCCC"/>
-                      </a:solidFill>
-                    </a:lnL>
-                    <a:lnR w="12700" cap="flat" cmpd="sng">
-                      <a:solidFill>
-                        <a:srgbClr val="CCCCCC"/>
-                      </a:solidFill>
-                    </a:lnR>
-                    <a:lnT w="12700" cap="flat" cmpd="sng">
-                      <a:solidFill>
-                        <a:srgbClr val="CCCCCC"/>
-                      </a:solidFill>
-                    </a:lnT>
-                    <a:lnB w="12700" cap="flat" cmpd="sng">
-                      <a:solidFill>
-                        <a:srgbClr val="CCCCCC"/>
-                      </a:solidFill>
-                    </a:lnB>
                   </a:tcPr>
                 </a:tc>
                 <a:tc>
@@ -9068,26 +7460,6 @@
                     <a:solidFill>
                       <a:srgbClr val="1F3564"/>
                     </a:solidFill>
-                    <a:lnL w="12700" cap="flat" cmpd="sng">
-                      <a:solidFill>
-                        <a:srgbClr val="CCCCCC"/>
-                      </a:solidFill>
-                    </a:lnL>
-                    <a:lnR w="12700" cap="flat" cmpd="sng">
-                      <a:solidFill>
-                        <a:srgbClr val="CCCCCC"/>
-                      </a:solidFill>
-                    </a:lnR>
-                    <a:lnT w="12700" cap="flat" cmpd="sng">
-                      <a:solidFill>
-                        <a:srgbClr val="CCCCCC"/>
-                      </a:solidFill>
-                    </a:lnT>
-                    <a:lnB w="12700" cap="flat" cmpd="sng">
-                      <a:solidFill>
-                        <a:srgbClr val="CCCCCC"/>
-                      </a:solidFill>
-                    </a:lnB>
                   </a:tcPr>
                 </a:tc>
                 <a:tc>
@@ -9111,26 +7483,6 @@
                     <a:solidFill>
                       <a:srgbClr val="1F3564"/>
                     </a:solidFill>
-                    <a:lnL w="12700" cap="flat" cmpd="sng">
-                      <a:solidFill>
-                        <a:srgbClr val="CCCCCC"/>
-                      </a:solidFill>
-                    </a:lnL>
-                    <a:lnR w="12700" cap="flat" cmpd="sng">
-                      <a:solidFill>
-                        <a:srgbClr val="CCCCCC"/>
-                      </a:solidFill>
-                    </a:lnR>
-                    <a:lnT w="12700" cap="flat" cmpd="sng">
-                      <a:solidFill>
-                        <a:srgbClr val="CCCCCC"/>
-                      </a:solidFill>
-                    </a:lnT>
-                    <a:lnB w="12700" cap="flat" cmpd="sng">
-                      <a:solidFill>
-                        <a:srgbClr val="CCCCCC"/>
-                      </a:solidFill>
-                    </a:lnB>
                   </a:tcPr>
                 </a:tc>
                 <a:tc>
@@ -9154,26 +7506,6 @@
                     <a:solidFill>
                       <a:srgbClr val="1F3564"/>
                     </a:solidFill>
-                    <a:lnL w="12700" cap="flat" cmpd="sng">
-                      <a:solidFill>
-                        <a:srgbClr val="CCCCCC"/>
-                      </a:solidFill>
-                    </a:lnL>
-                    <a:lnR w="12700" cap="flat" cmpd="sng">
-                      <a:solidFill>
-                        <a:srgbClr val="CCCCCC"/>
-                      </a:solidFill>
-                    </a:lnR>
-                    <a:lnT w="12700" cap="flat" cmpd="sng">
-                      <a:solidFill>
-                        <a:srgbClr val="CCCCCC"/>
-                      </a:solidFill>
-                    </a:lnT>
-                    <a:lnB w="12700" cap="flat" cmpd="sng">
-                      <a:solidFill>
-                        <a:srgbClr val="CCCCCC"/>
-                      </a:solidFill>
-                    </a:lnB>
                   </a:tcPr>
                 </a:tc>
               </a:tr>
@@ -9185,7 +7517,7 @@
                     <a:p>
                       <a:pPr algn="ctr"/>
                       <a:r>
-                        <a:rPr sz="1500" b="0">
+                        <a:rPr sz="1400" b="0">
                           <a:solidFill>
                             <a:srgbClr val="1F3564"/>
                           </a:solidFill>
@@ -9199,36 +7531,16 @@
                     <a:solidFill>
                       <a:srgbClr val="FFFFFF"/>
                     </a:solidFill>
-                    <a:lnL w="12700" cap="flat" cmpd="sng">
-                      <a:solidFill>
-                        <a:srgbClr val="CCCCCC"/>
-                      </a:solidFill>
-                    </a:lnL>
-                    <a:lnR w="12700" cap="flat" cmpd="sng">
-                      <a:solidFill>
-                        <a:srgbClr val="CCCCCC"/>
-                      </a:solidFill>
-                    </a:lnR>
-                    <a:lnT w="12700" cap="flat" cmpd="sng">
-                      <a:solidFill>
-                        <a:srgbClr val="CCCCCC"/>
-                      </a:solidFill>
-                    </a:lnT>
-                    <a:lnB w="12700" cap="flat" cmpd="sng">
-                      <a:solidFill>
-                        <a:srgbClr val="CCCCCC"/>
-                      </a:solidFill>
-                    </a:lnB>
-                  </a:tcPr>
-                </a:tc>
-                <a:tc>
-                  <a:txBody>
-                    <a:bodyPr wrap="square"/>
-                    <a:lstStyle/>
-                    <a:p>
-                      <a:pPr algn="ctr"/>
-                      <a:r>
-                        <a:rPr sz="1500" b="0">
+                  </a:tcPr>
+                </a:tc>
+                <a:tc>
+                  <a:txBody>
+                    <a:bodyPr wrap="square"/>
+                    <a:lstStyle/>
+                    <a:p>
+                      <a:pPr algn="ctr"/>
+                      <a:r>
+                        <a:rPr sz="1400" b="0">
                           <a:solidFill>
                             <a:srgbClr val="1F3564"/>
                           </a:solidFill>
@@ -9242,36 +7554,16 @@
                     <a:solidFill>
                       <a:srgbClr val="FFFFFF"/>
                     </a:solidFill>
-                    <a:lnL w="12700" cap="flat" cmpd="sng">
-                      <a:solidFill>
-                        <a:srgbClr val="CCCCCC"/>
-                      </a:solidFill>
-                    </a:lnL>
-                    <a:lnR w="12700" cap="flat" cmpd="sng">
-                      <a:solidFill>
-                        <a:srgbClr val="CCCCCC"/>
-                      </a:solidFill>
-                    </a:lnR>
-                    <a:lnT w="12700" cap="flat" cmpd="sng">
-                      <a:solidFill>
-                        <a:srgbClr val="CCCCCC"/>
-                      </a:solidFill>
-                    </a:lnT>
-                    <a:lnB w="12700" cap="flat" cmpd="sng">
-                      <a:solidFill>
-                        <a:srgbClr val="CCCCCC"/>
-                      </a:solidFill>
-                    </a:lnB>
-                  </a:tcPr>
-                </a:tc>
-                <a:tc>
-                  <a:txBody>
-                    <a:bodyPr wrap="square"/>
-                    <a:lstStyle/>
-                    <a:p>
-                      <a:pPr algn="ctr"/>
-                      <a:r>
-                        <a:rPr sz="1500" b="0">
+                  </a:tcPr>
+                </a:tc>
+                <a:tc>
+                  <a:txBody>
+                    <a:bodyPr wrap="square"/>
+                    <a:lstStyle/>
+                    <a:p>
+                      <a:pPr algn="ctr"/>
+                      <a:r>
+                        <a:rPr sz="1400" b="0">
                           <a:solidFill>
                             <a:srgbClr val="1F3564"/>
                           </a:solidFill>
@@ -9285,36 +7577,16 @@
                     <a:solidFill>
                       <a:srgbClr val="FFFFFF"/>
                     </a:solidFill>
-                    <a:lnL w="12700" cap="flat" cmpd="sng">
-                      <a:solidFill>
-                        <a:srgbClr val="CCCCCC"/>
-                      </a:solidFill>
-                    </a:lnL>
-                    <a:lnR w="12700" cap="flat" cmpd="sng">
-                      <a:solidFill>
-                        <a:srgbClr val="CCCCCC"/>
-                      </a:solidFill>
-                    </a:lnR>
-                    <a:lnT w="12700" cap="flat" cmpd="sng">
-                      <a:solidFill>
-                        <a:srgbClr val="CCCCCC"/>
-                      </a:solidFill>
-                    </a:lnT>
-                    <a:lnB w="12700" cap="flat" cmpd="sng">
-                      <a:solidFill>
-                        <a:srgbClr val="CCCCCC"/>
-                      </a:solidFill>
-                    </a:lnB>
-                  </a:tcPr>
-                </a:tc>
-                <a:tc>
-                  <a:txBody>
-                    <a:bodyPr wrap="square"/>
-                    <a:lstStyle/>
-                    <a:p>
-                      <a:pPr algn="ctr"/>
-                      <a:r>
-                        <a:rPr sz="1600" b="1">
+                  </a:tcPr>
+                </a:tc>
+                <a:tc>
+                  <a:txBody>
+                    <a:bodyPr wrap="square"/>
+                    <a:lstStyle/>
+                    <a:p>
+                      <a:pPr algn="ctr"/>
+                      <a:r>
+                        <a:rPr sz="1500" b="1">
                           <a:solidFill>
                             <a:srgbClr val="E85D5D"/>
                           </a:solidFill>
@@ -9328,36 +7600,16 @@
                     <a:solidFill>
                       <a:srgbClr val="FFF0F0"/>
                     </a:solidFill>
-                    <a:lnL w="12700" cap="flat" cmpd="sng">
-                      <a:solidFill>
-                        <a:srgbClr val="CCCCCC"/>
-                      </a:solidFill>
-                    </a:lnL>
-                    <a:lnR w="12700" cap="flat" cmpd="sng">
-                      <a:solidFill>
-                        <a:srgbClr val="CCCCCC"/>
-                      </a:solidFill>
-                    </a:lnR>
-                    <a:lnT w="12700" cap="flat" cmpd="sng">
-                      <a:solidFill>
-                        <a:srgbClr val="CCCCCC"/>
-                      </a:solidFill>
-                    </a:lnT>
-                    <a:lnB w="12700" cap="flat" cmpd="sng">
-                      <a:solidFill>
-                        <a:srgbClr val="CCCCCC"/>
-                      </a:solidFill>
-                    </a:lnB>
-                  </a:tcPr>
-                </a:tc>
-                <a:tc>
-                  <a:txBody>
-                    <a:bodyPr wrap="square"/>
-                    <a:lstStyle/>
-                    <a:p>
-                      <a:pPr algn="ctr"/>
-                      <a:r>
-                        <a:rPr sz="1500" b="0">
+                  </a:tcPr>
+                </a:tc>
+                <a:tc>
+                  <a:txBody>
+                    <a:bodyPr wrap="square"/>
+                    <a:lstStyle/>
+                    <a:p>
+                      <a:pPr algn="ctr"/>
+                      <a:r>
+                        <a:rPr sz="1400" b="0">
                           <a:solidFill>
                             <a:srgbClr val="1F3564"/>
                           </a:solidFill>
@@ -9371,26 +7623,6 @@
                     <a:solidFill>
                       <a:srgbClr val="FFFFFF"/>
                     </a:solidFill>
-                    <a:lnL w="12700" cap="flat" cmpd="sng">
-                      <a:solidFill>
-                        <a:srgbClr val="CCCCCC"/>
-                      </a:solidFill>
-                    </a:lnL>
-                    <a:lnR w="12700" cap="flat" cmpd="sng">
-                      <a:solidFill>
-                        <a:srgbClr val="CCCCCC"/>
-                      </a:solidFill>
-                    </a:lnR>
-                    <a:lnT w="12700" cap="flat" cmpd="sng">
-                      <a:solidFill>
-                        <a:srgbClr val="CCCCCC"/>
-                      </a:solidFill>
-                    </a:lnT>
-                    <a:lnB w="12700" cap="flat" cmpd="sng">
-                      <a:solidFill>
-                        <a:srgbClr val="CCCCCC"/>
-                      </a:solidFill>
-                    </a:lnB>
                   </a:tcPr>
                 </a:tc>
               </a:tr>
@@ -9402,7 +7634,7 @@
                     <a:p>
                       <a:pPr algn="ctr"/>
                       <a:r>
-                        <a:rPr sz="1500" b="0">
+                        <a:rPr sz="1400" b="0">
                           <a:solidFill>
                             <a:srgbClr val="1F3564"/>
                           </a:solidFill>
@@ -9416,36 +7648,16 @@
                     <a:solidFill>
                       <a:srgbClr val="ECF0F8"/>
                     </a:solidFill>
-                    <a:lnL w="12700" cap="flat" cmpd="sng">
-                      <a:solidFill>
-                        <a:srgbClr val="CCCCCC"/>
-                      </a:solidFill>
-                    </a:lnL>
-                    <a:lnR w="12700" cap="flat" cmpd="sng">
-                      <a:solidFill>
-                        <a:srgbClr val="CCCCCC"/>
-                      </a:solidFill>
-                    </a:lnR>
-                    <a:lnT w="12700" cap="flat" cmpd="sng">
-                      <a:solidFill>
-                        <a:srgbClr val="CCCCCC"/>
-                      </a:solidFill>
-                    </a:lnT>
-                    <a:lnB w="12700" cap="flat" cmpd="sng">
-                      <a:solidFill>
-                        <a:srgbClr val="CCCCCC"/>
-                      </a:solidFill>
-                    </a:lnB>
-                  </a:tcPr>
-                </a:tc>
-                <a:tc>
-                  <a:txBody>
-                    <a:bodyPr wrap="square"/>
-                    <a:lstStyle/>
-                    <a:p>
-                      <a:pPr algn="ctr"/>
-                      <a:r>
-                        <a:rPr sz="1500" b="0">
+                  </a:tcPr>
+                </a:tc>
+                <a:tc>
+                  <a:txBody>
+                    <a:bodyPr wrap="square"/>
+                    <a:lstStyle/>
+                    <a:p>
+                      <a:pPr algn="ctr"/>
+                      <a:r>
+                        <a:rPr sz="1400" b="0">
                           <a:solidFill>
                             <a:srgbClr val="1F3564"/>
                           </a:solidFill>
@@ -9459,36 +7671,16 @@
                     <a:solidFill>
                       <a:srgbClr val="ECF0F8"/>
                     </a:solidFill>
-                    <a:lnL w="12700" cap="flat" cmpd="sng">
-                      <a:solidFill>
-                        <a:srgbClr val="CCCCCC"/>
-                      </a:solidFill>
-                    </a:lnL>
-                    <a:lnR w="12700" cap="flat" cmpd="sng">
-                      <a:solidFill>
-                        <a:srgbClr val="CCCCCC"/>
-                      </a:solidFill>
-                    </a:lnR>
-                    <a:lnT w="12700" cap="flat" cmpd="sng">
-                      <a:solidFill>
-                        <a:srgbClr val="CCCCCC"/>
-                      </a:solidFill>
-                    </a:lnT>
-                    <a:lnB w="12700" cap="flat" cmpd="sng">
-                      <a:solidFill>
-                        <a:srgbClr val="CCCCCC"/>
-                      </a:solidFill>
-                    </a:lnB>
-                  </a:tcPr>
-                </a:tc>
-                <a:tc>
-                  <a:txBody>
-                    <a:bodyPr wrap="square"/>
-                    <a:lstStyle/>
-                    <a:p>
-                      <a:pPr algn="ctr"/>
-                      <a:r>
-                        <a:rPr sz="1500" b="0">
+                  </a:tcPr>
+                </a:tc>
+                <a:tc>
+                  <a:txBody>
+                    <a:bodyPr wrap="square"/>
+                    <a:lstStyle/>
+                    <a:p>
+                      <a:pPr algn="ctr"/>
+                      <a:r>
+                        <a:rPr sz="1400" b="0">
                           <a:solidFill>
                             <a:srgbClr val="1F3564"/>
                           </a:solidFill>
@@ -9502,36 +7694,16 @@
                     <a:solidFill>
                       <a:srgbClr val="ECF0F8"/>
                     </a:solidFill>
-                    <a:lnL w="12700" cap="flat" cmpd="sng">
-                      <a:solidFill>
-                        <a:srgbClr val="CCCCCC"/>
-                      </a:solidFill>
-                    </a:lnL>
-                    <a:lnR w="12700" cap="flat" cmpd="sng">
-                      <a:solidFill>
-                        <a:srgbClr val="CCCCCC"/>
-                      </a:solidFill>
-                    </a:lnR>
-                    <a:lnT w="12700" cap="flat" cmpd="sng">
-                      <a:solidFill>
-                        <a:srgbClr val="CCCCCC"/>
-                      </a:solidFill>
-                    </a:lnT>
-                    <a:lnB w="12700" cap="flat" cmpd="sng">
-                      <a:solidFill>
-                        <a:srgbClr val="CCCCCC"/>
-                      </a:solidFill>
-                    </a:lnB>
-                  </a:tcPr>
-                </a:tc>
-                <a:tc>
-                  <a:txBody>
-                    <a:bodyPr wrap="square"/>
-                    <a:lstStyle/>
-                    <a:p>
-                      <a:pPr algn="ctr"/>
-                      <a:r>
-                        <a:rPr sz="1500" b="0">
+                  </a:tcPr>
+                </a:tc>
+                <a:tc>
+                  <a:txBody>
+                    <a:bodyPr wrap="square"/>
+                    <a:lstStyle/>
+                    <a:p>
+                      <a:pPr algn="ctr"/>
+                      <a:r>
+                        <a:rPr sz="1400" b="0">
                           <a:solidFill>
                             <a:srgbClr val="AAAAAA"/>
                           </a:solidFill>
@@ -9545,36 +7717,16 @@
                     <a:solidFill>
                       <a:srgbClr val="ECF0F8"/>
                     </a:solidFill>
-                    <a:lnL w="12700" cap="flat" cmpd="sng">
-                      <a:solidFill>
-                        <a:srgbClr val="CCCCCC"/>
-                      </a:solidFill>
-                    </a:lnL>
-                    <a:lnR w="12700" cap="flat" cmpd="sng">
-                      <a:solidFill>
-                        <a:srgbClr val="CCCCCC"/>
-                      </a:solidFill>
-                    </a:lnR>
-                    <a:lnT w="12700" cap="flat" cmpd="sng">
-                      <a:solidFill>
-                        <a:srgbClr val="CCCCCC"/>
-                      </a:solidFill>
-                    </a:lnT>
-                    <a:lnB w="12700" cap="flat" cmpd="sng">
-                      <a:solidFill>
-                        <a:srgbClr val="CCCCCC"/>
-                      </a:solidFill>
-                    </a:lnB>
-                  </a:tcPr>
-                </a:tc>
-                <a:tc>
-                  <a:txBody>
-                    <a:bodyPr wrap="square"/>
-                    <a:lstStyle/>
-                    <a:p>
-                      <a:pPr algn="ctr"/>
-                      <a:r>
-                        <a:rPr sz="1500" b="0">
+                  </a:tcPr>
+                </a:tc>
+                <a:tc>
+                  <a:txBody>
+                    <a:bodyPr wrap="square"/>
+                    <a:lstStyle/>
+                    <a:p>
+                      <a:pPr algn="ctr"/>
+                      <a:r>
+                        <a:rPr sz="1400" b="0">
                           <a:solidFill>
                             <a:srgbClr val="AAAAAA"/>
                           </a:solidFill>
@@ -9588,26 +7740,6 @@
                     <a:solidFill>
                       <a:srgbClr val="ECF0F8"/>
                     </a:solidFill>
-                    <a:lnL w="12700" cap="flat" cmpd="sng">
-                      <a:solidFill>
-                        <a:srgbClr val="CCCCCC"/>
-                      </a:solidFill>
-                    </a:lnL>
-                    <a:lnR w="12700" cap="flat" cmpd="sng">
-                      <a:solidFill>
-                        <a:srgbClr val="CCCCCC"/>
-                      </a:solidFill>
-                    </a:lnR>
-                    <a:lnT w="12700" cap="flat" cmpd="sng">
-                      <a:solidFill>
-                        <a:srgbClr val="CCCCCC"/>
-                      </a:solidFill>
-                    </a:lnT>
-                    <a:lnB w="12700" cap="flat" cmpd="sng">
-                      <a:solidFill>
-                        <a:srgbClr val="CCCCCC"/>
-                      </a:solidFill>
-                    </a:lnB>
                   </a:tcPr>
                 </a:tc>
               </a:tr>
@@ -9619,7 +7751,7 @@
                     <a:p>
                       <a:pPr algn="ctr"/>
                       <a:r>
-                        <a:rPr sz="1500" b="0">
+                        <a:rPr sz="1400" b="0">
                           <a:solidFill>
                             <a:srgbClr val="1F3564"/>
                           </a:solidFill>
@@ -9633,36 +7765,16 @@
                     <a:solidFill>
                       <a:srgbClr val="FFFFFF"/>
                     </a:solidFill>
-                    <a:lnL w="12700" cap="flat" cmpd="sng">
-                      <a:solidFill>
-                        <a:srgbClr val="CCCCCC"/>
-                      </a:solidFill>
-                    </a:lnL>
-                    <a:lnR w="12700" cap="flat" cmpd="sng">
-                      <a:solidFill>
-                        <a:srgbClr val="CCCCCC"/>
-                      </a:solidFill>
-                    </a:lnR>
-                    <a:lnT w="12700" cap="flat" cmpd="sng">
-                      <a:solidFill>
-                        <a:srgbClr val="CCCCCC"/>
-                      </a:solidFill>
-                    </a:lnT>
-                    <a:lnB w="12700" cap="flat" cmpd="sng">
-                      <a:solidFill>
-                        <a:srgbClr val="CCCCCC"/>
-                      </a:solidFill>
-                    </a:lnB>
-                  </a:tcPr>
-                </a:tc>
-                <a:tc>
-                  <a:txBody>
-                    <a:bodyPr wrap="square"/>
-                    <a:lstStyle/>
-                    <a:p>
-                      <a:pPr algn="ctr"/>
-                      <a:r>
-                        <a:rPr sz="1500" b="0">
+                  </a:tcPr>
+                </a:tc>
+                <a:tc>
+                  <a:txBody>
+                    <a:bodyPr wrap="square"/>
+                    <a:lstStyle/>
+                    <a:p>
+                      <a:pPr algn="ctr"/>
+                      <a:r>
+                        <a:rPr sz="1400" b="0">
                           <a:solidFill>
                             <a:srgbClr val="1F3564"/>
                           </a:solidFill>
@@ -9676,36 +7788,16 @@
                     <a:solidFill>
                       <a:srgbClr val="FFFFFF"/>
                     </a:solidFill>
-                    <a:lnL w="12700" cap="flat" cmpd="sng">
-                      <a:solidFill>
-                        <a:srgbClr val="CCCCCC"/>
-                      </a:solidFill>
-                    </a:lnL>
-                    <a:lnR w="12700" cap="flat" cmpd="sng">
-                      <a:solidFill>
-                        <a:srgbClr val="CCCCCC"/>
-                      </a:solidFill>
-                    </a:lnR>
-                    <a:lnT w="12700" cap="flat" cmpd="sng">
-                      <a:solidFill>
-                        <a:srgbClr val="CCCCCC"/>
-                      </a:solidFill>
-                    </a:lnT>
-                    <a:lnB w="12700" cap="flat" cmpd="sng">
-                      <a:solidFill>
-                        <a:srgbClr val="CCCCCC"/>
-                      </a:solidFill>
-                    </a:lnB>
-                  </a:tcPr>
-                </a:tc>
-                <a:tc>
-                  <a:txBody>
-                    <a:bodyPr wrap="square"/>
-                    <a:lstStyle/>
-                    <a:p>
-                      <a:pPr algn="ctr"/>
-                      <a:r>
-                        <a:rPr sz="1500" b="0">
+                  </a:tcPr>
+                </a:tc>
+                <a:tc>
+                  <a:txBody>
+                    <a:bodyPr wrap="square"/>
+                    <a:lstStyle/>
+                    <a:p>
+                      <a:pPr algn="ctr"/>
+                      <a:r>
+                        <a:rPr sz="1400" b="0">
                           <a:solidFill>
                             <a:srgbClr val="1F3564"/>
                           </a:solidFill>
@@ -9719,36 +7811,16 @@
                     <a:solidFill>
                       <a:srgbClr val="FFFFFF"/>
                     </a:solidFill>
-                    <a:lnL w="12700" cap="flat" cmpd="sng">
-                      <a:solidFill>
-                        <a:srgbClr val="CCCCCC"/>
-                      </a:solidFill>
-                    </a:lnL>
-                    <a:lnR w="12700" cap="flat" cmpd="sng">
-                      <a:solidFill>
-                        <a:srgbClr val="CCCCCC"/>
-                      </a:solidFill>
-                    </a:lnR>
-                    <a:lnT w="12700" cap="flat" cmpd="sng">
-                      <a:solidFill>
-                        <a:srgbClr val="CCCCCC"/>
-                      </a:solidFill>
-                    </a:lnT>
-                    <a:lnB w="12700" cap="flat" cmpd="sng">
-                      <a:solidFill>
-                        <a:srgbClr val="CCCCCC"/>
-                      </a:solidFill>
-                    </a:lnB>
-                  </a:tcPr>
-                </a:tc>
-                <a:tc>
-                  <a:txBody>
-                    <a:bodyPr wrap="square"/>
-                    <a:lstStyle/>
-                    <a:p>
-                      <a:pPr algn="ctr"/>
-                      <a:r>
-                        <a:rPr sz="1500" b="0">
+                  </a:tcPr>
+                </a:tc>
+                <a:tc>
+                  <a:txBody>
+                    <a:bodyPr wrap="square"/>
+                    <a:lstStyle/>
+                    <a:p>
+                      <a:pPr algn="ctr"/>
+                      <a:r>
+                        <a:rPr sz="1400" b="0">
                           <a:solidFill>
                             <a:srgbClr val="AAAAAA"/>
                           </a:solidFill>
@@ -9762,36 +7834,16 @@
                     <a:solidFill>
                       <a:srgbClr val="FFFFFF"/>
                     </a:solidFill>
-                    <a:lnL w="12700" cap="flat" cmpd="sng">
-                      <a:solidFill>
-                        <a:srgbClr val="CCCCCC"/>
-                      </a:solidFill>
-                    </a:lnL>
-                    <a:lnR w="12700" cap="flat" cmpd="sng">
-                      <a:solidFill>
-                        <a:srgbClr val="CCCCCC"/>
-                      </a:solidFill>
-                    </a:lnR>
-                    <a:lnT w="12700" cap="flat" cmpd="sng">
-                      <a:solidFill>
-                        <a:srgbClr val="CCCCCC"/>
-                      </a:solidFill>
-                    </a:lnT>
-                    <a:lnB w="12700" cap="flat" cmpd="sng">
-                      <a:solidFill>
-                        <a:srgbClr val="CCCCCC"/>
-                      </a:solidFill>
-                    </a:lnB>
-                  </a:tcPr>
-                </a:tc>
-                <a:tc>
-                  <a:txBody>
-                    <a:bodyPr wrap="square"/>
-                    <a:lstStyle/>
-                    <a:p>
-                      <a:pPr algn="ctr"/>
-                      <a:r>
-                        <a:rPr sz="1500" b="0">
+                  </a:tcPr>
+                </a:tc>
+                <a:tc>
+                  <a:txBody>
+                    <a:bodyPr wrap="square"/>
+                    <a:lstStyle/>
+                    <a:p>
+                      <a:pPr algn="ctr"/>
+                      <a:r>
+                        <a:rPr sz="1400" b="0">
                           <a:solidFill>
                             <a:srgbClr val="AAAAAA"/>
                           </a:solidFill>
@@ -9805,26 +7857,6 @@
                     <a:solidFill>
                       <a:srgbClr val="FFFFFF"/>
                     </a:solidFill>
-                    <a:lnL w="12700" cap="flat" cmpd="sng">
-                      <a:solidFill>
-                        <a:srgbClr val="CCCCCC"/>
-                      </a:solidFill>
-                    </a:lnL>
-                    <a:lnR w="12700" cap="flat" cmpd="sng">
-                      <a:solidFill>
-                        <a:srgbClr val="CCCCCC"/>
-                      </a:solidFill>
-                    </a:lnR>
-                    <a:lnT w="12700" cap="flat" cmpd="sng">
-                      <a:solidFill>
-                        <a:srgbClr val="CCCCCC"/>
-                      </a:solidFill>
-                    </a:lnT>
-                    <a:lnB w="12700" cap="flat" cmpd="sng">
-                      <a:solidFill>
-                        <a:srgbClr val="CCCCCC"/>
-                      </a:solidFill>
-                    </a:lnB>
                   </a:tcPr>
                 </a:tc>
               </a:tr>
@@ -9836,7 +7868,7 @@
                     <a:p>
                       <a:pPr algn="ctr"/>
                       <a:r>
-                        <a:rPr sz="1600" b="1">
+                        <a:rPr sz="1500" b="1">
                           <a:solidFill>
                             <a:srgbClr val="1F3564"/>
                           </a:solidFill>
@@ -9850,36 +7882,16 @@
                     <a:solidFill>
                       <a:srgbClr val="ECF0F8"/>
                     </a:solidFill>
-                    <a:lnL w="12700" cap="flat" cmpd="sng">
-                      <a:solidFill>
-                        <a:srgbClr val="CCCCCC"/>
-                      </a:solidFill>
-                    </a:lnL>
-                    <a:lnR w="12700" cap="flat" cmpd="sng">
-                      <a:solidFill>
-                        <a:srgbClr val="CCCCCC"/>
-                      </a:solidFill>
-                    </a:lnR>
-                    <a:lnT w="12700" cap="flat" cmpd="sng">
-                      <a:solidFill>
-                        <a:srgbClr val="CCCCCC"/>
-                      </a:solidFill>
-                    </a:lnT>
-                    <a:lnB w="12700" cap="flat" cmpd="sng">
-                      <a:solidFill>
-                        <a:srgbClr val="CCCCCC"/>
-                      </a:solidFill>
-                    </a:lnB>
-                  </a:tcPr>
-                </a:tc>
-                <a:tc>
-                  <a:txBody>
-                    <a:bodyPr wrap="square"/>
-                    <a:lstStyle/>
-                    <a:p>
-                      <a:pPr algn="ctr"/>
-                      <a:r>
-                        <a:rPr sz="1600" b="1">
+                  </a:tcPr>
+                </a:tc>
+                <a:tc>
+                  <a:txBody>
+                    <a:bodyPr wrap="square"/>
+                    <a:lstStyle/>
+                    <a:p>
+                      <a:pPr algn="ctr"/>
+                      <a:r>
+                        <a:rPr sz="1500" b="1">
                           <a:solidFill>
                             <a:srgbClr val="1F3564"/>
                           </a:solidFill>
@@ -9893,36 +7905,16 @@
                     <a:solidFill>
                       <a:srgbClr val="ECF0F8"/>
                     </a:solidFill>
-                    <a:lnL w="12700" cap="flat" cmpd="sng">
-                      <a:solidFill>
-                        <a:srgbClr val="CCCCCC"/>
-                      </a:solidFill>
-                    </a:lnL>
-                    <a:lnR w="12700" cap="flat" cmpd="sng">
-                      <a:solidFill>
-                        <a:srgbClr val="CCCCCC"/>
-                      </a:solidFill>
-                    </a:lnR>
-                    <a:lnT w="12700" cap="flat" cmpd="sng">
-                      <a:solidFill>
-                        <a:srgbClr val="CCCCCC"/>
-                      </a:solidFill>
-                    </a:lnT>
-                    <a:lnB w="12700" cap="flat" cmpd="sng">
-                      <a:solidFill>
-                        <a:srgbClr val="CCCCCC"/>
-                      </a:solidFill>
-                    </a:lnB>
-                  </a:tcPr>
-                </a:tc>
-                <a:tc>
-                  <a:txBody>
-                    <a:bodyPr wrap="square"/>
-                    <a:lstStyle/>
-                    <a:p>
-                      <a:pPr algn="ctr"/>
-                      <a:r>
-                        <a:rPr sz="1600" b="1">
+                  </a:tcPr>
+                </a:tc>
+                <a:tc>
+                  <a:txBody>
+                    <a:bodyPr wrap="square"/>
+                    <a:lstStyle/>
+                    <a:p>
+                      <a:pPr algn="ctr"/>
+                      <a:r>
+                        <a:rPr sz="1500" b="1">
                           <a:solidFill>
                             <a:srgbClr val="1F3564"/>
                           </a:solidFill>
@@ -9936,36 +7928,16 @@
                     <a:solidFill>
                       <a:srgbClr val="ECF0F8"/>
                     </a:solidFill>
-                    <a:lnL w="12700" cap="flat" cmpd="sng">
-                      <a:solidFill>
-                        <a:srgbClr val="CCCCCC"/>
-                      </a:solidFill>
-                    </a:lnL>
-                    <a:lnR w="12700" cap="flat" cmpd="sng">
-                      <a:solidFill>
-                        <a:srgbClr val="CCCCCC"/>
-                      </a:solidFill>
-                    </a:lnR>
-                    <a:lnT w="12700" cap="flat" cmpd="sng">
-                      <a:solidFill>
-                        <a:srgbClr val="CCCCCC"/>
-                      </a:solidFill>
-                    </a:lnT>
-                    <a:lnB w="12700" cap="flat" cmpd="sng">
-                      <a:solidFill>
-                        <a:srgbClr val="CCCCCC"/>
-                      </a:solidFill>
-                    </a:lnB>
-                  </a:tcPr>
-                </a:tc>
-                <a:tc>
-                  <a:txBody>
-                    <a:bodyPr wrap="square"/>
-                    <a:lstStyle/>
-                    <a:p>
-                      <a:pPr algn="ctr"/>
-                      <a:r>
-                        <a:rPr sz="1600" b="1">
+                  </a:tcPr>
+                </a:tc>
+                <a:tc>
+                  <a:txBody>
+                    <a:bodyPr wrap="square"/>
+                    <a:lstStyle/>
+                    <a:p>
+                      <a:pPr algn="ctr"/>
+                      <a:r>
+                        <a:rPr sz="1500" b="1">
                           <a:solidFill>
                             <a:srgbClr val="1F3564"/>
                           </a:solidFill>
@@ -9979,36 +7951,16 @@
                     <a:solidFill>
                       <a:srgbClr val="ECF0F8"/>
                     </a:solidFill>
-                    <a:lnL w="12700" cap="flat" cmpd="sng">
-                      <a:solidFill>
-                        <a:srgbClr val="CCCCCC"/>
-                      </a:solidFill>
-                    </a:lnL>
-                    <a:lnR w="12700" cap="flat" cmpd="sng">
-                      <a:solidFill>
-                        <a:srgbClr val="CCCCCC"/>
-                      </a:solidFill>
-                    </a:lnR>
-                    <a:lnT w="12700" cap="flat" cmpd="sng">
-                      <a:solidFill>
-                        <a:srgbClr val="CCCCCC"/>
-                      </a:solidFill>
-                    </a:lnT>
-                    <a:lnB w="12700" cap="flat" cmpd="sng">
-                      <a:solidFill>
-                        <a:srgbClr val="CCCCCC"/>
-                      </a:solidFill>
-                    </a:lnB>
-                  </a:tcPr>
-                </a:tc>
-                <a:tc>
-                  <a:txBody>
-                    <a:bodyPr wrap="square"/>
-                    <a:lstStyle/>
-                    <a:p>
-                      <a:pPr algn="ctr"/>
-                      <a:r>
-                        <a:rPr sz="1600" b="1">
+                  </a:tcPr>
+                </a:tc>
+                <a:tc>
+                  <a:txBody>
+                    <a:bodyPr wrap="square"/>
+                    <a:lstStyle/>
+                    <a:p>
+                      <a:pPr algn="ctr"/>
+                      <a:r>
+                        <a:rPr sz="1500" b="1">
                           <a:solidFill>
                             <a:srgbClr val="1F3564"/>
                           </a:solidFill>
@@ -10022,26 +7974,6 @@
                     <a:solidFill>
                       <a:srgbClr val="ECF0F8"/>
                     </a:solidFill>
-                    <a:lnL w="12700" cap="flat" cmpd="sng">
-                      <a:solidFill>
-                        <a:srgbClr val="CCCCCC"/>
-                      </a:solidFill>
-                    </a:lnL>
-                    <a:lnR w="12700" cap="flat" cmpd="sng">
-                      <a:solidFill>
-                        <a:srgbClr val="CCCCCC"/>
-                      </a:solidFill>
-                    </a:lnR>
-                    <a:lnT w="12700" cap="flat" cmpd="sng">
-                      <a:solidFill>
-                        <a:srgbClr val="CCCCCC"/>
-                      </a:solidFill>
-                    </a:lnT>
-                    <a:lnB w="12700" cap="flat" cmpd="sng">
-                      <a:solidFill>
-                        <a:srgbClr val="CCCCCC"/>
-                      </a:solidFill>
-                    </a:lnB>
                   </a:tcPr>
                 </a:tc>
               </a:tr>

--- a/上位校採用分析レポート_2026_v2.pptx
+++ b/上位校採用分析レポート_2026_v2.pptx
@@ -3146,8 +3146,8 @@
         </p:nvSpPr>
         <p:spPr>
           <a:xfrm>
-            <a:off x="0" y="4937760"/>
-            <a:ext cx="12193200" cy="1920240"/>
+            <a:off x="0" y="5006340"/>
+            <a:ext cx="12193200" cy="1851660"/>
           </a:xfrm>
           <a:prstGeom prst="rect">
             <a:avLst/>
@@ -3189,8 +3189,8 @@
         </p:nvSpPr>
         <p:spPr>
           <a:xfrm>
-            <a:off x="1080000" y="1260000"/>
-            <a:ext cx="10033200" cy="1080000"/>
+            <a:off x="720000" y="1260000"/>
+            <a:ext cx="10753200" cy="1080000"/>
           </a:xfrm>
           <a:prstGeom prst="rect">
             <a:avLst/>
@@ -3205,11 +3205,11 @@
           <a:p>
             <a:pPr algn="ctr"/>
             <a:r>
-              <a:rPr sz="3800" b="1">
+              <a:rPr sz="3600" b="1">
                 <a:solidFill>
                   <a:srgbClr val="FFFFFF"/>
                 </a:solidFill>
-                <a:latin typeface="IPAGothic"/>
+                <a:latin typeface="IPAゴシック"/>
               </a:rPr>
               <a:t>上位校 採用選考 進捗レポート</a:t>
             </a:r>
@@ -3224,8 +3224,8 @@
         </p:nvSpPr>
         <p:spPr>
           <a:xfrm>
-            <a:off x="1080000" y="2592000"/>
-            <a:ext cx="10033200" cy="540000"/>
+            <a:off x="720000" y="2520000"/>
+            <a:ext cx="10753200" cy="503999"/>
           </a:xfrm>
           <a:prstGeom prst="rect">
             <a:avLst/>
@@ -3240,13 +3240,13 @@
           <a:p>
             <a:pPr algn="ctr"/>
             <a:r>
-              <a:rPr sz="2000" b="0">
+              <a:rPr sz="1800" b="0">
                 <a:solidFill>
                   <a:srgbClr val="CCDDFF"/>
                 </a:solidFill>
-                <a:latin typeface="IPAGothic"/>
+                <a:latin typeface="IPAゴシック"/>
               </a:rPr>
-              <a:t>対象期間：2026年1月〜7月　／　GMARCH以上（上位校）</a:t>
+              <a:t>対象期間：2026年1月〜7月　GMARCH・関関同立以上</a:t>
             </a:r>
           </a:p>
         </p:txBody>
@@ -3259,8 +3259,8 @@
         </p:nvSpPr>
         <p:spPr>
           <a:xfrm>
-            <a:off x="1080000" y="3240000"/>
-            <a:ext cx="10033200" cy="432000"/>
+            <a:off x="720000" y="3060000"/>
+            <a:ext cx="10753200" cy="432000"/>
           </a:xfrm>
           <a:prstGeom prst="rect">
             <a:avLst/>
@@ -3275,11 +3275,11 @@
           <a:p>
             <a:pPr algn="ctr"/>
             <a:r>
-              <a:rPr sz="1800" b="0">
+              <a:rPr sz="1600" b="0">
                 <a:solidFill>
                   <a:srgbClr val="AACCFF"/>
                 </a:solidFill>
-                <a:latin typeface="IPAGothic"/>
+                <a:latin typeface="IPAゴシック"/>
               </a:rPr>
               <a:t>集計日：2026年7月2日</a:t>
             </a:r>
@@ -3294,8 +3294,8 @@
         </p:nvSpPr>
         <p:spPr>
           <a:xfrm>
-            <a:off x="360000" y="4140000"/>
-            <a:ext cx="2724300" cy="1980000"/>
+            <a:off x="360000" y="3780000"/>
+            <a:ext cx="2724300" cy="2088000"/>
           </a:xfrm>
           <a:prstGeom prst="rect">
             <a:avLst/>
@@ -3339,8 +3339,8 @@
         </p:nvSpPr>
         <p:spPr>
           <a:xfrm>
-            <a:off x="468000" y="4248000"/>
-            <a:ext cx="2580300" cy="1800000"/>
+            <a:off x="468000" y="3888000"/>
+            <a:ext cx="2580300" cy="1872000"/>
           </a:xfrm>
           <a:prstGeom prst="rect">
             <a:avLst/>
@@ -3355,11 +3355,11 @@
           <a:p>
             <a:pPr algn="ctr"/>
             <a:r>
-              <a:rPr sz="1500" b="0">
+              <a:rPr sz="1400" b="0">
                 <a:solidFill>
                   <a:srgbClr val="99BBFF"/>
                 </a:solidFill>
-                <a:latin typeface="IPAGothic"/>
+                <a:latin typeface="IPAゴシック"/>
               </a:rPr>
               <a:t>総応募者</a:t>
             </a:r>
@@ -3367,11 +3367,11 @@
           <a:p>
             <a:pPr algn="ctr"/>
             <a:r>
-              <a:rPr sz="3600" b="1">
+              <a:rPr sz="3400" b="1">
                 <a:solidFill>
                   <a:srgbClr val="FFFFFF"/>
                 </a:solidFill>
-                <a:latin typeface="IPAGothic"/>
+                <a:latin typeface="IPAゴシック"/>
               </a:rPr>
               <a:t>19名</a:t>
             </a:r>
@@ -3379,13 +3379,13 @@
           <a:p>
             <a:pPr algn="ctr"/>
             <a:r>
-              <a:rPr sz="1200" b="0">
+              <a:rPr sz="1100" b="0">
                 <a:solidFill>
                   <a:srgbClr val="AAAAAA"/>
                 </a:solidFill>
-                <a:latin typeface="IPAGothic"/>
+                <a:latin typeface="IPAゴシック"/>
               </a:rPr>
-              <a:t>全大学合計</a:t>
+              <a:t>全大学</a:t>
             </a:r>
           </a:p>
         </p:txBody>
@@ -3398,8 +3398,8 @@
         </p:nvSpPr>
         <p:spPr>
           <a:xfrm>
-            <a:off x="3228300" y="4140000"/>
-            <a:ext cx="2724300" cy="1980000"/>
+            <a:off x="3228300" y="3780000"/>
+            <a:ext cx="2724300" cy="2088000"/>
           </a:xfrm>
           <a:prstGeom prst="rect">
             <a:avLst/>
@@ -3409,7 +3409,7 @@
           </a:solidFill>
           <a:ln w="19050">
             <a:solidFill>
-              <a:srgbClr val="276CAE"/>
+              <a:srgbClr val="27AE60"/>
             </a:solidFill>
           </a:ln>
         </p:spPr>
@@ -3443,8 +3443,8 @@
         </p:nvSpPr>
         <p:spPr>
           <a:xfrm>
-            <a:off x="3336300" y="4248000"/>
-            <a:ext cx="2580300" cy="1800000"/>
+            <a:off x="3336300" y="3888000"/>
+            <a:ext cx="2580300" cy="1872000"/>
           </a:xfrm>
           <a:prstGeom prst="rect">
             <a:avLst/>
@@ -3459,23 +3459,23 @@
           <a:p>
             <a:pPr algn="ctr"/>
             <a:r>
-              <a:rPr sz="1500" b="0">
+              <a:rPr sz="1400" b="0">
                 <a:solidFill>
                   <a:srgbClr val="99BBFF"/>
                 </a:solidFill>
-                <a:latin typeface="IPAGothic"/>
+                <a:latin typeface="IPAゴシック"/>
               </a:rPr>
-              <a:t>上位校応募</a:t>
+              <a:t>上位校</a:t>
             </a:r>
           </a:p>
           <a:p>
             <a:pPr algn="ctr"/>
             <a:r>
-              <a:rPr sz="3600" b="1">
+              <a:rPr sz="3400" b="1">
                 <a:solidFill>
                   <a:srgbClr val="FFFFFF"/>
                 </a:solidFill>
-                <a:latin typeface="IPAGothic"/>
+                <a:latin typeface="IPAゴシック"/>
               </a:rPr>
               <a:t>4名</a:t>
             </a:r>
@@ -3483,11 +3483,11 @@
           <a:p>
             <a:pPr algn="ctr"/>
             <a:r>
-              <a:rPr sz="1200" b="0">
+              <a:rPr sz="1100" b="0">
                 <a:solidFill>
                   <a:srgbClr val="AAAAAA"/>
                 </a:solidFill>
-                <a:latin typeface="IPAGothic"/>
+                <a:latin typeface="IPAゴシック"/>
               </a:rPr>
               <a:t>GMARCH・関関同立</a:t>
             </a:r>
@@ -3502,8 +3502,8 @@
         </p:nvSpPr>
         <p:spPr>
           <a:xfrm>
-            <a:off x="6096600" y="4140000"/>
-            <a:ext cx="2724300" cy="1980000"/>
+            <a:off x="6096600" y="3780000"/>
+            <a:ext cx="2724300" cy="2088000"/>
           </a:xfrm>
           <a:prstGeom prst="rect">
             <a:avLst/>
@@ -3513,7 +3513,7 @@
           </a:solidFill>
           <a:ln w="19050">
             <a:solidFill>
-              <a:srgbClr val="276CAE"/>
+              <a:srgbClr val="F5A623"/>
             </a:solidFill>
           </a:ln>
         </p:spPr>
@@ -3547,8 +3547,8 @@
         </p:nvSpPr>
         <p:spPr>
           <a:xfrm>
-            <a:off x="6204600" y="4248000"/>
-            <a:ext cx="2580300" cy="1800000"/>
+            <a:off x="6204600" y="3888000"/>
+            <a:ext cx="2580300" cy="1872000"/>
           </a:xfrm>
           <a:prstGeom prst="rect">
             <a:avLst/>
@@ -3563,23 +3563,23 @@
           <a:p>
             <a:pPr algn="ctr"/>
             <a:r>
-              <a:rPr sz="1500" b="0">
+              <a:rPr sz="1400" b="0">
                 <a:solidFill>
                   <a:srgbClr val="99BBFF"/>
                 </a:solidFill>
-                <a:latin typeface="IPAGothic"/>
+                <a:latin typeface="IPAゴシック"/>
               </a:rPr>
-              <a:t>現在選考中</a:t>
+              <a:t>選考中</a:t>
             </a:r>
           </a:p>
           <a:p>
             <a:pPr algn="ctr"/>
             <a:r>
-              <a:rPr sz="3600" b="1">
+              <a:rPr sz="3400" b="1">
                 <a:solidFill>
                   <a:srgbClr val="FFFFFF"/>
                 </a:solidFill>
-                <a:latin typeface="IPAGothic"/>
+                <a:latin typeface="IPAゴシック"/>
               </a:rPr>
               <a:t>18名</a:t>
             </a:r>
@@ -3587,13 +3587,13 @@
           <a:p>
             <a:pPr algn="ctr"/>
             <a:r>
-              <a:rPr sz="1200" b="0">
+              <a:rPr sz="1100" b="0">
                 <a:solidFill>
                   <a:srgbClr val="AAAAAA"/>
                 </a:solidFill>
-                <a:latin typeface="IPAGothic"/>
+                <a:latin typeface="IPAゴシック"/>
               </a:rPr>
-              <a:t>説明会兼WEB選考</a:t>
+              <a:t>説明会WEB選考中</a:t>
             </a:r>
           </a:p>
         </p:txBody>
@@ -3606,8 +3606,8 @@
         </p:nvSpPr>
         <p:spPr>
           <a:xfrm>
-            <a:off x="8964900" y="4140000"/>
-            <a:ext cx="2724300" cy="1980000"/>
+            <a:off x="8964900" y="3780000"/>
+            <a:ext cx="2724300" cy="2088000"/>
           </a:xfrm>
           <a:prstGeom prst="rect">
             <a:avLst/>
@@ -3617,7 +3617,7 @@
           </a:solidFill>
           <a:ln w="19050">
             <a:solidFill>
-              <a:srgbClr val="276CAE"/>
+              <a:srgbClr val="E85D5D"/>
             </a:solidFill>
           </a:ln>
         </p:spPr>
@@ -3651,8 +3651,8 @@
         </p:nvSpPr>
         <p:spPr>
           <a:xfrm>
-            <a:off x="9072900" y="4248000"/>
-            <a:ext cx="2580300" cy="1800000"/>
+            <a:off x="9072900" y="3888000"/>
+            <a:ext cx="2580300" cy="1872000"/>
           </a:xfrm>
           <a:prstGeom prst="rect">
             <a:avLst/>
@@ -3667,11 +3667,11 @@
           <a:p>
             <a:pPr algn="ctr"/>
             <a:r>
-              <a:rPr sz="1500" b="0">
+              <a:rPr sz="1400" b="0">
                 <a:solidFill>
                   <a:srgbClr val="99BBFF"/>
                 </a:solidFill>
-                <a:latin typeface="IPAGothic"/>
+                <a:latin typeface="IPAゴシック"/>
               </a:rPr>
               <a:t>辞退</a:t>
             </a:r>
@@ -3679,11 +3679,11 @@
           <a:p>
             <a:pPr algn="ctr"/>
             <a:r>
-              <a:rPr sz="3600" b="1">
+              <a:rPr sz="3400" b="1">
                 <a:solidFill>
                   <a:srgbClr val="FFFFFF"/>
                 </a:solidFill>
-                <a:latin typeface="IPAGothic"/>
+                <a:latin typeface="IPAゴシック"/>
               </a:rPr>
               <a:t>1名</a:t>
             </a:r>
@@ -3691,13 +3691,13 @@
           <a:p>
             <a:pPr algn="ctr"/>
             <a:r>
-              <a:rPr sz="1200" b="0">
+              <a:rPr sz="1100" b="0">
                 <a:solidFill>
                   <a:srgbClr val="AAAAAA"/>
                 </a:solidFill>
-                <a:latin typeface="IPAGothic"/>
+                <a:latin typeface="IPAゴシック"/>
               </a:rPr>
-              <a:t>説明会前</a:t>
+              <a:t>説明会前辞退</a:t>
             </a:r>
           </a:p>
         </p:txBody>
@@ -3765,8 +3765,8 @@
       </p:sp>
       <p:sp>
         <p:nvSpPr>
-          <p:cNvPr id="3" name="TextBox 2"/>
-          <p:cNvSpPr txBox="1"/>
+          <p:cNvPr id="3" name="Rectangle 2"/>
+          <p:cNvSpPr/>
           <p:nvPr/>
         </p:nvSpPr>
         <p:spPr>
@@ -3780,6 +3780,47 @@
           <a:solidFill>
             <a:srgbClr val="1F3564"/>
           </a:solidFill>
+          <a:ln>
+            <a:noFill/>
+          </a:ln>
+        </p:spPr>
+        <p:style>
+          <a:lnRef idx="1">
+            <a:schemeClr val="accent1"/>
+          </a:lnRef>
+          <a:fillRef idx="3">
+            <a:schemeClr val="accent1"/>
+          </a:fillRef>
+          <a:effectRef idx="2">
+            <a:schemeClr val="accent1"/>
+          </a:effectRef>
+          <a:fontRef idx="minor">
+            <a:schemeClr val="lt1"/>
+          </a:fontRef>
+        </p:style>
+        <p:txBody>
+          <a:bodyPr rtlCol="0" anchor="ctr"/>
+          <a:lstStyle/>
+          <a:p>
+            <a:pPr algn="ctr"/>
+          </a:p>
+        </p:txBody>
+      </p:sp>
+      <p:sp>
+        <p:nvSpPr>
+          <p:cNvPr id="4" name="TextBox 3"/>
+          <p:cNvSpPr txBox="1"/>
+          <p:nvPr/>
+        </p:nvSpPr>
+        <p:spPr>
+          <a:xfrm>
+            <a:off x="180000" y="0"/>
+            <a:ext cx="11833200" cy="792000"/>
+          </a:xfrm>
+          <a:prstGeom prst="rect">
+            <a:avLst/>
+          </a:prstGeom>
+          <a:noFill/>
         </p:spPr>
         <p:txBody>
           <a:bodyPr wrap="none">
@@ -3789,11 +3830,11 @@
           <a:p>
             <a:pPr algn="ctr"/>
             <a:r>
-              <a:rPr sz="2800" b="1">
+              <a:rPr sz="2600" b="1">
                 <a:solidFill>
                   <a:srgbClr val="FFFFFF"/>
                 </a:solidFill>
-                <a:latin typeface="IPAGothic"/>
+                <a:latin typeface="IPAゴシック"/>
               </a:rPr>
               <a:t>サマリー：上位校　選考進捗（2026年1〜7月）</a:t>
             </a:r>
@@ -3802,14 +3843,14 @@
       </p:sp>
       <p:sp>
         <p:nvSpPr>
-          <p:cNvPr id="4" name="Rectangle 3"/>
+          <p:cNvPr id="5" name="Rectangle 4"/>
           <p:cNvSpPr/>
           <p:nvPr/>
         </p:nvSpPr>
         <p:spPr>
           <a:xfrm>
-            <a:off x="216000" y="972000"/>
-            <a:ext cx="2796300" cy="1440000"/>
+            <a:off x="180000" y="936000"/>
+            <a:ext cx="2868300" cy="1368000"/>
           </a:xfrm>
           <a:prstGeom prst="rect">
             <a:avLst/>
@@ -3847,14 +3888,14 @@
       </p:sp>
       <p:sp>
         <p:nvSpPr>
-          <p:cNvPr id="5" name="TextBox 4"/>
+          <p:cNvPr id="6" name="TextBox 5"/>
           <p:cNvSpPr txBox="1"/>
           <p:nvPr/>
         </p:nvSpPr>
         <p:spPr>
           <a:xfrm>
-            <a:off x="288000" y="1043999"/>
-            <a:ext cx="2652301" cy="1260000"/>
+            <a:off x="252000" y="1044000"/>
+            <a:ext cx="2724300" cy="1224000"/>
           </a:xfrm>
           <a:prstGeom prst="rect">
             <a:avLst/>
@@ -3869,11 +3910,11 @@
           <a:p>
             <a:pPr algn="ctr"/>
             <a:r>
-              <a:rPr sz="1500" b="1">
+              <a:rPr sz="1300" b="1">
                 <a:solidFill>
                   <a:srgbClr val="27AE60"/>
                 </a:solidFill>
-                <a:latin typeface="IPAGothic"/>
+                <a:latin typeface="IPAゴシック"/>
               </a:rPr>
               <a:t>上位校応募者数</a:t>
             </a:r>
@@ -3881,11 +3922,11 @@
           <a:p>
             <a:pPr algn="ctr"/>
             <a:r>
-              <a:rPr sz="3400" b="1">
+              <a:rPr sz="3000" b="1">
                 <a:solidFill>
                   <a:srgbClr val="1F3564"/>
                 </a:solidFill>
-                <a:latin typeface="IPAGothic"/>
+                <a:latin typeface="IPAゴシック"/>
               </a:rPr>
               <a:t>4名</a:t>
             </a:r>
@@ -3893,11 +3934,11 @@
           <a:p>
             <a:pPr algn="ctr"/>
             <a:r>
-              <a:rPr sz="1200" b="0">
+              <a:rPr sz="1100" b="0">
                 <a:solidFill>
                   <a:srgbClr val="AAAAAA"/>
                 </a:solidFill>
-                <a:latin typeface="IPAGothic"/>
+                <a:latin typeface="IPAゴシック"/>
               </a:rPr>
               <a:t>関関同立2・MARCH2</a:t>
             </a:r>
@@ -3906,14 +3947,14 @@
       </p:sp>
       <p:sp>
         <p:nvSpPr>
-          <p:cNvPr id="6" name="Rectangle 5"/>
+          <p:cNvPr id="7" name="Rectangle 6"/>
           <p:cNvSpPr/>
           <p:nvPr/>
         </p:nvSpPr>
         <p:spPr>
           <a:xfrm>
-            <a:off x="3120300" y="972000"/>
-            <a:ext cx="2796300" cy="1440000"/>
+            <a:off x="3120300" y="936000"/>
+            <a:ext cx="2868300" cy="1368000"/>
           </a:xfrm>
           <a:prstGeom prst="rect">
             <a:avLst/>
@@ -3951,14 +3992,14 @@
       </p:sp>
       <p:sp>
         <p:nvSpPr>
-          <p:cNvPr id="7" name="TextBox 6"/>
+          <p:cNvPr id="8" name="TextBox 7"/>
           <p:cNvSpPr txBox="1"/>
           <p:nvPr/>
         </p:nvSpPr>
         <p:spPr>
           <a:xfrm>
-            <a:off x="3192300" y="1043999"/>
-            <a:ext cx="2652301" cy="1260000"/>
+            <a:off x="3192300" y="1044000"/>
+            <a:ext cx="2724300" cy="1224000"/>
           </a:xfrm>
           <a:prstGeom prst="rect">
             <a:avLst/>
@@ -3973,11 +4014,11 @@
           <a:p>
             <a:pPr algn="ctr"/>
             <a:r>
-              <a:rPr sz="1500" b="1">
+              <a:rPr sz="1300" b="1">
                 <a:solidFill>
                   <a:srgbClr val="1F3564"/>
                 </a:solidFill>
-                <a:latin typeface="IPAGothic"/>
+                <a:latin typeface="IPAゴシック"/>
               </a:rPr>
               <a:t>全体応募者数</a:t>
             </a:r>
@@ -3985,11 +4026,11 @@
           <a:p>
             <a:pPr algn="ctr"/>
             <a:r>
-              <a:rPr sz="3400" b="1">
+              <a:rPr sz="3000" b="1">
                 <a:solidFill>
                   <a:srgbClr val="1F3564"/>
                 </a:solidFill>
-                <a:latin typeface="IPAGothic"/>
+                <a:latin typeface="IPAゴシック"/>
               </a:rPr>
               <a:t>19名</a:t>
             </a:r>
@@ -3997,11 +4038,11 @@
           <a:p>
             <a:pPr algn="ctr"/>
             <a:r>
-              <a:rPr sz="1200" b="0">
+              <a:rPr sz="1100" b="0">
                 <a:solidFill>
                   <a:srgbClr val="AAAAAA"/>
                 </a:solidFill>
-                <a:latin typeface="IPAGothic"/>
+                <a:latin typeface="IPAゴシック"/>
               </a:rPr>
               <a:t>全応募</a:t>
             </a:r>
@@ -4010,14 +4051,14 @@
       </p:sp>
       <p:sp>
         <p:nvSpPr>
-          <p:cNvPr id="8" name="Rectangle 7"/>
+          <p:cNvPr id="9" name="Rectangle 8"/>
           <p:cNvSpPr/>
           <p:nvPr/>
         </p:nvSpPr>
         <p:spPr>
           <a:xfrm>
-            <a:off x="6024600" y="972000"/>
-            <a:ext cx="2796300" cy="1440000"/>
+            <a:off x="6060600" y="936000"/>
+            <a:ext cx="2868300" cy="1368000"/>
           </a:xfrm>
           <a:prstGeom prst="rect">
             <a:avLst/>
@@ -4055,14 +4096,14 @@
       </p:sp>
       <p:sp>
         <p:nvSpPr>
-          <p:cNvPr id="9" name="TextBox 8"/>
+          <p:cNvPr id="10" name="TextBox 9"/>
           <p:cNvSpPr txBox="1"/>
           <p:nvPr/>
         </p:nvSpPr>
         <p:spPr>
           <a:xfrm>
-            <a:off x="6096600" y="1043999"/>
-            <a:ext cx="2652301" cy="1260000"/>
+            <a:off x="6132600" y="1044000"/>
+            <a:ext cx="2724300" cy="1224000"/>
           </a:xfrm>
           <a:prstGeom prst="rect">
             <a:avLst/>
@@ -4077,11 +4118,11 @@
           <a:p>
             <a:pPr algn="ctr"/>
             <a:r>
-              <a:rPr sz="1500" b="1">
+              <a:rPr sz="1300" b="1">
                 <a:solidFill>
                   <a:srgbClr val="F5A623"/>
                 </a:solidFill>
-                <a:latin typeface="IPAGothic"/>
+                <a:latin typeface="IPAゴシック"/>
               </a:rPr>
               <a:t>現在選考中</a:t>
             </a:r>
@@ -4089,11 +4130,11 @@
           <a:p>
             <a:pPr algn="ctr"/>
             <a:r>
-              <a:rPr sz="3400" b="1">
+              <a:rPr sz="3000" b="1">
                 <a:solidFill>
                   <a:srgbClr val="1F3564"/>
                 </a:solidFill>
-                <a:latin typeface="IPAGothic"/>
+                <a:latin typeface="IPAゴシック"/>
               </a:rPr>
               <a:t>18名</a:t>
             </a:r>
@@ -4101,27 +4142,27 @@
           <a:p>
             <a:pPr algn="ctr"/>
             <a:r>
-              <a:rPr sz="1200" b="0">
+              <a:rPr sz="1100" b="0">
                 <a:solidFill>
                   <a:srgbClr val="AAAAAA"/>
                 </a:solidFill>
-                <a:latin typeface="IPAGothic"/>
+                <a:latin typeface="IPAゴシック"/>
               </a:rPr>
-              <a:t>説明会兼WEB選考 進行中</a:t>
-            </a:r>
-          </a:p>
-        </p:txBody>
-      </p:sp>
-      <p:sp>
-        <p:nvSpPr>
-          <p:cNvPr id="10" name="Rectangle 9"/>
+              <a:t>説明会WEB選考中</a:t>
+            </a:r>
+          </a:p>
+        </p:txBody>
+      </p:sp>
+      <p:sp>
+        <p:nvSpPr>
+          <p:cNvPr id="11" name="Rectangle 10"/>
           <p:cNvSpPr/>
           <p:nvPr/>
         </p:nvSpPr>
         <p:spPr>
           <a:xfrm>
-            <a:off x="8928900" y="972000"/>
-            <a:ext cx="2796300" cy="1440000"/>
+            <a:off x="9000900" y="936000"/>
+            <a:ext cx="2868300" cy="1368000"/>
           </a:xfrm>
           <a:prstGeom prst="rect">
             <a:avLst/>
@@ -4159,14 +4200,14 @@
       </p:sp>
       <p:sp>
         <p:nvSpPr>
-          <p:cNvPr id="11" name="TextBox 10"/>
+          <p:cNvPr id="12" name="TextBox 11"/>
           <p:cNvSpPr txBox="1"/>
           <p:nvPr/>
         </p:nvSpPr>
         <p:spPr>
           <a:xfrm>
-            <a:off x="9000900" y="1043999"/>
-            <a:ext cx="2652301" cy="1260000"/>
+            <a:off x="9072900" y="1044000"/>
+            <a:ext cx="2724300" cy="1224000"/>
           </a:xfrm>
           <a:prstGeom prst="rect">
             <a:avLst/>
@@ -4181,11 +4222,11 @@
           <a:p>
             <a:pPr algn="ctr"/>
             <a:r>
-              <a:rPr sz="1500" b="1">
+              <a:rPr sz="1300" b="1">
                 <a:solidFill>
                   <a:srgbClr val="E85D5D"/>
                 </a:solidFill>
-                <a:latin typeface="IPAGothic"/>
+                <a:latin typeface="IPAゴシック"/>
               </a:rPr>
               <a:t>辞退</a:t>
             </a:r>
@@ -4193,11 +4234,11 @@
           <a:p>
             <a:pPr algn="ctr"/>
             <a:r>
-              <a:rPr sz="3400" b="1">
+              <a:rPr sz="3000" b="1">
                 <a:solidFill>
                   <a:srgbClr val="1F3564"/>
                 </a:solidFill>
-                <a:latin typeface="IPAGothic"/>
+                <a:latin typeface="IPAゴシック"/>
               </a:rPr>
               <a:t>1名</a:t>
             </a:r>
@@ -4205,11 +4246,11 @@
           <a:p>
             <a:pPr algn="ctr"/>
             <a:r>
-              <a:rPr sz="1200" b="0">
+              <a:rPr sz="1100" b="0">
                 <a:solidFill>
                   <a:srgbClr val="AAAAAA"/>
                 </a:solidFill>
-                <a:latin typeface="IPAGothic"/>
+                <a:latin typeface="IPAゴシック"/>
               </a:rPr>
               <a:t>説明会実施前辞退</a:t>
             </a:r>
@@ -4218,15 +4259,15 @@
       </p:sp>
       <p:graphicFrame>
         <p:nvGraphicFramePr>
-          <p:cNvPr id="12" name="Table 11"/>
+          <p:cNvPr id="13" name="Table 12"/>
           <p:cNvGraphicFramePr>
             <a:graphicFrameLocks noGrp="1"/>
           </p:cNvGraphicFramePr>
           <p:nvPr/>
         </p:nvGraphicFramePr>
         <p:xfrm>
-          <a:off x="180000" y="2664000"/>
-          <a:ext cx="9684000" cy="4014000"/>
+          <a:off x="144000" y="2412000"/>
+          <a:ext cx="9540000" cy="4302000"/>
         </p:xfrm>
         <a:graphic>
           <a:graphicData uri="http://schemas.openxmlformats.org/drawingml/2006/table">
@@ -4236,15 +4277,15 @@
               </a:tblPr>
               <a:tblGrid>
                 <a:gridCol w="1980000"/>
-                <a:gridCol w="900000"/>
-                <a:gridCol w="900000"/>
+                <a:gridCol w="864000"/>
+                <a:gridCol w="864000"/>
                 <a:gridCol w="1152000"/>
                 <a:gridCol w="1152000"/>
-                <a:gridCol w="900000"/>
-                <a:gridCol w="900000"/>
+                <a:gridCol w="864000"/>
+                <a:gridCol w="864000"/>
                 <a:gridCol w="1800000"/>
               </a:tblGrid>
-              <a:tr h="802800">
+              <a:tr h="860400">
                 <a:tc>
                   <a:txBody>
                     <a:bodyPr wrap="square"/>
@@ -4256,7 +4297,7 @@
                           <a:solidFill>
                             <a:srgbClr val="FFFFFF"/>
                           </a:solidFill>
-                          <a:latin typeface="IPAGothic"/>
+                          <a:latin typeface="IPAゴシック"/>
                         </a:rPr>
                         <a:t>選考ステップ</a:t>
                       </a:r>
@@ -4279,7 +4320,7 @@
                           <a:solidFill>
                             <a:srgbClr val="FFFFFF"/>
                           </a:solidFill>
-                          <a:latin typeface="IPAGothic"/>
+                          <a:latin typeface="IPAゴシック"/>
                         </a:rPr>
                         <a:t>対象者</a:t>
                       </a:r>
@@ -4302,7 +4343,7 @@
                           <a:solidFill>
                             <a:srgbClr val="FFFFFF"/>
                           </a:solidFill>
-                          <a:latin typeface="IPAGothic"/>
+                          <a:latin typeface="IPAゴシック"/>
                         </a:rPr>
                         <a:t>選考中</a:t>
                       </a:r>
@@ -4325,7 +4366,7 @@
                           <a:solidFill>
                             <a:srgbClr val="FFFFFF"/>
                           </a:solidFill>
-                          <a:latin typeface="IPAGothic"/>
+                          <a:latin typeface="IPAゴシック"/>
                         </a:rPr>
                         <a:t>辞退(実施前)</a:t>
                       </a:r>
@@ -4348,7 +4389,7 @@
                           <a:solidFill>
                             <a:srgbClr val="FFFFFF"/>
                           </a:solidFill>
-                          <a:latin typeface="IPAGothic"/>
+                          <a:latin typeface="IPAゴシック"/>
                         </a:rPr>
                         <a:t>辞退(実施後)</a:t>
                       </a:r>
@@ -4371,7 +4412,7 @@
                           <a:solidFill>
                             <a:srgbClr val="FFFFFF"/>
                           </a:solidFill>
-                          <a:latin typeface="IPAGothic"/>
+                          <a:latin typeface="IPAゴシック"/>
                         </a:rPr>
                         <a:t>通過</a:t>
                       </a:r>
@@ -4394,7 +4435,7 @@
                           <a:solidFill>
                             <a:srgbClr val="FFFFFF"/>
                           </a:solidFill>
-                          <a:latin typeface="IPAGothic"/>
+                          <a:latin typeface="IPAゴシック"/>
                         </a:rPr>
                         <a:t>不合格</a:t>
                       </a:r>
@@ -4417,7 +4458,7 @@
                           <a:solidFill>
                             <a:srgbClr val="FFFFFF"/>
                           </a:solidFill>
-                          <a:latin typeface="IPAGothic"/>
+                          <a:latin typeface="IPAゴシック"/>
                         </a:rPr>
                         <a:t>備考</a:t>
                       </a:r>
@@ -4430,19 +4471,19 @@
                   </a:tcPr>
                 </a:tc>
               </a:tr>
-              <a:tr h="802800">
-                <a:tc>
-                  <a:txBody>
-                    <a:bodyPr wrap="square"/>
-                    <a:lstStyle/>
-                    <a:p>
-                      <a:pPr algn="ctr"/>
-                      <a:r>
-                        <a:rPr sz="1400" b="1">
+              <a:tr h="860400">
+                <a:tc>
+                  <a:txBody>
+                    <a:bodyPr wrap="square"/>
+                    <a:lstStyle/>
+                    <a:p>
+                      <a:pPr algn="ctr"/>
+                      <a:r>
+                        <a:rPr sz="1300" b="1">
                           <a:solidFill>
                             <a:srgbClr val="1F3564"/>
                           </a:solidFill>
-                          <a:latin typeface="IPAGothic"/>
+                          <a:latin typeface="IPAゴシック"/>
                         </a:rPr>
                         <a:t>説明会兼WEB選考</a:t>
                       </a:r>
@@ -4461,11 +4502,11 @@
                     <a:p>
                       <a:pPr algn="ctr"/>
                       <a:r>
-                        <a:rPr sz="1400" b="0">
+                        <a:rPr sz="1300" b="0">
                           <a:solidFill>
                             <a:srgbClr val="1F3564"/>
                           </a:solidFill>
-                          <a:latin typeface="IPAGothic"/>
+                          <a:latin typeface="IPAゴシック"/>
                         </a:rPr>
                         <a:t>19名</a:t>
                       </a:r>
@@ -4484,11 +4525,11 @@
                     <a:p>
                       <a:pPr algn="ctr"/>
                       <a:r>
-                        <a:rPr sz="1600" b="1">
+                        <a:rPr sz="1500" b="1">
                           <a:solidFill>
                             <a:srgbClr val="27AE60"/>
                           </a:solidFill>
-                          <a:latin typeface="IPAGothic"/>
+                          <a:latin typeface="IPAゴシック"/>
                         </a:rPr>
                         <a:t>18名</a:t>
                       </a:r>
@@ -4503,11 +4544,11 @@
                     <a:p>
                       <a:pPr algn="ctr"/>
                       <a:r>
-                        <a:rPr sz="1600" b="1">
+                        <a:rPr sz="1500" b="1">
                           <a:solidFill>
                             <a:srgbClr val="E85D5D"/>
                           </a:solidFill>
-                          <a:latin typeface="IPAGothic"/>
+                          <a:latin typeface="IPAゴシック"/>
                         </a:rPr>
                         <a:t>1名</a:t>
                       </a:r>
@@ -4526,11 +4567,11 @@
                     <a:p>
                       <a:pPr algn="ctr"/>
                       <a:r>
-                        <a:rPr sz="1400" b="0">
+                        <a:rPr sz="1300" b="0">
                           <a:solidFill>
                             <a:srgbClr val="1F3564"/>
                           </a:solidFill>
-                          <a:latin typeface="IPAGothic"/>
+                          <a:latin typeface="IPAゴシック"/>
                         </a:rPr>
                         <a:t>0名</a:t>
                       </a:r>
@@ -4549,11 +4590,105 @@
                     <a:p>
                       <a:pPr algn="ctr"/>
                       <a:r>
+                        <a:rPr sz="1200" b="0">
+                          <a:solidFill>
+                            <a:srgbClr val="AAAAAA"/>
+                          </a:solidFill>
+                          <a:latin typeface="IPAゴシック"/>
+                        </a:rPr>
+                        <a:t>—</a:t>
+                      </a:r>
+                    </a:p>
+                  </a:txBody>
+                  <a:tcPr>
+                    <a:solidFill>
+                      <a:srgbClr val="F0F0F0"/>
+                    </a:solidFill>
+                  </a:tcPr>
+                </a:tc>
+                <a:tc>
+                  <a:txBody>
+                    <a:bodyPr wrap="square"/>
+                    <a:lstStyle/>
+                    <a:p>
+                      <a:pPr algn="ctr"/>
+                      <a:r>
+                        <a:rPr sz="1200" b="0">
+                          <a:solidFill>
+                            <a:srgbClr val="AAAAAA"/>
+                          </a:solidFill>
+                          <a:latin typeface="IPAゴシック"/>
+                        </a:rPr>
+                        <a:t>—</a:t>
+                      </a:r>
+                    </a:p>
+                  </a:txBody>
+                  <a:tcPr>
+                    <a:solidFill>
+                      <a:srgbClr val="F0F0F0"/>
+                    </a:solidFill>
+                  </a:tcPr>
+                </a:tc>
+                <a:tc>
+                  <a:txBody>
+                    <a:bodyPr wrap="square"/>
+                    <a:lstStyle/>
+                    <a:p>
+                      <a:pPr algn="ctr"/>
+                      <a:r>
                         <a:rPr sz="1300" b="0">
                           <a:solidFill>
+                            <a:srgbClr val="1F3564"/>
+                          </a:solidFill>
+                          <a:latin typeface="IPAゴシック"/>
+                        </a:rPr>
+                        <a:t>選考開始段階</a:t>
+                      </a:r>
+                    </a:p>
+                  </a:txBody>
+                  <a:tcPr>
+                    <a:solidFill>
+                      <a:srgbClr val="FFFFFF"/>
+                    </a:solidFill>
+                  </a:tcPr>
+                </a:tc>
+              </a:tr>
+              <a:tr h="860400">
+                <a:tc>
+                  <a:txBody>
+                    <a:bodyPr wrap="square"/>
+                    <a:lstStyle/>
+                    <a:p>
+                      <a:pPr algn="ctr"/>
+                      <a:r>
+                        <a:rPr sz="1300" b="1">
+                          <a:solidFill>
+                            <a:srgbClr val="1F3564"/>
+                          </a:solidFill>
+                          <a:latin typeface="IPAゴシック"/>
+                        </a:rPr>
+                        <a:t>一次選考(WEB)</a:t>
+                      </a:r>
+                    </a:p>
+                  </a:txBody>
+                  <a:tcPr>
+                    <a:solidFill>
+                      <a:srgbClr val="ECF0F8"/>
+                    </a:solidFill>
+                  </a:tcPr>
+                </a:tc>
+                <a:tc>
+                  <a:txBody>
+                    <a:bodyPr wrap="square"/>
+                    <a:lstStyle/>
+                    <a:p>
+                      <a:pPr algn="ctr"/>
+                      <a:r>
+                        <a:rPr sz="1200" b="0">
+                          <a:solidFill>
                             <a:srgbClr val="AAAAAA"/>
                           </a:solidFill>
-                          <a:latin typeface="IPAGothic"/>
+                          <a:latin typeface="IPAゴシック"/>
                         </a:rPr>
                         <a:t>—</a:t>
                       </a:r>
@@ -4572,11 +4707,174 @@
                     <a:p>
                       <a:pPr algn="ctr"/>
                       <a:r>
+                        <a:rPr sz="1200" b="0">
+                          <a:solidFill>
+                            <a:srgbClr val="AAAAAA"/>
+                          </a:solidFill>
+                          <a:latin typeface="IPAゴシック"/>
+                        </a:rPr>
+                        <a:t>—</a:t>
+                      </a:r>
+                    </a:p>
+                  </a:txBody>
+                  <a:tcPr>
+                    <a:solidFill>
+                      <a:srgbClr val="F0F0F0"/>
+                    </a:solidFill>
+                  </a:tcPr>
+                </a:tc>
+                <a:tc>
+                  <a:txBody>
+                    <a:bodyPr wrap="square"/>
+                    <a:lstStyle/>
+                    <a:p>
+                      <a:pPr algn="ctr"/>
+                      <a:r>
+                        <a:rPr sz="1200" b="0">
+                          <a:solidFill>
+                            <a:srgbClr val="AAAAAA"/>
+                          </a:solidFill>
+                          <a:latin typeface="IPAゴシック"/>
+                        </a:rPr>
+                        <a:t>—</a:t>
+                      </a:r>
+                    </a:p>
+                  </a:txBody>
+                  <a:tcPr>
+                    <a:solidFill>
+                      <a:srgbClr val="F0F0F0"/>
+                    </a:solidFill>
+                  </a:tcPr>
+                </a:tc>
+                <a:tc>
+                  <a:txBody>
+                    <a:bodyPr wrap="square"/>
+                    <a:lstStyle/>
+                    <a:p>
+                      <a:pPr algn="ctr"/>
+                      <a:r>
+                        <a:rPr sz="1200" b="0">
+                          <a:solidFill>
+                            <a:srgbClr val="AAAAAA"/>
+                          </a:solidFill>
+                          <a:latin typeface="IPAゴシック"/>
+                        </a:rPr>
+                        <a:t>—</a:t>
+                      </a:r>
+                    </a:p>
+                  </a:txBody>
+                  <a:tcPr>
+                    <a:solidFill>
+                      <a:srgbClr val="F0F0F0"/>
+                    </a:solidFill>
+                  </a:tcPr>
+                </a:tc>
+                <a:tc>
+                  <a:txBody>
+                    <a:bodyPr wrap="square"/>
+                    <a:lstStyle/>
+                    <a:p>
+                      <a:pPr algn="ctr"/>
+                      <a:r>
+                        <a:rPr sz="1200" b="0">
+                          <a:solidFill>
+                            <a:srgbClr val="AAAAAA"/>
+                          </a:solidFill>
+                          <a:latin typeface="IPAゴシック"/>
+                        </a:rPr>
+                        <a:t>—</a:t>
+                      </a:r>
+                    </a:p>
+                  </a:txBody>
+                  <a:tcPr>
+                    <a:solidFill>
+                      <a:srgbClr val="F0F0F0"/>
+                    </a:solidFill>
+                  </a:tcPr>
+                </a:tc>
+                <a:tc>
+                  <a:txBody>
+                    <a:bodyPr wrap="square"/>
+                    <a:lstStyle/>
+                    <a:p>
+                      <a:pPr algn="ctr"/>
+                      <a:r>
+                        <a:rPr sz="1200" b="0">
+                          <a:solidFill>
+                            <a:srgbClr val="AAAAAA"/>
+                          </a:solidFill>
+                          <a:latin typeface="IPAゴシック"/>
+                        </a:rPr>
+                        <a:t>—</a:t>
+                      </a:r>
+                    </a:p>
+                  </a:txBody>
+                  <a:tcPr>
+                    <a:solidFill>
+                      <a:srgbClr val="F0F0F0"/>
+                    </a:solidFill>
+                  </a:tcPr>
+                </a:tc>
+                <a:tc>
+                  <a:txBody>
+                    <a:bodyPr wrap="square"/>
+                    <a:lstStyle/>
+                    <a:p>
+                      <a:pPr algn="ctr"/>
+                      <a:r>
                         <a:rPr sz="1300" b="0">
                           <a:solidFill>
+                            <a:srgbClr val="1F3564"/>
+                          </a:solidFill>
+                          <a:latin typeface="IPAゴシック"/>
+                        </a:rPr>
+                        <a:t>未実施</a:t>
+                      </a:r>
+                    </a:p>
+                  </a:txBody>
+                  <a:tcPr>
+                    <a:solidFill>
+                      <a:srgbClr val="ECF0F8"/>
+                    </a:solidFill>
+                  </a:tcPr>
+                </a:tc>
+              </a:tr>
+              <a:tr h="860400">
+                <a:tc>
+                  <a:txBody>
+                    <a:bodyPr wrap="square"/>
+                    <a:lstStyle/>
+                    <a:p>
+                      <a:pPr algn="ctr"/>
+                      <a:r>
+                        <a:rPr sz="1300" b="1">
+                          <a:solidFill>
+                            <a:srgbClr val="1F3564"/>
+                          </a:solidFill>
+                          <a:latin typeface="IPAゴシック"/>
+                        </a:rPr>
+                        <a:t>二次選考(WEBor対面)</a:t>
+                      </a:r>
+                    </a:p>
+                  </a:txBody>
+                  <a:tcPr>
+                    <a:solidFill>
+                      <a:srgbClr val="ECF0F8"/>
+                    </a:solidFill>
+                  </a:tcPr>
+                </a:tc>
+                <a:tc>
+                  <a:txBody>
+                    <a:bodyPr wrap="square"/>
+                    <a:lstStyle/>
+                    <a:p>
+                      <a:pPr algn="ctr"/>
+                      <a:r>
+                        <a:rPr sz="1200" b="0">
+                          <a:solidFill>
                             <a:srgbClr val="AAAAAA"/>
                           </a:solidFill>
-                          <a:latin typeface="IPAGothic"/>
+                          <a:latin typeface="IPAゴシック"/>
                         </a:rPr>
                         <a:t>—</a:t>
                       </a:r>
@@ -4595,13 +4893,128 @@
                     <a:p>
                       <a:pPr algn="ctr"/>
                       <a:r>
-                        <a:rPr sz="1400" b="0">
+                        <a:rPr sz="1200" b="0">
+                          <a:solidFill>
+                            <a:srgbClr val="AAAAAA"/>
+                          </a:solidFill>
+                          <a:latin typeface="IPAゴシック"/>
+                        </a:rPr>
+                        <a:t>—</a:t>
+                      </a:r>
+                    </a:p>
+                  </a:txBody>
+                  <a:tcPr>
+                    <a:solidFill>
+                      <a:srgbClr val="F0F0F0"/>
+                    </a:solidFill>
+                  </a:tcPr>
+                </a:tc>
+                <a:tc>
+                  <a:txBody>
+                    <a:bodyPr wrap="square"/>
+                    <a:lstStyle/>
+                    <a:p>
+                      <a:pPr algn="ctr"/>
+                      <a:r>
+                        <a:rPr sz="1200" b="0">
+                          <a:solidFill>
+                            <a:srgbClr val="AAAAAA"/>
+                          </a:solidFill>
+                          <a:latin typeface="IPAゴシック"/>
+                        </a:rPr>
+                        <a:t>—</a:t>
+                      </a:r>
+                    </a:p>
+                  </a:txBody>
+                  <a:tcPr>
+                    <a:solidFill>
+                      <a:srgbClr val="F0F0F0"/>
+                    </a:solidFill>
+                  </a:tcPr>
+                </a:tc>
+                <a:tc>
+                  <a:txBody>
+                    <a:bodyPr wrap="square"/>
+                    <a:lstStyle/>
+                    <a:p>
+                      <a:pPr algn="ctr"/>
+                      <a:r>
+                        <a:rPr sz="1200" b="0">
+                          <a:solidFill>
+                            <a:srgbClr val="AAAAAA"/>
+                          </a:solidFill>
+                          <a:latin typeface="IPAゴシック"/>
+                        </a:rPr>
+                        <a:t>—</a:t>
+                      </a:r>
+                    </a:p>
+                  </a:txBody>
+                  <a:tcPr>
+                    <a:solidFill>
+                      <a:srgbClr val="F0F0F0"/>
+                    </a:solidFill>
+                  </a:tcPr>
+                </a:tc>
+                <a:tc>
+                  <a:txBody>
+                    <a:bodyPr wrap="square"/>
+                    <a:lstStyle/>
+                    <a:p>
+                      <a:pPr algn="ctr"/>
+                      <a:r>
+                        <a:rPr sz="1200" b="0">
+                          <a:solidFill>
+                            <a:srgbClr val="AAAAAA"/>
+                          </a:solidFill>
+                          <a:latin typeface="IPAゴシック"/>
+                        </a:rPr>
+                        <a:t>—</a:t>
+                      </a:r>
+                    </a:p>
+                  </a:txBody>
+                  <a:tcPr>
+                    <a:solidFill>
+                      <a:srgbClr val="F0F0F0"/>
+                    </a:solidFill>
+                  </a:tcPr>
+                </a:tc>
+                <a:tc>
+                  <a:txBody>
+                    <a:bodyPr wrap="square"/>
+                    <a:lstStyle/>
+                    <a:p>
+                      <a:pPr algn="ctr"/>
+                      <a:r>
+                        <a:rPr sz="1200" b="0">
+                          <a:solidFill>
+                            <a:srgbClr val="AAAAAA"/>
+                          </a:solidFill>
+                          <a:latin typeface="IPAゴシック"/>
+                        </a:rPr>
+                        <a:t>—</a:t>
+                      </a:r>
+                    </a:p>
+                  </a:txBody>
+                  <a:tcPr>
+                    <a:solidFill>
+                      <a:srgbClr val="F0F0F0"/>
+                    </a:solidFill>
+                  </a:tcPr>
+                </a:tc>
+                <a:tc>
+                  <a:txBody>
+                    <a:bodyPr wrap="square"/>
+                    <a:lstStyle/>
+                    <a:p>
+                      <a:pPr algn="ctr"/>
+                      <a:r>
+                        <a:rPr sz="1300" b="0">
                           <a:solidFill>
                             <a:srgbClr val="1F3564"/>
                           </a:solidFill>
-                          <a:latin typeface="IPAGothic"/>
-                        </a:rPr>
-                        <a:t>選考開始段階</a:t>
+                          <a:latin typeface="IPAゴシック"/>
+                        </a:rPr>
+                        <a:t>未実施</a:t>
                       </a:r>
                     </a:p>
                   </a:txBody>
@@ -4612,21 +5025,21 @@
                   </a:tcPr>
                 </a:tc>
               </a:tr>
-              <a:tr h="802800">
-                <a:tc>
-                  <a:txBody>
-                    <a:bodyPr wrap="square"/>
-                    <a:lstStyle/>
-                    <a:p>
-                      <a:pPr algn="ctr"/>
-                      <a:r>
-                        <a:rPr sz="1400" b="1">
+              <a:tr h="860400">
+                <a:tc>
+                  <a:txBody>
+                    <a:bodyPr wrap="square"/>
+                    <a:lstStyle/>
+                    <a:p>
+                      <a:pPr algn="ctr"/>
+                      <a:r>
+                        <a:rPr sz="1300" b="1">
                           <a:solidFill>
                             <a:srgbClr val="1F3564"/>
                           </a:solidFill>
-                          <a:latin typeface="IPAGothic"/>
-                        </a:rPr>
-                        <a:t>一次選考(WEB)</a:t>
+                          <a:latin typeface="IPAゴシック"/>
+                        </a:rPr>
+                        <a:t>最終選考(対面)</a:t>
                       </a:r>
                     </a:p>
                   </a:txBody>
@@ -4643,521 +5056,149 @@
                     <a:p>
                       <a:pPr algn="ctr"/>
                       <a:r>
+                        <a:rPr sz="1200" b="0">
+                          <a:solidFill>
+                            <a:srgbClr val="AAAAAA"/>
+                          </a:solidFill>
+                          <a:latin typeface="IPAゴシック"/>
+                        </a:rPr>
+                        <a:t>—</a:t>
+                      </a:r>
+                    </a:p>
+                  </a:txBody>
+                  <a:tcPr>
+                    <a:solidFill>
+                      <a:srgbClr val="F0F0F0"/>
+                    </a:solidFill>
+                  </a:tcPr>
+                </a:tc>
+                <a:tc>
+                  <a:txBody>
+                    <a:bodyPr wrap="square"/>
+                    <a:lstStyle/>
+                    <a:p>
+                      <a:pPr algn="ctr"/>
+                      <a:r>
+                        <a:rPr sz="1200" b="0">
+                          <a:solidFill>
+                            <a:srgbClr val="AAAAAA"/>
+                          </a:solidFill>
+                          <a:latin typeface="IPAゴシック"/>
+                        </a:rPr>
+                        <a:t>—</a:t>
+                      </a:r>
+                    </a:p>
+                  </a:txBody>
+                  <a:tcPr>
+                    <a:solidFill>
+                      <a:srgbClr val="F0F0F0"/>
+                    </a:solidFill>
+                  </a:tcPr>
+                </a:tc>
+                <a:tc>
+                  <a:txBody>
+                    <a:bodyPr wrap="square"/>
+                    <a:lstStyle/>
+                    <a:p>
+                      <a:pPr algn="ctr"/>
+                      <a:r>
+                        <a:rPr sz="1200" b="0">
+                          <a:solidFill>
+                            <a:srgbClr val="AAAAAA"/>
+                          </a:solidFill>
+                          <a:latin typeface="IPAゴシック"/>
+                        </a:rPr>
+                        <a:t>—</a:t>
+                      </a:r>
+                    </a:p>
+                  </a:txBody>
+                  <a:tcPr>
+                    <a:solidFill>
+                      <a:srgbClr val="F0F0F0"/>
+                    </a:solidFill>
+                  </a:tcPr>
+                </a:tc>
+                <a:tc>
+                  <a:txBody>
+                    <a:bodyPr wrap="square"/>
+                    <a:lstStyle/>
+                    <a:p>
+                      <a:pPr algn="ctr"/>
+                      <a:r>
+                        <a:rPr sz="1200" b="0">
+                          <a:solidFill>
+                            <a:srgbClr val="AAAAAA"/>
+                          </a:solidFill>
+                          <a:latin typeface="IPAゴシック"/>
+                        </a:rPr>
+                        <a:t>—</a:t>
+                      </a:r>
+                    </a:p>
+                  </a:txBody>
+                  <a:tcPr>
+                    <a:solidFill>
+                      <a:srgbClr val="F0F0F0"/>
+                    </a:solidFill>
+                  </a:tcPr>
+                </a:tc>
+                <a:tc>
+                  <a:txBody>
+                    <a:bodyPr wrap="square"/>
+                    <a:lstStyle/>
+                    <a:p>
+                      <a:pPr algn="ctr"/>
+                      <a:r>
+                        <a:rPr sz="1200" b="0">
+                          <a:solidFill>
+                            <a:srgbClr val="AAAAAA"/>
+                          </a:solidFill>
+                          <a:latin typeface="IPAゴシック"/>
+                        </a:rPr>
+                        <a:t>—</a:t>
+                      </a:r>
+                    </a:p>
+                  </a:txBody>
+                  <a:tcPr>
+                    <a:solidFill>
+                      <a:srgbClr val="F0F0F0"/>
+                    </a:solidFill>
+                  </a:tcPr>
+                </a:tc>
+                <a:tc>
+                  <a:txBody>
+                    <a:bodyPr wrap="square"/>
+                    <a:lstStyle/>
+                    <a:p>
+                      <a:pPr algn="ctr"/>
+                      <a:r>
+                        <a:rPr sz="1200" b="0">
+                          <a:solidFill>
+                            <a:srgbClr val="AAAAAA"/>
+                          </a:solidFill>
+                          <a:latin typeface="IPAゴシック"/>
+                        </a:rPr>
+                        <a:t>—</a:t>
+                      </a:r>
+                    </a:p>
+                  </a:txBody>
+                  <a:tcPr>
+                    <a:solidFill>
+                      <a:srgbClr val="F0F0F0"/>
+                    </a:solidFill>
+                  </a:tcPr>
+                </a:tc>
+                <a:tc>
+                  <a:txBody>
+                    <a:bodyPr wrap="square"/>
+                    <a:lstStyle/>
+                    <a:p>
+                      <a:pPr algn="ctr"/>
+                      <a:r>
                         <a:rPr sz="1300" b="0">
                           <a:solidFill>
-                            <a:srgbClr val="AAAAAA"/>
-                          </a:solidFill>
-                          <a:latin typeface="IPAGothic"/>
-                        </a:rPr>
-                        <a:t>—</a:t>
-                      </a:r>
-                    </a:p>
-                  </a:txBody>
-                  <a:tcPr>
-                    <a:solidFill>
-                      <a:srgbClr val="F0F0F0"/>
-                    </a:solidFill>
-                  </a:tcPr>
-                </a:tc>
-                <a:tc>
-                  <a:txBody>
-                    <a:bodyPr wrap="square"/>
-                    <a:lstStyle/>
-                    <a:p>
-                      <a:pPr algn="ctr"/>
-                      <a:r>
-                        <a:rPr sz="1300" b="0">
-                          <a:solidFill>
-                            <a:srgbClr val="AAAAAA"/>
-                          </a:solidFill>
-                          <a:latin typeface="IPAGothic"/>
-                        </a:rPr>
-                        <a:t>—</a:t>
-                      </a:r>
-                    </a:p>
-                  </a:txBody>
-                  <a:tcPr>
-                    <a:solidFill>
-                      <a:srgbClr val="F0F0F0"/>
-                    </a:solidFill>
-                  </a:tcPr>
-                </a:tc>
-                <a:tc>
-                  <a:txBody>
-                    <a:bodyPr wrap="square"/>
-                    <a:lstStyle/>
-                    <a:p>
-                      <a:pPr algn="ctr"/>
-                      <a:r>
-                        <a:rPr sz="1300" b="0">
-                          <a:solidFill>
-                            <a:srgbClr val="AAAAAA"/>
-                          </a:solidFill>
-                          <a:latin typeface="IPAGothic"/>
-                        </a:rPr>
-                        <a:t>—</a:t>
-                      </a:r>
-                    </a:p>
-                  </a:txBody>
-                  <a:tcPr>
-                    <a:solidFill>
-                      <a:srgbClr val="F0F0F0"/>
-                    </a:solidFill>
-                  </a:tcPr>
-                </a:tc>
-                <a:tc>
-                  <a:txBody>
-                    <a:bodyPr wrap="square"/>
-                    <a:lstStyle/>
-                    <a:p>
-                      <a:pPr algn="ctr"/>
-                      <a:r>
-                        <a:rPr sz="1300" b="0">
-                          <a:solidFill>
-                            <a:srgbClr val="AAAAAA"/>
-                          </a:solidFill>
-                          <a:latin typeface="IPAGothic"/>
-                        </a:rPr>
-                        <a:t>—</a:t>
-                      </a:r>
-                    </a:p>
-                  </a:txBody>
-                  <a:tcPr>
-                    <a:solidFill>
-                      <a:srgbClr val="F0F0F0"/>
-                    </a:solidFill>
-                  </a:tcPr>
-                </a:tc>
-                <a:tc>
-                  <a:txBody>
-                    <a:bodyPr wrap="square"/>
-                    <a:lstStyle/>
-                    <a:p>
-                      <a:pPr algn="ctr"/>
-                      <a:r>
-                        <a:rPr sz="1300" b="0">
-                          <a:solidFill>
-                            <a:srgbClr val="AAAAAA"/>
-                          </a:solidFill>
-                          <a:latin typeface="IPAGothic"/>
-                        </a:rPr>
-                        <a:t>—</a:t>
-                      </a:r>
-                    </a:p>
-                  </a:txBody>
-                  <a:tcPr>
-                    <a:solidFill>
-                      <a:srgbClr val="F0F0F0"/>
-                    </a:solidFill>
-                  </a:tcPr>
-                </a:tc>
-                <a:tc>
-                  <a:txBody>
-                    <a:bodyPr wrap="square"/>
-                    <a:lstStyle/>
-                    <a:p>
-                      <a:pPr algn="ctr"/>
-                      <a:r>
-                        <a:rPr sz="1300" b="0">
-                          <a:solidFill>
-                            <a:srgbClr val="AAAAAA"/>
-                          </a:solidFill>
-                          <a:latin typeface="IPAGothic"/>
-                        </a:rPr>
-                        <a:t>—</a:t>
-                      </a:r>
-                    </a:p>
-                  </a:txBody>
-                  <a:tcPr>
-                    <a:solidFill>
-                      <a:srgbClr val="F0F0F0"/>
-                    </a:solidFill>
-                  </a:tcPr>
-                </a:tc>
-                <a:tc>
-                  <a:txBody>
-                    <a:bodyPr wrap="square"/>
-                    <a:lstStyle/>
-                    <a:p>
-                      <a:pPr algn="ctr"/>
-                      <a:r>
-                        <a:rPr sz="1400" b="0">
-                          <a:solidFill>
                             <a:srgbClr val="1F3564"/>
                           </a:solidFill>
-                          <a:latin typeface="IPAGothic"/>
-                        </a:rPr>
-                        <a:t>未実施</a:t>
-                      </a:r>
-                    </a:p>
-                  </a:txBody>
-                  <a:tcPr>
-                    <a:solidFill>
-                      <a:srgbClr val="ECF0F8"/>
-                    </a:solidFill>
-                  </a:tcPr>
-                </a:tc>
-              </a:tr>
-              <a:tr h="802800">
-                <a:tc>
-                  <a:txBody>
-                    <a:bodyPr wrap="square"/>
-                    <a:lstStyle/>
-                    <a:p>
-                      <a:pPr algn="ctr"/>
-                      <a:r>
-                        <a:rPr sz="1400" b="1">
-                          <a:solidFill>
-                            <a:srgbClr val="1F3564"/>
-                          </a:solidFill>
-                          <a:latin typeface="IPAGothic"/>
-                        </a:rPr>
-                        <a:t>二次選考(WEBor対面)</a:t>
-                      </a:r>
-                    </a:p>
-                  </a:txBody>
-                  <a:tcPr>
-                    <a:solidFill>
-                      <a:srgbClr val="ECF0F8"/>
-                    </a:solidFill>
-                  </a:tcPr>
-                </a:tc>
-                <a:tc>
-                  <a:txBody>
-                    <a:bodyPr wrap="square"/>
-                    <a:lstStyle/>
-                    <a:p>
-                      <a:pPr algn="ctr"/>
-                      <a:r>
-                        <a:rPr sz="1300" b="0">
-                          <a:solidFill>
-                            <a:srgbClr val="AAAAAA"/>
-                          </a:solidFill>
-                          <a:latin typeface="IPAGothic"/>
-                        </a:rPr>
-                        <a:t>—</a:t>
-                      </a:r>
-                    </a:p>
-                  </a:txBody>
-                  <a:tcPr>
-                    <a:solidFill>
-                      <a:srgbClr val="F0F0F0"/>
-                    </a:solidFill>
-                  </a:tcPr>
-                </a:tc>
-                <a:tc>
-                  <a:txBody>
-                    <a:bodyPr wrap="square"/>
-                    <a:lstStyle/>
-                    <a:p>
-                      <a:pPr algn="ctr"/>
-                      <a:r>
-                        <a:rPr sz="1300" b="0">
-                          <a:solidFill>
-                            <a:srgbClr val="AAAAAA"/>
-                          </a:solidFill>
-                          <a:latin typeface="IPAGothic"/>
-                        </a:rPr>
-                        <a:t>—</a:t>
-                      </a:r>
-                    </a:p>
-                  </a:txBody>
-                  <a:tcPr>
-                    <a:solidFill>
-                      <a:srgbClr val="F0F0F0"/>
-                    </a:solidFill>
-                  </a:tcPr>
-                </a:tc>
-                <a:tc>
-                  <a:txBody>
-                    <a:bodyPr wrap="square"/>
-                    <a:lstStyle/>
-                    <a:p>
-                      <a:pPr algn="ctr"/>
-                      <a:r>
-                        <a:rPr sz="1300" b="0">
-                          <a:solidFill>
-                            <a:srgbClr val="AAAAAA"/>
-                          </a:solidFill>
-                          <a:latin typeface="IPAGothic"/>
-                        </a:rPr>
-                        <a:t>—</a:t>
-                      </a:r>
-                    </a:p>
-                  </a:txBody>
-                  <a:tcPr>
-                    <a:solidFill>
-                      <a:srgbClr val="F0F0F0"/>
-                    </a:solidFill>
-                  </a:tcPr>
-                </a:tc>
-                <a:tc>
-                  <a:txBody>
-                    <a:bodyPr wrap="square"/>
-                    <a:lstStyle/>
-                    <a:p>
-                      <a:pPr algn="ctr"/>
-                      <a:r>
-                        <a:rPr sz="1300" b="0">
-                          <a:solidFill>
-                            <a:srgbClr val="AAAAAA"/>
-                          </a:solidFill>
-                          <a:latin typeface="IPAGothic"/>
-                        </a:rPr>
-                        <a:t>—</a:t>
-                      </a:r>
-                    </a:p>
-                  </a:txBody>
-                  <a:tcPr>
-                    <a:solidFill>
-                      <a:srgbClr val="F0F0F0"/>
-                    </a:solidFill>
-                  </a:tcPr>
-                </a:tc>
-                <a:tc>
-                  <a:txBody>
-                    <a:bodyPr wrap="square"/>
-                    <a:lstStyle/>
-                    <a:p>
-                      <a:pPr algn="ctr"/>
-                      <a:r>
-                        <a:rPr sz="1300" b="0">
-                          <a:solidFill>
-                            <a:srgbClr val="AAAAAA"/>
-                          </a:solidFill>
-                          <a:latin typeface="IPAGothic"/>
-                        </a:rPr>
-                        <a:t>—</a:t>
-                      </a:r>
-                    </a:p>
-                  </a:txBody>
-                  <a:tcPr>
-                    <a:solidFill>
-                      <a:srgbClr val="F0F0F0"/>
-                    </a:solidFill>
-                  </a:tcPr>
-                </a:tc>
-                <a:tc>
-                  <a:txBody>
-                    <a:bodyPr wrap="square"/>
-                    <a:lstStyle/>
-                    <a:p>
-                      <a:pPr algn="ctr"/>
-                      <a:r>
-                        <a:rPr sz="1300" b="0">
-                          <a:solidFill>
-                            <a:srgbClr val="AAAAAA"/>
-                          </a:solidFill>
-                          <a:latin typeface="IPAGothic"/>
-                        </a:rPr>
-                        <a:t>—</a:t>
-                      </a:r>
-                    </a:p>
-                  </a:txBody>
-                  <a:tcPr>
-                    <a:solidFill>
-                      <a:srgbClr val="F0F0F0"/>
-                    </a:solidFill>
-                  </a:tcPr>
-                </a:tc>
-                <a:tc>
-                  <a:txBody>
-                    <a:bodyPr wrap="square"/>
-                    <a:lstStyle/>
-                    <a:p>
-                      <a:pPr algn="ctr"/>
-                      <a:r>
-                        <a:rPr sz="1400" b="0">
-                          <a:solidFill>
-                            <a:srgbClr val="1F3564"/>
-                          </a:solidFill>
-                          <a:latin typeface="IPAGothic"/>
-                        </a:rPr>
-                        <a:t>未実施</a:t>
-                      </a:r>
-                    </a:p>
-                  </a:txBody>
-                  <a:tcPr>
-                    <a:solidFill>
-                      <a:srgbClr val="FFFFFF"/>
-                    </a:solidFill>
-                  </a:tcPr>
-                </a:tc>
-              </a:tr>
-              <a:tr h="802800">
-                <a:tc>
-                  <a:txBody>
-                    <a:bodyPr wrap="square"/>
-                    <a:lstStyle/>
-                    <a:p>
-                      <a:pPr algn="ctr"/>
-                      <a:r>
-                        <a:rPr sz="1400" b="1">
-                          <a:solidFill>
-                            <a:srgbClr val="1F3564"/>
-                          </a:solidFill>
-                          <a:latin typeface="IPAGothic"/>
-                        </a:rPr>
-                        <a:t>最終選考(対面)</a:t>
-                      </a:r>
-                    </a:p>
-                  </a:txBody>
-                  <a:tcPr>
-                    <a:solidFill>
-                      <a:srgbClr val="ECF0F8"/>
-                    </a:solidFill>
-                  </a:tcPr>
-                </a:tc>
-                <a:tc>
-                  <a:txBody>
-                    <a:bodyPr wrap="square"/>
-                    <a:lstStyle/>
-                    <a:p>
-                      <a:pPr algn="ctr"/>
-                      <a:r>
-                        <a:rPr sz="1300" b="0">
-                          <a:solidFill>
-                            <a:srgbClr val="AAAAAA"/>
-                          </a:solidFill>
-                          <a:latin typeface="IPAGothic"/>
-                        </a:rPr>
-                        <a:t>—</a:t>
-                      </a:r>
-                    </a:p>
-                  </a:txBody>
-                  <a:tcPr>
-                    <a:solidFill>
-                      <a:srgbClr val="F0F0F0"/>
-                    </a:solidFill>
-                  </a:tcPr>
-                </a:tc>
-                <a:tc>
-                  <a:txBody>
-                    <a:bodyPr wrap="square"/>
-                    <a:lstStyle/>
-                    <a:p>
-                      <a:pPr algn="ctr"/>
-                      <a:r>
-                        <a:rPr sz="1300" b="0">
-                          <a:solidFill>
-                            <a:srgbClr val="AAAAAA"/>
-                          </a:solidFill>
-                          <a:latin typeface="IPAGothic"/>
-                        </a:rPr>
-                        <a:t>—</a:t>
-                      </a:r>
-                    </a:p>
-                  </a:txBody>
-                  <a:tcPr>
-                    <a:solidFill>
-                      <a:srgbClr val="F0F0F0"/>
-                    </a:solidFill>
-                  </a:tcPr>
-                </a:tc>
-                <a:tc>
-                  <a:txBody>
-                    <a:bodyPr wrap="square"/>
-                    <a:lstStyle/>
-                    <a:p>
-                      <a:pPr algn="ctr"/>
-                      <a:r>
-                        <a:rPr sz="1300" b="0">
-                          <a:solidFill>
-                            <a:srgbClr val="AAAAAA"/>
-                          </a:solidFill>
-                          <a:latin typeface="IPAGothic"/>
-                        </a:rPr>
-                        <a:t>—</a:t>
-                      </a:r>
-                    </a:p>
-                  </a:txBody>
-                  <a:tcPr>
-                    <a:solidFill>
-                      <a:srgbClr val="F0F0F0"/>
-                    </a:solidFill>
-                  </a:tcPr>
-                </a:tc>
-                <a:tc>
-                  <a:txBody>
-                    <a:bodyPr wrap="square"/>
-                    <a:lstStyle/>
-                    <a:p>
-                      <a:pPr algn="ctr"/>
-                      <a:r>
-                        <a:rPr sz="1300" b="0">
-                          <a:solidFill>
-                            <a:srgbClr val="AAAAAA"/>
-                          </a:solidFill>
-                          <a:latin typeface="IPAGothic"/>
-                        </a:rPr>
-                        <a:t>—</a:t>
-                      </a:r>
-                    </a:p>
-                  </a:txBody>
-                  <a:tcPr>
-                    <a:solidFill>
-                      <a:srgbClr val="F0F0F0"/>
-                    </a:solidFill>
-                  </a:tcPr>
-                </a:tc>
-                <a:tc>
-                  <a:txBody>
-                    <a:bodyPr wrap="square"/>
-                    <a:lstStyle/>
-                    <a:p>
-                      <a:pPr algn="ctr"/>
-                      <a:r>
-                        <a:rPr sz="1300" b="0">
-                          <a:solidFill>
-                            <a:srgbClr val="AAAAAA"/>
-                          </a:solidFill>
-                          <a:latin typeface="IPAGothic"/>
-                        </a:rPr>
-                        <a:t>—</a:t>
-                      </a:r>
-                    </a:p>
-                  </a:txBody>
-                  <a:tcPr>
-                    <a:solidFill>
-                      <a:srgbClr val="F0F0F0"/>
-                    </a:solidFill>
-                  </a:tcPr>
-                </a:tc>
-                <a:tc>
-                  <a:txBody>
-                    <a:bodyPr wrap="square"/>
-                    <a:lstStyle/>
-                    <a:p>
-                      <a:pPr algn="ctr"/>
-                      <a:r>
-                        <a:rPr sz="1300" b="0">
-                          <a:solidFill>
-                            <a:srgbClr val="AAAAAA"/>
-                          </a:solidFill>
-                          <a:latin typeface="IPAGothic"/>
-                        </a:rPr>
-                        <a:t>—</a:t>
-                      </a:r>
-                    </a:p>
-                  </a:txBody>
-                  <a:tcPr>
-                    <a:solidFill>
-                      <a:srgbClr val="F0F0F0"/>
-                    </a:solidFill>
-                  </a:tcPr>
-                </a:tc>
-                <a:tc>
-                  <a:txBody>
-                    <a:bodyPr wrap="square"/>
-                    <a:lstStyle/>
-                    <a:p>
-                      <a:pPr algn="ctr"/>
-                      <a:r>
-                        <a:rPr sz="1400" b="0">
-                          <a:solidFill>
-                            <a:srgbClr val="1F3564"/>
-                          </a:solidFill>
-                          <a:latin typeface="IPAGothic"/>
+                          <a:latin typeface="IPAゴシック"/>
                         </a:rPr>
                         <a:t>未実施</a:t>
                       </a:r>
@@ -5237,8 +5278,8 @@
       </p:sp>
       <p:sp>
         <p:nvSpPr>
-          <p:cNvPr id="3" name="TextBox 2"/>
-          <p:cNvSpPr txBox="1"/>
+          <p:cNvPr id="3" name="Rectangle 2"/>
+          <p:cNvSpPr/>
           <p:nvPr/>
         </p:nvSpPr>
         <p:spPr>
@@ -5252,23 +5293,29 @@
           <a:solidFill>
             <a:srgbClr val="1F3564"/>
           </a:solidFill>
+          <a:ln>
+            <a:noFill/>
+          </a:ln>
         </p:spPr>
-        <p:txBody>
-          <a:bodyPr wrap="none">
-            <a:spAutoFit/>
-          </a:bodyPr>
+        <p:style>
+          <a:lnRef idx="1">
+            <a:schemeClr val="accent1"/>
+          </a:lnRef>
+          <a:fillRef idx="3">
+            <a:schemeClr val="accent1"/>
+          </a:fillRef>
+          <a:effectRef idx="2">
+            <a:schemeClr val="accent1"/>
+          </a:effectRef>
+          <a:fontRef idx="minor">
+            <a:schemeClr val="lt1"/>
+          </a:fontRef>
+        </p:style>
+        <p:txBody>
+          <a:bodyPr rtlCol="0" anchor="ctr"/>
           <a:lstStyle/>
           <a:p>
             <a:pPr algn="ctr"/>
-            <a:r>
-              <a:rPr sz="2800" b="1">
-                <a:solidFill>
-                  <a:srgbClr val="FFFFFF"/>
-                </a:solidFill>
-                <a:latin typeface="IPAGothic"/>
-              </a:rPr>
-              <a:t>選考ファネル：全体応募〜選考状況</a:t>
-            </a:r>
           </a:p>
         </p:txBody>
       </p:sp>
@@ -5280,8 +5327,8 @@
         </p:nvSpPr>
         <p:spPr>
           <a:xfrm>
-            <a:off x="180000" y="900000"/>
-            <a:ext cx="11833200" cy="288000"/>
+            <a:off x="180000" y="0"/>
+            <a:ext cx="11833200" cy="792000"/>
           </a:xfrm>
           <a:prstGeom prst="rect">
             <a:avLst/>
@@ -5294,12 +5341,47 @@
           </a:bodyPr>
           <a:lstStyle/>
           <a:p>
-            <a:r>
-              <a:rPr sz="1300" b="0">
+            <a:pPr algn="ctr"/>
+            <a:r>
+              <a:rPr sz="2600" b="1">
+                <a:solidFill>
+                  <a:srgbClr val="FFFFFF"/>
+                </a:solidFill>
+                <a:latin typeface="IPAゴシック"/>
+              </a:rPr>
+              <a:t>選考ファネル：全体応募〜現在の選考状況</a:t>
+            </a:r>
+          </a:p>
+        </p:txBody>
+      </p:sp>
+      <p:sp>
+        <p:nvSpPr>
+          <p:cNvPr id="5" name="TextBox 4"/>
+          <p:cNvSpPr txBox="1"/>
+          <p:nvPr/>
+        </p:nvSpPr>
+        <p:spPr>
+          <a:xfrm>
+            <a:off x="180000" y="864000"/>
+            <a:ext cx="11833200" cy="251999"/>
+          </a:xfrm>
+          <a:prstGeom prst="rect">
+            <a:avLst/>
+          </a:prstGeom>
+          <a:noFill/>
+        </p:spPr>
+        <p:txBody>
+          <a:bodyPr wrap="none">
+            <a:spAutoFit/>
+          </a:bodyPr>
+          <a:lstStyle/>
+          <a:p>
+            <a:r>
+              <a:rPr sz="1200" b="0">
                 <a:solidFill>
                   <a:srgbClr val="E85D5D"/>
                 </a:solidFill>
-                <a:latin typeface="IPAGothic"/>
+                <a:latin typeface="IPAゴシック"/>
               </a:rPr>
               <a:t>※ 現在ほぼ全員が説明会兼WEB選考の選考中フェーズ（2026年1〜7月集計）</a:t>
             </a:r>
@@ -5308,7 +5390,7 @@
       </p:sp>
       <p:pic>
         <p:nvPicPr>
-          <p:cNvPr id="5" name="Picture 4" descr="funnel.png"/>
+          <p:cNvPr id="6" name="Picture 5" descr="funnel.png"/>
           <p:cNvPicPr>
             <a:picLocks noChangeAspect="1"/>
           </p:cNvPicPr>
@@ -5322,8 +5404,8 @@
         </p:blipFill>
         <p:spPr>
           <a:xfrm>
-            <a:off x="720000" y="1260000"/>
-            <a:ext cx="10753200" cy="5346000"/>
+            <a:off x="720000" y="1224000"/>
+            <a:ext cx="10753200" cy="5418000"/>
           </a:xfrm>
           <a:prstGeom prst="rect">
             <a:avLst/>
@@ -5393,8 +5475,8 @@
       </p:sp>
       <p:sp>
         <p:nvSpPr>
-          <p:cNvPr id="3" name="TextBox 2"/>
-          <p:cNvSpPr txBox="1"/>
+          <p:cNvPr id="3" name="Rectangle 2"/>
+          <p:cNvSpPr/>
           <p:nvPr/>
         </p:nvSpPr>
         <p:spPr>
@@ -5408,6 +5490,47 @@
           <a:solidFill>
             <a:srgbClr val="1F3564"/>
           </a:solidFill>
+          <a:ln>
+            <a:noFill/>
+          </a:ln>
+        </p:spPr>
+        <p:style>
+          <a:lnRef idx="1">
+            <a:schemeClr val="accent1"/>
+          </a:lnRef>
+          <a:fillRef idx="3">
+            <a:schemeClr val="accent1"/>
+          </a:fillRef>
+          <a:effectRef idx="2">
+            <a:schemeClr val="accent1"/>
+          </a:effectRef>
+          <a:fontRef idx="minor">
+            <a:schemeClr val="lt1"/>
+          </a:fontRef>
+        </p:style>
+        <p:txBody>
+          <a:bodyPr rtlCol="0" anchor="ctr"/>
+          <a:lstStyle/>
+          <a:p>
+            <a:pPr algn="ctr"/>
+          </a:p>
+        </p:txBody>
+      </p:sp>
+      <p:sp>
+        <p:nvSpPr>
+          <p:cNvPr id="4" name="TextBox 3"/>
+          <p:cNvSpPr txBox="1"/>
+          <p:nvPr/>
+        </p:nvSpPr>
+        <p:spPr>
+          <a:xfrm>
+            <a:off x="180000" y="0"/>
+            <a:ext cx="11833200" cy="792000"/>
+          </a:xfrm>
+          <a:prstGeom prst="rect">
+            <a:avLst/>
+          </a:prstGeom>
+          <a:noFill/>
         </p:spPr>
         <p:txBody>
           <a:bodyPr wrap="none">
@@ -5417,11 +5540,11 @@
           <a:p>
             <a:pPr algn="ctr"/>
             <a:r>
-              <a:rPr sz="2800" b="1">
+              <a:rPr sz="2600" b="1">
                 <a:solidFill>
                   <a:srgbClr val="FFFFFF"/>
                 </a:solidFill>
-                <a:latin typeface="IPAGothic"/>
+                <a:latin typeface="IPAゴシック"/>
               </a:rPr>
               <a:t>大学グループ別　応募者数</a:t>
             </a:r>
@@ -5430,7 +5553,7 @@
       </p:sp>
       <p:pic>
         <p:nvPicPr>
-          <p:cNvPr id="4" name="Picture 3" descr="group_bar.png"/>
+          <p:cNvPr id="5" name="Picture 4" descr="group_bar.png"/>
           <p:cNvPicPr>
             <a:picLocks noChangeAspect="1"/>
           </p:cNvPicPr>
@@ -5444,8 +5567,8 @@
         </p:blipFill>
         <p:spPr>
           <a:xfrm>
-            <a:off x="360000" y="972000"/>
-            <a:ext cx="7072055" cy="5526000"/>
+            <a:off x="180000" y="936000"/>
+            <a:ext cx="7072055" cy="5634000"/>
           </a:xfrm>
           <a:prstGeom prst="rect">
             <a:avLst/>
@@ -5454,13 +5577,13 @@
       </p:pic>
       <p:sp>
         <p:nvSpPr>
-          <p:cNvPr id="5" name="TextBox 4"/>
+          <p:cNvPr id="6" name="TextBox 5"/>
           <p:cNvSpPr txBox="1"/>
           <p:nvPr/>
         </p:nvSpPr>
         <p:spPr>
           <a:xfrm>
-            <a:off x="7315920" y="1152000"/>
+            <a:off x="7315920" y="1080000"/>
             <a:ext cx="4511484" cy="5346000"/>
           </a:xfrm>
           <a:prstGeom prst="rect">
@@ -5479,7 +5602,7 @@
                 <a:solidFill>
                   <a:srgbClr val="1F3564"/>
                 </a:solidFill>
-                <a:latin typeface="IPAGothic"/>
+                <a:latin typeface="IPAゴシック"/>
               </a:rPr>
               <a:t>【上位校内訳】</a:t>
             </a:r>
@@ -5490,7 +5613,7 @@
                 <a:solidFill>
                   <a:srgbClr val="1F3564"/>
                 </a:solidFill>
-                <a:latin typeface="IPAGothic"/>
+                <a:latin typeface="IPAゴシック"/>
               </a:rPr>
               <a:t>関西学院大学　2名</a:t>
             </a:r>
@@ -5501,7 +5624,7 @@
                 <a:solidFill>
                   <a:srgbClr val="1F3564"/>
                 </a:solidFill>
-                <a:latin typeface="IPAGothic"/>
+                <a:latin typeface="IPAゴシック"/>
               </a:rPr>
               <a:t>明治大学　　　1名</a:t>
             </a:r>
@@ -5512,51 +5635,51 @@
                 <a:solidFill>
                   <a:srgbClr val="1F3564"/>
                 </a:solidFill>
-                <a:latin typeface="IPAGothic"/>
+                <a:latin typeface="IPAゴシック"/>
               </a:rPr>
               <a:t>同志社大学　　1名</a:t>
             </a:r>
           </a:p>
           <a:p>
             <a:r>
-              <a:rPr sz="800" b="0">
+              <a:rPr sz="600" b="0">
                 <a:solidFill>
                   <a:srgbClr val="1F3564"/>
                 </a:solidFill>
-                <a:latin typeface="IPAGothic"/>
+                <a:latin typeface="IPAゴシック"/>
               </a:rPr>
               <a:t/>
             </a:r>
           </a:p>
           <a:p>
             <a:r>
-              <a:rPr sz="1500" b="1">
+              <a:rPr sz="1400" b="1">
                 <a:solidFill>
                   <a:srgbClr val="E85D5D"/>
                 </a:solidFill>
-                <a:latin typeface="IPAGothic"/>
+                <a:latin typeface="IPAゴシック"/>
               </a:rPr>
               <a:t>【ポイント】</a:t>
             </a:r>
           </a:p>
           <a:p>
             <a:r>
-              <a:rPr sz="1400" b="0">
+              <a:rPr sz="1300" b="0">
                 <a:solidFill>
                   <a:srgbClr val="1F3564"/>
                 </a:solidFill>
-                <a:latin typeface="IPAGothic"/>
+                <a:latin typeface="IPAゴシック"/>
               </a:rPr>
               <a:t>・上位校比率：21%（4名/19名）</a:t>
             </a:r>
           </a:p>
           <a:p>
             <a:r>
-              <a:rPr sz="1400" b="0">
+              <a:rPr sz="1300" b="0">
                 <a:solidFill>
                   <a:srgbClr val="AAAAAA"/>
                 </a:solidFill>
-                <a:latin typeface="IPAGothic"/>
+                <a:latin typeface="IPAゴシック"/>
               </a:rPr>
               <a:t>・旧帝大・早慶は応募なし</a:t>
             </a:r>
@@ -5626,8 +5749,8 @@
       </p:sp>
       <p:sp>
         <p:nvSpPr>
-          <p:cNvPr id="3" name="TextBox 2"/>
-          <p:cNvSpPr txBox="1"/>
+          <p:cNvPr id="3" name="Rectangle 2"/>
+          <p:cNvSpPr/>
           <p:nvPr/>
         </p:nvSpPr>
         <p:spPr>
@@ -5641,6 +5764,47 @@
           <a:solidFill>
             <a:srgbClr val="1F3564"/>
           </a:solidFill>
+          <a:ln>
+            <a:noFill/>
+          </a:ln>
+        </p:spPr>
+        <p:style>
+          <a:lnRef idx="1">
+            <a:schemeClr val="accent1"/>
+          </a:lnRef>
+          <a:fillRef idx="3">
+            <a:schemeClr val="accent1"/>
+          </a:fillRef>
+          <a:effectRef idx="2">
+            <a:schemeClr val="accent1"/>
+          </a:effectRef>
+          <a:fontRef idx="minor">
+            <a:schemeClr val="lt1"/>
+          </a:fontRef>
+        </p:style>
+        <p:txBody>
+          <a:bodyPr rtlCol="0" anchor="ctr"/>
+          <a:lstStyle/>
+          <a:p>
+            <a:pPr algn="ctr"/>
+          </a:p>
+        </p:txBody>
+      </p:sp>
+      <p:sp>
+        <p:nvSpPr>
+          <p:cNvPr id="4" name="TextBox 3"/>
+          <p:cNvSpPr txBox="1"/>
+          <p:nvPr/>
+        </p:nvSpPr>
+        <p:spPr>
+          <a:xfrm>
+            <a:off x="180000" y="0"/>
+            <a:ext cx="11833200" cy="792000"/>
+          </a:xfrm>
+          <a:prstGeom prst="rect">
+            <a:avLst/>
+          </a:prstGeom>
+          <a:noFill/>
         </p:spPr>
         <p:txBody>
           <a:bodyPr wrap="none">
@@ -5650,11 +5814,11 @@
           <a:p>
             <a:pPr algn="ctr"/>
             <a:r>
-              <a:rPr sz="2800" b="1">
+              <a:rPr sz="2600" b="1">
                 <a:solidFill>
                   <a:srgbClr val="FFFFFF"/>
                 </a:solidFill>
-                <a:latin typeface="IPAGothic"/>
+                <a:latin typeface="IPAゴシック"/>
               </a:rPr>
               <a:t>上位校　個別大学別　応募者数</a:t>
             </a:r>
@@ -5663,7 +5827,7 @@
       </p:sp>
       <p:pic>
         <p:nvPicPr>
-          <p:cNvPr id="4" name="Picture 3" descr="univ_bar.png"/>
+          <p:cNvPr id="5" name="Picture 4" descr="univ_bar.png"/>
           <p:cNvPicPr>
             <a:picLocks noChangeAspect="1"/>
           </p:cNvPicPr>
@@ -5678,7 +5842,7 @@
         <p:spPr>
           <a:xfrm>
             <a:off x="720000" y="1080000"/>
-            <a:ext cx="6706260" cy="5346000"/>
+            <a:ext cx="6706260" cy="5418000"/>
           </a:xfrm>
           <a:prstGeom prst="rect">
             <a:avLst/>
@@ -5687,14 +5851,14 @@
       </p:pic>
       <p:sp>
         <p:nvSpPr>
-          <p:cNvPr id="5" name="TextBox 4"/>
+          <p:cNvPr id="6" name="TextBox 5"/>
           <p:cNvSpPr txBox="1"/>
           <p:nvPr/>
         </p:nvSpPr>
         <p:spPr>
           <a:xfrm>
-            <a:off x="7315920" y="1332000"/>
-            <a:ext cx="4511484" cy="2880000"/>
+            <a:off x="7193988" y="1224000"/>
+            <a:ext cx="4633416" cy="3240000"/>
           </a:xfrm>
           <a:prstGeom prst="rect">
             <a:avLst/>
@@ -5712,51 +5876,51 @@
                 <a:solidFill>
                   <a:srgbClr val="27AE60"/>
                 </a:solidFill>
-                <a:latin typeface="IPAGothic"/>
+                <a:latin typeface="IPAゴシック"/>
               </a:rPr>
               <a:t>【全員 選考中】</a:t>
             </a:r>
           </a:p>
           <a:p>
             <a:r>
-              <a:rPr sz="1500" b="1">
+              <a:rPr sz="1400" b="1">
                 <a:solidFill>
                   <a:srgbClr val="1F3564"/>
                 </a:solidFill>
-                <a:latin typeface="IPAGothic"/>
+                <a:latin typeface="IPAゴシック"/>
               </a:rPr>
               <a:t>関西学院大学（経済学部）</a:t>
             </a:r>
           </a:p>
           <a:p>
             <a:r>
-              <a:rPr sz="1500" b="1">
+              <a:rPr sz="1400" b="1">
                 <a:solidFill>
                   <a:srgbClr val="1F3564"/>
                 </a:solidFill>
-                <a:latin typeface="IPAGothic"/>
+                <a:latin typeface="IPAゴシック"/>
               </a:rPr>
               <a:t>関西学院大学（文学部）</a:t>
             </a:r>
           </a:p>
           <a:p>
             <a:r>
-              <a:rPr sz="1500" b="1">
+              <a:rPr sz="1400" b="1">
                 <a:solidFill>
                   <a:srgbClr val="1F3564"/>
                 </a:solidFill>
-                <a:latin typeface="IPAGothic"/>
+                <a:latin typeface="IPAゴシック"/>
               </a:rPr>
               <a:t>明治大学（商学部）</a:t>
             </a:r>
           </a:p>
           <a:p>
             <a:r>
-              <a:rPr sz="1500" b="1">
+              <a:rPr sz="1400" b="1">
                 <a:solidFill>
                   <a:srgbClr val="1F3564"/>
                 </a:solidFill>
-                <a:latin typeface="IPAGothic"/>
+                <a:latin typeface="IPAゴシック"/>
               </a:rPr>
               <a:t>同志社大学（文化情報学部）</a:t>
             </a:r>
@@ -5826,8 +5990,8 @@
       </p:sp>
       <p:sp>
         <p:nvSpPr>
-          <p:cNvPr id="3" name="TextBox 2"/>
-          <p:cNvSpPr txBox="1"/>
+          <p:cNvPr id="3" name="Rectangle 2"/>
+          <p:cNvSpPr/>
           <p:nvPr/>
         </p:nvSpPr>
         <p:spPr>
@@ -5841,6 +6005,47 @@
           <a:solidFill>
             <a:srgbClr val="1F3564"/>
           </a:solidFill>
+          <a:ln>
+            <a:noFill/>
+          </a:ln>
+        </p:spPr>
+        <p:style>
+          <a:lnRef idx="1">
+            <a:schemeClr val="accent1"/>
+          </a:lnRef>
+          <a:fillRef idx="3">
+            <a:schemeClr val="accent1"/>
+          </a:fillRef>
+          <a:effectRef idx="2">
+            <a:schemeClr val="accent1"/>
+          </a:effectRef>
+          <a:fontRef idx="minor">
+            <a:schemeClr val="lt1"/>
+          </a:fontRef>
+        </p:style>
+        <p:txBody>
+          <a:bodyPr rtlCol="0" anchor="ctr"/>
+          <a:lstStyle/>
+          <a:p>
+            <a:pPr algn="ctr"/>
+          </a:p>
+        </p:txBody>
+      </p:sp>
+      <p:sp>
+        <p:nvSpPr>
+          <p:cNvPr id="4" name="TextBox 3"/>
+          <p:cNvSpPr txBox="1"/>
+          <p:nvPr/>
+        </p:nvSpPr>
+        <p:spPr>
+          <a:xfrm>
+            <a:off x="180000" y="0"/>
+            <a:ext cx="11833200" cy="792000"/>
+          </a:xfrm>
+          <a:prstGeom prst="rect">
+            <a:avLst/>
+          </a:prstGeom>
+          <a:noFill/>
         </p:spPr>
         <p:txBody>
           <a:bodyPr wrap="none">
@@ -5850,11 +6055,11 @@
           <a:p>
             <a:pPr algn="ctr"/>
             <a:r>
-              <a:rPr sz="2800" b="1">
+              <a:rPr sz="2600" b="1">
                 <a:solidFill>
                   <a:srgbClr val="FFFFFF"/>
                 </a:solidFill>
-                <a:latin typeface="IPAGothic"/>
+                <a:latin typeface="IPAゴシック"/>
               </a:rPr>
               <a:t>選考ステータス内訳（全応募者）</a:t>
             </a:r>
@@ -5863,7 +6068,7 @@
       </p:sp>
       <p:pic>
         <p:nvPicPr>
-          <p:cNvPr id="4" name="Picture 3" descr="status_donut.png"/>
+          <p:cNvPr id="5" name="Picture 4" descr="status_donut.png"/>
           <p:cNvPicPr>
             <a:picLocks noChangeAspect="1"/>
           </p:cNvPicPr>
@@ -5877,8 +6082,8 @@
         </p:blipFill>
         <p:spPr>
           <a:xfrm>
-            <a:off x="360000" y="900000"/>
-            <a:ext cx="5365008" cy="5634000"/>
+            <a:off x="180000" y="864000"/>
+            <a:ext cx="5365008" cy="5706000"/>
           </a:xfrm>
           <a:prstGeom prst="rect">
             <a:avLst/>
@@ -5887,15 +6092,15 @@
       </p:pic>
       <p:graphicFrame>
         <p:nvGraphicFramePr>
-          <p:cNvPr id="5" name="Table 4"/>
+          <p:cNvPr id="6" name="Table 5"/>
           <p:cNvGraphicFramePr>
             <a:graphicFrameLocks noGrp="1"/>
           </p:cNvGraphicFramePr>
           <p:nvPr/>
         </p:nvGraphicFramePr>
         <p:xfrm>
-          <a:off x="5730804.0" y="972000"/>
-          <a:ext cx="6096600" cy="5634000"/>
+          <a:off x="5730804" y="936000"/>
+          <a:ext cx="6096600" cy="5706000"/>
         </p:xfrm>
         <a:graphic>
           <a:graphicData uri="http://schemas.openxmlformats.org/drawingml/2006/table">
@@ -5908,7 +6113,7 @@
                 <a:gridCol w="914490"/>
                 <a:gridCol w="1828980"/>
               </a:tblGrid>
-              <a:tr h="626000">
+              <a:tr h="634000">
                 <a:tc>
                   <a:txBody>
                     <a:bodyPr wrap="square"/>
@@ -5920,7 +6125,7 @@
                           <a:solidFill>
                             <a:srgbClr val="FFFFFF"/>
                           </a:solidFill>
-                          <a:latin typeface="IPAGothic"/>
+                          <a:latin typeface="IPAゴシック"/>
                         </a:rPr>
                         <a:t>大学名</a:t>
                       </a:r>
@@ -5943,7 +6148,7 @@
                           <a:solidFill>
                             <a:srgbClr val="FFFFFF"/>
                           </a:solidFill>
-                          <a:latin typeface="IPAGothic"/>
+                          <a:latin typeface="IPAゴシック"/>
                         </a:rPr>
                         <a:t>上位校</a:t>
                       </a:r>
@@ -5966,7 +6171,7 @@
                           <a:solidFill>
                             <a:srgbClr val="FFFFFF"/>
                           </a:solidFill>
-                          <a:latin typeface="IPAGothic"/>
+                          <a:latin typeface="IPAゴシック"/>
                         </a:rPr>
                         <a:t>ステータス</a:t>
                       </a:r>
@@ -5979,19 +6184,19 @@
                   </a:tcPr>
                 </a:tc>
               </a:tr>
-              <a:tr h="626000">
-                <a:tc>
-                  <a:txBody>
-                    <a:bodyPr wrap="square"/>
-                    <a:lstStyle/>
-                    <a:p>
-                      <a:pPr algn="ctr"/>
-                      <a:r>
-                        <a:rPr sz="1300" b="0">
+              <a:tr h="634000">
+                <a:tc>
+                  <a:txBody>
+                    <a:bodyPr wrap="square"/>
+                    <a:lstStyle/>
+                    <a:p>
+                      <a:pPr algn="ctr"/>
+                      <a:r>
+                        <a:rPr sz="1200" b="0">
                           <a:solidFill>
                             <a:srgbClr val="1F3564"/>
                           </a:solidFill>
-                          <a:latin typeface="IPAGothic"/>
+                          <a:latin typeface="IPAゴシック"/>
                         </a:rPr>
                         <a:t>関西学院大学(×2)</a:t>
                       </a:r>
@@ -6010,11 +6215,11 @@
                     <a:p>
                       <a:pPr algn="ctr"/>
                       <a:r>
-                        <a:rPr sz="1600" b="1">
+                        <a:rPr sz="1500" b="1">
                           <a:solidFill>
                             <a:srgbClr val="F5A623"/>
                           </a:solidFill>
-                          <a:latin typeface="IPAGothic"/>
+                          <a:latin typeface="IPAゴシック"/>
                         </a:rPr>
                         <a:t>★</a:t>
                       </a:r>
@@ -6033,11 +6238,11 @@
                     <a:p>
                       <a:pPr algn="ctr"/>
                       <a:r>
-                        <a:rPr sz="1300" b="0">
+                        <a:rPr sz="1200" b="0">
                           <a:solidFill>
                             <a:srgbClr val="1F3564"/>
                           </a:solidFill>
-                          <a:latin typeface="IPAGothic"/>
+                          <a:latin typeface="IPAゴシック"/>
                         </a:rPr>
                         <a:t>選考中</a:t>
                       </a:r>
@@ -6050,19 +6255,19 @@
                   </a:tcPr>
                 </a:tc>
               </a:tr>
-              <a:tr h="626000">
-                <a:tc>
-                  <a:txBody>
-                    <a:bodyPr wrap="square"/>
-                    <a:lstStyle/>
-                    <a:p>
-                      <a:pPr algn="ctr"/>
-                      <a:r>
-                        <a:rPr sz="1300" b="0">
+              <a:tr h="634000">
+                <a:tc>
+                  <a:txBody>
+                    <a:bodyPr wrap="square"/>
+                    <a:lstStyle/>
+                    <a:p>
+                      <a:pPr algn="ctr"/>
+                      <a:r>
+                        <a:rPr sz="1200" b="0">
                           <a:solidFill>
                             <a:srgbClr val="1F3564"/>
                           </a:solidFill>
-                          <a:latin typeface="IPAGothic"/>
+                          <a:latin typeface="IPAゴシック"/>
                         </a:rPr>
                         <a:t>明治大学</a:t>
                       </a:r>
@@ -6081,11 +6286,11 @@
                     <a:p>
                       <a:pPr algn="ctr"/>
                       <a:r>
-                        <a:rPr sz="1600" b="1">
+                        <a:rPr sz="1500" b="1">
                           <a:solidFill>
                             <a:srgbClr val="F5A623"/>
                           </a:solidFill>
-                          <a:latin typeface="IPAGothic"/>
+                          <a:latin typeface="IPAゴシック"/>
                         </a:rPr>
                         <a:t>★</a:t>
                       </a:r>
@@ -6104,11 +6309,11 @@
                     <a:p>
                       <a:pPr algn="ctr"/>
                       <a:r>
-                        <a:rPr sz="1300" b="0">
+                        <a:rPr sz="1200" b="0">
                           <a:solidFill>
                             <a:srgbClr val="1F3564"/>
                           </a:solidFill>
-                          <a:latin typeface="IPAGothic"/>
+                          <a:latin typeface="IPAゴシック"/>
                         </a:rPr>
                         <a:t>選考中</a:t>
                       </a:r>
@@ -6121,19 +6326,19 @@
                   </a:tcPr>
                 </a:tc>
               </a:tr>
-              <a:tr h="626000">
-                <a:tc>
-                  <a:txBody>
-                    <a:bodyPr wrap="square"/>
-                    <a:lstStyle/>
-                    <a:p>
-                      <a:pPr algn="ctr"/>
-                      <a:r>
-                        <a:rPr sz="1300" b="0">
+              <a:tr h="634000">
+                <a:tc>
+                  <a:txBody>
+                    <a:bodyPr wrap="square"/>
+                    <a:lstStyle/>
+                    <a:p>
+                      <a:pPr algn="ctr"/>
+                      <a:r>
+                        <a:rPr sz="1200" b="0">
                           <a:solidFill>
                             <a:srgbClr val="1F3564"/>
                           </a:solidFill>
-                          <a:latin typeface="IPAGothic"/>
+                          <a:latin typeface="IPAゴシック"/>
                         </a:rPr>
                         <a:t>同志社大学</a:t>
                       </a:r>
@@ -6152,11 +6357,11 @@
                     <a:p>
                       <a:pPr algn="ctr"/>
                       <a:r>
-                        <a:rPr sz="1600" b="1">
+                        <a:rPr sz="1500" b="1">
                           <a:solidFill>
                             <a:srgbClr val="F5A623"/>
                           </a:solidFill>
-                          <a:latin typeface="IPAGothic"/>
+                          <a:latin typeface="IPAゴシック"/>
                         </a:rPr>
                         <a:t>★</a:t>
                       </a:r>
@@ -6175,11 +6380,11 @@
                     <a:p>
                       <a:pPr algn="ctr"/>
                       <a:r>
-                        <a:rPr sz="1300" b="0">
+                        <a:rPr sz="1200" b="0">
                           <a:solidFill>
                             <a:srgbClr val="1F3564"/>
                           </a:solidFill>
-                          <a:latin typeface="IPAGothic"/>
+                          <a:latin typeface="IPAゴシック"/>
                         </a:rPr>
                         <a:t>選考中</a:t>
                       </a:r>
@@ -6192,19 +6397,19 @@
                   </a:tcPr>
                 </a:tc>
               </a:tr>
-              <a:tr h="626000">
-                <a:tc>
-                  <a:txBody>
-                    <a:bodyPr wrap="square"/>
-                    <a:lstStyle/>
-                    <a:p>
-                      <a:pPr algn="ctr"/>
-                      <a:r>
-                        <a:rPr sz="1300" b="0">
+              <a:tr h="634000">
+                <a:tc>
+                  <a:txBody>
+                    <a:bodyPr wrap="square"/>
+                    <a:lstStyle/>
+                    <a:p>
+                      <a:pPr algn="ctr"/>
+                      <a:r>
+                        <a:rPr sz="1200" b="0">
                           <a:solidFill>
                             <a:srgbClr val="1F3564"/>
                           </a:solidFill>
-                          <a:latin typeface="IPAGothic"/>
+                          <a:latin typeface="IPAゴシック"/>
                         </a:rPr>
                         <a:t>駒澤大学</a:t>
                       </a:r>
@@ -6223,11 +6428,11 @@
                     <a:p>
                       <a:pPr algn="ctr"/>
                       <a:r>
-                        <a:rPr sz="1300" b="0">
+                        <a:rPr sz="1200" b="0">
                           <a:solidFill>
                             <a:srgbClr val="1F3564"/>
                           </a:solidFill>
-                          <a:latin typeface="IPAGothic"/>
+                          <a:latin typeface="IPAゴシック"/>
                         </a:rPr>
                         <a:t/>
                       </a:r>
@@ -6246,11 +6451,11 @@
                     <a:p>
                       <a:pPr algn="ctr"/>
                       <a:r>
-                        <a:rPr sz="1500" b="1">
+                        <a:rPr sz="1400" b="1">
                           <a:solidFill>
                             <a:srgbClr val="E85D5D"/>
                           </a:solidFill>
-                          <a:latin typeface="IPAGothic"/>
+                          <a:latin typeface="IPAゴシック"/>
                         </a:rPr>
                         <a:t>辞退</a:t>
                       </a:r>
@@ -6263,19 +6468,19 @@
                   </a:tcPr>
                 </a:tc>
               </a:tr>
-              <a:tr h="626000">
-                <a:tc>
-                  <a:txBody>
-                    <a:bodyPr wrap="square"/>
-                    <a:lstStyle/>
-                    <a:p>
-                      <a:pPr algn="ctr"/>
-                      <a:r>
-                        <a:rPr sz="1300" b="0">
+              <a:tr h="634000">
+                <a:tc>
+                  <a:txBody>
+                    <a:bodyPr wrap="square"/>
+                    <a:lstStyle/>
+                    <a:p>
+                      <a:pPr algn="ctr"/>
+                      <a:r>
+                        <a:rPr sz="1200" b="0">
                           <a:solidFill>
                             <a:srgbClr val="1F3564"/>
                           </a:solidFill>
-                          <a:latin typeface="IPAGothic"/>
+                          <a:latin typeface="IPAゴシック"/>
                         </a:rPr>
                         <a:t>専修大学(×2)</a:t>
                       </a:r>
@@ -6294,11 +6499,11 @@
                     <a:p>
                       <a:pPr algn="ctr"/>
                       <a:r>
-                        <a:rPr sz="1300" b="0">
+                        <a:rPr sz="1200" b="0">
                           <a:solidFill>
                             <a:srgbClr val="1F3564"/>
                           </a:solidFill>
-                          <a:latin typeface="IPAGothic"/>
+                          <a:latin typeface="IPAゴシック"/>
                         </a:rPr>
                         <a:t/>
                       </a:r>
@@ -6317,11 +6522,11 @@
                     <a:p>
                       <a:pPr algn="ctr"/>
                       <a:r>
-                        <a:rPr sz="1300" b="0">
+                        <a:rPr sz="1200" b="0">
                           <a:solidFill>
                             <a:srgbClr val="1F3564"/>
                           </a:solidFill>
-                          <a:latin typeface="IPAGothic"/>
+                          <a:latin typeface="IPAゴシック"/>
                         </a:rPr>
                         <a:t>選考中</a:t>
                       </a:r>
@@ -6334,19 +6539,19 @@
                   </a:tcPr>
                 </a:tc>
               </a:tr>
-              <a:tr h="626000">
-                <a:tc>
-                  <a:txBody>
-                    <a:bodyPr wrap="square"/>
-                    <a:lstStyle/>
-                    <a:p>
-                      <a:pPr algn="ctr"/>
-                      <a:r>
-                        <a:rPr sz="1300" b="0">
+              <a:tr h="634000">
+                <a:tc>
+                  <a:txBody>
+                    <a:bodyPr wrap="square"/>
+                    <a:lstStyle/>
+                    <a:p>
+                      <a:pPr algn="ctr"/>
+                      <a:r>
+                        <a:rPr sz="1200" b="0">
                           <a:solidFill>
                             <a:srgbClr val="1F3564"/>
                           </a:solidFill>
-                          <a:latin typeface="IPAGothic"/>
+                          <a:latin typeface="IPAゴシック"/>
                         </a:rPr>
                         <a:t>神奈川大学(×2)</a:t>
                       </a:r>
@@ -6365,11 +6570,11 @@
                     <a:p>
                       <a:pPr algn="ctr"/>
                       <a:r>
-                        <a:rPr sz="1300" b="0">
+                        <a:rPr sz="1200" b="0">
                           <a:solidFill>
                             <a:srgbClr val="1F3564"/>
                           </a:solidFill>
-                          <a:latin typeface="IPAGothic"/>
+                          <a:latin typeface="IPAゴシック"/>
                         </a:rPr>
                         <a:t/>
                       </a:r>
@@ -6388,11 +6593,11 @@
                     <a:p>
                       <a:pPr algn="ctr"/>
                       <a:r>
-                        <a:rPr sz="1300" b="0">
+                        <a:rPr sz="1200" b="0">
                           <a:solidFill>
                             <a:srgbClr val="1F3564"/>
                           </a:solidFill>
-                          <a:latin typeface="IPAGothic"/>
+                          <a:latin typeface="IPAゴシック"/>
                         </a:rPr>
                         <a:t>選考中</a:t>
                       </a:r>
@@ -6405,19 +6610,19 @@
                   </a:tcPr>
                 </a:tc>
               </a:tr>
-              <a:tr h="626000">
-                <a:tc>
-                  <a:txBody>
-                    <a:bodyPr wrap="square"/>
-                    <a:lstStyle/>
-                    <a:p>
-                      <a:pPr algn="ctr"/>
-                      <a:r>
-                        <a:rPr sz="1300" b="0">
+              <a:tr h="634000">
+                <a:tc>
+                  <a:txBody>
+                    <a:bodyPr wrap="square"/>
+                    <a:lstStyle/>
+                    <a:p>
+                      <a:pPr algn="ctr"/>
+                      <a:r>
+                        <a:rPr sz="1200" b="0">
                           <a:solidFill>
                             <a:srgbClr val="1F3564"/>
                           </a:solidFill>
-                          <a:latin typeface="IPAGothic"/>
+                          <a:latin typeface="IPAゴシック"/>
                         </a:rPr>
                         <a:t>日本大学(×2)</a:t>
                       </a:r>
@@ -6436,11 +6641,11 @@
                     <a:p>
                       <a:pPr algn="ctr"/>
                       <a:r>
-                        <a:rPr sz="1300" b="0">
+                        <a:rPr sz="1200" b="0">
                           <a:solidFill>
                             <a:srgbClr val="1F3564"/>
                           </a:solidFill>
-                          <a:latin typeface="IPAGothic"/>
+                          <a:latin typeface="IPAゴシック"/>
                         </a:rPr>
                         <a:t/>
                       </a:r>
@@ -6459,11 +6664,11 @@
                     <a:p>
                       <a:pPr algn="ctr"/>
                       <a:r>
-                        <a:rPr sz="1300" b="0">
+                        <a:rPr sz="1200" b="0">
                           <a:solidFill>
                             <a:srgbClr val="1F3564"/>
                           </a:solidFill>
-                          <a:latin typeface="IPAGothic"/>
+                          <a:latin typeface="IPAゴシック"/>
                         </a:rPr>
                         <a:t>選考中</a:t>
                       </a:r>
@@ -6476,19 +6681,19 @@
                   </a:tcPr>
                 </a:tc>
               </a:tr>
-              <a:tr h="626000">
-                <a:tc>
-                  <a:txBody>
-                    <a:bodyPr wrap="square"/>
-                    <a:lstStyle/>
-                    <a:p>
-                      <a:pPr algn="ctr"/>
-                      <a:r>
-                        <a:rPr sz="1300" b="0">
+              <a:tr h="634000">
+                <a:tc>
+                  <a:txBody>
+                    <a:bodyPr wrap="square"/>
+                    <a:lstStyle/>
+                    <a:p>
+                      <a:pPr algn="ctr"/>
+                      <a:r>
+                        <a:rPr sz="1200" b="0">
                           <a:solidFill>
                             <a:srgbClr val="1F3564"/>
                           </a:solidFill>
-                          <a:latin typeface="IPAGothic"/>
+                          <a:latin typeface="IPAゴシック"/>
                         </a:rPr>
                         <a:t>その他（計10名）</a:t>
                       </a:r>
@@ -6507,11 +6712,11 @@
                     <a:p>
                       <a:pPr algn="ctr"/>
                       <a:r>
-                        <a:rPr sz="1300" b="0">
+                        <a:rPr sz="1200" b="0">
                           <a:solidFill>
                             <a:srgbClr val="1F3564"/>
                           </a:solidFill>
-                          <a:latin typeface="IPAGothic"/>
+                          <a:latin typeface="IPAゴシック"/>
                         </a:rPr>
                         <a:t/>
                       </a:r>
@@ -6530,11 +6735,11 @@
                     <a:p>
                       <a:pPr algn="ctr"/>
                       <a:r>
-                        <a:rPr sz="1300" b="0">
+                        <a:rPr sz="1200" b="0">
                           <a:solidFill>
                             <a:srgbClr val="1F3564"/>
                           </a:solidFill>
-                          <a:latin typeface="IPAGothic"/>
+                          <a:latin typeface="IPAゴシック"/>
                         </a:rPr>
                         <a:t>選考中</a:t>
                       </a:r>
@@ -6614,8 +6819,8 @@
       </p:sp>
       <p:sp>
         <p:nvSpPr>
-          <p:cNvPr id="3" name="TextBox 2"/>
-          <p:cNvSpPr txBox="1"/>
+          <p:cNvPr id="3" name="Rectangle 2"/>
+          <p:cNvSpPr/>
           <p:nvPr/>
         </p:nvSpPr>
         <p:spPr>
@@ -6629,23 +6834,29 @@
           <a:solidFill>
             <a:srgbClr val="1F3564"/>
           </a:solidFill>
+          <a:ln>
+            <a:noFill/>
+          </a:ln>
         </p:spPr>
-        <p:txBody>
-          <a:bodyPr wrap="none">
-            <a:spAutoFit/>
-          </a:bodyPr>
+        <p:style>
+          <a:lnRef idx="1">
+            <a:schemeClr val="accent1"/>
+          </a:lnRef>
+          <a:fillRef idx="3">
+            <a:schemeClr val="accent1"/>
+          </a:fillRef>
+          <a:effectRef idx="2">
+            <a:schemeClr val="accent1"/>
+          </a:effectRef>
+          <a:fontRef idx="minor">
+            <a:schemeClr val="lt1"/>
+          </a:fontRef>
+        </p:style>
+        <p:txBody>
+          <a:bodyPr rtlCol="0" anchor="ctr"/>
           <a:lstStyle/>
           <a:p>
             <a:pPr algn="ctr"/>
-            <a:r>
-              <a:rPr sz="2800" b="1">
-                <a:solidFill>
-                  <a:srgbClr val="FFFFFF"/>
-                </a:solidFill>
-                <a:latin typeface="IPAGothic"/>
-              </a:rPr>
-              <a:t>辞退分析：理由・タイミング</a:t>
-            </a:r>
           </a:p>
         </p:txBody>
       </p:sp>
@@ -6657,8 +6868,8 @@
         </p:nvSpPr>
         <p:spPr>
           <a:xfrm>
-            <a:off x="360000" y="972000"/>
-            <a:ext cx="11473200" cy="324000"/>
+            <a:off x="180000" y="0"/>
+            <a:ext cx="11833200" cy="792000"/>
           </a:xfrm>
           <a:prstGeom prst="rect">
             <a:avLst/>
@@ -6671,12 +6882,47 @@
           </a:bodyPr>
           <a:lstStyle/>
           <a:p>
-            <a:r>
-              <a:rPr sz="1700" b="1">
+            <a:pPr algn="ctr"/>
+            <a:r>
+              <a:rPr sz="2600" b="1">
+                <a:solidFill>
+                  <a:srgbClr val="FFFFFF"/>
+                </a:solidFill>
+                <a:latin typeface="IPAゴシック"/>
+              </a:rPr>
+              <a:t>辞退分析：理由・タイミング</a:t>
+            </a:r>
+          </a:p>
+        </p:txBody>
+      </p:sp>
+      <p:sp>
+        <p:nvSpPr>
+          <p:cNvPr id="5" name="TextBox 4"/>
+          <p:cNvSpPr txBox="1"/>
+          <p:nvPr/>
+        </p:nvSpPr>
+        <p:spPr>
+          <a:xfrm>
+            <a:off x="360000" y="936000"/>
+            <a:ext cx="11473200" cy="288000"/>
+          </a:xfrm>
+          <a:prstGeom prst="rect">
+            <a:avLst/>
+          </a:prstGeom>
+          <a:noFill/>
+        </p:spPr>
+        <p:txBody>
+          <a:bodyPr wrap="none">
+            <a:spAutoFit/>
+          </a:bodyPr>
+          <a:lstStyle/>
+          <a:p>
+            <a:r>
+              <a:rPr sz="1600" b="1">
                 <a:solidFill>
                   <a:srgbClr val="E85D5D"/>
                 </a:solidFill>
-                <a:latin typeface="IPAGothic"/>
+                <a:latin typeface="IPAゴシック"/>
               </a:rPr>
               <a:t>辞退者：1名（説明会実施前辞退）</a:t>
             </a:r>
@@ -6685,15 +6931,15 @@
       </p:sp>
       <p:graphicFrame>
         <p:nvGraphicFramePr>
-          <p:cNvPr id="5" name="Table 4"/>
+          <p:cNvPr id="6" name="Table 5"/>
           <p:cNvGraphicFramePr>
             <a:graphicFrameLocks noGrp="1"/>
           </p:cNvGraphicFramePr>
           <p:nvPr/>
         </p:nvGraphicFramePr>
         <p:xfrm>
-          <a:off x="180000" y="1404000"/>
-          <a:ext cx="12013200" cy="1152000"/>
+          <a:off x="144000" y="1332000"/>
+          <a:ext cx="11833200" cy="1152000"/>
         </p:xfrm>
         <a:graphic>
           <a:graphicData uri="http://schemas.openxmlformats.org/drawingml/2006/table">
@@ -6705,7 +6951,7 @@
                 <a:gridCol w="1800000"/>
                 <a:gridCol w="1440000"/>
                 <a:gridCol w="2340000"/>
-                <a:gridCol w="6433200"/>
+                <a:gridCol w="6253200"/>
               </a:tblGrid>
               <a:tr h="576000">
                 <a:tc>
@@ -6715,11 +6961,11 @@
                     <a:p>
                       <a:pPr algn="ctr"/>
                       <a:r>
-                        <a:rPr sz="1400" b="1">
+                        <a:rPr sz="1300" b="1">
                           <a:solidFill>
                             <a:srgbClr val="FFFFFF"/>
                           </a:solidFill>
-                          <a:latin typeface="IPAGothic"/>
+                          <a:latin typeface="IPAゴシック"/>
                         </a:rPr>
                         <a:t>ステップ</a:t>
                       </a:r>
@@ -6738,11 +6984,11 @@
                     <a:p>
                       <a:pPr algn="ctr"/>
                       <a:r>
-                        <a:rPr sz="1400" b="1">
+                        <a:rPr sz="1300" b="1">
                           <a:solidFill>
                             <a:srgbClr val="FFFFFF"/>
                           </a:solidFill>
-                          <a:latin typeface="IPAGothic"/>
+                          <a:latin typeface="IPAゴシック"/>
                         </a:rPr>
                         <a:t>辞退タイミング</a:t>
                       </a:r>
@@ -6761,11 +7007,11 @@
                     <a:p>
                       <a:pPr algn="ctr"/>
                       <a:r>
-                        <a:rPr sz="1400" b="1">
+                        <a:rPr sz="1300" b="1">
                           <a:solidFill>
                             <a:srgbClr val="FFFFFF"/>
                           </a:solidFill>
-                          <a:latin typeface="IPAGothic"/>
+                          <a:latin typeface="IPAゴシック"/>
                         </a:rPr>
                         <a:t>辞退理由分類</a:t>
                       </a:r>
@@ -6784,11 +7030,11 @@
                     <a:p>
                       <a:pPr algn="ctr"/>
                       <a:r>
-                        <a:rPr sz="1400" b="1">
+                        <a:rPr sz="1300" b="1">
                           <a:solidFill>
                             <a:srgbClr val="FFFFFF"/>
                           </a:solidFill>
-                          <a:latin typeface="IPAGothic"/>
+                          <a:latin typeface="IPAゴシック"/>
                         </a:rPr>
                         <a:t>辞退理由詳細</a:t>
                       </a:r>
@@ -6809,13 +7055,59 @@
                     <a:p>
                       <a:pPr algn="ctr"/>
                       <a:r>
+                        <a:rPr sz="1200" b="0">
+                          <a:solidFill>
+                            <a:srgbClr val="1F3564"/>
+                          </a:solidFill>
+                          <a:latin typeface="IPAゴシック"/>
+                        </a:rPr>
+                        <a:t>説明会兼WEB選考</a:t>
+                      </a:r>
+                    </a:p>
+                  </a:txBody>
+                  <a:tcPr>
+                    <a:solidFill>
+                      <a:srgbClr val="FFFFFF"/>
+                    </a:solidFill>
+                  </a:tcPr>
+                </a:tc>
+                <a:tc>
+                  <a:txBody>
+                    <a:bodyPr wrap="square"/>
+                    <a:lstStyle/>
+                    <a:p>
+                      <a:pPr algn="ctr"/>
+                      <a:r>
                         <a:rPr sz="1300" b="0">
                           <a:solidFill>
+                            <a:srgbClr val="E85D5D"/>
+                          </a:solidFill>
+                          <a:latin typeface="IPAゴシック"/>
+                        </a:rPr>
+                        <a:t>実施前辞退</a:t>
+                      </a:r>
+                    </a:p>
+                  </a:txBody>
+                  <a:tcPr>
+                    <a:solidFill>
+                      <a:srgbClr val="FFF0F0"/>
+                    </a:solidFill>
+                  </a:tcPr>
+                </a:tc>
+                <a:tc>
+                  <a:txBody>
+                    <a:bodyPr wrap="square"/>
+                    <a:lstStyle/>
+                    <a:p>
+                      <a:pPr algn="ctr"/>
+                      <a:r>
+                        <a:rPr sz="1200" b="0">
+                          <a:solidFill>
                             <a:srgbClr val="1F3564"/>
                           </a:solidFill>
-                          <a:latin typeface="IPAGothic"/>
-                        </a:rPr>
-                        <a:t>説明会兼WEB選考</a:t>
+                          <a:latin typeface="IPAゴシック"/>
+                        </a:rPr>
+                        <a:t>働き方・制度・カルチャー</a:t>
                       </a:r>
                     </a:p>
                   </a:txBody>
@@ -6832,57 +7124,11 @@
                     <a:p>
                       <a:pPr algn="ctr"/>
                       <a:r>
-                        <a:rPr sz="1400" b="0">
-                          <a:solidFill>
-                            <a:srgbClr val="E85D5D"/>
-                          </a:solidFill>
-                          <a:latin typeface="IPAGothic"/>
-                        </a:rPr>
-                        <a:t>実施前辞退</a:t>
-                      </a:r>
-                    </a:p>
-                  </a:txBody>
-                  <a:tcPr>
-                    <a:solidFill>
-                      <a:srgbClr val="FFF0F0"/>
-                    </a:solidFill>
-                  </a:tcPr>
-                </a:tc>
-                <a:tc>
-                  <a:txBody>
-                    <a:bodyPr wrap="square"/>
-                    <a:lstStyle/>
-                    <a:p>
-                      <a:pPr algn="ctr"/>
-                      <a:r>
-                        <a:rPr sz="1300" b="0">
+                        <a:rPr sz="1200" b="0">
                           <a:solidFill>
                             <a:srgbClr val="1F3564"/>
                           </a:solidFill>
-                          <a:latin typeface="IPAGothic"/>
-                        </a:rPr>
-                        <a:t>働き方・制度・カルチャー</a:t>
-                      </a:r>
-                    </a:p>
-                  </a:txBody>
-                  <a:tcPr>
-                    <a:solidFill>
-                      <a:srgbClr val="FFFFFF"/>
-                    </a:solidFill>
-                  </a:tcPr>
-                </a:tc>
-                <a:tc>
-                  <a:txBody>
-                    <a:bodyPr wrap="square"/>
-                    <a:lstStyle/>
-                    <a:p>
-                      <a:pPr algn="ctr"/>
-                      <a:r>
-                        <a:rPr sz="1300" b="0">
-                          <a:solidFill>
-                            <a:srgbClr val="1F3564"/>
-                          </a:solidFill>
-                          <a:latin typeface="IPAGothic"/>
+                          <a:latin typeface="IPAゴシック"/>
                         </a:rPr>
                         <a:t>会社説明会前：自身の軸と合わないと感じたため</a:t>
                       </a:r>
@@ -6901,14 +7147,14 @@
       </p:graphicFrame>
       <p:sp>
         <p:nvSpPr>
-          <p:cNvPr id="6" name="Rectangle 5"/>
+          <p:cNvPr id="7" name="Rectangle 6"/>
           <p:cNvSpPr/>
           <p:nvPr/>
         </p:nvSpPr>
         <p:spPr>
           <a:xfrm>
-            <a:off x="180000" y="2772000"/>
-            <a:ext cx="3776400" cy="3942000"/>
+            <a:off x="144000" y="2700000"/>
+            <a:ext cx="3812400" cy="4050000"/>
           </a:xfrm>
           <a:prstGeom prst="rect">
             <a:avLst/>
@@ -6916,7 +7162,7 @@
           <a:solidFill>
             <a:srgbClr val="FFFFFF"/>
           </a:solidFill>
-          <a:ln w="25400">
+          <a:ln w="19050">
             <a:solidFill>
               <a:srgbClr val="E85D5D"/>
             </a:solidFill>
@@ -6946,14 +7192,14 @@
       </p:sp>
       <p:sp>
         <p:nvSpPr>
-          <p:cNvPr id="7" name="TextBox 6"/>
+          <p:cNvPr id="8" name="TextBox 7"/>
           <p:cNvSpPr txBox="1"/>
           <p:nvPr/>
         </p:nvSpPr>
         <p:spPr>
           <a:xfrm>
-            <a:off x="288000" y="2880000"/>
-            <a:ext cx="3596400" cy="3762000"/>
+            <a:off x="252000" y="2808000"/>
+            <a:ext cx="3632401" cy="3906001"/>
           </a:xfrm>
           <a:prstGeom prst="rect">
             <a:avLst/>
@@ -6968,11 +7214,11 @@
           <a:p>
             <a:pPr algn="ctr"/>
             <a:r>
-              <a:rPr sz="1400" b="1">
+              <a:rPr sz="1300" b="1">
                 <a:solidFill>
                   <a:srgbClr val="1F3564"/>
                 </a:solidFill>
-                <a:latin typeface="IPAGothic"/>
+                <a:latin typeface="IPAゴシック"/>
               </a:rPr>
               <a:t>説明会兼WEB選考</a:t>
             </a:r>
@@ -6980,11 +7226,11 @@
           <a:p>
             <a:pPr algn="ctr"/>
             <a:r>
-              <a:rPr sz="1800" b="1">
+              <a:rPr sz="1700" b="1">
                 <a:solidFill>
                   <a:srgbClr val="E85D5D"/>
                 </a:solidFill>
-                <a:latin typeface="IPAGothic"/>
+                <a:latin typeface="IPAゴシック"/>
               </a:rPr>
               <a:t>実施前辞退：1名</a:t>
             </a:r>
@@ -6992,39 +7238,39 @@
           <a:p>
             <a:pPr algn="ctr"/>
             <a:r>
-              <a:rPr sz="1800" b="1">
+              <a:rPr sz="1700" b="1">
                 <a:solidFill>
                   <a:srgbClr val="AAAAAA"/>
                 </a:solidFill>
-                <a:latin typeface="IPAGothic"/>
+                <a:latin typeface="IPAゴシック"/>
               </a:rPr>
               <a:t>実施後辞退：0名</a:t>
             </a:r>
           </a:p>
           <a:p>
             <a:r>
-              <a:rPr sz="1200" b="0">
+              <a:rPr sz="1100" b="0">
                 <a:solidFill>
                   <a:srgbClr val="555555"/>
                 </a:solidFill>
-                <a:latin typeface="IPAGothic"/>
+                <a:latin typeface="IPAゴシック"/>
               </a:rPr>
-              <a:t>説明会前の離脱。
-参加後の辞退はなし。</a:t>
-            </a:r>
-          </a:p>
-        </p:txBody>
-      </p:sp>
-      <p:sp>
-        <p:nvSpPr>
-          <p:cNvPr id="8" name="Rectangle 7"/>
+              <a:t>説明会前の離脱
+参加後の辞退はなし</a:t>
+            </a:r>
+          </a:p>
+        </p:txBody>
+      </p:sp>
+      <p:sp>
+        <p:nvSpPr>
+          <p:cNvPr id="9" name="Rectangle 8"/>
           <p:cNvSpPr/>
           <p:nvPr/>
         </p:nvSpPr>
         <p:spPr>
           <a:xfrm>
-            <a:off x="4064400" y="2772000"/>
-            <a:ext cx="3776400" cy="3942000"/>
+            <a:off x="4028400" y="2700000"/>
+            <a:ext cx="3812400" cy="4050000"/>
           </a:xfrm>
           <a:prstGeom prst="rect">
             <a:avLst/>
@@ -7032,7 +7278,7 @@
           <a:solidFill>
             <a:srgbClr val="FFFFFF"/>
           </a:solidFill>
-          <a:ln w="25400">
+          <a:ln w="19050">
             <a:solidFill>
               <a:srgbClr val="AAAAAA"/>
             </a:solidFill>
@@ -7062,14 +7308,14 @@
       </p:sp>
       <p:sp>
         <p:nvSpPr>
-          <p:cNvPr id="9" name="TextBox 8"/>
+          <p:cNvPr id="10" name="TextBox 9"/>
           <p:cNvSpPr txBox="1"/>
           <p:nvPr/>
         </p:nvSpPr>
         <p:spPr>
           <a:xfrm>
-            <a:off x="4172400" y="2880000"/>
-            <a:ext cx="3596400" cy="3762000"/>
+            <a:off x="4136400" y="2808000"/>
+            <a:ext cx="3632401" cy="3906001"/>
           </a:xfrm>
           <a:prstGeom prst="rect">
             <a:avLst/>
@@ -7084,11 +7330,11 @@
           <a:p>
             <a:pPr algn="ctr"/>
             <a:r>
-              <a:rPr sz="1400" b="1">
+              <a:rPr sz="1300" b="1">
                 <a:solidFill>
                   <a:srgbClr val="1F3564"/>
                 </a:solidFill>
-                <a:latin typeface="IPAGothic"/>
+                <a:latin typeface="IPAゴシック"/>
               </a:rPr>
               <a:t>一次選考(WEB)</a:t>
             </a:r>
@@ -7096,11 +7342,11 @@
           <a:p>
             <a:pPr algn="ctr"/>
             <a:r>
-              <a:rPr sz="1800" b="1">
+              <a:rPr sz="1700" b="1">
                 <a:solidFill>
                   <a:srgbClr val="AAAAAA"/>
                 </a:solidFill>
-                <a:latin typeface="IPAGothic"/>
+                <a:latin typeface="IPAゴシック"/>
               </a:rPr>
               <a:t>実施前辞退：0名</a:t>
             </a:r>
@@ -7108,22 +7354,22 @@
           <a:p>
             <a:pPr algn="ctr"/>
             <a:r>
-              <a:rPr sz="1800" b="1">
+              <a:rPr sz="1700" b="1">
                 <a:solidFill>
                   <a:srgbClr val="AAAAAA"/>
                 </a:solidFill>
-                <a:latin typeface="IPAGothic"/>
+                <a:latin typeface="IPAゴシック"/>
               </a:rPr>
               <a:t>実施後辞退：0名</a:t>
             </a:r>
           </a:p>
           <a:p>
             <a:r>
-              <a:rPr sz="1200" b="0">
+              <a:rPr sz="1100" b="0">
                 <a:solidFill>
                   <a:srgbClr val="555555"/>
                 </a:solidFill>
-                <a:latin typeface="IPAGothic"/>
+                <a:latin typeface="IPAゴシック"/>
               </a:rPr>
               <a:t>未実施（選考前フェーズ）</a:t>
             </a:r>
@@ -7132,14 +7378,14 @@
       </p:sp>
       <p:sp>
         <p:nvSpPr>
-          <p:cNvPr id="10" name="Rectangle 9"/>
+          <p:cNvPr id="11" name="Rectangle 10"/>
           <p:cNvSpPr/>
           <p:nvPr/>
         </p:nvSpPr>
         <p:spPr>
           <a:xfrm>
-            <a:off x="7948800" y="2772000"/>
-            <a:ext cx="3776400" cy="3942000"/>
+            <a:off x="7912800" y="2700000"/>
+            <a:ext cx="3812400" cy="4050000"/>
           </a:xfrm>
           <a:prstGeom prst="rect">
             <a:avLst/>
@@ -7147,7 +7393,7 @@
           <a:solidFill>
             <a:srgbClr val="FFFFFF"/>
           </a:solidFill>
-          <a:ln w="25400">
+          <a:ln w="19050">
             <a:solidFill>
               <a:srgbClr val="AAAAAA"/>
             </a:solidFill>
@@ -7177,14 +7423,14 @@
       </p:sp>
       <p:sp>
         <p:nvSpPr>
-          <p:cNvPr id="11" name="TextBox 10"/>
+          <p:cNvPr id="12" name="TextBox 11"/>
           <p:cNvSpPr txBox="1"/>
           <p:nvPr/>
         </p:nvSpPr>
         <p:spPr>
           <a:xfrm>
-            <a:off x="8056800" y="2880000"/>
-            <a:ext cx="3596400" cy="3762000"/>
+            <a:off x="8020800" y="2808000"/>
+            <a:ext cx="3632401" cy="3906001"/>
           </a:xfrm>
           <a:prstGeom prst="rect">
             <a:avLst/>
@@ -7199,11 +7445,11 @@
           <a:p>
             <a:pPr algn="ctr"/>
             <a:r>
-              <a:rPr sz="1400" b="1">
+              <a:rPr sz="1300" b="1">
                 <a:solidFill>
                   <a:srgbClr val="1F3564"/>
                 </a:solidFill>
-                <a:latin typeface="IPAGothic"/>
+                <a:latin typeface="IPAゴシック"/>
               </a:rPr>
               <a:t>最終選考(対面)</a:t>
             </a:r>
@@ -7211,11 +7457,11 @@
           <a:p>
             <a:pPr algn="ctr"/>
             <a:r>
-              <a:rPr sz="1800" b="1">
+              <a:rPr sz="1700" b="1">
                 <a:solidFill>
                   <a:srgbClr val="AAAAAA"/>
                 </a:solidFill>
-                <a:latin typeface="IPAGothic"/>
+                <a:latin typeface="IPAゴシック"/>
               </a:rPr>
               <a:t>実施前辞退：0名</a:t>
             </a:r>
@@ -7223,22 +7469,22 @@
           <a:p>
             <a:pPr algn="ctr"/>
             <a:r>
-              <a:rPr sz="1800" b="1">
+              <a:rPr sz="1700" b="1">
                 <a:solidFill>
                   <a:srgbClr val="AAAAAA"/>
                 </a:solidFill>
-                <a:latin typeface="IPAGothic"/>
+                <a:latin typeface="IPAゴシック"/>
               </a:rPr>
               <a:t>実施後辞退：0名</a:t>
             </a:r>
           </a:p>
           <a:p>
             <a:r>
-              <a:rPr sz="1200" b="0">
+              <a:rPr sz="1100" b="0">
                 <a:solidFill>
                   <a:srgbClr val="555555"/>
                 </a:solidFill>
-                <a:latin typeface="IPAGothic"/>
+                <a:latin typeface="IPAゴシック"/>
               </a:rPr>
               <a:t>未実施（選考前フェーズ）</a:t>
             </a:r>
@@ -7308,8 +7554,8 @@
       </p:sp>
       <p:sp>
         <p:nvSpPr>
-          <p:cNvPr id="3" name="TextBox 2"/>
-          <p:cNvSpPr txBox="1"/>
+          <p:cNvPr id="3" name="Rectangle 2"/>
+          <p:cNvSpPr/>
           <p:nvPr/>
         </p:nvSpPr>
         <p:spPr>
@@ -7323,6 +7569,47 @@
           <a:solidFill>
             <a:srgbClr val="1F3564"/>
           </a:solidFill>
+          <a:ln>
+            <a:noFill/>
+          </a:ln>
+        </p:spPr>
+        <p:style>
+          <a:lnRef idx="1">
+            <a:schemeClr val="accent1"/>
+          </a:lnRef>
+          <a:fillRef idx="3">
+            <a:schemeClr val="accent1"/>
+          </a:fillRef>
+          <a:effectRef idx="2">
+            <a:schemeClr val="accent1"/>
+          </a:effectRef>
+          <a:fontRef idx="minor">
+            <a:schemeClr val="lt1"/>
+          </a:fontRef>
+        </p:style>
+        <p:txBody>
+          <a:bodyPr rtlCol="0" anchor="ctr"/>
+          <a:lstStyle/>
+          <a:p>
+            <a:pPr algn="ctr"/>
+          </a:p>
+        </p:txBody>
+      </p:sp>
+      <p:sp>
+        <p:nvSpPr>
+          <p:cNvPr id="4" name="TextBox 3"/>
+          <p:cNvSpPr txBox="1"/>
+          <p:nvPr/>
+        </p:nvSpPr>
+        <p:spPr>
+          <a:xfrm>
+            <a:off x="180000" y="0"/>
+            <a:ext cx="11833200" cy="792000"/>
+          </a:xfrm>
+          <a:prstGeom prst="rect">
+            <a:avLst/>
+          </a:prstGeom>
+          <a:noFill/>
         </p:spPr>
         <p:txBody>
           <a:bodyPr wrap="none">
@@ -7332,11 +7619,11 @@
           <a:p>
             <a:pPr algn="ctr"/>
             <a:r>
-              <a:rPr sz="2800" b="1">
+              <a:rPr sz="2600" b="1">
                 <a:solidFill>
                   <a:srgbClr val="FFFFFF"/>
                 </a:solidFill>
-                <a:latin typeface="IPAGothic"/>
+                <a:latin typeface="IPAゴシック"/>
               </a:rPr>
               <a:t>エージェント（人材紹介会社）別　応募状況</a:t>
             </a:r>
@@ -7345,7 +7632,7 @@
       </p:sp>
       <p:pic>
         <p:nvPicPr>
-          <p:cNvPr id="4" name="Picture 3" descr="agency_chart.png"/>
+          <p:cNvPr id="5" name="Picture 4" descr="agency_chart.png"/>
           <p:cNvPicPr>
             <a:picLocks noChangeAspect="1"/>
           </p:cNvPicPr>
@@ -7359,8 +7646,8 @@
         </p:blipFill>
         <p:spPr>
           <a:xfrm>
-            <a:off x="180000" y="972000"/>
-            <a:ext cx="6584328" cy="5526000"/>
+            <a:off x="180000" y="936000"/>
+            <a:ext cx="6584328" cy="5634000"/>
           </a:xfrm>
           <a:prstGeom prst="rect">
             <a:avLst/>
@@ -7369,15 +7656,15 @@
       </p:pic>
       <p:graphicFrame>
         <p:nvGraphicFramePr>
-          <p:cNvPr id="5" name="Table 4"/>
+          <p:cNvPr id="6" name="Table 5"/>
           <p:cNvGraphicFramePr>
             <a:graphicFrameLocks noGrp="1"/>
           </p:cNvGraphicFramePr>
           <p:nvPr/>
         </p:nvGraphicFramePr>
         <p:xfrm>
-          <a:off x="6706260.000000001" y="1008000"/>
-          <a:ext cx="5243073" cy="5526000"/>
+          <a:off x="6706260" y="972000"/>
+          <a:ext cx="5243073" cy="5634000"/>
         </p:xfrm>
         <a:graphic>
           <a:graphicData uri="http://schemas.openxmlformats.org/drawingml/2006/table">
@@ -7392,7 +7679,193 @@
                 <a:gridCol w="681599"/>
                 <a:gridCol w="786461"/>
               </a:tblGrid>
-              <a:tr h="1105200">
+              <a:tr h="1126800">
+                <a:tc>
+                  <a:txBody>
+                    <a:bodyPr wrap="square"/>
+                    <a:lstStyle/>
+                    <a:p>
+                      <a:pPr algn="ctr"/>
+                      <a:r>
+                        <a:rPr sz="1300" b="1">
+                          <a:solidFill>
+                            <a:srgbClr val="FFFFFF"/>
+                          </a:solidFill>
+                          <a:latin typeface="IPAゴシック"/>
+                        </a:rPr>
+                        <a:t>エージェント企業名</a:t>
+                      </a:r>
+                    </a:p>
+                  </a:txBody>
+                  <a:tcPr>
+                    <a:solidFill>
+                      <a:srgbClr val="1F3564"/>
+                    </a:solidFill>
+                  </a:tcPr>
+                </a:tc>
+                <a:tc>
+                  <a:txBody>
+                    <a:bodyPr wrap="square"/>
+                    <a:lstStyle/>
+                    <a:p>
+                      <a:pPr algn="ctr"/>
+                      <a:r>
+                        <a:rPr sz="1300" b="1">
+                          <a:solidFill>
+                            <a:srgbClr val="FFFFFF"/>
+                          </a:solidFill>
+                          <a:latin typeface="IPAゴシック"/>
+                        </a:rPr>
+                        <a:t>紹介数</a:t>
+                      </a:r>
+                    </a:p>
+                  </a:txBody>
+                  <a:tcPr>
+                    <a:solidFill>
+                      <a:srgbClr val="1F3564"/>
+                    </a:solidFill>
+                  </a:tcPr>
+                </a:tc>
+                <a:tc>
+                  <a:txBody>
+                    <a:bodyPr wrap="square"/>
+                    <a:lstStyle/>
+                    <a:p>
+                      <a:pPr algn="ctr"/>
+                      <a:r>
+                        <a:rPr sz="1300" b="1">
+                          <a:solidFill>
+                            <a:srgbClr val="FFFFFF"/>
+                          </a:solidFill>
+                          <a:latin typeface="IPAゴシック"/>
+                        </a:rPr>
+                        <a:t>選考中</a:t>
+                      </a:r>
+                    </a:p>
+                  </a:txBody>
+                  <a:tcPr>
+                    <a:solidFill>
+                      <a:srgbClr val="1F3564"/>
+                    </a:solidFill>
+                  </a:tcPr>
+                </a:tc>
+                <a:tc>
+                  <a:txBody>
+                    <a:bodyPr wrap="square"/>
+                    <a:lstStyle/>
+                    <a:p>
+                      <a:pPr algn="ctr"/>
+                      <a:r>
+                        <a:rPr sz="1300" b="1">
+                          <a:solidFill>
+                            <a:srgbClr val="FFFFFF"/>
+                          </a:solidFill>
+                          <a:latin typeface="IPAゴシック"/>
+                        </a:rPr>
+                        <a:t>辞退</a:t>
+                      </a:r>
+                    </a:p>
+                  </a:txBody>
+                  <a:tcPr>
+                    <a:solidFill>
+                      <a:srgbClr val="1F3564"/>
+                    </a:solidFill>
+                  </a:tcPr>
+                </a:tc>
+                <a:tc>
+                  <a:txBody>
+                    <a:bodyPr wrap="square"/>
+                    <a:lstStyle/>
+                    <a:p>
+                      <a:pPr algn="ctr"/>
+                      <a:r>
+                        <a:rPr sz="1300" b="1">
+                          <a:solidFill>
+                            <a:srgbClr val="FFFFFF"/>
+                          </a:solidFill>
+                          <a:latin typeface="IPAゴシック"/>
+                        </a:rPr>
+                        <a:t>辞退率</a:t>
+                      </a:r>
+                    </a:p>
+                  </a:txBody>
+                  <a:tcPr>
+                    <a:solidFill>
+                      <a:srgbClr val="1F3564"/>
+                    </a:solidFill>
+                  </a:tcPr>
+                </a:tc>
+              </a:tr>
+              <a:tr h="1126800">
+                <a:tc>
+                  <a:txBody>
+                    <a:bodyPr wrap="square"/>
+                    <a:lstStyle/>
+                    <a:p>
+                      <a:pPr algn="ctr"/>
+                      <a:r>
+                        <a:rPr sz="1300" b="0">
+                          <a:solidFill>
+                            <a:srgbClr val="1F3564"/>
+                          </a:solidFill>
+                          <a:latin typeface="IPAゴシック"/>
+                        </a:rPr>
+                        <a:t>レバレジーズ株式会社</a:t>
+                      </a:r>
+                    </a:p>
+                  </a:txBody>
+                  <a:tcPr>
+                    <a:solidFill>
+                      <a:srgbClr val="FFFFFF"/>
+                    </a:solidFill>
+                  </a:tcPr>
+                </a:tc>
+                <a:tc>
+                  <a:txBody>
+                    <a:bodyPr wrap="square"/>
+                    <a:lstStyle/>
+                    <a:p>
+                      <a:pPr algn="ctr"/>
+                      <a:r>
+                        <a:rPr sz="1300" b="0">
+                          <a:solidFill>
+                            <a:srgbClr val="1F3564"/>
+                          </a:solidFill>
+                          <a:latin typeface="IPAゴシック"/>
+                        </a:rPr>
+                        <a:t>16名</a:t>
+                      </a:r>
+                    </a:p>
+                  </a:txBody>
+                  <a:tcPr>
+                    <a:solidFill>
+                      <a:srgbClr val="FFFFFF"/>
+                    </a:solidFill>
+                  </a:tcPr>
+                </a:tc>
+                <a:tc>
+                  <a:txBody>
+                    <a:bodyPr wrap="square"/>
+                    <a:lstStyle/>
+                    <a:p>
+                      <a:pPr algn="ctr"/>
+                      <a:r>
+                        <a:rPr sz="1300" b="0">
+                          <a:solidFill>
+                            <a:srgbClr val="1F3564"/>
+                          </a:solidFill>
+                          <a:latin typeface="IPAゴシック"/>
+                        </a:rPr>
+                        <a:t>15名</a:t>
+                      </a:r>
+                    </a:p>
+                  </a:txBody>
+                  <a:tcPr>
+                    <a:solidFill>
+                      <a:srgbClr val="FFFFFF"/>
+                    </a:solidFill>
+                  </a:tcPr>
+                </a:tc>
                 <a:tc>
                   <a:txBody>
                     <a:bodyPr wrap="square"/>
@@ -7402,20 +7875,279 @@
                       <a:r>
                         <a:rPr sz="1400" b="1">
                           <a:solidFill>
-                            <a:srgbClr val="FFFFFF"/>
-                          </a:solidFill>
-                          <a:latin typeface="IPAGothic"/>
-                        </a:rPr>
-                        <a:t>エージェント企業名</a:t>
-                      </a:r>
-                    </a:p>
-                  </a:txBody>
-                  <a:tcPr>
-                    <a:solidFill>
-                      <a:srgbClr val="1F3564"/>
-                    </a:solidFill>
-                  </a:tcPr>
-                </a:tc>
+                            <a:srgbClr val="E85D5D"/>
+                          </a:solidFill>
+                          <a:latin typeface="IPAゴシック"/>
+                        </a:rPr>
+                        <a:t>1名</a:t>
+                      </a:r>
+                    </a:p>
+                  </a:txBody>
+                  <a:tcPr>
+                    <a:solidFill>
+                      <a:srgbClr val="FFF0F0"/>
+                    </a:solidFill>
+                  </a:tcPr>
+                </a:tc>
+                <a:tc>
+                  <a:txBody>
+                    <a:bodyPr wrap="square"/>
+                    <a:lstStyle/>
+                    <a:p>
+                      <a:pPr algn="ctr"/>
+                      <a:r>
+                        <a:rPr sz="1300" b="0">
+                          <a:solidFill>
+                            <a:srgbClr val="1F3564"/>
+                          </a:solidFill>
+                          <a:latin typeface="IPAゴシック"/>
+                        </a:rPr>
+                        <a:t>6.3%</a:t>
+                      </a:r>
+                    </a:p>
+                  </a:txBody>
+                  <a:tcPr>
+                    <a:solidFill>
+                      <a:srgbClr val="FFFFFF"/>
+                    </a:solidFill>
+                  </a:tcPr>
+                </a:tc>
+              </a:tr>
+              <a:tr h="1126800">
+                <a:tc>
+                  <a:txBody>
+                    <a:bodyPr wrap="square"/>
+                    <a:lstStyle/>
+                    <a:p>
+                      <a:pPr algn="ctr"/>
+                      <a:r>
+                        <a:rPr sz="1300" b="0">
+                          <a:solidFill>
+                            <a:srgbClr val="1F3564"/>
+                          </a:solidFill>
+                          <a:latin typeface="IPAゴシック"/>
+                        </a:rPr>
+                        <a:t>キャリアスタート株式会社</a:t>
+                      </a:r>
+                    </a:p>
+                  </a:txBody>
+                  <a:tcPr>
+                    <a:solidFill>
+                      <a:srgbClr val="ECF0F8"/>
+                    </a:solidFill>
+                  </a:tcPr>
+                </a:tc>
+                <a:tc>
+                  <a:txBody>
+                    <a:bodyPr wrap="square"/>
+                    <a:lstStyle/>
+                    <a:p>
+                      <a:pPr algn="ctr"/>
+                      <a:r>
+                        <a:rPr sz="1300" b="0">
+                          <a:solidFill>
+                            <a:srgbClr val="1F3564"/>
+                          </a:solidFill>
+                          <a:latin typeface="IPAゴシック"/>
+                        </a:rPr>
+                        <a:t>2名</a:t>
+                      </a:r>
+                    </a:p>
+                  </a:txBody>
+                  <a:tcPr>
+                    <a:solidFill>
+                      <a:srgbClr val="ECF0F8"/>
+                    </a:solidFill>
+                  </a:tcPr>
+                </a:tc>
+                <a:tc>
+                  <a:txBody>
+                    <a:bodyPr wrap="square"/>
+                    <a:lstStyle/>
+                    <a:p>
+                      <a:pPr algn="ctr"/>
+                      <a:r>
+                        <a:rPr sz="1300" b="0">
+                          <a:solidFill>
+                            <a:srgbClr val="1F3564"/>
+                          </a:solidFill>
+                          <a:latin typeface="IPAゴシック"/>
+                        </a:rPr>
+                        <a:t>2名</a:t>
+                      </a:r>
+                    </a:p>
+                  </a:txBody>
+                  <a:tcPr>
+                    <a:solidFill>
+                      <a:srgbClr val="ECF0F8"/>
+                    </a:solidFill>
+                  </a:tcPr>
+                </a:tc>
+                <a:tc>
+                  <a:txBody>
+                    <a:bodyPr wrap="square"/>
+                    <a:lstStyle/>
+                    <a:p>
+                      <a:pPr algn="ctr"/>
+                      <a:r>
+                        <a:rPr sz="1300" b="0">
+                          <a:solidFill>
+                            <a:srgbClr val="AAAAAA"/>
+                          </a:solidFill>
+                          <a:latin typeface="IPAゴシック"/>
+                        </a:rPr>
+                        <a:t>0名</a:t>
+                      </a:r>
+                    </a:p>
+                  </a:txBody>
+                  <a:tcPr>
+                    <a:solidFill>
+                      <a:srgbClr val="ECF0F8"/>
+                    </a:solidFill>
+                  </a:tcPr>
+                </a:tc>
+                <a:tc>
+                  <a:txBody>
+                    <a:bodyPr wrap="square"/>
+                    <a:lstStyle/>
+                    <a:p>
+                      <a:pPr algn="ctr"/>
+                      <a:r>
+                        <a:rPr sz="1300" b="0">
+                          <a:solidFill>
+                            <a:srgbClr val="AAAAAA"/>
+                          </a:solidFill>
+                          <a:latin typeface="IPAゴシック"/>
+                        </a:rPr>
+                        <a:t>0.0%</a:t>
+                      </a:r>
+                    </a:p>
+                  </a:txBody>
+                  <a:tcPr>
+                    <a:solidFill>
+                      <a:srgbClr val="ECF0F8"/>
+                    </a:solidFill>
+                  </a:tcPr>
+                </a:tc>
+              </a:tr>
+              <a:tr h="1126800">
+                <a:tc>
+                  <a:txBody>
+                    <a:bodyPr wrap="square"/>
+                    <a:lstStyle/>
+                    <a:p>
+                      <a:pPr algn="ctr"/>
+                      <a:r>
+                        <a:rPr sz="1300" b="0">
+                          <a:solidFill>
+                            <a:srgbClr val="1F3564"/>
+                          </a:solidFill>
+                          <a:latin typeface="IPAゴシック"/>
+                        </a:rPr>
+                        <a:t>株式会社キャリタス</a:t>
+                      </a:r>
+                    </a:p>
+                  </a:txBody>
+                  <a:tcPr>
+                    <a:solidFill>
+                      <a:srgbClr val="FFFFFF"/>
+                    </a:solidFill>
+                  </a:tcPr>
+                </a:tc>
+                <a:tc>
+                  <a:txBody>
+                    <a:bodyPr wrap="square"/>
+                    <a:lstStyle/>
+                    <a:p>
+                      <a:pPr algn="ctr"/>
+                      <a:r>
+                        <a:rPr sz="1300" b="0">
+                          <a:solidFill>
+                            <a:srgbClr val="1F3564"/>
+                          </a:solidFill>
+                          <a:latin typeface="IPAゴシック"/>
+                        </a:rPr>
+                        <a:t>1名</a:t>
+                      </a:r>
+                    </a:p>
+                  </a:txBody>
+                  <a:tcPr>
+                    <a:solidFill>
+                      <a:srgbClr val="FFFFFF"/>
+                    </a:solidFill>
+                  </a:tcPr>
+                </a:tc>
+                <a:tc>
+                  <a:txBody>
+                    <a:bodyPr wrap="square"/>
+                    <a:lstStyle/>
+                    <a:p>
+                      <a:pPr algn="ctr"/>
+                      <a:r>
+                        <a:rPr sz="1300" b="0">
+                          <a:solidFill>
+                            <a:srgbClr val="1F3564"/>
+                          </a:solidFill>
+                          <a:latin typeface="IPAゴシック"/>
+                        </a:rPr>
+                        <a:t>1名</a:t>
+                      </a:r>
+                    </a:p>
+                  </a:txBody>
+                  <a:tcPr>
+                    <a:solidFill>
+                      <a:srgbClr val="FFFFFF"/>
+                    </a:solidFill>
+                  </a:tcPr>
+                </a:tc>
+                <a:tc>
+                  <a:txBody>
+                    <a:bodyPr wrap="square"/>
+                    <a:lstStyle/>
+                    <a:p>
+                      <a:pPr algn="ctr"/>
+                      <a:r>
+                        <a:rPr sz="1300" b="0">
+                          <a:solidFill>
+                            <a:srgbClr val="AAAAAA"/>
+                          </a:solidFill>
+                          <a:latin typeface="IPAゴシック"/>
+                        </a:rPr>
+                        <a:t>0名</a:t>
+                      </a:r>
+                    </a:p>
+                  </a:txBody>
+                  <a:tcPr>
+                    <a:solidFill>
+                      <a:srgbClr val="FFFFFF"/>
+                    </a:solidFill>
+                  </a:tcPr>
+                </a:tc>
+                <a:tc>
+                  <a:txBody>
+                    <a:bodyPr wrap="square"/>
+                    <a:lstStyle/>
+                    <a:p>
+                      <a:pPr algn="ctr"/>
+                      <a:r>
+                        <a:rPr sz="1300" b="0">
+                          <a:solidFill>
+                            <a:srgbClr val="AAAAAA"/>
+                          </a:solidFill>
+                          <a:latin typeface="IPAゴシック"/>
+                        </a:rPr>
+                        <a:t>0.0%</a:t>
+                      </a:r>
+                    </a:p>
+                  </a:txBody>
+                  <a:tcPr>
+                    <a:solidFill>
+                      <a:srgbClr val="FFFFFF"/>
+                    </a:solidFill>
+                  </a:tcPr>
+                </a:tc>
+              </a:tr>
+              <a:tr h="1126800">
                 <a:tc>
                   <a:txBody>
                     <a:bodyPr wrap="square"/>
@@ -7425,17 +8157,17 @@
                       <a:r>
                         <a:rPr sz="1400" b="1">
                           <a:solidFill>
-                            <a:srgbClr val="FFFFFF"/>
-                          </a:solidFill>
-                          <a:latin typeface="IPAGothic"/>
-                        </a:rPr>
-                        <a:t>紹介数</a:t>
-                      </a:r>
-                    </a:p>
-                  </a:txBody>
-                  <a:tcPr>
-                    <a:solidFill>
-                      <a:srgbClr val="1F3564"/>
+                            <a:srgbClr val="1F3564"/>
+                          </a:solidFill>
+                          <a:latin typeface="IPAゴシック"/>
+                        </a:rPr>
+                        <a:t>合計</a:t>
+                      </a:r>
+                    </a:p>
+                  </a:txBody>
+                  <a:tcPr>
+                    <a:solidFill>
+                      <a:srgbClr val="ECF0F8"/>
                     </a:solidFill>
                   </a:tcPr>
                 </a:tc>
@@ -7448,17 +8180,17 @@
                       <a:r>
                         <a:rPr sz="1400" b="1">
                           <a:solidFill>
-                            <a:srgbClr val="FFFFFF"/>
-                          </a:solidFill>
-                          <a:latin typeface="IPAGothic"/>
-                        </a:rPr>
-                        <a:t>選考中</a:t>
-                      </a:r>
-                    </a:p>
-                  </a:txBody>
-                  <a:tcPr>
-                    <a:solidFill>
-                      <a:srgbClr val="1F3564"/>
+                            <a:srgbClr val="1F3564"/>
+                          </a:solidFill>
+                          <a:latin typeface="IPAゴシック"/>
+                        </a:rPr>
+                        <a:t>19名</a:t>
+                      </a:r>
+                    </a:p>
+                  </a:txBody>
+                  <a:tcPr>
+                    <a:solidFill>
+                      <a:srgbClr val="ECF0F8"/>
                     </a:solidFill>
                   </a:tcPr>
                 </a:tc>
@@ -7471,17 +8203,17 @@
                       <a:r>
                         <a:rPr sz="1400" b="1">
                           <a:solidFill>
-                            <a:srgbClr val="FFFFFF"/>
-                          </a:solidFill>
-                          <a:latin typeface="IPAGothic"/>
-                        </a:rPr>
-                        <a:t>辞退</a:t>
-                      </a:r>
-                    </a:p>
-                  </a:txBody>
-                  <a:tcPr>
-                    <a:solidFill>
-                      <a:srgbClr val="1F3564"/>
+                            <a:srgbClr val="1F3564"/>
+                          </a:solidFill>
+                          <a:latin typeface="IPAゴシック"/>
+                        </a:rPr>
+                        <a:t>18名</a:t>
+                      </a:r>
+                    </a:p>
+                  </a:txBody>
+                  <a:tcPr>
+                    <a:solidFill>
+                      <a:srgbClr val="ECF0F8"/>
                     </a:solidFill>
                   </a:tcPr>
                 </a:tc>
@@ -7494,477 +8226,32 @@
                       <a:r>
                         <a:rPr sz="1400" b="1">
                           <a:solidFill>
-                            <a:srgbClr val="FFFFFF"/>
-                          </a:solidFill>
-                          <a:latin typeface="IPAGothic"/>
-                        </a:rPr>
-                        <a:t>辞退率</a:t>
-                      </a:r>
-                    </a:p>
-                  </a:txBody>
-                  <a:tcPr>
-                    <a:solidFill>
-                      <a:srgbClr val="1F3564"/>
-                    </a:solidFill>
-                  </a:tcPr>
-                </a:tc>
-              </a:tr>
-              <a:tr h="1105200">
-                <a:tc>
-                  <a:txBody>
-                    <a:bodyPr wrap="square"/>
-                    <a:lstStyle/>
-                    <a:p>
-                      <a:pPr algn="ctr"/>
-                      <a:r>
-                        <a:rPr sz="1400" b="0">
-                          <a:solidFill>
                             <a:srgbClr val="1F3564"/>
                           </a:solidFill>
-                          <a:latin typeface="IPAGothic"/>
-                        </a:rPr>
-                        <a:t>レバレジーズ株式会社</a:t>
-                      </a:r>
-                    </a:p>
-                  </a:txBody>
-                  <a:tcPr>
-                    <a:solidFill>
-                      <a:srgbClr val="FFFFFF"/>
-                    </a:solidFill>
-                  </a:tcPr>
-                </a:tc>
-                <a:tc>
-                  <a:txBody>
-                    <a:bodyPr wrap="square"/>
-                    <a:lstStyle/>
-                    <a:p>
-                      <a:pPr algn="ctr"/>
-                      <a:r>
-                        <a:rPr sz="1400" b="0">
+                          <a:latin typeface="IPAゴシック"/>
+                        </a:rPr>
+                        <a:t>1名</a:t>
+                      </a:r>
+                    </a:p>
+                  </a:txBody>
+                  <a:tcPr>
+                    <a:solidFill>
+                      <a:srgbClr val="ECF0F8"/>
+                    </a:solidFill>
+                  </a:tcPr>
+                </a:tc>
+                <a:tc>
+                  <a:txBody>
+                    <a:bodyPr wrap="square"/>
+                    <a:lstStyle/>
+                    <a:p>
+                      <a:pPr algn="ctr"/>
+                      <a:r>
+                        <a:rPr sz="1400" b="1">
                           <a:solidFill>
                             <a:srgbClr val="1F3564"/>
                           </a:solidFill>
-                          <a:latin typeface="IPAGothic"/>
-                        </a:rPr>
-                        <a:t>16名</a:t>
-                      </a:r>
-                    </a:p>
-                  </a:txBody>
-                  <a:tcPr>
-                    <a:solidFill>
-                      <a:srgbClr val="FFFFFF"/>
-                    </a:solidFill>
-                  </a:tcPr>
-                </a:tc>
-                <a:tc>
-                  <a:txBody>
-                    <a:bodyPr wrap="square"/>
-                    <a:lstStyle/>
-                    <a:p>
-                      <a:pPr algn="ctr"/>
-                      <a:r>
-                        <a:rPr sz="1400" b="0">
-                          <a:solidFill>
-                            <a:srgbClr val="1F3564"/>
-                          </a:solidFill>
-                          <a:latin typeface="IPAGothic"/>
-                        </a:rPr>
-                        <a:t>15名</a:t>
-                      </a:r>
-                    </a:p>
-                  </a:txBody>
-                  <a:tcPr>
-                    <a:solidFill>
-                      <a:srgbClr val="FFFFFF"/>
-                    </a:solidFill>
-                  </a:tcPr>
-                </a:tc>
-                <a:tc>
-                  <a:txBody>
-                    <a:bodyPr wrap="square"/>
-                    <a:lstStyle/>
-                    <a:p>
-                      <a:pPr algn="ctr"/>
-                      <a:r>
-                        <a:rPr sz="1500" b="1">
-                          <a:solidFill>
-                            <a:srgbClr val="E85D5D"/>
-                          </a:solidFill>
-                          <a:latin typeface="IPAGothic"/>
-                        </a:rPr>
-                        <a:t>1名</a:t>
-                      </a:r>
-                    </a:p>
-                  </a:txBody>
-                  <a:tcPr>
-                    <a:solidFill>
-                      <a:srgbClr val="FFF0F0"/>
-                    </a:solidFill>
-                  </a:tcPr>
-                </a:tc>
-                <a:tc>
-                  <a:txBody>
-                    <a:bodyPr wrap="square"/>
-                    <a:lstStyle/>
-                    <a:p>
-                      <a:pPr algn="ctr"/>
-                      <a:r>
-                        <a:rPr sz="1400" b="0">
-                          <a:solidFill>
-                            <a:srgbClr val="1F3564"/>
-                          </a:solidFill>
-                          <a:latin typeface="IPAGothic"/>
-                        </a:rPr>
-                        <a:t>6.3%</a:t>
-                      </a:r>
-                    </a:p>
-                  </a:txBody>
-                  <a:tcPr>
-                    <a:solidFill>
-                      <a:srgbClr val="FFFFFF"/>
-                    </a:solidFill>
-                  </a:tcPr>
-                </a:tc>
-              </a:tr>
-              <a:tr h="1105200">
-                <a:tc>
-                  <a:txBody>
-                    <a:bodyPr wrap="square"/>
-                    <a:lstStyle/>
-                    <a:p>
-                      <a:pPr algn="ctr"/>
-                      <a:r>
-                        <a:rPr sz="1400" b="0">
-                          <a:solidFill>
-                            <a:srgbClr val="1F3564"/>
-                          </a:solidFill>
-                          <a:latin typeface="IPAGothic"/>
-                        </a:rPr>
-                        <a:t>キャリアスタート株式会社</a:t>
-                      </a:r>
-                    </a:p>
-                  </a:txBody>
-                  <a:tcPr>
-                    <a:solidFill>
-                      <a:srgbClr val="ECF0F8"/>
-                    </a:solidFill>
-                  </a:tcPr>
-                </a:tc>
-                <a:tc>
-                  <a:txBody>
-                    <a:bodyPr wrap="square"/>
-                    <a:lstStyle/>
-                    <a:p>
-                      <a:pPr algn="ctr"/>
-                      <a:r>
-                        <a:rPr sz="1400" b="0">
-                          <a:solidFill>
-                            <a:srgbClr val="1F3564"/>
-                          </a:solidFill>
-                          <a:latin typeface="IPAGothic"/>
-                        </a:rPr>
-                        <a:t>2名</a:t>
-                      </a:r>
-                    </a:p>
-                  </a:txBody>
-                  <a:tcPr>
-                    <a:solidFill>
-                      <a:srgbClr val="ECF0F8"/>
-                    </a:solidFill>
-                  </a:tcPr>
-                </a:tc>
-                <a:tc>
-                  <a:txBody>
-                    <a:bodyPr wrap="square"/>
-                    <a:lstStyle/>
-                    <a:p>
-                      <a:pPr algn="ctr"/>
-                      <a:r>
-                        <a:rPr sz="1400" b="0">
-                          <a:solidFill>
-                            <a:srgbClr val="1F3564"/>
-                          </a:solidFill>
-                          <a:latin typeface="IPAGothic"/>
-                        </a:rPr>
-                        <a:t>2名</a:t>
-                      </a:r>
-                    </a:p>
-                  </a:txBody>
-                  <a:tcPr>
-                    <a:solidFill>
-                      <a:srgbClr val="ECF0F8"/>
-                    </a:solidFill>
-                  </a:tcPr>
-                </a:tc>
-                <a:tc>
-                  <a:txBody>
-                    <a:bodyPr wrap="square"/>
-                    <a:lstStyle/>
-                    <a:p>
-                      <a:pPr algn="ctr"/>
-                      <a:r>
-                        <a:rPr sz="1400" b="0">
-                          <a:solidFill>
-                            <a:srgbClr val="AAAAAA"/>
-                          </a:solidFill>
-                          <a:latin typeface="IPAGothic"/>
-                        </a:rPr>
-                        <a:t>0名</a:t>
-                      </a:r>
-                    </a:p>
-                  </a:txBody>
-                  <a:tcPr>
-                    <a:solidFill>
-                      <a:srgbClr val="ECF0F8"/>
-                    </a:solidFill>
-                  </a:tcPr>
-                </a:tc>
-                <a:tc>
-                  <a:txBody>
-                    <a:bodyPr wrap="square"/>
-                    <a:lstStyle/>
-                    <a:p>
-                      <a:pPr algn="ctr"/>
-                      <a:r>
-                        <a:rPr sz="1400" b="0">
-                          <a:solidFill>
-                            <a:srgbClr val="AAAAAA"/>
-                          </a:solidFill>
-                          <a:latin typeface="IPAGothic"/>
-                        </a:rPr>
-                        <a:t>0.0%</a:t>
-                      </a:r>
-                    </a:p>
-                  </a:txBody>
-                  <a:tcPr>
-                    <a:solidFill>
-                      <a:srgbClr val="ECF0F8"/>
-                    </a:solidFill>
-                  </a:tcPr>
-                </a:tc>
-              </a:tr>
-              <a:tr h="1105200">
-                <a:tc>
-                  <a:txBody>
-                    <a:bodyPr wrap="square"/>
-                    <a:lstStyle/>
-                    <a:p>
-                      <a:pPr algn="ctr"/>
-                      <a:r>
-                        <a:rPr sz="1400" b="0">
-                          <a:solidFill>
-                            <a:srgbClr val="1F3564"/>
-                          </a:solidFill>
-                          <a:latin typeface="IPAGothic"/>
-                        </a:rPr>
-                        <a:t>株式会社キャリタス</a:t>
-                      </a:r>
-                    </a:p>
-                  </a:txBody>
-                  <a:tcPr>
-                    <a:solidFill>
-                      <a:srgbClr val="FFFFFF"/>
-                    </a:solidFill>
-                  </a:tcPr>
-                </a:tc>
-                <a:tc>
-                  <a:txBody>
-                    <a:bodyPr wrap="square"/>
-                    <a:lstStyle/>
-                    <a:p>
-                      <a:pPr algn="ctr"/>
-                      <a:r>
-                        <a:rPr sz="1400" b="0">
-                          <a:solidFill>
-                            <a:srgbClr val="1F3564"/>
-                          </a:solidFill>
-                          <a:latin typeface="IPAGothic"/>
-                        </a:rPr>
-                        <a:t>1名</a:t>
-                      </a:r>
-                    </a:p>
-                  </a:txBody>
-                  <a:tcPr>
-                    <a:solidFill>
-                      <a:srgbClr val="FFFFFF"/>
-                    </a:solidFill>
-                  </a:tcPr>
-                </a:tc>
-                <a:tc>
-                  <a:txBody>
-                    <a:bodyPr wrap="square"/>
-                    <a:lstStyle/>
-                    <a:p>
-                      <a:pPr algn="ctr"/>
-                      <a:r>
-                        <a:rPr sz="1400" b="0">
-                          <a:solidFill>
-                            <a:srgbClr val="1F3564"/>
-                          </a:solidFill>
-                          <a:latin typeface="IPAGothic"/>
-                        </a:rPr>
-                        <a:t>1名</a:t>
-                      </a:r>
-                    </a:p>
-                  </a:txBody>
-                  <a:tcPr>
-                    <a:solidFill>
-                      <a:srgbClr val="FFFFFF"/>
-                    </a:solidFill>
-                  </a:tcPr>
-                </a:tc>
-                <a:tc>
-                  <a:txBody>
-                    <a:bodyPr wrap="square"/>
-                    <a:lstStyle/>
-                    <a:p>
-                      <a:pPr algn="ctr"/>
-                      <a:r>
-                        <a:rPr sz="1400" b="0">
-                          <a:solidFill>
-                            <a:srgbClr val="AAAAAA"/>
-                          </a:solidFill>
-                          <a:latin typeface="IPAGothic"/>
-                        </a:rPr>
-                        <a:t>0名</a:t>
-                      </a:r>
-                    </a:p>
-                  </a:txBody>
-                  <a:tcPr>
-                    <a:solidFill>
-                      <a:srgbClr val="FFFFFF"/>
-                    </a:solidFill>
-                  </a:tcPr>
-                </a:tc>
-                <a:tc>
-                  <a:txBody>
-                    <a:bodyPr wrap="square"/>
-                    <a:lstStyle/>
-                    <a:p>
-                      <a:pPr algn="ctr"/>
-                      <a:r>
-                        <a:rPr sz="1400" b="0">
-                          <a:solidFill>
-                            <a:srgbClr val="AAAAAA"/>
-                          </a:solidFill>
-                          <a:latin typeface="IPAGothic"/>
-                        </a:rPr>
-                        <a:t>0.0%</a:t>
-                      </a:r>
-                    </a:p>
-                  </a:txBody>
-                  <a:tcPr>
-                    <a:solidFill>
-                      <a:srgbClr val="FFFFFF"/>
-                    </a:solidFill>
-                  </a:tcPr>
-                </a:tc>
-              </a:tr>
-              <a:tr h="1105200">
-                <a:tc>
-                  <a:txBody>
-                    <a:bodyPr wrap="square"/>
-                    <a:lstStyle/>
-                    <a:p>
-                      <a:pPr algn="ctr"/>
-                      <a:r>
-                        <a:rPr sz="1500" b="1">
-                          <a:solidFill>
-                            <a:srgbClr val="1F3564"/>
-                          </a:solidFill>
-                          <a:latin typeface="IPAGothic"/>
-                        </a:rPr>
-                        <a:t>合計</a:t>
-                      </a:r>
-                    </a:p>
-                  </a:txBody>
-                  <a:tcPr>
-                    <a:solidFill>
-                      <a:srgbClr val="ECF0F8"/>
-                    </a:solidFill>
-                  </a:tcPr>
-                </a:tc>
-                <a:tc>
-                  <a:txBody>
-                    <a:bodyPr wrap="square"/>
-                    <a:lstStyle/>
-                    <a:p>
-                      <a:pPr algn="ctr"/>
-                      <a:r>
-                        <a:rPr sz="1500" b="1">
-                          <a:solidFill>
-                            <a:srgbClr val="1F3564"/>
-                          </a:solidFill>
-                          <a:latin typeface="IPAGothic"/>
-                        </a:rPr>
-                        <a:t>19名</a:t>
-                      </a:r>
-                    </a:p>
-                  </a:txBody>
-                  <a:tcPr>
-                    <a:solidFill>
-                      <a:srgbClr val="ECF0F8"/>
-                    </a:solidFill>
-                  </a:tcPr>
-                </a:tc>
-                <a:tc>
-                  <a:txBody>
-                    <a:bodyPr wrap="square"/>
-                    <a:lstStyle/>
-                    <a:p>
-                      <a:pPr algn="ctr"/>
-                      <a:r>
-                        <a:rPr sz="1500" b="1">
-                          <a:solidFill>
-                            <a:srgbClr val="1F3564"/>
-                          </a:solidFill>
-                          <a:latin typeface="IPAGothic"/>
-                        </a:rPr>
-                        <a:t>18名</a:t>
-                      </a:r>
-                    </a:p>
-                  </a:txBody>
-                  <a:tcPr>
-                    <a:solidFill>
-                      <a:srgbClr val="ECF0F8"/>
-                    </a:solidFill>
-                  </a:tcPr>
-                </a:tc>
-                <a:tc>
-                  <a:txBody>
-                    <a:bodyPr wrap="square"/>
-                    <a:lstStyle/>
-                    <a:p>
-                      <a:pPr algn="ctr"/>
-                      <a:r>
-                        <a:rPr sz="1500" b="1">
-                          <a:solidFill>
-                            <a:srgbClr val="1F3564"/>
-                          </a:solidFill>
-                          <a:latin typeface="IPAGothic"/>
-                        </a:rPr>
-                        <a:t>1名</a:t>
-                      </a:r>
-                    </a:p>
-                  </a:txBody>
-                  <a:tcPr>
-                    <a:solidFill>
-                      <a:srgbClr val="ECF0F8"/>
-                    </a:solidFill>
-                  </a:tcPr>
-                </a:tc>
-                <a:tc>
-                  <a:txBody>
-                    <a:bodyPr wrap="square"/>
-                    <a:lstStyle/>
-                    <a:p>
-                      <a:pPr algn="ctr"/>
-                      <a:r>
-                        <a:rPr sz="1500" b="1">
-                          <a:solidFill>
-                            <a:srgbClr val="1F3564"/>
-                          </a:solidFill>
-                          <a:latin typeface="IPAGothic"/>
+                          <a:latin typeface="IPAゴシック"/>
                         </a:rPr>
                         <a:t>5.3%</a:t>
                       </a:r>

--- a/上位校採用分析レポート_2026_v2.pptx
+++ b/上位校採用分析レポート_2026_v2.pptx
@@ -13,6 +13,7 @@
     <p:sldId id="261" r:id="rId12"/>
     <p:sldId id="262" r:id="rId13"/>
     <p:sldId id="263" r:id="rId14"/>
+    <p:sldId id="264" r:id="rId15"/>
   </p:sldIdLst>
   <p:sldSz cx="12193200" cy="6858000" type="screen4x3"/>
   <p:notesSz cx="6858000" cy="9144000"/>
@@ -3246,7 +3247,7 @@
                 </a:solidFill>
                 <a:latin typeface="IPAゴシック"/>
               </a:rPr>
-              <a:t>対象期間：2026年1月〜7月　GMARCH・関関同立以上</a:t>
+              <a:t>対象期間：2026年1月〜7月　GMARCH以上（上位校）</a:t>
             </a:r>
           </a:p>
         </p:txBody>
@@ -3711,6 +3712,2295 @@
 </file>
 
 <file path=ppt/slides/slide2.xml><?xml version="1.0" encoding="utf-8"?>
+<p:sld xmlns:a="http://schemas.openxmlformats.org/drawingml/2006/main" xmlns:p="http://schemas.openxmlformats.org/presentationml/2006/main" xmlns:r="http://schemas.openxmlformats.org/officeDocument/2006/relationships">
+  <p:cSld>
+    <p:spTree>
+      <p:nvGrpSpPr>
+        <p:cNvPr id="1" name=""/>
+        <p:cNvGrpSpPr/>
+        <p:nvPr/>
+      </p:nvGrpSpPr>
+      <p:grpSpPr/>
+      <p:sp>
+        <p:nvSpPr>
+          <p:cNvPr id="2" name="Rectangle 1"/>
+          <p:cNvSpPr/>
+          <p:nvPr/>
+        </p:nvSpPr>
+        <p:spPr>
+          <a:xfrm>
+            <a:off x="0" y="0"/>
+            <a:ext cx="12193200" cy="6858000"/>
+          </a:xfrm>
+          <a:prstGeom prst="rect">
+            <a:avLst/>
+          </a:prstGeom>
+          <a:solidFill>
+            <a:srgbClr val="F4F6FB"/>
+          </a:solidFill>
+          <a:ln>
+            <a:noFill/>
+          </a:ln>
+        </p:spPr>
+        <p:style>
+          <a:lnRef idx="1">
+            <a:schemeClr val="accent1"/>
+          </a:lnRef>
+          <a:fillRef idx="3">
+            <a:schemeClr val="accent1"/>
+          </a:fillRef>
+          <a:effectRef idx="2">
+            <a:schemeClr val="accent1"/>
+          </a:effectRef>
+          <a:fontRef idx="minor">
+            <a:schemeClr val="lt1"/>
+          </a:fontRef>
+        </p:style>
+        <p:txBody>
+          <a:bodyPr rtlCol="0" anchor="ctr"/>
+          <a:lstStyle/>
+          <a:p>
+            <a:pPr algn="ctr"/>
+          </a:p>
+        </p:txBody>
+      </p:sp>
+      <p:sp>
+        <p:nvSpPr>
+          <p:cNvPr id="3" name="Rectangle 2"/>
+          <p:cNvSpPr/>
+          <p:nvPr/>
+        </p:nvSpPr>
+        <p:spPr>
+          <a:xfrm>
+            <a:off x="0" y="0"/>
+            <a:ext cx="12193200" cy="792000"/>
+          </a:xfrm>
+          <a:prstGeom prst="rect">
+            <a:avLst/>
+          </a:prstGeom>
+          <a:solidFill>
+            <a:srgbClr val="1F3564"/>
+          </a:solidFill>
+          <a:ln>
+            <a:noFill/>
+          </a:ln>
+        </p:spPr>
+        <p:style>
+          <a:lnRef idx="1">
+            <a:schemeClr val="accent1"/>
+          </a:lnRef>
+          <a:fillRef idx="3">
+            <a:schemeClr val="accent1"/>
+          </a:fillRef>
+          <a:effectRef idx="2">
+            <a:schemeClr val="accent1"/>
+          </a:effectRef>
+          <a:fontRef idx="minor">
+            <a:schemeClr val="lt1"/>
+          </a:fontRef>
+        </p:style>
+        <p:txBody>
+          <a:bodyPr rtlCol="0" anchor="ctr"/>
+          <a:lstStyle/>
+          <a:p>
+            <a:pPr algn="ctr"/>
+          </a:p>
+        </p:txBody>
+      </p:sp>
+      <p:sp>
+        <p:nvSpPr>
+          <p:cNvPr id="4" name="TextBox 3"/>
+          <p:cNvSpPr txBox="1"/>
+          <p:nvPr/>
+        </p:nvSpPr>
+        <p:spPr>
+          <a:xfrm>
+            <a:off x="180000" y="0"/>
+            <a:ext cx="11833200" cy="792000"/>
+          </a:xfrm>
+          <a:prstGeom prst="rect">
+            <a:avLst/>
+          </a:prstGeom>
+          <a:noFill/>
+        </p:spPr>
+        <p:txBody>
+          <a:bodyPr wrap="none">
+            <a:spAutoFit/>
+          </a:bodyPr>
+          <a:lstStyle/>
+          <a:p>
+            <a:pPr algn="ctr"/>
+            <a:r>
+              <a:rPr sz="2600" b="1">
+                <a:solidFill>
+                  <a:srgbClr val="FFFFFF"/>
+                </a:solidFill>
+                <a:latin typeface="IPAゴシック"/>
+              </a:rPr>
+              <a:t>上位校 定義一覧（GMARCH以上）</a:t>
+            </a:r>
+          </a:p>
+        </p:txBody>
+      </p:sp>
+      <p:sp>
+        <p:nvSpPr>
+          <p:cNvPr id="5" name="Rectangle 4"/>
+          <p:cNvSpPr/>
+          <p:nvPr/>
+        </p:nvSpPr>
+        <p:spPr>
+          <a:xfrm>
+            <a:off x="180000" y="936000"/>
+            <a:ext cx="2294640" cy="540000"/>
+          </a:xfrm>
+          <a:prstGeom prst="rect">
+            <a:avLst/>
+          </a:prstGeom>
+          <a:solidFill>
+            <a:srgbClr val="E85D5D"/>
+          </a:solidFill>
+          <a:ln>
+            <a:noFill/>
+          </a:ln>
+        </p:spPr>
+        <p:style>
+          <a:lnRef idx="1">
+            <a:schemeClr val="accent1"/>
+          </a:lnRef>
+          <a:fillRef idx="3">
+            <a:schemeClr val="accent1"/>
+          </a:fillRef>
+          <a:effectRef idx="2">
+            <a:schemeClr val="accent1"/>
+          </a:effectRef>
+          <a:fontRef idx="minor">
+            <a:schemeClr val="lt1"/>
+          </a:fontRef>
+        </p:style>
+        <p:txBody>
+          <a:bodyPr rtlCol="0" anchor="ctr"/>
+          <a:lstStyle/>
+          <a:p>
+            <a:pPr algn="ctr"/>
+          </a:p>
+        </p:txBody>
+      </p:sp>
+      <p:sp>
+        <p:nvSpPr>
+          <p:cNvPr id="6" name="TextBox 5"/>
+          <p:cNvSpPr txBox="1"/>
+          <p:nvPr/>
+        </p:nvSpPr>
+        <p:spPr>
+          <a:xfrm>
+            <a:off x="216000" y="972000"/>
+            <a:ext cx="2258640" cy="468000"/>
+          </a:xfrm>
+          <a:prstGeom prst="rect">
+            <a:avLst/>
+          </a:prstGeom>
+          <a:noFill/>
+        </p:spPr>
+        <p:txBody>
+          <a:bodyPr wrap="none">
+            <a:spAutoFit/>
+          </a:bodyPr>
+          <a:lstStyle/>
+          <a:p>
+            <a:pPr algn="ctr"/>
+            <a:r>
+              <a:rPr sz="1300" b="1">
+                <a:solidFill>
+                  <a:srgbClr val="FFFFFF"/>
+                </a:solidFill>
+                <a:latin typeface="IPAゴシック"/>
+              </a:rPr>
+              <a:t>■ 旧帝国大学・最難関</a:t>
+            </a:r>
+          </a:p>
+        </p:txBody>
+      </p:sp>
+      <p:sp>
+        <p:nvSpPr>
+          <p:cNvPr id="7" name="Rectangle 6"/>
+          <p:cNvSpPr/>
+          <p:nvPr/>
+        </p:nvSpPr>
+        <p:spPr>
+          <a:xfrm>
+            <a:off x="216000" y="1548000"/>
+            <a:ext cx="2258640" cy="540000"/>
+          </a:xfrm>
+          <a:prstGeom prst="rect">
+            <a:avLst/>
+          </a:prstGeom>
+          <a:solidFill>
+            <a:srgbClr val="FFFFFF"/>
+          </a:solidFill>
+          <a:ln w="12700">
+            <a:solidFill>
+              <a:srgbClr val="E85D5D"/>
+            </a:solidFill>
+          </a:ln>
+        </p:spPr>
+        <p:style>
+          <a:lnRef idx="1">
+            <a:schemeClr val="accent1"/>
+          </a:lnRef>
+          <a:fillRef idx="3">
+            <a:schemeClr val="accent1"/>
+          </a:fillRef>
+          <a:effectRef idx="2">
+            <a:schemeClr val="accent1"/>
+          </a:effectRef>
+          <a:fontRef idx="minor">
+            <a:schemeClr val="lt1"/>
+          </a:fontRef>
+        </p:style>
+        <p:txBody>
+          <a:bodyPr rtlCol="0" anchor="ctr"/>
+          <a:lstStyle/>
+          <a:p>
+            <a:pPr algn="ctr"/>
+          </a:p>
+        </p:txBody>
+      </p:sp>
+      <p:sp>
+        <p:nvSpPr>
+          <p:cNvPr id="8" name="TextBox 7"/>
+          <p:cNvSpPr txBox="1"/>
+          <p:nvPr/>
+        </p:nvSpPr>
+        <p:spPr>
+          <a:xfrm>
+            <a:off x="252000" y="1584000"/>
+            <a:ext cx="2186640" cy="468000"/>
+          </a:xfrm>
+          <a:prstGeom prst="rect">
+            <a:avLst/>
+          </a:prstGeom>
+          <a:noFill/>
+        </p:spPr>
+        <p:txBody>
+          <a:bodyPr wrap="none">
+            <a:spAutoFit/>
+          </a:bodyPr>
+          <a:lstStyle/>
+          <a:p>
+            <a:pPr algn="ctr"/>
+            <a:r>
+              <a:rPr sz="1300" b="1">
+                <a:solidFill>
+                  <a:srgbClr val="1F3564"/>
+                </a:solidFill>
+                <a:latin typeface="IPAゴシック"/>
+              </a:rPr>
+              <a:t>東京大学</a:t>
+            </a:r>
+          </a:p>
+        </p:txBody>
+      </p:sp>
+      <p:sp>
+        <p:nvSpPr>
+          <p:cNvPr id="9" name="Rectangle 8"/>
+          <p:cNvSpPr/>
+          <p:nvPr/>
+        </p:nvSpPr>
+        <p:spPr>
+          <a:xfrm>
+            <a:off x="216000" y="2142000"/>
+            <a:ext cx="2258640" cy="540000"/>
+          </a:xfrm>
+          <a:prstGeom prst="rect">
+            <a:avLst/>
+          </a:prstGeom>
+          <a:solidFill>
+            <a:srgbClr val="FFFFFF"/>
+          </a:solidFill>
+          <a:ln w="12700">
+            <a:solidFill>
+              <a:srgbClr val="E85D5D"/>
+            </a:solidFill>
+          </a:ln>
+        </p:spPr>
+        <p:style>
+          <a:lnRef idx="1">
+            <a:schemeClr val="accent1"/>
+          </a:lnRef>
+          <a:fillRef idx="3">
+            <a:schemeClr val="accent1"/>
+          </a:fillRef>
+          <a:effectRef idx="2">
+            <a:schemeClr val="accent1"/>
+          </a:effectRef>
+          <a:fontRef idx="minor">
+            <a:schemeClr val="lt1"/>
+          </a:fontRef>
+        </p:style>
+        <p:txBody>
+          <a:bodyPr rtlCol="0" anchor="ctr"/>
+          <a:lstStyle/>
+          <a:p>
+            <a:pPr algn="ctr"/>
+          </a:p>
+        </p:txBody>
+      </p:sp>
+      <p:sp>
+        <p:nvSpPr>
+          <p:cNvPr id="10" name="TextBox 9"/>
+          <p:cNvSpPr txBox="1"/>
+          <p:nvPr/>
+        </p:nvSpPr>
+        <p:spPr>
+          <a:xfrm>
+            <a:off x="252000" y="2178000"/>
+            <a:ext cx="2186640" cy="468000"/>
+          </a:xfrm>
+          <a:prstGeom prst="rect">
+            <a:avLst/>
+          </a:prstGeom>
+          <a:noFill/>
+        </p:spPr>
+        <p:txBody>
+          <a:bodyPr wrap="none">
+            <a:spAutoFit/>
+          </a:bodyPr>
+          <a:lstStyle/>
+          <a:p>
+            <a:pPr algn="ctr"/>
+            <a:r>
+              <a:rPr sz="1300" b="1">
+                <a:solidFill>
+                  <a:srgbClr val="1F3564"/>
+                </a:solidFill>
+                <a:latin typeface="IPAゴシック"/>
+              </a:rPr>
+              <a:t>京都大学</a:t>
+            </a:r>
+          </a:p>
+        </p:txBody>
+      </p:sp>
+      <p:sp>
+        <p:nvSpPr>
+          <p:cNvPr id="11" name="Rectangle 10"/>
+          <p:cNvSpPr/>
+          <p:nvPr/>
+        </p:nvSpPr>
+        <p:spPr>
+          <a:xfrm>
+            <a:off x="216000" y="2736000"/>
+            <a:ext cx="2258640" cy="540000"/>
+          </a:xfrm>
+          <a:prstGeom prst="rect">
+            <a:avLst/>
+          </a:prstGeom>
+          <a:solidFill>
+            <a:srgbClr val="FFFFFF"/>
+          </a:solidFill>
+          <a:ln w="12700">
+            <a:solidFill>
+              <a:srgbClr val="E85D5D"/>
+            </a:solidFill>
+          </a:ln>
+        </p:spPr>
+        <p:style>
+          <a:lnRef idx="1">
+            <a:schemeClr val="accent1"/>
+          </a:lnRef>
+          <a:fillRef idx="3">
+            <a:schemeClr val="accent1"/>
+          </a:fillRef>
+          <a:effectRef idx="2">
+            <a:schemeClr val="accent1"/>
+          </a:effectRef>
+          <a:fontRef idx="minor">
+            <a:schemeClr val="lt1"/>
+          </a:fontRef>
+        </p:style>
+        <p:txBody>
+          <a:bodyPr rtlCol="0" anchor="ctr"/>
+          <a:lstStyle/>
+          <a:p>
+            <a:pPr algn="ctr"/>
+          </a:p>
+        </p:txBody>
+      </p:sp>
+      <p:sp>
+        <p:nvSpPr>
+          <p:cNvPr id="12" name="TextBox 11"/>
+          <p:cNvSpPr txBox="1"/>
+          <p:nvPr/>
+        </p:nvSpPr>
+        <p:spPr>
+          <a:xfrm>
+            <a:off x="252000" y="2772000"/>
+            <a:ext cx="2186640" cy="468000"/>
+          </a:xfrm>
+          <a:prstGeom prst="rect">
+            <a:avLst/>
+          </a:prstGeom>
+          <a:noFill/>
+        </p:spPr>
+        <p:txBody>
+          <a:bodyPr wrap="none">
+            <a:spAutoFit/>
+          </a:bodyPr>
+          <a:lstStyle/>
+          <a:p>
+            <a:pPr algn="ctr"/>
+            <a:r>
+              <a:rPr sz="1300" b="1">
+                <a:solidFill>
+                  <a:srgbClr val="1F3564"/>
+                </a:solidFill>
+                <a:latin typeface="IPAゴシック"/>
+              </a:rPr>
+              <a:t>大阪大学</a:t>
+            </a:r>
+          </a:p>
+        </p:txBody>
+      </p:sp>
+      <p:sp>
+        <p:nvSpPr>
+          <p:cNvPr id="13" name="Rectangle 12"/>
+          <p:cNvSpPr/>
+          <p:nvPr/>
+        </p:nvSpPr>
+        <p:spPr>
+          <a:xfrm>
+            <a:off x="216000" y="3330000"/>
+            <a:ext cx="2258640" cy="540000"/>
+          </a:xfrm>
+          <a:prstGeom prst="rect">
+            <a:avLst/>
+          </a:prstGeom>
+          <a:solidFill>
+            <a:srgbClr val="FFFFFF"/>
+          </a:solidFill>
+          <a:ln w="12700">
+            <a:solidFill>
+              <a:srgbClr val="E85D5D"/>
+            </a:solidFill>
+          </a:ln>
+        </p:spPr>
+        <p:style>
+          <a:lnRef idx="1">
+            <a:schemeClr val="accent1"/>
+          </a:lnRef>
+          <a:fillRef idx="3">
+            <a:schemeClr val="accent1"/>
+          </a:fillRef>
+          <a:effectRef idx="2">
+            <a:schemeClr val="accent1"/>
+          </a:effectRef>
+          <a:fontRef idx="minor">
+            <a:schemeClr val="lt1"/>
+          </a:fontRef>
+        </p:style>
+        <p:txBody>
+          <a:bodyPr rtlCol="0" anchor="ctr"/>
+          <a:lstStyle/>
+          <a:p>
+            <a:pPr algn="ctr"/>
+          </a:p>
+        </p:txBody>
+      </p:sp>
+      <p:sp>
+        <p:nvSpPr>
+          <p:cNvPr id="14" name="TextBox 13"/>
+          <p:cNvSpPr txBox="1"/>
+          <p:nvPr/>
+        </p:nvSpPr>
+        <p:spPr>
+          <a:xfrm>
+            <a:off x="252000" y="3366000"/>
+            <a:ext cx="2186640" cy="468000"/>
+          </a:xfrm>
+          <a:prstGeom prst="rect">
+            <a:avLst/>
+          </a:prstGeom>
+          <a:noFill/>
+        </p:spPr>
+        <p:txBody>
+          <a:bodyPr wrap="none">
+            <a:spAutoFit/>
+          </a:bodyPr>
+          <a:lstStyle/>
+          <a:p>
+            <a:pPr algn="ctr"/>
+            <a:r>
+              <a:rPr sz="1300" b="1">
+                <a:solidFill>
+                  <a:srgbClr val="1F3564"/>
+                </a:solidFill>
+                <a:latin typeface="IPAゴシック"/>
+              </a:rPr>
+              <a:t>東北大学</a:t>
+            </a:r>
+          </a:p>
+        </p:txBody>
+      </p:sp>
+      <p:sp>
+        <p:nvSpPr>
+          <p:cNvPr id="15" name="Rectangle 14"/>
+          <p:cNvSpPr/>
+          <p:nvPr/>
+        </p:nvSpPr>
+        <p:spPr>
+          <a:xfrm>
+            <a:off x="216000" y="3924000"/>
+            <a:ext cx="2258640" cy="540000"/>
+          </a:xfrm>
+          <a:prstGeom prst="rect">
+            <a:avLst/>
+          </a:prstGeom>
+          <a:solidFill>
+            <a:srgbClr val="FFFFFF"/>
+          </a:solidFill>
+          <a:ln w="12700">
+            <a:solidFill>
+              <a:srgbClr val="E85D5D"/>
+            </a:solidFill>
+          </a:ln>
+        </p:spPr>
+        <p:style>
+          <a:lnRef idx="1">
+            <a:schemeClr val="accent1"/>
+          </a:lnRef>
+          <a:fillRef idx="3">
+            <a:schemeClr val="accent1"/>
+          </a:fillRef>
+          <a:effectRef idx="2">
+            <a:schemeClr val="accent1"/>
+          </a:effectRef>
+          <a:fontRef idx="minor">
+            <a:schemeClr val="lt1"/>
+          </a:fontRef>
+        </p:style>
+        <p:txBody>
+          <a:bodyPr rtlCol="0" anchor="ctr"/>
+          <a:lstStyle/>
+          <a:p>
+            <a:pPr algn="ctr"/>
+          </a:p>
+        </p:txBody>
+      </p:sp>
+      <p:sp>
+        <p:nvSpPr>
+          <p:cNvPr id="16" name="TextBox 15"/>
+          <p:cNvSpPr txBox="1"/>
+          <p:nvPr/>
+        </p:nvSpPr>
+        <p:spPr>
+          <a:xfrm>
+            <a:off x="252000" y="3960000"/>
+            <a:ext cx="2186640" cy="468000"/>
+          </a:xfrm>
+          <a:prstGeom prst="rect">
+            <a:avLst/>
+          </a:prstGeom>
+          <a:noFill/>
+        </p:spPr>
+        <p:txBody>
+          <a:bodyPr wrap="none">
+            <a:spAutoFit/>
+          </a:bodyPr>
+          <a:lstStyle/>
+          <a:p>
+            <a:pPr algn="ctr"/>
+            <a:r>
+              <a:rPr sz="1300" b="1">
+                <a:solidFill>
+                  <a:srgbClr val="1F3564"/>
+                </a:solidFill>
+                <a:latin typeface="IPAゴシック"/>
+              </a:rPr>
+              <a:t>名古屋大学</a:t>
+            </a:r>
+          </a:p>
+        </p:txBody>
+      </p:sp>
+      <p:sp>
+        <p:nvSpPr>
+          <p:cNvPr id="17" name="Rectangle 16"/>
+          <p:cNvSpPr/>
+          <p:nvPr/>
+        </p:nvSpPr>
+        <p:spPr>
+          <a:xfrm>
+            <a:off x="216000" y="4518000"/>
+            <a:ext cx="2258640" cy="540000"/>
+          </a:xfrm>
+          <a:prstGeom prst="rect">
+            <a:avLst/>
+          </a:prstGeom>
+          <a:solidFill>
+            <a:srgbClr val="FFFFFF"/>
+          </a:solidFill>
+          <a:ln w="12700">
+            <a:solidFill>
+              <a:srgbClr val="E85D5D"/>
+            </a:solidFill>
+          </a:ln>
+        </p:spPr>
+        <p:style>
+          <a:lnRef idx="1">
+            <a:schemeClr val="accent1"/>
+          </a:lnRef>
+          <a:fillRef idx="3">
+            <a:schemeClr val="accent1"/>
+          </a:fillRef>
+          <a:effectRef idx="2">
+            <a:schemeClr val="accent1"/>
+          </a:effectRef>
+          <a:fontRef idx="minor">
+            <a:schemeClr val="lt1"/>
+          </a:fontRef>
+        </p:style>
+        <p:txBody>
+          <a:bodyPr rtlCol="0" anchor="ctr"/>
+          <a:lstStyle/>
+          <a:p>
+            <a:pPr algn="ctr"/>
+          </a:p>
+        </p:txBody>
+      </p:sp>
+      <p:sp>
+        <p:nvSpPr>
+          <p:cNvPr id="18" name="TextBox 17"/>
+          <p:cNvSpPr txBox="1"/>
+          <p:nvPr/>
+        </p:nvSpPr>
+        <p:spPr>
+          <a:xfrm>
+            <a:off x="252000" y="4554000"/>
+            <a:ext cx="2186640" cy="468000"/>
+          </a:xfrm>
+          <a:prstGeom prst="rect">
+            <a:avLst/>
+          </a:prstGeom>
+          <a:noFill/>
+        </p:spPr>
+        <p:txBody>
+          <a:bodyPr wrap="none">
+            <a:spAutoFit/>
+          </a:bodyPr>
+          <a:lstStyle/>
+          <a:p>
+            <a:pPr algn="ctr"/>
+            <a:r>
+              <a:rPr sz="1300" b="1">
+                <a:solidFill>
+                  <a:srgbClr val="1F3564"/>
+                </a:solidFill>
+                <a:latin typeface="IPAゴシック"/>
+              </a:rPr>
+              <a:t>九州大学</a:t>
+            </a:r>
+          </a:p>
+        </p:txBody>
+      </p:sp>
+      <p:sp>
+        <p:nvSpPr>
+          <p:cNvPr id="19" name="Rectangle 18"/>
+          <p:cNvSpPr/>
+          <p:nvPr/>
+        </p:nvSpPr>
+        <p:spPr>
+          <a:xfrm>
+            <a:off x="216000" y="5112000"/>
+            <a:ext cx="2258640" cy="540000"/>
+          </a:xfrm>
+          <a:prstGeom prst="rect">
+            <a:avLst/>
+          </a:prstGeom>
+          <a:solidFill>
+            <a:srgbClr val="FFFFFF"/>
+          </a:solidFill>
+          <a:ln w="12700">
+            <a:solidFill>
+              <a:srgbClr val="E85D5D"/>
+            </a:solidFill>
+          </a:ln>
+        </p:spPr>
+        <p:style>
+          <a:lnRef idx="1">
+            <a:schemeClr val="accent1"/>
+          </a:lnRef>
+          <a:fillRef idx="3">
+            <a:schemeClr val="accent1"/>
+          </a:fillRef>
+          <a:effectRef idx="2">
+            <a:schemeClr val="accent1"/>
+          </a:effectRef>
+          <a:fontRef idx="minor">
+            <a:schemeClr val="lt1"/>
+          </a:fontRef>
+        </p:style>
+        <p:txBody>
+          <a:bodyPr rtlCol="0" anchor="ctr"/>
+          <a:lstStyle/>
+          <a:p>
+            <a:pPr algn="ctr"/>
+          </a:p>
+        </p:txBody>
+      </p:sp>
+      <p:sp>
+        <p:nvSpPr>
+          <p:cNvPr id="20" name="TextBox 19"/>
+          <p:cNvSpPr txBox="1"/>
+          <p:nvPr/>
+        </p:nvSpPr>
+        <p:spPr>
+          <a:xfrm>
+            <a:off x="252000" y="5148000"/>
+            <a:ext cx="2186640" cy="468000"/>
+          </a:xfrm>
+          <a:prstGeom prst="rect">
+            <a:avLst/>
+          </a:prstGeom>
+          <a:noFill/>
+        </p:spPr>
+        <p:txBody>
+          <a:bodyPr wrap="none">
+            <a:spAutoFit/>
+          </a:bodyPr>
+          <a:lstStyle/>
+          <a:p>
+            <a:pPr algn="ctr"/>
+            <a:r>
+              <a:rPr sz="1300" b="1">
+                <a:solidFill>
+                  <a:srgbClr val="1F3564"/>
+                </a:solidFill>
+                <a:latin typeface="IPAゴシック"/>
+              </a:rPr>
+              <a:t>北海道大学</a:t>
+            </a:r>
+          </a:p>
+        </p:txBody>
+      </p:sp>
+      <p:sp>
+        <p:nvSpPr>
+          <p:cNvPr id="21" name="Rectangle 20"/>
+          <p:cNvSpPr/>
+          <p:nvPr/>
+        </p:nvSpPr>
+        <p:spPr>
+          <a:xfrm>
+            <a:off x="2546640" y="936000"/>
+            <a:ext cx="2294640" cy="540000"/>
+          </a:xfrm>
+          <a:prstGeom prst="rect">
+            <a:avLst/>
+          </a:prstGeom>
+          <a:solidFill>
+            <a:srgbClr val="9B59B6"/>
+          </a:solidFill>
+          <a:ln>
+            <a:noFill/>
+          </a:ln>
+        </p:spPr>
+        <p:style>
+          <a:lnRef idx="1">
+            <a:schemeClr val="accent1"/>
+          </a:lnRef>
+          <a:fillRef idx="3">
+            <a:schemeClr val="accent1"/>
+          </a:fillRef>
+          <a:effectRef idx="2">
+            <a:schemeClr val="accent1"/>
+          </a:effectRef>
+          <a:fontRef idx="minor">
+            <a:schemeClr val="lt1"/>
+          </a:fontRef>
+        </p:style>
+        <p:txBody>
+          <a:bodyPr rtlCol="0" anchor="ctr"/>
+          <a:lstStyle/>
+          <a:p>
+            <a:pPr algn="ctr"/>
+          </a:p>
+        </p:txBody>
+      </p:sp>
+      <p:sp>
+        <p:nvSpPr>
+          <p:cNvPr id="22" name="TextBox 21"/>
+          <p:cNvSpPr txBox="1"/>
+          <p:nvPr/>
+        </p:nvSpPr>
+        <p:spPr>
+          <a:xfrm>
+            <a:off x="2582640" y="972000"/>
+            <a:ext cx="2258640" cy="468000"/>
+          </a:xfrm>
+          <a:prstGeom prst="rect">
+            <a:avLst/>
+          </a:prstGeom>
+          <a:noFill/>
+        </p:spPr>
+        <p:txBody>
+          <a:bodyPr wrap="none">
+            <a:spAutoFit/>
+          </a:bodyPr>
+          <a:lstStyle/>
+          <a:p>
+            <a:pPr algn="ctr"/>
+            <a:r>
+              <a:rPr sz="1300" b="1">
+                <a:solidFill>
+                  <a:srgbClr val="FFFFFF"/>
+                </a:solidFill>
+                <a:latin typeface="IPAゴシック"/>
+              </a:rPr>
+              <a:t>■ 私立最難関（早慶）</a:t>
+            </a:r>
+          </a:p>
+        </p:txBody>
+      </p:sp>
+      <p:sp>
+        <p:nvSpPr>
+          <p:cNvPr id="23" name="Rectangle 22"/>
+          <p:cNvSpPr/>
+          <p:nvPr/>
+        </p:nvSpPr>
+        <p:spPr>
+          <a:xfrm>
+            <a:off x="2582640" y="1548000"/>
+            <a:ext cx="2258640" cy="540000"/>
+          </a:xfrm>
+          <a:prstGeom prst="rect">
+            <a:avLst/>
+          </a:prstGeom>
+          <a:solidFill>
+            <a:srgbClr val="FFFFFF"/>
+          </a:solidFill>
+          <a:ln w="12700">
+            <a:solidFill>
+              <a:srgbClr val="9B59B6"/>
+            </a:solidFill>
+          </a:ln>
+        </p:spPr>
+        <p:style>
+          <a:lnRef idx="1">
+            <a:schemeClr val="accent1"/>
+          </a:lnRef>
+          <a:fillRef idx="3">
+            <a:schemeClr val="accent1"/>
+          </a:fillRef>
+          <a:effectRef idx="2">
+            <a:schemeClr val="accent1"/>
+          </a:effectRef>
+          <a:fontRef idx="minor">
+            <a:schemeClr val="lt1"/>
+          </a:fontRef>
+        </p:style>
+        <p:txBody>
+          <a:bodyPr rtlCol="0" anchor="ctr"/>
+          <a:lstStyle/>
+          <a:p>
+            <a:pPr algn="ctr"/>
+          </a:p>
+        </p:txBody>
+      </p:sp>
+      <p:sp>
+        <p:nvSpPr>
+          <p:cNvPr id="24" name="TextBox 23"/>
+          <p:cNvSpPr txBox="1"/>
+          <p:nvPr/>
+        </p:nvSpPr>
+        <p:spPr>
+          <a:xfrm>
+            <a:off x="2618640" y="1584000"/>
+            <a:ext cx="2186640" cy="468000"/>
+          </a:xfrm>
+          <a:prstGeom prst="rect">
+            <a:avLst/>
+          </a:prstGeom>
+          <a:noFill/>
+        </p:spPr>
+        <p:txBody>
+          <a:bodyPr wrap="none">
+            <a:spAutoFit/>
+          </a:bodyPr>
+          <a:lstStyle/>
+          <a:p>
+            <a:pPr algn="ctr"/>
+            <a:r>
+              <a:rPr sz="1300" b="1">
+                <a:solidFill>
+                  <a:srgbClr val="1F3564"/>
+                </a:solidFill>
+                <a:latin typeface="IPAゴシック"/>
+              </a:rPr>
+              <a:t>慶應義塾大学</a:t>
+            </a:r>
+          </a:p>
+        </p:txBody>
+      </p:sp>
+      <p:sp>
+        <p:nvSpPr>
+          <p:cNvPr id="25" name="Rectangle 24"/>
+          <p:cNvSpPr/>
+          <p:nvPr/>
+        </p:nvSpPr>
+        <p:spPr>
+          <a:xfrm>
+            <a:off x="2582640" y="2142000"/>
+            <a:ext cx="2258640" cy="540000"/>
+          </a:xfrm>
+          <a:prstGeom prst="rect">
+            <a:avLst/>
+          </a:prstGeom>
+          <a:solidFill>
+            <a:srgbClr val="FFFFFF"/>
+          </a:solidFill>
+          <a:ln w="12700">
+            <a:solidFill>
+              <a:srgbClr val="9B59B6"/>
+            </a:solidFill>
+          </a:ln>
+        </p:spPr>
+        <p:style>
+          <a:lnRef idx="1">
+            <a:schemeClr val="accent1"/>
+          </a:lnRef>
+          <a:fillRef idx="3">
+            <a:schemeClr val="accent1"/>
+          </a:fillRef>
+          <a:effectRef idx="2">
+            <a:schemeClr val="accent1"/>
+          </a:effectRef>
+          <a:fontRef idx="minor">
+            <a:schemeClr val="lt1"/>
+          </a:fontRef>
+        </p:style>
+        <p:txBody>
+          <a:bodyPr rtlCol="0" anchor="ctr"/>
+          <a:lstStyle/>
+          <a:p>
+            <a:pPr algn="ctr"/>
+          </a:p>
+        </p:txBody>
+      </p:sp>
+      <p:sp>
+        <p:nvSpPr>
+          <p:cNvPr id="26" name="TextBox 25"/>
+          <p:cNvSpPr txBox="1"/>
+          <p:nvPr/>
+        </p:nvSpPr>
+        <p:spPr>
+          <a:xfrm>
+            <a:off x="2618640" y="2178000"/>
+            <a:ext cx="2186640" cy="468000"/>
+          </a:xfrm>
+          <a:prstGeom prst="rect">
+            <a:avLst/>
+          </a:prstGeom>
+          <a:noFill/>
+        </p:spPr>
+        <p:txBody>
+          <a:bodyPr wrap="none">
+            <a:spAutoFit/>
+          </a:bodyPr>
+          <a:lstStyle/>
+          <a:p>
+            <a:pPr algn="ctr"/>
+            <a:r>
+              <a:rPr sz="1300" b="1">
+                <a:solidFill>
+                  <a:srgbClr val="1F3564"/>
+                </a:solidFill>
+                <a:latin typeface="IPAゴシック"/>
+              </a:rPr>
+              <a:t>早稲田大学</a:t>
+            </a:r>
+          </a:p>
+        </p:txBody>
+      </p:sp>
+      <p:sp>
+        <p:nvSpPr>
+          <p:cNvPr id="27" name="Rectangle 26"/>
+          <p:cNvSpPr/>
+          <p:nvPr/>
+        </p:nvSpPr>
+        <p:spPr>
+          <a:xfrm>
+            <a:off x="4913280" y="936000"/>
+            <a:ext cx="2294640" cy="540000"/>
+          </a:xfrm>
+          <a:prstGeom prst="rect">
+            <a:avLst/>
+          </a:prstGeom>
+          <a:solidFill>
+            <a:srgbClr val="F5A623"/>
+          </a:solidFill>
+          <a:ln>
+            <a:noFill/>
+          </a:ln>
+        </p:spPr>
+        <p:style>
+          <a:lnRef idx="1">
+            <a:schemeClr val="accent1"/>
+          </a:lnRef>
+          <a:fillRef idx="3">
+            <a:schemeClr val="accent1"/>
+          </a:fillRef>
+          <a:effectRef idx="2">
+            <a:schemeClr val="accent1"/>
+          </a:effectRef>
+          <a:fontRef idx="minor">
+            <a:schemeClr val="lt1"/>
+          </a:fontRef>
+        </p:style>
+        <p:txBody>
+          <a:bodyPr rtlCol="0" anchor="ctr"/>
+          <a:lstStyle/>
+          <a:p>
+            <a:pPr algn="ctr"/>
+          </a:p>
+        </p:txBody>
+      </p:sp>
+      <p:sp>
+        <p:nvSpPr>
+          <p:cNvPr id="28" name="TextBox 27"/>
+          <p:cNvSpPr txBox="1"/>
+          <p:nvPr/>
+        </p:nvSpPr>
+        <p:spPr>
+          <a:xfrm>
+            <a:off x="4949280" y="972000"/>
+            <a:ext cx="2258640" cy="468000"/>
+          </a:xfrm>
+          <a:prstGeom prst="rect">
+            <a:avLst/>
+          </a:prstGeom>
+          <a:noFill/>
+        </p:spPr>
+        <p:txBody>
+          <a:bodyPr wrap="none">
+            <a:spAutoFit/>
+          </a:bodyPr>
+          <a:lstStyle/>
+          <a:p>
+            <a:pPr algn="ctr"/>
+            <a:r>
+              <a:rPr sz="1300" b="1">
+                <a:solidFill>
+                  <a:srgbClr val="FFFFFF"/>
+                </a:solidFill>
+                <a:latin typeface="IPAゴシック"/>
+              </a:rPr>
+              <a:t>■ 準難関私立</a:t>
+            </a:r>
+          </a:p>
+        </p:txBody>
+      </p:sp>
+      <p:sp>
+        <p:nvSpPr>
+          <p:cNvPr id="29" name="Rectangle 28"/>
+          <p:cNvSpPr/>
+          <p:nvPr/>
+        </p:nvSpPr>
+        <p:spPr>
+          <a:xfrm>
+            <a:off x="4949280" y="1548000"/>
+            <a:ext cx="2258640" cy="540000"/>
+          </a:xfrm>
+          <a:prstGeom prst="rect">
+            <a:avLst/>
+          </a:prstGeom>
+          <a:solidFill>
+            <a:srgbClr val="FFFFFF"/>
+          </a:solidFill>
+          <a:ln w="12700">
+            <a:solidFill>
+              <a:srgbClr val="F5A623"/>
+            </a:solidFill>
+          </a:ln>
+        </p:spPr>
+        <p:style>
+          <a:lnRef idx="1">
+            <a:schemeClr val="accent1"/>
+          </a:lnRef>
+          <a:fillRef idx="3">
+            <a:schemeClr val="accent1"/>
+          </a:fillRef>
+          <a:effectRef idx="2">
+            <a:schemeClr val="accent1"/>
+          </a:effectRef>
+          <a:fontRef idx="minor">
+            <a:schemeClr val="lt1"/>
+          </a:fontRef>
+        </p:style>
+        <p:txBody>
+          <a:bodyPr rtlCol="0" anchor="ctr"/>
+          <a:lstStyle/>
+          <a:p>
+            <a:pPr algn="ctr"/>
+          </a:p>
+        </p:txBody>
+      </p:sp>
+      <p:sp>
+        <p:nvSpPr>
+          <p:cNvPr id="30" name="TextBox 29"/>
+          <p:cNvSpPr txBox="1"/>
+          <p:nvPr/>
+        </p:nvSpPr>
+        <p:spPr>
+          <a:xfrm>
+            <a:off x="4985280" y="1584000"/>
+            <a:ext cx="2186640" cy="468000"/>
+          </a:xfrm>
+          <a:prstGeom prst="rect">
+            <a:avLst/>
+          </a:prstGeom>
+          <a:noFill/>
+        </p:spPr>
+        <p:txBody>
+          <a:bodyPr wrap="none">
+            <a:spAutoFit/>
+          </a:bodyPr>
+          <a:lstStyle/>
+          <a:p>
+            <a:pPr algn="ctr"/>
+            <a:r>
+              <a:rPr sz="1300" b="1">
+                <a:solidFill>
+                  <a:srgbClr val="1F3564"/>
+                </a:solidFill>
+                <a:latin typeface="IPAゴシック"/>
+              </a:rPr>
+              <a:t>上智大学</a:t>
+            </a:r>
+          </a:p>
+        </p:txBody>
+      </p:sp>
+      <p:sp>
+        <p:nvSpPr>
+          <p:cNvPr id="31" name="Rectangle 30"/>
+          <p:cNvSpPr/>
+          <p:nvPr/>
+        </p:nvSpPr>
+        <p:spPr>
+          <a:xfrm>
+            <a:off x="4949280" y="2142000"/>
+            <a:ext cx="2258640" cy="540000"/>
+          </a:xfrm>
+          <a:prstGeom prst="rect">
+            <a:avLst/>
+          </a:prstGeom>
+          <a:solidFill>
+            <a:srgbClr val="FFFFFF"/>
+          </a:solidFill>
+          <a:ln w="12700">
+            <a:solidFill>
+              <a:srgbClr val="F5A623"/>
+            </a:solidFill>
+          </a:ln>
+        </p:spPr>
+        <p:style>
+          <a:lnRef idx="1">
+            <a:schemeClr val="accent1"/>
+          </a:lnRef>
+          <a:fillRef idx="3">
+            <a:schemeClr val="accent1"/>
+          </a:fillRef>
+          <a:effectRef idx="2">
+            <a:schemeClr val="accent1"/>
+          </a:effectRef>
+          <a:fontRef idx="minor">
+            <a:schemeClr val="lt1"/>
+          </a:fontRef>
+        </p:style>
+        <p:txBody>
+          <a:bodyPr rtlCol="0" anchor="ctr"/>
+          <a:lstStyle/>
+          <a:p>
+            <a:pPr algn="ctr"/>
+          </a:p>
+        </p:txBody>
+      </p:sp>
+      <p:sp>
+        <p:nvSpPr>
+          <p:cNvPr id="32" name="TextBox 31"/>
+          <p:cNvSpPr txBox="1"/>
+          <p:nvPr/>
+        </p:nvSpPr>
+        <p:spPr>
+          <a:xfrm>
+            <a:off x="4985280" y="2178000"/>
+            <a:ext cx="2186640" cy="468000"/>
+          </a:xfrm>
+          <a:prstGeom prst="rect">
+            <a:avLst/>
+          </a:prstGeom>
+          <a:noFill/>
+        </p:spPr>
+        <p:txBody>
+          <a:bodyPr wrap="none">
+            <a:spAutoFit/>
+          </a:bodyPr>
+          <a:lstStyle/>
+          <a:p>
+            <a:pPr algn="ctr"/>
+            <a:r>
+              <a:rPr sz="1300" b="1">
+                <a:solidFill>
+                  <a:srgbClr val="1F3564"/>
+                </a:solidFill>
+                <a:latin typeface="IPAゴシック"/>
+              </a:rPr>
+              <a:t>東京理科大学</a:t>
+            </a:r>
+          </a:p>
+        </p:txBody>
+      </p:sp>
+      <p:sp>
+        <p:nvSpPr>
+          <p:cNvPr id="33" name="Rectangle 32"/>
+          <p:cNvSpPr/>
+          <p:nvPr/>
+        </p:nvSpPr>
+        <p:spPr>
+          <a:xfrm>
+            <a:off x="4949280" y="2736000"/>
+            <a:ext cx="2258640" cy="540000"/>
+          </a:xfrm>
+          <a:prstGeom prst="rect">
+            <a:avLst/>
+          </a:prstGeom>
+          <a:solidFill>
+            <a:srgbClr val="FFFFFF"/>
+          </a:solidFill>
+          <a:ln w="12700">
+            <a:solidFill>
+              <a:srgbClr val="F5A623"/>
+            </a:solidFill>
+          </a:ln>
+        </p:spPr>
+        <p:style>
+          <a:lnRef idx="1">
+            <a:schemeClr val="accent1"/>
+          </a:lnRef>
+          <a:fillRef idx="3">
+            <a:schemeClr val="accent1"/>
+          </a:fillRef>
+          <a:effectRef idx="2">
+            <a:schemeClr val="accent1"/>
+          </a:effectRef>
+          <a:fontRef idx="minor">
+            <a:schemeClr val="lt1"/>
+          </a:fontRef>
+        </p:style>
+        <p:txBody>
+          <a:bodyPr rtlCol="0" anchor="ctr"/>
+          <a:lstStyle/>
+          <a:p>
+            <a:pPr algn="ctr"/>
+          </a:p>
+        </p:txBody>
+      </p:sp>
+      <p:sp>
+        <p:nvSpPr>
+          <p:cNvPr id="34" name="TextBox 33"/>
+          <p:cNvSpPr txBox="1"/>
+          <p:nvPr/>
+        </p:nvSpPr>
+        <p:spPr>
+          <a:xfrm>
+            <a:off x="4985280" y="2772000"/>
+            <a:ext cx="2186640" cy="468000"/>
+          </a:xfrm>
+          <a:prstGeom prst="rect">
+            <a:avLst/>
+          </a:prstGeom>
+          <a:noFill/>
+        </p:spPr>
+        <p:txBody>
+          <a:bodyPr wrap="none">
+            <a:spAutoFit/>
+          </a:bodyPr>
+          <a:lstStyle/>
+          <a:p>
+            <a:pPr algn="ctr"/>
+            <a:r>
+              <a:rPr sz="1300" b="1">
+                <a:solidFill>
+                  <a:srgbClr val="1F3564"/>
+                </a:solidFill>
+                <a:latin typeface="IPAゴシック"/>
+              </a:rPr>
+              <a:t>国際基督教大学</a:t>
+            </a:r>
+          </a:p>
+        </p:txBody>
+      </p:sp>
+      <p:sp>
+        <p:nvSpPr>
+          <p:cNvPr id="35" name="Rectangle 34"/>
+          <p:cNvSpPr/>
+          <p:nvPr/>
+        </p:nvSpPr>
+        <p:spPr>
+          <a:xfrm>
+            <a:off x="7279920" y="936000"/>
+            <a:ext cx="2294640" cy="540000"/>
+          </a:xfrm>
+          <a:prstGeom prst="rect">
+            <a:avLst/>
+          </a:prstGeom>
+          <a:solidFill>
+            <a:srgbClr val="1F78B4"/>
+          </a:solidFill>
+          <a:ln>
+            <a:noFill/>
+          </a:ln>
+        </p:spPr>
+        <p:style>
+          <a:lnRef idx="1">
+            <a:schemeClr val="accent1"/>
+          </a:lnRef>
+          <a:fillRef idx="3">
+            <a:schemeClr val="accent1"/>
+          </a:fillRef>
+          <a:effectRef idx="2">
+            <a:schemeClr val="accent1"/>
+          </a:effectRef>
+          <a:fontRef idx="minor">
+            <a:schemeClr val="lt1"/>
+          </a:fontRef>
+        </p:style>
+        <p:txBody>
+          <a:bodyPr rtlCol="0" anchor="ctr"/>
+          <a:lstStyle/>
+          <a:p>
+            <a:pPr algn="ctr"/>
+          </a:p>
+        </p:txBody>
+      </p:sp>
+      <p:sp>
+        <p:nvSpPr>
+          <p:cNvPr id="36" name="TextBox 35"/>
+          <p:cNvSpPr txBox="1"/>
+          <p:nvPr/>
+        </p:nvSpPr>
+        <p:spPr>
+          <a:xfrm>
+            <a:off x="7315920" y="972000"/>
+            <a:ext cx="2258640" cy="468000"/>
+          </a:xfrm>
+          <a:prstGeom prst="rect">
+            <a:avLst/>
+          </a:prstGeom>
+          <a:noFill/>
+        </p:spPr>
+        <p:txBody>
+          <a:bodyPr wrap="none">
+            <a:spAutoFit/>
+          </a:bodyPr>
+          <a:lstStyle/>
+          <a:p>
+            <a:pPr algn="ctr"/>
+            <a:r>
+              <a:rPr sz="1300" b="1">
+                <a:solidFill>
+                  <a:srgbClr val="FFFFFF"/>
+                </a:solidFill>
+                <a:latin typeface="IPAゴシック"/>
+              </a:rPr>
+              <a:t>■ GMARCH</a:t>
+            </a:r>
+          </a:p>
+        </p:txBody>
+      </p:sp>
+      <p:sp>
+        <p:nvSpPr>
+          <p:cNvPr id="37" name="Rectangle 36"/>
+          <p:cNvSpPr/>
+          <p:nvPr/>
+        </p:nvSpPr>
+        <p:spPr>
+          <a:xfrm>
+            <a:off x="7315920" y="1548000"/>
+            <a:ext cx="2258640" cy="540000"/>
+          </a:xfrm>
+          <a:prstGeom prst="rect">
+            <a:avLst/>
+          </a:prstGeom>
+          <a:solidFill>
+            <a:srgbClr val="FFFFFF"/>
+          </a:solidFill>
+          <a:ln w="12700">
+            <a:solidFill>
+              <a:srgbClr val="1F78B4"/>
+            </a:solidFill>
+          </a:ln>
+        </p:spPr>
+        <p:style>
+          <a:lnRef idx="1">
+            <a:schemeClr val="accent1"/>
+          </a:lnRef>
+          <a:fillRef idx="3">
+            <a:schemeClr val="accent1"/>
+          </a:fillRef>
+          <a:effectRef idx="2">
+            <a:schemeClr val="accent1"/>
+          </a:effectRef>
+          <a:fontRef idx="minor">
+            <a:schemeClr val="lt1"/>
+          </a:fontRef>
+        </p:style>
+        <p:txBody>
+          <a:bodyPr rtlCol="0" anchor="ctr"/>
+          <a:lstStyle/>
+          <a:p>
+            <a:pPr algn="ctr"/>
+          </a:p>
+        </p:txBody>
+      </p:sp>
+      <p:sp>
+        <p:nvSpPr>
+          <p:cNvPr id="38" name="TextBox 37"/>
+          <p:cNvSpPr txBox="1"/>
+          <p:nvPr/>
+        </p:nvSpPr>
+        <p:spPr>
+          <a:xfrm>
+            <a:off x="7351920" y="1584000"/>
+            <a:ext cx="2186640" cy="468000"/>
+          </a:xfrm>
+          <a:prstGeom prst="rect">
+            <a:avLst/>
+          </a:prstGeom>
+          <a:noFill/>
+        </p:spPr>
+        <p:txBody>
+          <a:bodyPr wrap="none">
+            <a:spAutoFit/>
+          </a:bodyPr>
+          <a:lstStyle/>
+          <a:p>
+            <a:pPr algn="ctr"/>
+            <a:r>
+              <a:rPr sz="1300" b="1">
+                <a:solidFill>
+                  <a:srgbClr val="1F3564"/>
+                </a:solidFill>
+                <a:latin typeface="IPAゴシック"/>
+              </a:rPr>
+              <a:t>学習院大学</a:t>
+            </a:r>
+          </a:p>
+        </p:txBody>
+      </p:sp>
+      <p:sp>
+        <p:nvSpPr>
+          <p:cNvPr id="39" name="Rectangle 38"/>
+          <p:cNvSpPr/>
+          <p:nvPr/>
+        </p:nvSpPr>
+        <p:spPr>
+          <a:xfrm>
+            <a:off x="7315920" y="2142000"/>
+            <a:ext cx="2258640" cy="540000"/>
+          </a:xfrm>
+          <a:prstGeom prst="rect">
+            <a:avLst/>
+          </a:prstGeom>
+          <a:solidFill>
+            <a:srgbClr val="FFFFFF"/>
+          </a:solidFill>
+          <a:ln w="12700">
+            <a:solidFill>
+              <a:srgbClr val="1F78B4"/>
+            </a:solidFill>
+          </a:ln>
+        </p:spPr>
+        <p:style>
+          <a:lnRef idx="1">
+            <a:schemeClr val="accent1"/>
+          </a:lnRef>
+          <a:fillRef idx="3">
+            <a:schemeClr val="accent1"/>
+          </a:fillRef>
+          <a:effectRef idx="2">
+            <a:schemeClr val="accent1"/>
+          </a:effectRef>
+          <a:fontRef idx="minor">
+            <a:schemeClr val="lt1"/>
+          </a:fontRef>
+        </p:style>
+        <p:txBody>
+          <a:bodyPr rtlCol="0" anchor="ctr"/>
+          <a:lstStyle/>
+          <a:p>
+            <a:pPr algn="ctr"/>
+          </a:p>
+        </p:txBody>
+      </p:sp>
+      <p:sp>
+        <p:nvSpPr>
+          <p:cNvPr id="40" name="TextBox 39"/>
+          <p:cNvSpPr txBox="1"/>
+          <p:nvPr/>
+        </p:nvSpPr>
+        <p:spPr>
+          <a:xfrm>
+            <a:off x="7351920" y="2178000"/>
+            <a:ext cx="2186640" cy="468000"/>
+          </a:xfrm>
+          <a:prstGeom prst="rect">
+            <a:avLst/>
+          </a:prstGeom>
+          <a:noFill/>
+        </p:spPr>
+        <p:txBody>
+          <a:bodyPr wrap="none">
+            <a:spAutoFit/>
+          </a:bodyPr>
+          <a:lstStyle/>
+          <a:p>
+            <a:pPr algn="ctr"/>
+            <a:r>
+              <a:rPr sz="1300" b="1">
+                <a:solidFill>
+                  <a:srgbClr val="1F3564"/>
+                </a:solidFill>
+                <a:latin typeface="IPAゴシック"/>
+              </a:rPr>
+              <a:t>明治大学</a:t>
+            </a:r>
+          </a:p>
+        </p:txBody>
+      </p:sp>
+      <p:sp>
+        <p:nvSpPr>
+          <p:cNvPr id="41" name="Rectangle 40"/>
+          <p:cNvSpPr/>
+          <p:nvPr/>
+        </p:nvSpPr>
+        <p:spPr>
+          <a:xfrm>
+            <a:off x="7315920" y="2736000"/>
+            <a:ext cx="2258640" cy="540000"/>
+          </a:xfrm>
+          <a:prstGeom prst="rect">
+            <a:avLst/>
+          </a:prstGeom>
+          <a:solidFill>
+            <a:srgbClr val="FFFFFF"/>
+          </a:solidFill>
+          <a:ln w="12700">
+            <a:solidFill>
+              <a:srgbClr val="1F78B4"/>
+            </a:solidFill>
+          </a:ln>
+        </p:spPr>
+        <p:style>
+          <a:lnRef idx="1">
+            <a:schemeClr val="accent1"/>
+          </a:lnRef>
+          <a:fillRef idx="3">
+            <a:schemeClr val="accent1"/>
+          </a:fillRef>
+          <a:effectRef idx="2">
+            <a:schemeClr val="accent1"/>
+          </a:effectRef>
+          <a:fontRef idx="minor">
+            <a:schemeClr val="lt1"/>
+          </a:fontRef>
+        </p:style>
+        <p:txBody>
+          <a:bodyPr rtlCol="0" anchor="ctr"/>
+          <a:lstStyle/>
+          <a:p>
+            <a:pPr algn="ctr"/>
+          </a:p>
+        </p:txBody>
+      </p:sp>
+      <p:sp>
+        <p:nvSpPr>
+          <p:cNvPr id="42" name="TextBox 41"/>
+          <p:cNvSpPr txBox="1"/>
+          <p:nvPr/>
+        </p:nvSpPr>
+        <p:spPr>
+          <a:xfrm>
+            <a:off x="7351920" y="2772000"/>
+            <a:ext cx="2186640" cy="468000"/>
+          </a:xfrm>
+          <a:prstGeom prst="rect">
+            <a:avLst/>
+          </a:prstGeom>
+          <a:noFill/>
+        </p:spPr>
+        <p:txBody>
+          <a:bodyPr wrap="none">
+            <a:spAutoFit/>
+          </a:bodyPr>
+          <a:lstStyle/>
+          <a:p>
+            <a:pPr algn="ctr"/>
+            <a:r>
+              <a:rPr sz="1300" b="1">
+                <a:solidFill>
+                  <a:srgbClr val="1F3564"/>
+                </a:solidFill>
+                <a:latin typeface="IPAゴシック"/>
+              </a:rPr>
+              <a:t>青山学院大学</a:t>
+            </a:r>
+          </a:p>
+        </p:txBody>
+      </p:sp>
+      <p:sp>
+        <p:nvSpPr>
+          <p:cNvPr id="43" name="Rectangle 42"/>
+          <p:cNvSpPr/>
+          <p:nvPr/>
+        </p:nvSpPr>
+        <p:spPr>
+          <a:xfrm>
+            <a:off x="7315920" y="3330000"/>
+            <a:ext cx="2258640" cy="540000"/>
+          </a:xfrm>
+          <a:prstGeom prst="rect">
+            <a:avLst/>
+          </a:prstGeom>
+          <a:solidFill>
+            <a:srgbClr val="FFFFFF"/>
+          </a:solidFill>
+          <a:ln w="12700">
+            <a:solidFill>
+              <a:srgbClr val="1F78B4"/>
+            </a:solidFill>
+          </a:ln>
+        </p:spPr>
+        <p:style>
+          <a:lnRef idx="1">
+            <a:schemeClr val="accent1"/>
+          </a:lnRef>
+          <a:fillRef idx="3">
+            <a:schemeClr val="accent1"/>
+          </a:fillRef>
+          <a:effectRef idx="2">
+            <a:schemeClr val="accent1"/>
+          </a:effectRef>
+          <a:fontRef idx="minor">
+            <a:schemeClr val="lt1"/>
+          </a:fontRef>
+        </p:style>
+        <p:txBody>
+          <a:bodyPr rtlCol="0" anchor="ctr"/>
+          <a:lstStyle/>
+          <a:p>
+            <a:pPr algn="ctr"/>
+          </a:p>
+        </p:txBody>
+      </p:sp>
+      <p:sp>
+        <p:nvSpPr>
+          <p:cNvPr id="44" name="TextBox 43"/>
+          <p:cNvSpPr txBox="1"/>
+          <p:nvPr/>
+        </p:nvSpPr>
+        <p:spPr>
+          <a:xfrm>
+            <a:off x="7351920" y="3366000"/>
+            <a:ext cx="2186640" cy="468000"/>
+          </a:xfrm>
+          <a:prstGeom prst="rect">
+            <a:avLst/>
+          </a:prstGeom>
+          <a:noFill/>
+        </p:spPr>
+        <p:txBody>
+          <a:bodyPr wrap="none">
+            <a:spAutoFit/>
+          </a:bodyPr>
+          <a:lstStyle/>
+          <a:p>
+            <a:pPr algn="ctr"/>
+            <a:r>
+              <a:rPr sz="1300" b="1">
+                <a:solidFill>
+                  <a:srgbClr val="1F3564"/>
+                </a:solidFill>
+                <a:latin typeface="IPAゴシック"/>
+              </a:rPr>
+              <a:t>立教大学</a:t>
+            </a:r>
+          </a:p>
+        </p:txBody>
+      </p:sp>
+      <p:sp>
+        <p:nvSpPr>
+          <p:cNvPr id="45" name="Rectangle 44"/>
+          <p:cNvSpPr/>
+          <p:nvPr/>
+        </p:nvSpPr>
+        <p:spPr>
+          <a:xfrm>
+            <a:off x="7315920" y="3924000"/>
+            <a:ext cx="2258640" cy="540000"/>
+          </a:xfrm>
+          <a:prstGeom prst="rect">
+            <a:avLst/>
+          </a:prstGeom>
+          <a:solidFill>
+            <a:srgbClr val="FFFFFF"/>
+          </a:solidFill>
+          <a:ln w="12700">
+            <a:solidFill>
+              <a:srgbClr val="1F78B4"/>
+            </a:solidFill>
+          </a:ln>
+        </p:spPr>
+        <p:style>
+          <a:lnRef idx="1">
+            <a:schemeClr val="accent1"/>
+          </a:lnRef>
+          <a:fillRef idx="3">
+            <a:schemeClr val="accent1"/>
+          </a:fillRef>
+          <a:effectRef idx="2">
+            <a:schemeClr val="accent1"/>
+          </a:effectRef>
+          <a:fontRef idx="minor">
+            <a:schemeClr val="lt1"/>
+          </a:fontRef>
+        </p:style>
+        <p:txBody>
+          <a:bodyPr rtlCol="0" anchor="ctr"/>
+          <a:lstStyle/>
+          <a:p>
+            <a:pPr algn="ctr"/>
+          </a:p>
+        </p:txBody>
+      </p:sp>
+      <p:sp>
+        <p:nvSpPr>
+          <p:cNvPr id="46" name="TextBox 45"/>
+          <p:cNvSpPr txBox="1"/>
+          <p:nvPr/>
+        </p:nvSpPr>
+        <p:spPr>
+          <a:xfrm>
+            <a:off x="7351920" y="3960000"/>
+            <a:ext cx="2186640" cy="468000"/>
+          </a:xfrm>
+          <a:prstGeom prst="rect">
+            <a:avLst/>
+          </a:prstGeom>
+          <a:noFill/>
+        </p:spPr>
+        <p:txBody>
+          <a:bodyPr wrap="none">
+            <a:spAutoFit/>
+          </a:bodyPr>
+          <a:lstStyle/>
+          <a:p>
+            <a:pPr algn="ctr"/>
+            <a:r>
+              <a:rPr sz="1300" b="1">
+                <a:solidFill>
+                  <a:srgbClr val="1F3564"/>
+                </a:solidFill>
+                <a:latin typeface="IPAゴシック"/>
+              </a:rPr>
+              <a:t>中央大学</a:t>
+            </a:r>
+          </a:p>
+        </p:txBody>
+      </p:sp>
+      <p:sp>
+        <p:nvSpPr>
+          <p:cNvPr id="47" name="Rectangle 46"/>
+          <p:cNvSpPr/>
+          <p:nvPr/>
+        </p:nvSpPr>
+        <p:spPr>
+          <a:xfrm>
+            <a:off x="7315920" y="4518000"/>
+            <a:ext cx="2258640" cy="540000"/>
+          </a:xfrm>
+          <a:prstGeom prst="rect">
+            <a:avLst/>
+          </a:prstGeom>
+          <a:solidFill>
+            <a:srgbClr val="FFFFFF"/>
+          </a:solidFill>
+          <a:ln w="12700">
+            <a:solidFill>
+              <a:srgbClr val="1F78B4"/>
+            </a:solidFill>
+          </a:ln>
+        </p:spPr>
+        <p:style>
+          <a:lnRef idx="1">
+            <a:schemeClr val="accent1"/>
+          </a:lnRef>
+          <a:fillRef idx="3">
+            <a:schemeClr val="accent1"/>
+          </a:fillRef>
+          <a:effectRef idx="2">
+            <a:schemeClr val="accent1"/>
+          </a:effectRef>
+          <a:fontRef idx="minor">
+            <a:schemeClr val="lt1"/>
+          </a:fontRef>
+        </p:style>
+        <p:txBody>
+          <a:bodyPr rtlCol="0" anchor="ctr"/>
+          <a:lstStyle/>
+          <a:p>
+            <a:pPr algn="ctr"/>
+          </a:p>
+        </p:txBody>
+      </p:sp>
+      <p:sp>
+        <p:nvSpPr>
+          <p:cNvPr id="48" name="TextBox 47"/>
+          <p:cNvSpPr txBox="1"/>
+          <p:nvPr/>
+        </p:nvSpPr>
+        <p:spPr>
+          <a:xfrm>
+            <a:off x="7351920" y="4554000"/>
+            <a:ext cx="2186640" cy="468000"/>
+          </a:xfrm>
+          <a:prstGeom prst="rect">
+            <a:avLst/>
+          </a:prstGeom>
+          <a:noFill/>
+        </p:spPr>
+        <p:txBody>
+          <a:bodyPr wrap="none">
+            <a:spAutoFit/>
+          </a:bodyPr>
+          <a:lstStyle/>
+          <a:p>
+            <a:pPr algn="ctr"/>
+            <a:r>
+              <a:rPr sz="1300" b="1">
+                <a:solidFill>
+                  <a:srgbClr val="1F3564"/>
+                </a:solidFill>
+                <a:latin typeface="IPAゴシック"/>
+              </a:rPr>
+              <a:t>法政大学</a:t>
+            </a:r>
+          </a:p>
+        </p:txBody>
+      </p:sp>
+      <p:sp>
+        <p:nvSpPr>
+          <p:cNvPr id="49" name="Rectangle 48"/>
+          <p:cNvSpPr/>
+          <p:nvPr/>
+        </p:nvSpPr>
+        <p:spPr>
+          <a:xfrm>
+            <a:off x="9646560" y="936000"/>
+            <a:ext cx="2294640" cy="540000"/>
+          </a:xfrm>
+          <a:prstGeom prst="rect">
+            <a:avLst/>
+          </a:prstGeom>
+          <a:solidFill>
+            <a:srgbClr val="27AE60"/>
+          </a:solidFill>
+          <a:ln>
+            <a:noFill/>
+          </a:ln>
+        </p:spPr>
+        <p:style>
+          <a:lnRef idx="1">
+            <a:schemeClr val="accent1"/>
+          </a:lnRef>
+          <a:fillRef idx="3">
+            <a:schemeClr val="accent1"/>
+          </a:fillRef>
+          <a:effectRef idx="2">
+            <a:schemeClr val="accent1"/>
+          </a:effectRef>
+          <a:fontRef idx="minor">
+            <a:schemeClr val="lt1"/>
+          </a:fontRef>
+        </p:style>
+        <p:txBody>
+          <a:bodyPr rtlCol="0" anchor="ctr"/>
+          <a:lstStyle/>
+          <a:p>
+            <a:pPr algn="ctr"/>
+          </a:p>
+        </p:txBody>
+      </p:sp>
+      <p:sp>
+        <p:nvSpPr>
+          <p:cNvPr id="50" name="TextBox 49"/>
+          <p:cNvSpPr txBox="1"/>
+          <p:nvPr/>
+        </p:nvSpPr>
+        <p:spPr>
+          <a:xfrm>
+            <a:off x="9682560" y="972000"/>
+            <a:ext cx="2258640" cy="468000"/>
+          </a:xfrm>
+          <a:prstGeom prst="rect">
+            <a:avLst/>
+          </a:prstGeom>
+          <a:noFill/>
+        </p:spPr>
+        <p:txBody>
+          <a:bodyPr wrap="none">
+            <a:spAutoFit/>
+          </a:bodyPr>
+          <a:lstStyle/>
+          <a:p>
+            <a:pPr algn="ctr"/>
+            <a:r>
+              <a:rPr sz="1300" b="1">
+                <a:solidFill>
+                  <a:srgbClr val="FFFFFF"/>
+                </a:solidFill>
+                <a:latin typeface="IPAゴシック"/>
+              </a:rPr>
+              <a:t>■ 関関同立</a:t>
+            </a:r>
+          </a:p>
+        </p:txBody>
+      </p:sp>
+      <p:sp>
+        <p:nvSpPr>
+          <p:cNvPr id="51" name="Rectangle 50"/>
+          <p:cNvSpPr/>
+          <p:nvPr/>
+        </p:nvSpPr>
+        <p:spPr>
+          <a:xfrm>
+            <a:off x="9682560" y="1548000"/>
+            <a:ext cx="2258640" cy="540000"/>
+          </a:xfrm>
+          <a:prstGeom prst="rect">
+            <a:avLst/>
+          </a:prstGeom>
+          <a:solidFill>
+            <a:srgbClr val="FFFFFF"/>
+          </a:solidFill>
+          <a:ln w="12700">
+            <a:solidFill>
+              <a:srgbClr val="27AE60"/>
+            </a:solidFill>
+          </a:ln>
+        </p:spPr>
+        <p:style>
+          <a:lnRef idx="1">
+            <a:schemeClr val="accent1"/>
+          </a:lnRef>
+          <a:fillRef idx="3">
+            <a:schemeClr val="accent1"/>
+          </a:fillRef>
+          <a:effectRef idx="2">
+            <a:schemeClr val="accent1"/>
+          </a:effectRef>
+          <a:fontRef idx="minor">
+            <a:schemeClr val="lt1"/>
+          </a:fontRef>
+        </p:style>
+        <p:txBody>
+          <a:bodyPr rtlCol="0" anchor="ctr"/>
+          <a:lstStyle/>
+          <a:p>
+            <a:pPr algn="ctr"/>
+          </a:p>
+        </p:txBody>
+      </p:sp>
+      <p:sp>
+        <p:nvSpPr>
+          <p:cNvPr id="52" name="TextBox 51"/>
+          <p:cNvSpPr txBox="1"/>
+          <p:nvPr/>
+        </p:nvSpPr>
+        <p:spPr>
+          <a:xfrm>
+            <a:off x="9718560" y="1584000"/>
+            <a:ext cx="2186640" cy="468000"/>
+          </a:xfrm>
+          <a:prstGeom prst="rect">
+            <a:avLst/>
+          </a:prstGeom>
+          <a:noFill/>
+        </p:spPr>
+        <p:txBody>
+          <a:bodyPr wrap="none">
+            <a:spAutoFit/>
+          </a:bodyPr>
+          <a:lstStyle/>
+          <a:p>
+            <a:pPr algn="ctr"/>
+            <a:r>
+              <a:rPr sz="1300" b="1">
+                <a:solidFill>
+                  <a:srgbClr val="1F3564"/>
+                </a:solidFill>
+                <a:latin typeface="IPAゴシック"/>
+              </a:rPr>
+              <a:t>関西大学</a:t>
+            </a:r>
+          </a:p>
+        </p:txBody>
+      </p:sp>
+      <p:sp>
+        <p:nvSpPr>
+          <p:cNvPr id="53" name="Rectangle 52"/>
+          <p:cNvSpPr/>
+          <p:nvPr/>
+        </p:nvSpPr>
+        <p:spPr>
+          <a:xfrm>
+            <a:off x="9682560" y="2142000"/>
+            <a:ext cx="2258640" cy="540000"/>
+          </a:xfrm>
+          <a:prstGeom prst="rect">
+            <a:avLst/>
+          </a:prstGeom>
+          <a:solidFill>
+            <a:srgbClr val="FFFFFF"/>
+          </a:solidFill>
+          <a:ln w="12700">
+            <a:solidFill>
+              <a:srgbClr val="27AE60"/>
+            </a:solidFill>
+          </a:ln>
+        </p:spPr>
+        <p:style>
+          <a:lnRef idx="1">
+            <a:schemeClr val="accent1"/>
+          </a:lnRef>
+          <a:fillRef idx="3">
+            <a:schemeClr val="accent1"/>
+          </a:fillRef>
+          <a:effectRef idx="2">
+            <a:schemeClr val="accent1"/>
+          </a:effectRef>
+          <a:fontRef idx="minor">
+            <a:schemeClr val="lt1"/>
+          </a:fontRef>
+        </p:style>
+        <p:txBody>
+          <a:bodyPr rtlCol="0" anchor="ctr"/>
+          <a:lstStyle/>
+          <a:p>
+            <a:pPr algn="ctr"/>
+          </a:p>
+        </p:txBody>
+      </p:sp>
+      <p:sp>
+        <p:nvSpPr>
+          <p:cNvPr id="54" name="TextBox 53"/>
+          <p:cNvSpPr txBox="1"/>
+          <p:nvPr/>
+        </p:nvSpPr>
+        <p:spPr>
+          <a:xfrm>
+            <a:off x="9718560" y="2178000"/>
+            <a:ext cx="2186640" cy="468000"/>
+          </a:xfrm>
+          <a:prstGeom prst="rect">
+            <a:avLst/>
+          </a:prstGeom>
+          <a:noFill/>
+        </p:spPr>
+        <p:txBody>
+          <a:bodyPr wrap="none">
+            <a:spAutoFit/>
+          </a:bodyPr>
+          <a:lstStyle/>
+          <a:p>
+            <a:pPr algn="ctr"/>
+            <a:r>
+              <a:rPr sz="1300" b="1">
+                <a:solidFill>
+                  <a:srgbClr val="1F3564"/>
+                </a:solidFill>
+                <a:latin typeface="IPAゴシック"/>
+              </a:rPr>
+              <a:t>関西学院大学</a:t>
+            </a:r>
+          </a:p>
+        </p:txBody>
+      </p:sp>
+      <p:sp>
+        <p:nvSpPr>
+          <p:cNvPr id="55" name="Rectangle 54"/>
+          <p:cNvSpPr/>
+          <p:nvPr/>
+        </p:nvSpPr>
+        <p:spPr>
+          <a:xfrm>
+            <a:off x="9682560" y="2736000"/>
+            <a:ext cx="2258640" cy="540000"/>
+          </a:xfrm>
+          <a:prstGeom prst="rect">
+            <a:avLst/>
+          </a:prstGeom>
+          <a:solidFill>
+            <a:srgbClr val="FFFFFF"/>
+          </a:solidFill>
+          <a:ln w="12700">
+            <a:solidFill>
+              <a:srgbClr val="27AE60"/>
+            </a:solidFill>
+          </a:ln>
+        </p:spPr>
+        <p:style>
+          <a:lnRef idx="1">
+            <a:schemeClr val="accent1"/>
+          </a:lnRef>
+          <a:fillRef idx="3">
+            <a:schemeClr val="accent1"/>
+          </a:fillRef>
+          <a:effectRef idx="2">
+            <a:schemeClr val="accent1"/>
+          </a:effectRef>
+          <a:fontRef idx="minor">
+            <a:schemeClr val="lt1"/>
+          </a:fontRef>
+        </p:style>
+        <p:txBody>
+          <a:bodyPr rtlCol="0" anchor="ctr"/>
+          <a:lstStyle/>
+          <a:p>
+            <a:pPr algn="ctr"/>
+          </a:p>
+        </p:txBody>
+      </p:sp>
+      <p:sp>
+        <p:nvSpPr>
+          <p:cNvPr id="56" name="TextBox 55"/>
+          <p:cNvSpPr txBox="1"/>
+          <p:nvPr/>
+        </p:nvSpPr>
+        <p:spPr>
+          <a:xfrm>
+            <a:off x="9718560" y="2772000"/>
+            <a:ext cx="2186640" cy="468000"/>
+          </a:xfrm>
+          <a:prstGeom prst="rect">
+            <a:avLst/>
+          </a:prstGeom>
+          <a:noFill/>
+        </p:spPr>
+        <p:txBody>
+          <a:bodyPr wrap="none">
+            <a:spAutoFit/>
+          </a:bodyPr>
+          <a:lstStyle/>
+          <a:p>
+            <a:pPr algn="ctr"/>
+            <a:r>
+              <a:rPr sz="1300" b="1">
+                <a:solidFill>
+                  <a:srgbClr val="1F3564"/>
+                </a:solidFill>
+                <a:latin typeface="IPAゴシック"/>
+              </a:rPr>
+              <a:t>同志社大学</a:t>
+            </a:r>
+          </a:p>
+        </p:txBody>
+      </p:sp>
+      <p:sp>
+        <p:nvSpPr>
+          <p:cNvPr id="57" name="Rectangle 56"/>
+          <p:cNvSpPr/>
+          <p:nvPr/>
+        </p:nvSpPr>
+        <p:spPr>
+          <a:xfrm>
+            <a:off x="9682560" y="3330000"/>
+            <a:ext cx="2258640" cy="540000"/>
+          </a:xfrm>
+          <a:prstGeom prst="rect">
+            <a:avLst/>
+          </a:prstGeom>
+          <a:solidFill>
+            <a:srgbClr val="FFFFFF"/>
+          </a:solidFill>
+          <a:ln w="12700">
+            <a:solidFill>
+              <a:srgbClr val="27AE60"/>
+            </a:solidFill>
+          </a:ln>
+        </p:spPr>
+        <p:style>
+          <a:lnRef idx="1">
+            <a:schemeClr val="accent1"/>
+          </a:lnRef>
+          <a:fillRef idx="3">
+            <a:schemeClr val="accent1"/>
+          </a:fillRef>
+          <a:effectRef idx="2">
+            <a:schemeClr val="accent1"/>
+          </a:effectRef>
+          <a:fontRef idx="minor">
+            <a:schemeClr val="lt1"/>
+          </a:fontRef>
+        </p:style>
+        <p:txBody>
+          <a:bodyPr rtlCol="0" anchor="ctr"/>
+          <a:lstStyle/>
+          <a:p>
+            <a:pPr algn="ctr"/>
+          </a:p>
+        </p:txBody>
+      </p:sp>
+      <p:sp>
+        <p:nvSpPr>
+          <p:cNvPr id="58" name="TextBox 57"/>
+          <p:cNvSpPr txBox="1"/>
+          <p:nvPr/>
+        </p:nvSpPr>
+        <p:spPr>
+          <a:xfrm>
+            <a:off x="9718560" y="3366000"/>
+            <a:ext cx="2186640" cy="468000"/>
+          </a:xfrm>
+          <a:prstGeom prst="rect">
+            <a:avLst/>
+          </a:prstGeom>
+          <a:noFill/>
+        </p:spPr>
+        <p:txBody>
+          <a:bodyPr wrap="none">
+            <a:spAutoFit/>
+          </a:bodyPr>
+          <a:lstStyle/>
+          <a:p>
+            <a:pPr algn="ctr"/>
+            <a:r>
+              <a:rPr sz="1300" b="1">
+                <a:solidFill>
+                  <a:srgbClr val="1F3564"/>
+                </a:solidFill>
+                <a:latin typeface="IPAゴシック"/>
+              </a:rPr>
+              <a:t>立命館大学</a:t>
+            </a:r>
+          </a:p>
+        </p:txBody>
+      </p:sp>
+    </p:spTree>
+  </p:cSld>
+  <p:clrMapOvr>
+    <a:masterClrMapping/>
+  </p:clrMapOvr>
+</p:sld>
+</file>
+
+<file path=ppt/slides/slide3.xml><?xml version="1.0" encoding="utf-8"?>
 <p:sld xmlns:a="http://schemas.openxmlformats.org/drawingml/2006/main" xmlns:p="http://schemas.openxmlformats.org/presentationml/2006/main" xmlns:r="http://schemas.openxmlformats.org/officeDocument/2006/relationships">
   <p:cSld>
     <p:spTree>
@@ -5223,203 +7513,6 @@
 </p:sld>
 </file>
 
-<file path=ppt/slides/slide3.xml><?xml version="1.0" encoding="utf-8"?>
-<p:sld xmlns:a="http://schemas.openxmlformats.org/drawingml/2006/main" xmlns:p="http://schemas.openxmlformats.org/presentationml/2006/main" xmlns:r="http://schemas.openxmlformats.org/officeDocument/2006/relationships">
-  <p:cSld>
-    <p:spTree>
-      <p:nvGrpSpPr>
-        <p:cNvPr id="1" name=""/>
-        <p:cNvGrpSpPr/>
-        <p:nvPr/>
-      </p:nvGrpSpPr>
-      <p:grpSpPr/>
-      <p:sp>
-        <p:nvSpPr>
-          <p:cNvPr id="2" name="Rectangle 1"/>
-          <p:cNvSpPr/>
-          <p:nvPr/>
-        </p:nvSpPr>
-        <p:spPr>
-          <a:xfrm>
-            <a:off x="0" y="0"/>
-            <a:ext cx="12193200" cy="6858000"/>
-          </a:xfrm>
-          <a:prstGeom prst="rect">
-            <a:avLst/>
-          </a:prstGeom>
-          <a:solidFill>
-            <a:srgbClr val="F4F6FB"/>
-          </a:solidFill>
-          <a:ln>
-            <a:noFill/>
-          </a:ln>
-        </p:spPr>
-        <p:style>
-          <a:lnRef idx="1">
-            <a:schemeClr val="accent1"/>
-          </a:lnRef>
-          <a:fillRef idx="3">
-            <a:schemeClr val="accent1"/>
-          </a:fillRef>
-          <a:effectRef idx="2">
-            <a:schemeClr val="accent1"/>
-          </a:effectRef>
-          <a:fontRef idx="minor">
-            <a:schemeClr val="lt1"/>
-          </a:fontRef>
-        </p:style>
-        <p:txBody>
-          <a:bodyPr rtlCol="0" anchor="ctr"/>
-          <a:lstStyle/>
-          <a:p>
-            <a:pPr algn="ctr"/>
-          </a:p>
-        </p:txBody>
-      </p:sp>
-      <p:sp>
-        <p:nvSpPr>
-          <p:cNvPr id="3" name="Rectangle 2"/>
-          <p:cNvSpPr/>
-          <p:nvPr/>
-        </p:nvSpPr>
-        <p:spPr>
-          <a:xfrm>
-            <a:off x="0" y="0"/>
-            <a:ext cx="12193200" cy="792000"/>
-          </a:xfrm>
-          <a:prstGeom prst="rect">
-            <a:avLst/>
-          </a:prstGeom>
-          <a:solidFill>
-            <a:srgbClr val="1F3564"/>
-          </a:solidFill>
-          <a:ln>
-            <a:noFill/>
-          </a:ln>
-        </p:spPr>
-        <p:style>
-          <a:lnRef idx="1">
-            <a:schemeClr val="accent1"/>
-          </a:lnRef>
-          <a:fillRef idx="3">
-            <a:schemeClr val="accent1"/>
-          </a:fillRef>
-          <a:effectRef idx="2">
-            <a:schemeClr val="accent1"/>
-          </a:effectRef>
-          <a:fontRef idx="minor">
-            <a:schemeClr val="lt1"/>
-          </a:fontRef>
-        </p:style>
-        <p:txBody>
-          <a:bodyPr rtlCol="0" anchor="ctr"/>
-          <a:lstStyle/>
-          <a:p>
-            <a:pPr algn="ctr"/>
-          </a:p>
-        </p:txBody>
-      </p:sp>
-      <p:sp>
-        <p:nvSpPr>
-          <p:cNvPr id="4" name="TextBox 3"/>
-          <p:cNvSpPr txBox="1"/>
-          <p:nvPr/>
-        </p:nvSpPr>
-        <p:spPr>
-          <a:xfrm>
-            <a:off x="180000" y="0"/>
-            <a:ext cx="11833200" cy="792000"/>
-          </a:xfrm>
-          <a:prstGeom prst="rect">
-            <a:avLst/>
-          </a:prstGeom>
-          <a:noFill/>
-        </p:spPr>
-        <p:txBody>
-          <a:bodyPr wrap="none">
-            <a:spAutoFit/>
-          </a:bodyPr>
-          <a:lstStyle/>
-          <a:p>
-            <a:pPr algn="ctr"/>
-            <a:r>
-              <a:rPr sz="2600" b="1">
-                <a:solidFill>
-                  <a:srgbClr val="FFFFFF"/>
-                </a:solidFill>
-                <a:latin typeface="IPAゴシック"/>
-              </a:rPr>
-              <a:t>選考ファネル：全体応募〜現在の選考状況</a:t>
-            </a:r>
-          </a:p>
-        </p:txBody>
-      </p:sp>
-      <p:sp>
-        <p:nvSpPr>
-          <p:cNvPr id="5" name="TextBox 4"/>
-          <p:cNvSpPr txBox="1"/>
-          <p:nvPr/>
-        </p:nvSpPr>
-        <p:spPr>
-          <a:xfrm>
-            <a:off x="180000" y="864000"/>
-            <a:ext cx="11833200" cy="251999"/>
-          </a:xfrm>
-          <a:prstGeom prst="rect">
-            <a:avLst/>
-          </a:prstGeom>
-          <a:noFill/>
-        </p:spPr>
-        <p:txBody>
-          <a:bodyPr wrap="none">
-            <a:spAutoFit/>
-          </a:bodyPr>
-          <a:lstStyle/>
-          <a:p>
-            <a:r>
-              <a:rPr sz="1200" b="0">
-                <a:solidFill>
-                  <a:srgbClr val="E85D5D"/>
-                </a:solidFill>
-                <a:latin typeface="IPAゴシック"/>
-              </a:rPr>
-              <a:t>※ 現在ほぼ全員が説明会兼WEB選考の選考中フェーズ（2026年1〜7月集計）</a:t>
-            </a:r>
-          </a:p>
-        </p:txBody>
-      </p:sp>
-      <p:pic>
-        <p:nvPicPr>
-          <p:cNvPr id="6" name="Picture 5" descr="funnel.png"/>
-          <p:cNvPicPr>
-            <a:picLocks noChangeAspect="1"/>
-          </p:cNvPicPr>
-          <p:nvPr/>
-        </p:nvPicPr>
-        <p:blipFill>
-          <a:blip r:embed="rId2"/>
-          <a:stretch>
-            <a:fillRect/>
-          </a:stretch>
-        </p:blipFill>
-        <p:spPr>
-          <a:xfrm>
-            <a:off x="720000" y="1224000"/>
-            <a:ext cx="10753200" cy="5418000"/>
-          </a:xfrm>
-          <a:prstGeom prst="rect">
-            <a:avLst/>
-          </a:prstGeom>
-        </p:spPr>
-      </p:pic>
-    </p:spTree>
-  </p:cSld>
-  <p:clrMapOvr>
-    <a:masterClrMapping/>
-  </p:clrMapOvr>
-</p:sld>
-</file>
-
 <file path=ppt/slides/slide4.xml><?xml version="1.0" encoding="utf-8"?>
 <p:sld xmlns:a="http://schemas.openxmlformats.org/drawingml/2006/main" xmlns:p="http://schemas.openxmlformats.org/presentationml/2006/main" xmlns:r="http://schemas.openxmlformats.org/officeDocument/2006/relationships">
   <p:cSld>
@@ -5546,14 +7639,48 @@
                 </a:solidFill>
                 <a:latin typeface="IPAゴシック"/>
               </a:rPr>
-              <a:t>大学グループ別　応募者数</a:t>
+              <a:t>選考ファネル：全体応募〜現在の選考状況</a:t>
+            </a:r>
+          </a:p>
+        </p:txBody>
+      </p:sp>
+      <p:sp>
+        <p:nvSpPr>
+          <p:cNvPr id="5" name="TextBox 4"/>
+          <p:cNvSpPr txBox="1"/>
+          <p:nvPr/>
+        </p:nvSpPr>
+        <p:spPr>
+          <a:xfrm>
+            <a:off x="180000" y="864000"/>
+            <a:ext cx="11833200" cy="251999"/>
+          </a:xfrm>
+          <a:prstGeom prst="rect">
+            <a:avLst/>
+          </a:prstGeom>
+          <a:noFill/>
+        </p:spPr>
+        <p:txBody>
+          <a:bodyPr wrap="none">
+            <a:spAutoFit/>
+          </a:bodyPr>
+          <a:lstStyle/>
+          <a:p>
+            <a:r>
+              <a:rPr sz="1200" b="0">
+                <a:solidFill>
+                  <a:srgbClr val="E85D5D"/>
+                </a:solidFill>
+                <a:latin typeface="IPAゴシック"/>
+              </a:rPr>
+              <a:t>※ 現在ほぼ全員が説明会兼WEB選考の選考中フェーズ（2026年1〜7月集計）</a:t>
             </a:r>
           </a:p>
         </p:txBody>
       </p:sp>
       <p:pic>
         <p:nvPicPr>
-          <p:cNvPr id="5" name="Picture 4" descr="group_bar.png"/>
+          <p:cNvPr id="6" name="Picture 5" descr="funnel.png"/>
           <p:cNvPicPr>
             <a:picLocks noChangeAspect="1"/>
           </p:cNvPicPr>
@@ -5567,125 +7694,14 @@
         </p:blipFill>
         <p:spPr>
           <a:xfrm>
-            <a:off x="180000" y="936000"/>
-            <a:ext cx="7072055" cy="5634000"/>
+            <a:off x="720000" y="1224000"/>
+            <a:ext cx="10753200" cy="5418000"/>
           </a:xfrm>
           <a:prstGeom prst="rect">
             <a:avLst/>
           </a:prstGeom>
         </p:spPr>
       </p:pic>
-      <p:sp>
-        <p:nvSpPr>
-          <p:cNvPr id="6" name="TextBox 5"/>
-          <p:cNvSpPr txBox="1"/>
-          <p:nvPr/>
-        </p:nvSpPr>
-        <p:spPr>
-          <a:xfrm>
-            <a:off x="7315920" y="1080000"/>
-            <a:ext cx="4511484" cy="5346000"/>
-          </a:xfrm>
-          <a:prstGeom prst="rect">
-            <a:avLst/>
-          </a:prstGeom>
-          <a:noFill/>
-        </p:spPr>
-        <p:txBody>
-          <a:bodyPr wrap="square">
-            <a:spAutoFit/>
-          </a:bodyPr>
-          <a:lstStyle/>
-          <a:p>
-            <a:r>
-              <a:rPr sz="1600" b="1">
-                <a:solidFill>
-                  <a:srgbClr val="1F3564"/>
-                </a:solidFill>
-                <a:latin typeface="IPAゴシック"/>
-              </a:rPr>
-              <a:t>【上位校内訳】</a:t>
-            </a:r>
-          </a:p>
-          <a:p>
-            <a:r>
-              <a:rPr sz="1800" b="1">
-                <a:solidFill>
-                  <a:srgbClr val="1F3564"/>
-                </a:solidFill>
-                <a:latin typeface="IPAゴシック"/>
-              </a:rPr>
-              <a:t>関西学院大学　2名</a:t>
-            </a:r>
-          </a:p>
-          <a:p>
-            <a:r>
-              <a:rPr sz="1800" b="1">
-                <a:solidFill>
-                  <a:srgbClr val="1F3564"/>
-                </a:solidFill>
-                <a:latin typeface="IPAゴシック"/>
-              </a:rPr>
-              <a:t>明治大学　　　1名</a:t>
-            </a:r>
-          </a:p>
-          <a:p>
-            <a:r>
-              <a:rPr sz="1800" b="1">
-                <a:solidFill>
-                  <a:srgbClr val="1F3564"/>
-                </a:solidFill>
-                <a:latin typeface="IPAゴシック"/>
-              </a:rPr>
-              <a:t>同志社大学　　1名</a:t>
-            </a:r>
-          </a:p>
-          <a:p>
-            <a:r>
-              <a:rPr sz="600" b="0">
-                <a:solidFill>
-                  <a:srgbClr val="1F3564"/>
-                </a:solidFill>
-                <a:latin typeface="IPAゴシック"/>
-              </a:rPr>
-              <a:t/>
-            </a:r>
-          </a:p>
-          <a:p>
-            <a:r>
-              <a:rPr sz="1400" b="1">
-                <a:solidFill>
-                  <a:srgbClr val="E85D5D"/>
-                </a:solidFill>
-                <a:latin typeface="IPAゴシック"/>
-              </a:rPr>
-              <a:t>【ポイント】</a:t>
-            </a:r>
-          </a:p>
-          <a:p>
-            <a:r>
-              <a:rPr sz="1300" b="0">
-                <a:solidFill>
-                  <a:srgbClr val="1F3564"/>
-                </a:solidFill>
-                <a:latin typeface="IPAゴシック"/>
-              </a:rPr>
-              <a:t>・上位校比率：21%（4名/19名）</a:t>
-            </a:r>
-          </a:p>
-          <a:p>
-            <a:r>
-              <a:rPr sz="1300" b="0">
-                <a:solidFill>
-                  <a:srgbClr val="AAAAAA"/>
-                </a:solidFill>
-                <a:latin typeface="IPAゴシック"/>
-              </a:rPr>
-              <a:t>・旧帝大・早慶は応募なし</a:t>
-            </a:r>
-          </a:p>
-        </p:txBody>
-      </p:sp>
     </p:spTree>
   </p:cSld>
   <p:clrMapOvr>
@@ -5820,14 +7836,14 @@
                 </a:solidFill>
                 <a:latin typeface="IPAゴシック"/>
               </a:rPr>
-              <a:t>上位校　個別大学別　応募者数</a:t>
+              <a:t>大学グループ別　応募者数</a:t>
             </a:r>
           </a:p>
         </p:txBody>
       </p:sp>
       <p:pic>
         <p:nvPicPr>
-          <p:cNvPr id="5" name="Picture 4" descr="univ_bar.png"/>
+          <p:cNvPr id="5" name="Picture 4" descr="group_bar.png"/>
           <p:cNvPicPr>
             <a:picLocks noChangeAspect="1"/>
           </p:cNvPicPr>
@@ -5841,8 +7857,8 @@
         </p:blipFill>
         <p:spPr>
           <a:xfrm>
-            <a:off x="720000" y="1080000"/>
-            <a:ext cx="6706260" cy="5418000"/>
+            <a:off x="180000" y="936000"/>
+            <a:ext cx="7072055" cy="5634000"/>
           </a:xfrm>
           <a:prstGeom prst="rect">
             <a:avLst/>
@@ -5857,8 +7873,8 @@
         </p:nvSpPr>
         <p:spPr>
           <a:xfrm>
-            <a:off x="7193988" y="1224000"/>
-            <a:ext cx="4633416" cy="3240000"/>
+            <a:off x="7315920" y="1080000"/>
+            <a:ext cx="4511484" cy="5346000"/>
           </a:xfrm>
           <a:prstGeom prst="rect">
             <a:avLst/>
@@ -5874,55 +7890,88 @@
             <a:r>
               <a:rPr sz="1600" b="1">
                 <a:solidFill>
-                  <a:srgbClr val="27AE60"/>
+                  <a:srgbClr val="1F3564"/>
                 </a:solidFill>
                 <a:latin typeface="IPAゴシック"/>
               </a:rPr>
-              <a:t>【全員 選考中】</a:t>
-            </a:r>
-          </a:p>
-          <a:p>
-            <a:r>
-              <a:rPr sz="1400" b="1">
+              <a:t>【上位校内訳】</a:t>
+            </a:r>
+          </a:p>
+          <a:p>
+            <a:r>
+              <a:rPr sz="1800" b="1">
                 <a:solidFill>
                   <a:srgbClr val="1F3564"/>
                 </a:solidFill>
                 <a:latin typeface="IPAゴシック"/>
               </a:rPr>
-              <a:t>関西学院大学（経済学部）</a:t>
-            </a:r>
-          </a:p>
-          <a:p>
-            <a:r>
-              <a:rPr sz="1400" b="1">
+              <a:t>関西学院大学　2名</a:t>
+            </a:r>
+          </a:p>
+          <a:p>
+            <a:r>
+              <a:rPr sz="1800" b="1">
                 <a:solidFill>
                   <a:srgbClr val="1F3564"/>
                 </a:solidFill>
                 <a:latin typeface="IPAゴシック"/>
               </a:rPr>
-              <a:t>関西学院大学（文学部）</a:t>
-            </a:r>
-          </a:p>
-          <a:p>
-            <a:r>
-              <a:rPr sz="1400" b="1">
+              <a:t>明治大学　　　1名</a:t>
+            </a:r>
+          </a:p>
+          <a:p>
+            <a:r>
+              <a:rPr sz="1800" b="1">
                 <a:solidFill>
                   <a:srgbClr val="1F3564"/>
                 </a:solidFill>
                 <a:latin typeface="IPAゴシック"/>
               </a:rPr>
-              <a:t>明治大学（商学部）</a:t>
-            </a:r>
-          </a:p>
-          <a:p>
-            <a:r>
-              <a:rPr sz="1400" b="1">
+              <a:t>同志社大学　　1名</a:t>
+            </a:r>
+          </a:p>
+          <a:p>
+            <a:r>
+              <a:rPr sz="600" b="0">
                 <a:solidFill>
                   <a:srgbClr val="1F3564"/>
                 </a:solidFill>
                 <a:latin typeface="IPAゴシック"/>
               </a:rPr>
-              <a:t>同志社大学（文化情報学部）</a:t>
+              <a:t/>
+            </a:r>
+          </a:p>
+          <a:p>
+            <a:r>
+              <a:rPr sz="1400" b="1">
+                <a:solidFill>
+                  <a:srgbClr val="E85D5D"/>
+                </a:solidFill>
+                <a:latin typeface="IPAゴシック"/>
+              </a:rPr>
+              <a:t>【ポイント】</a:t>
+            </a:r>
+          </a:p>
+          <a:p>
+            <a:r>
+              <a:rPr sz="1300" b="0">
+                <a:solidFill>
+                  <a:srgbClr val="1F3564"/>
+                </a:solidFill>
+                <a:latin typeface="IPAゴシック"/>
+              </a:rPr>
+              <a:t>・上位校比率：21%（4名/19名）</a:t>
+            </a:r>
+          </a:p>
+          <a:p>
+            <a:r>
+              <a:rPr sz="1300" b="0">
+                <a:solidFill>
+                  <a:srgbClr val="AAAAAA"/>
+                </a:solidFill>
+                <a:latin typeface="IPAゴシック"/>
+              </a:rPr>
+              <a:t>・旧帝大・早慶・学習院は応募なし</a:t>
             </a:r>
           </a:p>
         </p:txBody>
@@ -5936,6 +7985,247 @@
 </file>
 
 <file path=ppt/slides/slide6.xml><?xml version="1.0" encoding="utf-8"?>
+<p:sld xmlns:a="http://schemas.openxmlformats.org/drawingml/2006/main" xmlns:p="http://schemas.openxmlformats.org/presentationml/2006/main" xmlns:r="http://schemas.openxmlformats.org/officeDocument/2006/relationships">
+  <p:cSld>
+    <p:spTree>
+      <p:nvGrpSpPr>
+        <p:cNvPr id="1" name=""/>
+        <p:cNvGrpSpPr/>
+        <p:nvPr/>
+      </p:nvGrpSpPr>
+      <p:grpSpPr/>
+      <p:sp>
+        <p:nvSpPr>
+          <p:cNvPr id="2" name="Rectangle 1"/>
+          <p:cNvSpPr/>
+          <p:nvPr/>
+        </p:nvSpPr>
+        <p:spPr>
+          <a:xfrm>
+            <a:off x="0" y="0"/>
+            <a:ext cx="12193200" cy="6858000"/>
+          </a:xfrm>
+          <a:prstGeom prst="rect">
+            <a:avLst/>
+          </a:prstGeom>
+          <a:solidFill>
+            <a:srgbClr val="F4F6FB"/>
+          </a:solidFill>
+          <a:ln>
+            <a:noFill/>
+          </a:ln>
+        </p:spPr>
+        <p:style>
+          <a:lnRef idx="1">
+            <a:schemeClr val="accent1"/>
+          </a:lnRef>
+          <a:fillRef idx="3">
+            <a:schemeClr val="accent1"/>
+          </a:fillRef>
+          <a:effectRef idx="2">
+            <a:schemeClr val="accent1"/>
+          </a:effectRef>
+          <a:fontRef idx="minor">
+            <a:schemeClr val="lt1"/>
+          </a:fontRef>
+        </p:style>
+        <p:txBody>
+          <a:bodyPr rtlCol="0" anchor="ctr"/>
+          <a:lstStyle/>
+          <a:p>
+            <a:pPr algn="ctr"/>
+          </a:p>
+        </p:txBody>
+      </p:sp>
+      <p:sp>
+        <p:nvSpPr>
+          <p:cNvPr id="3" name="Rectangle 2"/>
+          <p:cNvSpPr/>
+          <p:nvPr/>
+        </p:nvSpPr>
+        <p:spPr>
+          <a:xfrm>
+            <a:off x="0" y="0"/>
+            <a:ext cx="12193200" cy="792000"/>
+          </a:xfrm>
+          <a:prstGeom prst="rect">
+            <a:avLst/>
+          </a:prstGeom>
+          <a:solidFill>
+            <a:srgbClr val="1F3564"/>
+          </a:solidFill>
+          <a:ln>
+            <a:noFill/>
+          </a:ln>
+        </p:spPr>
+        <p:style>
+          <a:lnRef idx="1">
+            <a:schemeClr val="accent1"/>
+          </a:lnRef>
+          <a:fillRef idx="3">
+            <a:schemeClr val="accent1"/>
+          </a:fillRef>
+          <a:effectRef idx="2">
+            <a:schemeClr val="accent1"/>
+          </a:effectRef>
+          <a:fontRef idx="minor">
+            <a:schemeClr val="lt1"/>
+          </a:fontRef>
+        </p:style>
+        <p:txBody>
+          <a:bodyPr rtlCol="0" anchor="ctr"/>
+          <a:lstStyle/>
+          <a:p>
+            <a:pPr algn="ctr"/>
+          </a:p>
+        </p:txBody>
+      </p:sp>
+      <p:sp>
+        <p:nvSpPr>
+          <p:cNvPr id="4" name="TextBox 3"/>
+          <p:cNvSpPr txBox="1"/>
+          <p:nvPr/>
+        </p:nvSpPr>
+        <p:spPr>
+          <a:xfrm>
+            <a:off x="180000" y="0"/>
+            <a:ext cx="11833200" cy="792000"/>
+          </a:xfrm>
+          <a:prstGeom prst="rect">
+            <a:avLst/>
+          </a:prstGeom>
+          <a:noFill/>
+        </p:spPr>
+        <p:txBody>
+          <a:bodyPr wrap="none">
+            <a:spAutoFit/>
+          </a:bodyPr>
+          <a:lstStyle/>
+          <a:p>
+            <a:pPr algn="ctr"/>
+            <a:r>
+              <a:rPr sz="2600" b="1">
+                <a:solidFill>
+                  <a:srgbClr val="FFFFFF"/>
+                </a:solidFill>
+                <a:latin typeface="IPAゴシック"/>
+              </a:rPr>
+              <a:t>上位校　個別大学別　応募者数</a:t>
+            </a:r>
+          </a:p>
+        </p:txBody>
+      </p:sp>
+      <p:pic>
+        <p:nvPicPr>
+          <p:cNvPr id="5" name="Picture 4" descr="univ_bar.png"/>
+          <p:cNvPicPr>
+            <a:picLocks noChangeAspect="1"/>
+          </p:cNvPicPr>
+          <p:nvPr/>
+        </p:nvPicPr>
+        <p:blipFill>
+          <a:blip r:embed="rId2"/>
+          <a:stretch>
+            <a:fillRect/>
+          </a:stretch>
+        </p:blipFill>
+        <p:spPr>
+          <a:xfrm>
+            <a:off x="720000" y="1080000"/>
+            <a:ext cx="6706260" cy="5418000"/>
+          </a:xfrm>
+          <a:prstGeom prst="rect">
+            <a:avLst/>
+          </a:prstGeom>
+        </p:spPr>
+      </p:pic>
+      <p:sp>
+        <p:nvSpPr>
+          <p:cNvPr id="6" name="TextBox 5"/>
+          <p:cNvSpPr txBox="1"/>
+          <p:nvPr/>
+        </p:nvSpPr>
+        <p:spPr>
+          <a:xfrm>
+            <a:off x="7193988" y="1224000"/>
+            <a:ext cx="4633416" cy="3240000"/>
+          </a:xfrm>
+          <a:prstGeom prst="rect">
+            <a:avLst/>
+          </a:prstGeom>
+          <a:noFill/>
+        </p:spPr>
+        <p:txBody>
+          <a:bodyPr wrap="square">
+            <a:spAutoFit/>
+          </a:bodyPr>
+          <a:lstStyle/>
+          <a:p>
+            <a:r>
+              <a:rPr sz="1600" b="1">
+                <a:solidFill>
+                  <a:srgbClr val="27AE60"/>
+                </a:solidFill>
+                <a:latin typeface="IPAゴシック"/>
+              </a:rPr>
+              <a:t>【全員 選考中】</a:t>
+            </a:r>
+          </a:p>
+          <a:p>
+            <a:r>
+              <a:rPr sz="1400" b="1">
+                <a:solidFill>
+                  <a:srgbClr val="1F3564"/>
+                </a:solidFill>
+                <a:latin typeface="IPAゴシック"/>
+              </a:rPr>
+              <a:t>関西学院大学（経済学部）</a:t>
+            </a:r>
+          </a:p>
+          <a:p>
+            <a:r>
+              <a:rPr sz="1400" b="1">
+                <a:solidFill>
+                  <a:srgbClr val="1F3564"/>
+                </a:solidFill>
+                <a:latin typeface="IPAゴシック"/>
+              </a:rPr>
+              <a:t>関西学院大学（文学部）</a:t>
+            </a:r>
+          </a:p>
+          <a:p>
+            <a:r>
+              <a:rPr sz="1400" b="1">
+                <a:solidFill>
+                  <a:srgbClr val="1F3564"/>
+                </a:solidFill>
+                <a:latin typeface="IPAゴシック"/>
+              </a:rPr>
+              <a:t>明治大学（商学部）</a:t>
+            </a:r>
+          </a:p>
+          <a:p>
+            <a:r>
+              <a:rPr sz="1400" b="1">
+                <a:solidFill>
+                  <a:srgbClr val="1F3564"/>
+                </a:solidFill>
+                <a:latin typeface="IPAゴシック"/>
+              </a:rPr>
+              <a:t>同志社大学（文化情報学部）</a:t>
+            </a:r>
+          </a:p>
+        </p:txBody>
+      </p:sp>
+    </p:spTree>
+  </p:cSld>
+  <p:clrMapOvr>
+    <a:masterClrMapping/>
+  </p:clrMapOvr>
+</p:sld>
+</file>
+
+<file path=ppt/slides/slide7.xml><?xml version="1.0" encoding="utf-8"?>
 <p:sld xmlns:a="http://schemas.openxmlformats.org/drawingml/2006/main" xmlns:p="http://schemas.openxmlformats.org/presentationml/2006/main" xmlns:r="http://schemas.openxmlformats.org/officeDocument/2006/relationships">
   <p:cSld>
     <p:spTree>
@@ -6764,7 +9054,7 @@
 </p:sld>
 </file>
 
-<file path=ppt/slides/slide7.xml><?xml version="1.0" encoding="utf-8"?>
+<file path=ppt/slides/slide8.xml><?xml version="1.0" encoding="utf-8"?>
 <p:sld xmlns:a="http://schemas.openxmlformats.org/drawingml/2006/main" xmlns:p="http://schemas.openxmlformats.org/presentationml/2006/main" xmlns:r="http://schemas.openxmlformats.org/officeDocument/2006/relationships">
   <p:cSld>
     <p:spTree>
@@ -7499,7 +9789,7 @@
 </p:sld>
 </file>
 
-<file path=ppt/slides/slide8.xml><?xml version="1.0" encoding="utf-8"?>
+<file path=ppt/slides/slide9.xml><?xml version="1.0" encoding="utf-8"?>
 <p:sld xmlns:a="http://schemas.openxmlformats.org/drawingml/2006/main" xmlns:p="http://schemas.openxmlformats.org/presentationml/2006/main" xmlns:r="http://schemas.openxmlformats.org/officeDocument/2006/relationships">
   <p:cSld>
     <p:spTree>
